--- a/report_and_presentation/Cohort8_DS3_Presentation.pptx
+++ b/report_and_presentation/Cohort8_DS3_Presentation.pptx
@@ -4,27 +4,31 @@
   <p:sldMasterIdLst>
     <p:sldMasterId id="2147483648" r:id="rId1"/>
   </p:sldMasterIdLst>
+  <p:notesMasterIdLst>
+    <p:notesMasterId r:id="rId23"/>
+  </p:notesMasterIdLst>
   <p:sldIdLst>
-    <p:sldId id="258" r:id="rId2"/>
-    <p:sldId id="273" r:id="rId3"/>
-    <p:sldId id="274" r:id="rId4"/>
-    <p:sldId id="271" r:id="rId5"/>
-    <p:sldId id="261" r:id="rId6"/>
-    <p:sldId id="266" r:id="rId7"/>
-    <p:sldId id="260" r:id="rId8"/>
-    <p:sldId id="262" r:id="rId9"/>
-    <p:sldId id="263" r:id="rId10"/>
-    <p:sldId id="275" r:id="rId11"/>
-    <p:sldId id="265" r:id="rId12"/>
-    <p:sldId id="267" r:id="rId13"/>
-    <p:sldId id="270" r:id="rId14"/>
+    <p:sldId id="279" r:id="rId2"/>
+    <p:sldId id="266" r:id="rId3"/>
+    <p:sldId id="283" r:id="rId4"/>
+    <p:sldId id="284" r:id="rId5"/>
+    <p:sldId id="280" r:id="rId6"/>
+    <p:sldId id="282" r:id="rId7"/>
+    <p:sldId id="285" r:id="rId8"/>
+    <p:sldId id="286" r:id="rId9"/>
+    <p:sldId id="287" r:id="rId10"/>
+    <p:sldId id="265" r:id="rId11"/>
+    <p:sldId id="267" r:id="rId12"/>
+    <p:sldId id="270" r:id="rId13"/>
+    <p:sldId id="288" r:id="rId14"/>
     <p:sldId id="268" r:id="rId15"/>
     <p:sldId id="269" r:id="rId16"/>
     <p:sldId id="256" r:id="rId17"/>
     <p:sldId id="257" r:id="rId18"/>
     <p:sldId id="276" r:id="rId19"/>
     <p:sldId id="278" r:id="rId20"/>
-    <p:sldId id="277" r:id="rId21"/>
+    <p:sldId id="289" r:id="rId21"/>
+    <p:sldId id="290" r:id="rId22"/>
   </p:sldIdLst>
   <p:sldSz cx="12192000" cy="6858000"/>
   <p:notesSz cx="6858000" cy="9144000"/>
@@ -129,6 +133,1765 @@
     </p:ext>
   </p:extLst>
 </p:presentation>
+</file>
+
+<file path=ppt/notesMasters/notesMaster1.xml><?xml version="1.0" encoding="utf-8"?>
+<p:notesMaster xmlns:a="http://schemas.openxmlformats.org/drawingml/2006/main" xmlns:r="http://schemas.openxmlformats.org/officeDocument/2006/relationships" xmlns:p="http://schemas.openxmlformats.org/presentationml/2006/main">
+  <p:cSld>
+    <p:bg>
+      <p:bgRef idx="1001">
+        <a:schemeClr val="bg1"/>
+      </p:bgRef>
+    </p:bg>
+    <p:spTree>
+      <p:nvGrpSpPr>
+        <p:cNvPr id="1" name=""/>
+        <p:cNvGrpSpPr/>
+        <p:nvPr/>
+      </p:nvGrpSpPr>
+      <p:grpSpPr>
+        <a:xfrm>
+          <a:off x="0" y="0"/>
+          <a:ext cx="0" cy="0"/>
+          <a:chOff x="0" y="0"/>
+          <a:chExt cx="0" cy="0"/>
+        </a:xfrm>
+      </p:grpSpPr>
+      <p:sp>
+        <p:nvSpPr>
+          <p:cNvPr id="2" name="Header Placeholder 1"/>
+          <p:cNvSpPr>
+            <a:spLocks noGrp="1"/>
+          </p:cNvSpPr>
+          <p:nvPr>
+            <p:ph type="hdr" sz="quarter"/>
+          </p:nvPr>
+        </p:nvSpPr>
+        <p:spPr>
+          <a:xfrm>
+            <a:off x="0" y="0"/>
+            <a:ext cx="2971800" cy="458788"/>
+          </a:xfrm>
+          <a:prstGeom prst="rect">
+            <a:avLst/>
+          </a:prstGeom>
+        </p:spPr>
+        <p:txBody>
+          <a:bodyPr vert="horz" lIns="91440" tIns="45720" rIns="91440" bIns="45720" rtlCol="0"/>
+          <a:lstStyle>
+            <a:lvl1pPr algn="l">
+              <a:defRPr sz="1200"/>
+            </a:lvl1pPr>
+          </a:lstStyle>
+          <a:p>
+            <a:endParaRPr lang="en-CA"/>
+          </a:p>
+        </p:txBody>
+      </p:sp>
+      <p:sp>
+        <p:nvSpPr>
+          <p:cNvPr id="3" name="Date Placeholder 2"/>
+          <p:cNvSpPr>
+            <a:spLocks noGrp="1"/>
+          </p:cNvSpPr>
+          <p:nvPr>
+            <p:ph type="dt" idx="1"/>
+          </p:nvPr>
+        </p:nvSpPr>
+        <p:spPr>
+          <a:xfrm>
+            <a:off x="3884613" y="0"/>
+            <a:ext cx="2971800" cy="458788"/>
+          </a:xfrm>
+          <a:prstGeom prst="rect">
+            <a:avLst/>
+          </a:prstGeom>
+        </p:spPr>
+        <p:txBody>
+          <a:bodyPr vert="horz" lIns="91440" tIns="45720" rIns="91440" bIns="45720" rtlCol="0"/>
+          <a:lstStyle>
+            <a:lvl1pPr algn="r">
+              <a:defRPr sz="1200"/>
+            </a:lvl1pPr>
+          </a:lstStyle>
+          <a:p>
+            <a:fld id="{318D9752-18F5-491D-A8FE-927E5AB031AE}" type="datetimeFigureOut">
+              <a:rPr lang="en-CA" smtClean="0"/>
+              <a:t>2026-03-05</a:t>
+            </a:fld>
+            <a:endParaRPr lang="en-CA"/>
+          </a:p>
+        </p:txBody>
+      </p:sp>
+      <p:sp>
+        <p:nvSpPr>
+          <p:cNvPr id="4" name="Slide Image Placeholder 3"/>
+          <p:cNvSpPr>
+            <a:spLocks noGrp="1" noRot="1" noChangeAspect="1"/>
+          </p:cNvSpPr>
+          <p:nvPr>
+            <p:ph type="sldImg" idx="2"/>
+          </p:nvPr>
+        </p:nvSpPr>
+        <p:spPr>
+          <a:xfrm>
+            <a:off x="685800" y="1143000"/>
+            <a:ext cx="5486400" cy="3086100"/>
+          </a:xfrm>
+          <a:prstGeom prst="rect">
+            <a:avLst/>
+          </a:prstGeom>
+          <a:noFill/>
+          <a:ln w="12700">
+            <a:solidFill>
+              <a:prstClr val="black"/>
+            </a:solidFill>
+          </a:ln>
+        </p:spPr>
+        <p:txBody>
+          <a:bodyPr vert="horz" lIns="91440" tIns="45720" rIns="91440" bIns="45720" rtlCol="0" anchor="ctr"/>
+          <a:lstStyle/>
+          <a:p>
+            <a:endParaRPr lang="en-CA"/>
+          </a:p>
+        </p:txBody>
+      </p:sp>
+      <p:sp>
+        <p:nvSpPr>
+          <p:cNvPr id="5" name="Notes Placeholder 4"/>
+          <p:cNvSpPr>
+            <a:spLocks noGrp="1"/>
+          </p:cNvSpPr>
+          <p:nvPr>
+            <p:ph type="body" sz="quarter" idx="3"/>
+          </p:nvPr>
+        </p:nvSpPr>
+        <p:spPr>
+          <a:xfrm>
+            <a:off x="685800" y="4400550"/>
+            <a:ext cx="5486400" cy="3600450"/>
+          </a:xfrm>
+          <a:prstGeom prst="rect">
+            <a:avLst/>
+          </a:prstGeom>
+        </p:spPr>
+        <p:txBody>
+          <a:bodyPr vert="horz" lIns="91440" tIns="45720" rIns="91440" bIns="45720" rtlCol="0"/>
+          <a:lstStyle/>
+          <a:p>
+            <a:pPr lvl="0"/>
+            <a:r>
+              <a:rPr lang="en-US"/>
+              <a:t>Click to edit Master text styles</a:t>
+            </a:r>
+          </a:p>
+          <a:p>
+            <a:pPr lvl="1"/>
+            <a:r>
+              <a:rPr lang="en-US"/>
+              <a:t>Second level</a:t>
+            </a:r>
+          </a:p>
+          <a:p>
+            <a:pPr lvl="2"/>
+            <a:r>
+              <a:rPr lang="en-US"/>
+              <a:t>Third level</a:t>
+            </a:r>
+          </a:p>
+          <a:p>
+            <a:pPr lvl="3"/>
+            <a:r>
+              <a:rPr lang="en-US"/>
+              <a:t>Fourth level</a:t>
+            </a:r>
+          </a:p>
+          <a:p>
+            <a:pPr lvl="4"/>
+            <a:r>
+              <a:rPr lang="en-US"/>
+              <a:t>Fifth level</a:t>
+            </a:r>
+            <a:endParaRPr lang="en-CA"/>
+          </a:p>
+        </p:txBody>
+      </p:sp>
+      <p:sp>
+        <p:nvSpPr>
+          <p:cNvPr id="6" name="Footer Placeholder 5"/>
+          <p:cNvSpPr>
+            <a:spLocks noGrp="1"/>
+          </p:cNvSpPr>
+          <p:nvPr>
+            <p:ph type="ftr" sz="quarter" idx="4"/>
+          </p:nvPr>
+        </p:nvSpPr>
+        <p:spPr>
+          <a:xfrm>
+            <a:off x="0" y="8685213"/>
+            <a:ext cx="2971800" cy="458787"/>
+          </a:xfrm>
+          <a:prstGeom prst="rect">
+            <a:avLst/>
+          </a:prstGeom>
+        </p:spPr>
+        <p:txBody>
+          <a:bodyPr vert="horz" lIns="91440" tIns="45720" rIns="91440" bIns="45720" rtlCol="0" anchor="b"/>
+          <a:lstStyle>
+            <a:lvl1pPr algn="l">
+              <a:defRPr sz="1200"/>
+            </a:lvl1pPr>
+          </a:lstStyle>
+          <a:p>
+            <a:endParaRPr lang="en-CA"/>
+          </a:p>
+        </p:txBody>
+      </p:sp>
+      <p:sp>
+        <p:nvSpPr>
+          <p:cNvPr id="7" name="Slide Number Placeholder 6"/>
+          <p:cNvSpPr>
+            <a:spLocks noGrp="1"/>
+          </p:cNvSpPr>
+          <p:nvPr>
+            <p:ph type="sldNum" sz="quarter" idx="5"/>
+          </p:nvPr>
+        </p:nvSpPr>
+        <p:spPr>
+          <a:xfrm>
+            <a:off x="3884613" y="8685213"/>
+            <a:ext cx="2971800" cy="458787"/>
+          </a:xfrm>
+          <a:prstGeom prst="rect">
+            <a:avLst/>
+          </a:prstGeom>
+        </p:spPr>
+        <p:txBody>
+          <a:bodyPr vert="horz" lIns="91440" tIns="45720" rIns="91440" bIns="45720" rtlCol="0" anchor="b"/>
+          <a:lstStyle>
+            <a:lvl1pPr algn="r">
+              <a:defRPr sz="1200"/>
+            </a:lvl1pPr>
+          </a:lstStyle>
+          <a:p>
+            <a:fld id="{8D82D4E7-790C-4BF0-9AE4-9CFCBBC847E0}" type="slidenum">
+              <a:rPr lang="en-CA" smtClean="0"/>
+              <a:t>‹#›</a:t>
+            </a:fld>
+            <a:endParaRPr lang="en-CA"/>
+          </a:p>
+        </p:txBody>
+      </p:sp>
+    </p:spTree>
+    <p:extLst>
+      <p:ext uri="{BB962C8B-B14F-4D97-AF65-F5344CB8AC3E}">
+        <p14:creationId xmlns:p14="http://schemas.microsoft.com/office/powerpoint/2010/main" val="4266718113"/>
+      </p:ext>
+    </p:extLst>
+  </p:cSld>
+  <p:clrMap bg1="lt1" tx1="dk1" bg2="lt2" tx2="dk2" accent1="accent1" accent2="accent2" accent3="accent3" accent4="accent4" accent5="accent5" accent6="accent6" hlink="hlink" folHlink="folHlink"/>
+  <p:notesStyle>
+    <a:lvl1pPr marL="0" algn="l" defTabSz="914400" rtl="0" eaLnBrk="1" latinLnBrk="0" hangingPunct="1">
+      <a:defRPr sz="1200" kern="1200">
+        <a:solidFill>
+          <a:schemeClr val="tx1"/>
+        </a:solidFill>
+        <a:latin typeface="+mn-lt"/>
+        <a:ea typeface="+mn-ea"/>
+        <a:cs typeface="+mn-cs"/>
+      </a:defRPr>
+    </a:lvl1pPr>
+    <a:lvl2pPr marL="457200" algn="l" defTabSz="914400" rtl="0" eaLnBrk="1" latinLnBrk="0" hangingPunct="1">
+      <a:defRPr sz="1200" kern="1200">
+        <a:solidFill>
+          <a:schemeClr val="tx1"/>
+        </a:solidFill>
+        <a:latin typeface="+mn-lt"/>
+        <a:ea typeface="+mn-ea"/>
+        <a:cs typeface="+mn-cs"/>
+      </a:defRPr>
+    </a:lvl2pPr>
+    <a:lvl3pPr marL="914400" algn="l" defTabSz="914400" rtl="0" eaLnBrk="1" latinLnBrk="0" hangingPunct="1">
+      <a:defRPr sz="1200" kern="1200">
+        <a:solidFill>
+          <a:schemeClr val="tx1"/>
+        </a:solidFill>
+        <a:latin typeface="+mn-lt"/>
+        <a:ea typeface="+mn-ea"/>
+        <a:cs typeface="+mn-cs"/>
+      </a:defRPr>
+    </a:lvl3pPr>
+    <a:lvl4pPr marL="1371600" algn="l" defTabSz="914400" rtl="0" eaLnBrk="1" latinLnBrk="0" hangingPunct="1">
+      <a:defRPr sz="1200" kern="1200">
+        <a:solidFill>
+          <a:schemeClr val="tx1"/>
+        </a:solidFill>
+        <a:latin typeface="+mn-lt"/>
+        <a:ea typeface="+mn-ea"/>
+        <a:cs typeface="+mn-cs"/>
+      </a:defRPr>
+    </a:lvl4pPr>
+    <a:lvl5pPr marL="1828800" algn="l" defTabSz="914400" rtl="0" eaLnBrk="1" latinLnBrk="0" hangingPunct="1">
+      <a:defRPr sz="1200" kern="1200">
+        <a:solidFill>
+          <a:schemeClr val="tx1"/>
+        </a:solidFill>
+        <a:latin typeface="+mn-lt"/>
+        <a:ea typeface="+mn-ea"/>
+        <a:cs typeface="+mn-cs"/>
+      </a:defRPr>
+    </a:lvl5pPr>
+    <a:lvl6pPr marL="2286000" algn="l" defTabSz="914400" rtl="0" eaLnBrk="1" latinLnBrk="0" hangingPunct="1">
+      <a:defRPr sz="1200" kern="1200">
+        <a:solidFill>
+          <a:schemeClr val="tx1"/>
+        </a:solidFill>
+        <a:latin typeface="+mn-lt"/>
+        <a:ea typeface="+mn-ea"/>
+        <a:cs typeface="+mn-cs"/>
+      </a:defRPr>
+    </a:lvl6pPr>
+    <a:lvl7pPr marL="2743200" algn="l" defTabSz="914400" rtl="0" eaLnBrk="1" latinLnBrk="0" hangingPunct="1">
+      <a:defRPr sz="1200" kern="1200">
+        <a:solidFill>
+          <a:schemeClr val="tx1"/>
+        </a:solidFill>
+        <a:latin typeface="+mn-lt"/>
+        <a:ea typeface="+mn-ea"/>
+        <a:cs typeface="+mn-cs"/>
+      </a:defRPr>
+    </a:lvl7pPr>
+    <a:lvl8pPr marL="3200400" algn="l" defTabSz="914400" rtl="0" eaLnBrk="1" latinLnBrk="0" hangingPunct="1">
+      <a:defRPr sz="1200" kern="1200">
+        <a:solidFill>
+          <a:schemeClr val="tx1"/>
+        </a:solidFill>
+        <a:latin typeface="+mn-lt"/>
+        <a:ea typeface="+mn-ea"/>
+        <a:cs typeface="+mn-cs"/>
+      </a:defRPr>
+    </a:lvl8pPr>
+    <a:lvl9pPr marL="3657600" algn="l" defTabSz="914400" rtl="0" eaLnBrk="1" latinLnBrk="0" hangingPunct="1">
+      <a:defRPr sz="1200" kern="1200">
+        <a:solidFill>
+          <a:schemeClr val="tx1"/>
+        </a:solidFill>
+        <a:latin typeface="+mn-lt"/>
+        <a:ea typeface="+mn-ea"/>
+        <a:cs typeface="+mn-cs"/>
+      </a:defRPr>
+    </a:lvl9pPr>
+  </p:notesStyle>
+</p:notesMaster>
+</file>
+
+<file path=ppt/notesSlides/notesSlide1.xml><?xml version="1.0" encoding="utf-8"?>
+<p:notes xmlns:a="http://schemas.openxmlformats.org/drawingml/2006/main" xmlns:r="http://schemas.openxmlformats.org/officeDocument/2006/relationships" xmlns:p="http://schemas.openxmlformats.org/presentationml/2006/main" showMasterSp="0" showMasterPhAnim="0">
+  <p:cSld>
+    <p:spTree>
+      <p:nvGrpSpPr>
+        <p:cNvPr id="1" name="Shape 80"/>
+        <p:cNvGrpSpPr/>
+        <p:nvPr/>
+      </p:nvGrpSpPr>
+      <p:grpSpPr>
+        <a:xfrm>
+          <a:off x="0" y="0"/>
+          <a:ext cx="0" cy="0"/>
+          <a:chOff x="0" y="0"/>
+          <a:chExt cx="0" cy="0"/>
+        </a:xfrm>
+      </p:grpSpPr>
+      <p:sp>
+        <p:nvSpPr>
+          <p:cNvPr id="81" name="Google Shape;81;p1:notes"/>
+          <p:cNvSpPr txBox="1">
+            <a:spLocks noGrp="1"/>
+          </p:cNvSpPr>
+          <p:nvPr>
+            <p:ph type="body" idx="1"/>
+          </p:nvPr>
+        </p:nvSpPr>
+        <p:spPr>
+          <a:xfrm>
+            <a:off x="685800" y="4343400"/>
+            <a:ext cx="5486400" cy="4114800"/>
+          </a:xfrm>
+          <a:prstGeom prst="rect">
+            <a:avLst/>
+          </a:prstGeom>
+        </p:spPr>
+        <p:txBody>
+          <a:bodyPr spcFirstLastPara="1" wrap="square" lIns="91425" tIns="91425" rIns="91425" bIns="91425" anchor="t" anchorCtr="0">
+            <a:noAutofit/>
+          </a:bodyPr>
+          <a:lstStyle/>
+          <a:p>
+            <a:pPr marL="0" lvl="0" indent="0" algn="l" rtl="0">
+              <a:spcBef>
+                <a:spcPts val="0"/>
+              </a:spcBef>
+              <a:spcAft>
+                <a:spcPts val="0"/>
+              </a:spcAft>
+              <a:buNone/>
+            </a:pPr>
+            <a:endParaRPr/>
+          </a:p>
+        </p:txBody>
+      </p:sp>
+      <p:sp>
+        <p:nvSpPr>
+          <p:cNvPr id="82" name="Google Shape;82;p1:notes"/>
+          <p:cNvSpPr>
+            <a:spLocks noGrp="1" noRot="1" noChangeAspect="1"/>
+          </p:cNvSpPr>
+          <p:nvPr>
+            <p:ph type="sldImg" idx="2"/>
+          </p:nvPr>
+        </p:nvSpPr>
+        <p:spPr>
+          <a:xfrm>
+            <a:off x="381000" y="685800"/>
+            <a:ext cx="6096000" cy="3429000"/>
+          </a:xfrm>
+          <a:custGeom>
+            <a:avLst/>
+            <a:gdLst/>
+            <a:ahLst/>
+            <a:cxnLst/>
+            <a:rect l="l" t="t" r="r" b="b"/>
+            <a:pathLst>
+              <a:path w="120000" h="120000" extrusionOk="0">
+                <a:moveTo>
+                  <a:pt x="0" y="0"/>
+                </a:moveTo>
+                <a:lnTo>
+                  <a:pt x="120000" y="0"/>
+                </a:lnTo>
+                <a:lnTo>
+                  <a:pt x="120000" y="120000"/>
+                </a:lnTo>
+                <a:lnTo>
+                  <a:pt x="0" y="120000"/>
+                </a:lnTo>
+                <a:close/>
+              </a:path>
+            </a:pathLst>
+          </a:custGeom>
+        </p:spPr>
+      </p:sp>
+    </p:spTree>
+  </p:cSld>
+  <p:clrMapOvr>
+    <a:masterClrMapping/>
+  </p:clrMapOvr>
+</p:notes>
+</file>
+
+<file path=ppt/notesSlides/notesSlide10.xml><?xml version="1.0" encoding="utf-8"?>
+<p:notes xmlns:a="http://schemas.openxmlformats.org/drawingml/2006/main" xmlns:r="http://schemas.openxmlformats.org/officeDocument/2006/relationships" xmlns:p="http://schemas.openxmlformats.org/presentationml/2006/main" showMasterSp="0" showMasterPhAnim="0">
+  <p:cSld>
+    <p:spTree>
+      <p:nvGrpSpPr>
+        <p:cNvPr id="1" name="Shape 271">
+          <a:extLst>
+            <a:ext uri="{FF2B5EF4-FFF2-40B4-BE49-F238E27FC236}">
+              <a16:creationId xmlns:a16="http://schemas.microsoft.com/office/drawing/2014/main" id="{30E5B0FF-7F6A-5BBA-FD84-E67D98E0CA07}"/>
+            </a:ext>
+          </a:extLst>
+        </p:cNvPr>
+        <p:cNvGrpSpPr/>
+        <p:nvPr/>
+      </p:nvGrpSpPr>
+      <p:grpSpPr>
+        <a:xfrm>
+          <a:off x="0" y="0"/>
+          <a:ext cx="0" cy="0"/>
+          <a:chOff x="0" y="0"/>
+          <a:chExt cx="0" cy="0"/>
+        </a:xfrm>
+      </p:grpSpPr>
+      <p:sp>
+        <p:nvSpPr>
+          <p:cNvPr id="272" name="Google Shape;272;p11:notes">
+            <a:extLst>
+              <a:ext uri="{FF2B5EF4-FFF2-40B4-BE49-F238E27FC236}">
+                <a16:creationId xmlns:a16="http://schemas.microsoft.com/office/drawing/2014/main" id="{58156EA9-AE74-DAA2-37EE-FD21A1D01AE0}"/>
+              </a:ext>
+            </a:extLst>
+          </p:cNvPr>
+          <p:cNvSpPr txBox="1">
+            <a:spLocks noGrp="1"/>
+          </p:cNvSpPr>
+          <p:nvPr>
+            <p:ph type="body" idx="1"/>
+          </p:nvPr>
+        </p:nvSpPr>
+        <p:spPr>
+          <a:xfrm>
+            <a:off x="685800" y="4343400"/>
+            <a:ext cx="5486400" cy="4114800"/>
+          </a:xfrm>
+          <a:prstGeom prst="rect">
+            <a:avLst/>
+          </a:prstGeom>
+        </p:spPr>
+        <p:txBody>
+          <a:bodyPr spcFirstLastPara="1" wrap="square" lIns="91425" tIns="91425" rIns="91425" bIns="91425" anchor="t" anchorCtr="0">
+            <a:noAutofit/>
+          </a:bodyPr>
+          <a:lstStyle/>
+          <a:p>
+            <a:pPr marL="0" lvl="0" indent="0" algn="l" rtl="0">
+              <a:spcBef>
+                <a:spcPts val="0"/>
+              </a:spcBef>
+              <a:spcAft>
+                <a:spcPts val="0"/>
+              </a:spcAft>
+              <a:buNone/>
+            </a:pPr>
+            <a:endParaRPr/>
+          </a:p>
+        </p:txBody>
+      </p:sp>
+      <p:sp>
+        <p:nvSpPr>
+          <p:cNvPr id="273" name="Google Shape;273;p11:notes">
+            <a:extLst>
+              <a:ext uri="{FF2B5EF4-FFF2-40B4-BE49-F238E27FC236}">
+                <a16:creationId xmlns:a16="http://schemas.microsoft.com/office/drawing/2014/main" id="{4D6DA1AF-9CBF-94BE-DAF7-11CC472703EE}"/>
+              </a:ext>
+            </a:extLst>
+          </p:cNvPr>
+          <p:cNvSpPr>
+            <a:spLocks noGrp="1" noRot="1" noChangeAspect="1"/>
+          </p:cNvSpPr>
+          <p:nvPr>
+            <p:ph type="sldImg" idx="2"/>
+          </p:nvPr>
+        </p:nvSpPr>
+        <p:spPr>
+          <a:xfrm>
+            <a:off x="381000" y="685800"/>
+            <a:ext cx="6096000" cy="3429000"/>
+          </a:xfrm>
+          <a:custGeom>
+            <a:avLst/>
+            <a:gdLst/>
+            <a:ahLst/>
+            <a:cxnLst/>
+            <a:rect l="l" t="t" r="r" b="b"/>
+            <a:pathLst>
+              <a:path w="120000" h="120000" extrusionOk="0">
+                <a:moveTo>
+                  <a:pt x="0" y="0"/>
+                </a:moveTo>
+                <a:lnTo>
+                  <a:pt x="120000" y="0"/>
+                </a:lnTo>
+                <a:lnTo>
+                  <a:pt x="120000" y="120000"/>
+                </a:lnTo>
+                <a:lnTo>
+                  <a:pt x="0" y="120000"/>
+                </a:lnTo>
+                <a:close/>
+              </a:path>
+            </a:pathLst>
+          </a:custGeom>
+        </p:spPr>
+      </p:sp>
+    </p:spTree>
+    <p:extLst>
+      <p:ext uri="{BB962C8B-B14F-4D97-AF65-F5344CB8AC3E}">
+        <p14:creationId xmlns:p14="http://schemas.microsoft.com/office/powerpoint/2010/main" val="796792180"/>
+      </p:ext>
+    </p:extLst>
+  </p:cSld>
+  <p:clrMapOvr>
+    <a:masterClrMapping/>
+  </p:clrMapOvr>
+</p:notes>
+</file>
+
+<file path=ppt/notesSlides/notesSlide11.xml><?xml version="1.0" encoding="utf-8"?>
+<p:notes xmlns:a="http://schemas.openxmlformats.org/drawingml/2006/main" xmlns:r="http://schemas.openxmlformats.org/officeDocument/2006/relationships" xmlns:p="http://schemas.openxmlformats.org/presentationml/2006/main" showMasterSp="0" showMasterPhAnim="0">
+  <p:cSld>
+    <p:spTree>
+      <p:nvGrpSpPr>
+        <p:cNvPr id="1" name="Shape 271">
+          <a:extLst>
+            <a:ext uri="{FF2B5EF4-FFF2-40B4-BE49-F238E27FC236}">
+              <a16:creationId xmlns:a16="http://schemas.microsoft.com/office/drawing/2014/main" id="{0B5CE19B-28C4-4D25-EB9B-439810A6455F}"/>
+            </a:ext>
+          </a:extLst>
+        </p:cNvPr>
+        <p:cNvGrpSpPr/>
+        <p:nvPr/>
+      </p:nvGrpSpPr>
+      <p:grpSpPr>
+        <a:xfrm>
+          <a:off x="0" y="0"/>
+          <a:ext cx="0" cy="0"/>
+          <a:chOff x="0" y="0"/>
+          <a:chExt cx="0" cy="0"/>
+        </a:xfrm>
+      </p:grpSpPr>
+      <p:sp>
+        <p:nvSpPr>
+          <p:cNvPr id="272" name="Google Shape;272;p11:notes">
+            <a:extLst>
+              <a:ext uri="{FF2B5EF4-FFF2-40B4-BE49-F238E27FC236}">
+                <a16:creationId xmlns:a16="http://schemas.microsoft.com/office/drawing/2014/main" id="{73B21E0F-8B08-FC1B-D07F-7E6E02321723}"/>
+              </a:ext>
+            </a:extLst>
+          </p:cNvPr>
+          <p:cNvSpPr txBox="1">
+            <a:spLocks noGrp="1"/>
+          </p:cNvSpPr>
+          <p:nvPr>
+            <p:ph type="body" idx="1"/>
+          </p:nvPr>
+        </p:nvSpPr>
+        <p:spPr>
+          <a:xfrm>
+            <a:off x="685800" y="4343400"/>
+            <a:ext cx="5486400" cy="4114800"/>
+          </a:xfrm>
+          <a:prstGeom prst="rect">
+            <a:avLst/>
+          </a:prstGeom>
+        </p:spPr>
+        <p:txBody>
+          <a:bodyPr spcFirstLastPara="1" wrap="square" lIns="91425" tIns="91425" rIns="91425" bIns="91425" anchor="t" anchorCtr="0">
+            <a:noAutofit/>
+          </a:bodyPr>
+          <a:lstStyle/>
+          <a:p>
+            <a:pPr marL="0" lvl="0" indent="0" algn="l" rtl="0">
+              <a:spcBef>
+                <a:spcPts val="0"/>
+              </a:spcBef>
+              <a:spcAft>
+                <a:spcPts val="0"/>
+              </a:spcAft>
+              <a:buNone/>
+            </a:pPr>
+            <a:endParaRPr/>
+          </a:p>
+        </p:txBody>
+      </p:sp>
+      <p:sp>
+        <p:nvSpPr>
+          <p:cNvPr id="273" name="Google Shape;273;p11:notes">
+            <a:extLst>
+              <a:ext uri="{FF2B5EF4-FFF2-40B4-BE49-F238E27FC236}">
+                <a16:creationId xmlns:a16="http://schemas.microsoft.com/office/drawing/2014/main" id="{243BF204-1B95-C87B-6715-B2949BED2E18}"/>
+              </a:ext>
+            </a:extLst>
+          </p:cNvPr>
+          <p:cNvSpPr>
+            <a:spLocks noGrp="1" noRot="1" noChangeAspect="1"/>
+          </p:cNvSpPr>
+          <p:nvPr>
+            <p:ph type="sldImg" idx="2"/>
+          </p:nvPr>
+        </p:nvSpPr>
+        <p:spPr>
+          <a:xfrm>
+            <a:off x="381000" y="685800"/>
+            <a:ext cx="6096000" cy="3429000"/>
+          </a:xfrm>
+          <a:custGeom>
+            <a:avLst/>
+            <a:gdLst/>
+            <a:ahLst/>
+            <a:cxnLst/>
+            <a:rect l="l" t="t" r="r" b="b"/>
+            <a:pathLst>
+              <a:path w="120000" h="120000" extrusionOk="0">
+                <a:moveTo>
+                  <a:pt x="0" y="0"/>
+                </a:moveTo>
+                <a:lnTo>
+                  <a:pt x="120000" y="0"/>
+                </a:lnTo>
+                <a:lnTo>
+                  <a:pt x="120000" y="120000"/>
+                </a:lnTo>
+                <a:lnTo>
+                  <a:pt x="0" y="120000"/>
+                </a:lnTo>
+                <a:close/>
+              </a:path>
+            </a:pathLst>
+          </a:custGeom>
+        </p:spPr>
+      </p:sp>
+    </p:spTree>
+    <p:extLst>
+      <p:ext uri="{BB962C8B-B14F-4D97-AF65-F5344CB8AC3E}">
+        <p14:creationId xmlns:p14="http://schemas.microsoft.com/office/powerpoint/2010/main" val="914700190"/>
+      </p:ext>
+    </p:extLst>
+  </p:cSld>
+  <p:clrMapOvr>
+    <a:masterClrMapping/>
+  </p:clrMapOvr>
+</p:notes>
+</file>
+
+<file path=ppt/notesSlides/notesSlide12.xml><?xml version="1.0" encoding="utf-8"?>
+<p:notes xmlns:a="http://schemas.openxmlformats.org/drawingml/2006/main" xmlns:r="http://schemas.openxmlformats.org/officeDocument/2006/relationships" xmlns:p="http://schemas.openxmlformats.org/presentationml/2006/main" showMasterSp="0" showMasterPhAnim="0">
+  <p:cSld>
+    <p:spTree>
+      <p:nvGrpSpPr>
+        <p:cNvPr id="1" name="Shape 493"/>
+        <p:cNvGrpSpPr/>
+        <p:nvPr/>
+      </p:nvGrpSpPr>
+      <p:grpSpPr>
+        <a:xfrm>
+          <a:off x="0" y="0"/>
+          <a:ext cx="0" cy="0"/>
+          <a:chOff x="0" y="0"/>
+          <a:chExt cx="0" cy="0"/>
+        </a:xfrm>
+      </p:grpSpPr>
+      <p:sp>
+        <p:nvSpPr>
+          <p:cNvPr id="494" name="Google Shape;494;p23:notes"/>
+          <p:cNvSpPr txBox="1">
+            <a:spLocks noGrp="1"/>
+          </p:cNvSpPr>
+          <p:nvPr>
+            <p:ph type="body" idx="1"/>
+          </p:nvPr>
+        </p:nvSpPr>
+        <p:spPr>
+          <a:xfrm>
+            <a:off x="685800" y="4343400"/>
+            <a:ext cx="5486400" cy="4114800"/>
+          </a:xfrm>
+          <a:prstGeom prst="rect">
+            <a:avLst/>
+          </a:prstGeom>
+        </p:spPr>
+        <p:txBody>
+          <a:bodyPr spcFirstLastPara="1" wrap="square" lIns="91425" tIns="91425" rIns="91425" bIns="91425" anchor="t" anchorCtr="0">
+            <a:noAutofit/>
+          </a:bodyPr>
+          <a:lstStyle/>
+          <a:p>
+            <a:pPr marL="0" lvl="0" indent="0" algn="l" rtl="0">
+              <a:spcBef>
+                <a:spcPts val="0"/>
+              </a:spcBef>
+              <a:spcAft>
+                <a:spcPts val="0"/>
+              </a:spcAft>
+              <a:buNone/>
+            </a:pPr>
+            <a:endParaRPr/>
+          </a:p>
+        </p:txBody>
+      </p:sp>
+      <p:sp>
+        <p:nvSpPr>
+          <p:cNvPr id="495" name="Google Shape;495;p23:notes"/>
+          <p:cNvSpPr>
+            <a:spLocks noGrp="1" noRot="1" noChangeAspect="1"/>
+          </p:cNvSpPr>
+          <p:nvPr>
+            <p:ph type="sldImg" idx="2"/>
+          </p:nvPr>
+        </p:nvSpPr>
+        <p:spPr>
+          <a:xfrm>
+            <a:off x="381000" y="685800"/>
+            <a:ext cx="6096000" cy="3429000"/>
+          </a:xfrm>
+          <a:custGeom>
+            <a:avLst/>
+            <a:gdLst/>
+            <a:ahLst/>
+            <a:cxnLst/>
+            <a:rect l="l" t="t" r="r" b="b"/>
+            <a:pathLst>
+              <a:path w="120000" h="120000" extrusionOk="0">
+                <a:moveTo>
+                  <a:pt x="0" y="0"/>
+                </a:moveTo>
+                <a:lnTo>
+                  <a:pt x="120000" y="0"/>
+                </a:lnTo>
+                <a:lnTo>
+                  <a:pt x="120000" y="120000"/>
+                </a:lnTo>
+                <a:lnTo>
+                  <a:pt x="0" y="120000"/>
+                </a:lnTo>
+                <a:close/>
+              </a:path>
+            </a:pathLst>
+          </a:custGeom>
+        </p:spPr>
+      </p:sp>
+    </p:spTree>
+  </p:cSld>
+  <p:clrMapOvr>
+    <a:masterClrMapping/>
+  </p:clrMapOvr>
+</p:notes>
+</file>
+
+<file path=ppt/notesSlides/notesSlide2.xml><?xml version="1.0" encoding="utf-8"?>
+<p:notes xmlns:a="http://schemas.openxmlformats.org/drawingml/2006/main" xmlns:r="http://schemas.openxmlformats.org/officeDocument/2006/relationships" xmlns:p="http://schemas.openxmlformats.org/presentationml/2006/main" showMasterSp="0" showMasterPhAnim="0">
+  <p:cSld>
+    <p:spTree>
+      <p:nvGrpSpPr>
+        <p:cNvPr id="1" name="Shape 271"/>
+        <p:cNvGrpSpPr/>
+        <p:nvPr/>
+      </p:nvGrpSpPr>
+      <p:grpSpPr>
+        <a:xfrm>
+          <a:off x="0" y="0"/>
+          <a:ext cx="0" cy="0"/>
+          <a:chOff x="0" y="0"/>
+          <a:chExt cx="0" cy="0"/>
+        </a:xfrm>
+      </p:grpSpPr>
+      <p:sp>
+        <p:nvSpPr>
+          <p:cNvPr id="272" name="Google Shape;272;p11:notes"/>
+          <p:cNvSpPr txBox="1">
+            <a:spLocks noGrp="1"/>
+          </p:cNvSpPr>
+          <p:nvPr>
+            <p:ph type="body" idx="1"/>
+          </p:nvPr>
+        </p:nvSpPr>
+        <p:spPr>
+          <a:xfrm>
+            <a:off x="685800" y="4343400"/>
+            <a:ext cx="5486400" cy="4114800"/>
+          </a:xfrm>
+          <a:prstGeom prst="rect">
+            <a:avLst/>
+          </a:prstGeom>
+        </p:spPr>
+        <p:txBody>
+          <a:bodyPr spcFirstLastPara="1" wrap="square" lIns="91425" tIns="91425" rIns="91425" bIns="91425" anchor="t" anchorCtr="0">
+            <a:noAutofit/>
+          </a:bodyPr>
+          <a:lstStyle/>
+          <a:p>
+            <a:pPr marL="0" lvl="0" indent="0" algn="l" rtl="0">
+              <a:spcBef>
+                <a:spcPts val="0"/>
+              </a:spcBef>
+              <a:spcAft>
+                <a:spcPts val="0"/>
+              </a:spcAft>
+              <a:buNone/>
+            </a:pPr>
+            <a:endParaRPr/>
+          </a:p>
+        </p:txBody>
+      </p:sp>
+      <p:sp>
+        <p:nvSpPr>
+          <p:cNvPr id="273" name="Google Shape;273;p11:notes"/>
+          <p:cNvSpPr>
+            <a:spLocks noGrp="1" noRot="1" noChangeAspect="1"/>
+          </p:cNvSpPr>
+          <p:nvPr>
+            <p:ph type="sldImg" idx="2"/>
+          </p:nvPr>
+        </p:nvSpPr>
+        <p:spPr>
+          <a:xfrm>
+            <a:off x="381000" y="685800"/>
+            <a:ext cx="6096000" cy="3429000"/>
+          </a:xfrm>
+          <a:custGeom>
+            <a:avLst/>
+            <a:gdLst/>
+            <a:ahLst/>
+            <a:cxnLst/>
+            <a:rect l="l" t="t" r="r" b="b"/>
+            <a:pathLst>
+              <a:path w="120000" h="120000" extrusionOk="0">
+                <a:moveTo>
+                  <a:pt x="0" y="0"/>
+                </a:moveTo>
+                <a:lnTo>
+                  <a:pt x="120000" y="0"/>
+                </a:lnTo>
+                <a:lnTo>
+                  <a:pt x="120000" y="120000"/>
+                </a:lnTo>
+                <a:lnTo>
+                  <a:pt x="0" y="120000"/>
+                </a:lnTo>
+                <a:close/>
+              </a:path>
+            </a:pathLst>
+          </a:custGeom>
+        </p:spPr>
+      </p:sp>
+    </p:spTree>
+  </p:cSld>
+  <p:clrMapOvr>
+    <a:masterClrMapping/>
+  </p:clrMapOvr>
+</p:notes>
+</file>
+
+<file path=ppt/notesSlides/notesSlide3.xml><?xml version="1.0" encoding="utf-8"?>
+<p:notes xmlns:a="http://schemas.openxmlformats.org/drawingml/2006/main" xmlns:r="http://schemas.openxmlformats.org/officeDocument/2006/relationships" xmlns:p="http://schemas.openxmlformats.org/presentationml/2006/main" showMasterSp="0" showMasterPhAnim="0">
+  <p:cSld>
+    <p:spTree>
+      <p:nvGrpSpPr>
+        <p:cNvPr id="1" name="Shape 271">
+          <a:extLst>
+            <a:ext uri="{FF2B5EF4-FFF2-40B4-BE49-F238E27FC236}">
+              <a16:creationId xmlns:a16="http://schemas.microsoft.com/office/drawing/2014/main" id="{92943E5C-15F6-54E9-B745-B30B17AAB483}"/>
+            </a:ext>
+          </a:extLst>
+        </p:cNvPr>
+        <p:cNvGrpSpPr/>
+        <p:nvPr/>
+      </p:nvGrpSpPr>
+      <p:grpSpPr>
+        <a:xfrm>
+          <a:off x="0" y="0"/>
+          <a:ext cx="0" cy="0"/>
+          <a:chOff x="0" y="0"/>
+          <a:chExt cx="0" cy="0"/>
+        </a:xfrm>
+      </p:grpSpPr>
+      <p:sp>
+        <p:nvSpPr>
+          <p:cNvPr id="272" name="Google Shape;272;p11:notes">
+            <a:extLst>
+              <a:ext uri="{FF2B5EF4-FFF2-40B4-BE49-F238E27FC236}">
+                <a16:creationId xmlns:a16="http://schemas.microsoft.com/office/drawing/2014/main" id="{43D16254-6F56-28A8-E72D-69E13CA5F982}"/>
+              </a:ext>
+            </a:extLst>
+          </p:cNvPr>
+          <p:cNvSpPr txBox="1">
+            <a:spLocks noGrp="1"/>
+          </p:cNvSpPr>
+          <p:nvPr>
+            <p:ph type="body" idx="1"/>
+          </p:nvPr>
+        </p:nvSpPr>
+        <p:spPr>
+          <a:xfrm>
+            <a:off x="685800" y="4343400"/>
+            <a:ext cx="5486400" cy="4114800"/>
+          </a:xfrm>
+          <a:prstGeom prst="rect">
+            <a:avLst/>
+          </a:prstGeom>
+        </p:spPr>
+        <p:txBody>
+          <a:bodyPr spcFirstLastPara="1" wrap="square" lIns="91425" tIns="91425" rIns="91425" bIns="91425" anchor="t" anchorCtr="0">
+            <a:noAutofit/>
+          </a:bodyPr>
+          <a:lstStyle/>
+          <a:p>
+            <a:pPr marL="0" lvl="0" indent="0" algn="l" rtl="0">
+              <a:spcBef>
+                <a:spcPts val="0"/>
+              </a:spcBef>
+              <a:spcAft>
+                <a:spcPts val="0"/>
+              </a:spcAft>
+              <a:buNone/>
+            </a:pPr>
+            <a:endParaRPr/>
+          </a:p>
+        </p:txBody>
+      </p:sp>
+      <p:sp>
+        <p:nvSpPr>
+          <p:cNvPr id="273" name="Google Shape;273;p11:notes">
+            <a:extLst>
+              <a:ext uri="{FF2B5EF4-FFF2-40B4-BE49-F238E27FC236}">
+                <a16:creationId xmlns:a16="http://schemas.microsoft.com/office/drawing/2014/main" id="{6A221F69-FA65-4CC9-B4D5-4663971FD65F}"/>
+              </a:ext>
+            </a:extLst>
+          </p:cNvPr>
+          <p:cNvSpPr>
+            <a:spLocks noGrp="1" noRot="1" noChangeAspect="1"/>
+          </p:cNvSpPr>
+          <p:nvPr>
+            <p:ph type="sldImg" idx="2"/>
+          </p:nvPr>
+        </p:nvSpPr>
+        <p:spPr>
+          <a:xfrm>
+            <a:off x="381000" y="685800"/>
+            <a:ext cx="6096000" cy="3429000"/>
+          </a:xfrm>
+          <a:custGeom>
+            <a:avLst/>
+            <a:gdLst/>
+            <a:ahLst/>
+            <a:cxnLst/>
+            <a:rect l="l" t="t" r="r" b="b"/>
+            <a:pathLst>
+              <a:path w="120000" h="120000" extrusionOk="0">
+                <a:moveTo>
+                  <a:pt x="0" y="0"/>
+                </a:moveTo>
+                <a:lnTo>
+                  <a:pt x="120000" y="0"/>
+                </a:lnTo>
+                <a:lnTo>
+                  <a:pt x="120000" y="120000"/>
+                </a:lnTo>
+                <a:lnTo>
+                  <a:pt x="0" y="120000"/>
+                </a:lnTo>
+                <a:close/>
+              </a:path>
+            </a:pathLst>
+          </a:custGeom>
+        </p:spPr>
+      </p:sp>
+    </p:spTree>
+    <p:extLst>
+      <p:ext uri="{BB962C8B-B14F-4D97-AF65-F5344CB8AC3E}">
+        <p14:creationId xmlns:p14="http://schemas.microsoft.com/office/powerpoint/2010/main" val="788900450"/>
+      </p:ext>
+    </p:extLst>
+  </p:cSld>
+  <p:clrMapOvr>
+    <a:masterClrMapping/>
+  </p:clrMapOvr>
+</p:notes>
+</file>
+
+<file path=ppt/notesSlides/notesSlide4.xml><?xml version="1.0" encoding="utf-8"?>
+<p:notes xmlns:a="http://schemas.openxmlformats.org/drawingml/2006/main" xmlns:r="http://schemas.openxmlformats.org/officeDocument/2006/relationships" xmlns:p="http://schemas.openxmlformats.org/presentationml/2006/main" showMasterSp="0" showMasterPhAnim="0">
+  <p:cSld>
+    <p:spTree>
+      <p:nvGrpSpPr>
+        <p:cNvPr id="1" name="Shape 271">
+          <a:extLst>
+            <a:ext uri="{FF2B5EF4-FFF2-40B4-BE49-F238E27FC236}">
+              <a16:creationId xmlns:a16="http://schemas.microsoft.com/office/drawing/2014/main" id="{A625C88B-0CD5-071E-5A5D-4FD1A109AEE4}"/>
+            </a:ext>
+          </a:extLst>
+        </p:cNvPr>
+        <p:cNvGrpSpPr/>
+        <p:nvPr/>
+      </p:nvGrpSpPr>
+      <p:grpSpPr>
+        <a:xfrm>
+          <a:off x="0" y="0"/>
+          <a:ext cx="0" cy="0"/>
+          <a:chOff x="0" y="0"/>
+          <a:chExt cx="0" cy="0"/>
+        </a:xfrm>
+      </p:grpSpPr>
+      <p:sp>
+        <p:nvSpPr>
+          <p:cNvPr id="272" name="Google Shape;272;p11:notes">
+            <a:extLst>
+              <a:ext uri="{FF2B5EF4-FFF2-40B4-BE49-F238E27FC236}">
+                <a16:creationId xmlns:a16="http://schemas.microsoft.com/office/drawing/2014/main" id="{CCF85C62-40C2-6C91-8D76-2C9527F36241}"/>
+              </a:ext>
+            </a:extLst>
+          </p:cNvPr>
+          <p:cNvSpPr txBox="1">
+            <a:spLocks noGrp="1"/>
+          </p:cNvSpPr>
+          <p:nvPr>
+            <p:ph type="body" idx="1"/>
+          </p:nvPr>
+        </p:nvSpPr>
+        <p:spPr>
+          <a:xfrm>
+            <a:off x="685800" y="4343400"/>
+            <a:ext cx="5486400" cy="4114800"/>
+          </a:xfrm>
+          <a:prstGeom prst="rect">
+            <a:avLst/>
+          </a:prstGeom>
+        </p:spPr>
+        <p:txBody>
+          <a:bodyPr spcFirstLastPara="1" wrap="square" lIns="91425" tIns="91425" rIns="91425" bIns="91425" anchor="t" anchorCtr="0">
+            <a:noAutofit/>
+          </a:bodyPr>
+          <a:lstStyle/>
+          <a:p>
+            <a:pPr marL="0" lvl="0" indent="0" algn="l" rtl="0">
+              <a:spcBef>
+                <a:spcPts val="0"/>
+              </a:spcBef>
+              <a:spcAft>
+                <a:spcPts val="0"/>
+              </a:spcAft>
+              <a:buNone/>
+            </a:pPr>
+            <a:endParaRPr/>
+          </a:p>
+        </p:txBody>
+      </p:sp>
+      <p:sp>
+        <p:nvSpPr>
+          <p:cNvPr id="273" name="Google Shape;273;p11:notes">
+            <a:extLst>
+              <a:ext uri="{FF2B5EF4-FFF2-40B4-BE49-F238E27FC236}">
+                <a16:creationId xmlns:a16="http://schemas.microsoft.com/office/drawing/2014/main" id="{718AB5F9-5C7D-9CC8-388A-8B7D10AEF1BF}"/>
+              </a:ext>
+            </a:extLst>
+          </p:cNvPr>
+          <p:cNvSpPr>
+            <a:spLocks noGrp="1" noRot="1" noChangeAspect="1"/>
+          </p:cNvSpPr>
+          <p:nvPr>
+            <p:ph type="sldImg" idx="2"/>
+          </p:nvPr>
+        </p:nvSpPr>
+        <p:spPr>
+          <a:xfrm>
+            <a:off x="381000" y="685800"/>
+            <a:ext cx="6096000" cy="3429000"/>
+          </a:xfrm>
+          <a:custGeom>
+            <a:avLst/>
+            <a:gdLst/>
+            <a:ahLst/>
+            <a:cxnLst/>
+            <a:rect l="l" t="t" r="r" b="b"/>
+            <a:pathLst>
+              <a:path w="120000" h="120000" extrusionOk="0">
+                <a:moveTo>
+                  <a:pt x="0" y="0"/>
+                </a:moveTo>
+                <a:lnTo>
+                  <a:pt x="120000" y="0"/>
+                </a:lnTo>
+                <a:lnTo>
+                  <a:pt x="120000" y="120000"/>
+                </a:lnTo>
+                <a:lnTo>
+                  <a:pt x="0" y="120000"/>
+                </a:lnTo>
+                <a:close/>
+              </a:path>
+            </a:pathLst>
+          </a:custGeom>
+        </p:spPr>
+      </p:sp>
+    </p:spTree>
+    <p:extLst>
+      <p:ext uri="{BB962C8B-B14F-4D97-AF65-F5344CB8AC3E}">
+        <p14:creationId xmlns:p14="http://schemas.microsoft.com/office/powerpoint/2010/main" val="3632880126"/>
+      </p:ext>
+    </p:extLst>
+  </p:cSld>
+  <p:clrMapOvr>
+    <a:masterClrMapping/>
+  </p:clrMapOvr>
+</p:notes>
+</file>
+
+<file path=ppt/notesSlides/notesSlide5.xml><?xml version="1.0" encoding="utf-8"?>
+<p:notes xmlns:a="http://schemas.openxmlformats.org/drawingml/2006/main" xmlns:r="http://schemas.openxmlformats.org/officeDocument/2006/relationships" xmlns:p="http://schemas.openxmlformats.org/presentationml/2006/main" showMasterSp="0" showMasterPhAnim="0">
+  <p:cSld>
+    <p:spTree>
+      <p:nvGrpSpPr>
+        <p:cNvPr id="1" name="Shape 260"/>
+        <p:cNvGrpSpPr/>
+        <p:nvPr/>
+      </p:nvGrpSpPr>
+      <p:grpSpPr>
+        <a:xfrm>
+          <a:off x="0" y="0"/>
+          <a:ext cx="0" cy="0"/>
+          <a:chOff x="0" y="0"/>
+          <a:chExt cx="0" cy="0"/>
+        </a:xfrm>
+      </p:grpSpPr>
+      <p:sp>
+        <p:nvSpPr>
+          <p:cNvPr id="261" name="Google Shape;261;p10:notes"/>
+          <p:cNvSpPr txBox="1">
+            <a:spLocks noGrp="1"/>
+          </p:cNvSpPr>
+          <p:nvPr>
+            <p:ph type="body" idx="1"/>
+          </p:nvPr>
+        </p:nvSpPr>
+        <p:spPr>
+          <a:xfrm>
+            <a:off x="685800" y="4343400"/>
+            <a:ext cx="5486400" cy="4114800"/>
+          </a:xfrm>
+          <a:prstGeom prst="rect">
+            <a:avLst/>
+          </a:prstGeom>
+        </p:spPr>
+        <p:txBody>
+          <a:bodyPr spcFirstLastPara="1" wrap="square" lIns="91425" tIns="91425" rIns="91425" bIns="91425" anchor="t" anchorCtr="0">
+            <a:noAutofit/>
+          </a:bodyPr>
+          <a:lstStyle/>
+          <a:p>
+            <a:pPr marL="0" lvl="0" indent="0" algn="l" rtl="0">
+              <a:spcBef>
+                <a:spcPts val="0"/>
+              </a:spcBef>
+              <a:spcAft>
+                <a:spcPts val="0"/>
+              </a:spcAft>
+              <a:buNone/>
+            </a:pPr>
+            <a:endParaRPr/>
+          </a:p>
+        </p:txBody>
+      </p:sp>
+      <p:sp>
+        <p:nvSpPr>
+          <p:cNvPr id="262" name="Google Shape;262;p10:notes"/>
+          <p:cNvSpPr>
+            <a:spLocks noGrp="1" noRot="1" noChangeAspect="1"/>
+          </p:cNvSpPr>
+          <p:nvPr>
+            <p:ph type="sldImg" idx="2"/>
+          </p:nvPr>
+        </p:nvSpPr>
+        <p:spPr>
+          <a:xfrm>
+            <a:off x="381000" y="685800"/>
+            <a:ext cx="6096000" cy="3429000"/>
+          </a:xfrm>
+          <a:custGeom>
+            <a:avLst/>
+            <a:gdLst/>
+            <a:ahLst/>
+            <a:cxnLst/>
+            <a:rect l="l" t="t" r="r" b="b"/>
+            <a:pathLst>
+              <a:path w="120000" h="120000" extrusionOk="0">
+                <a:moveTo>
+                  <a:pt x="0" y="0"/>
+                </a:moveTo>
+                <a:lnTo>
+                  <a:pt x="120000" y="0"/>
+                </a:lnTo>
+                <a:lnTo>
+                  <a:pt x="120000" y="120000"/>
+                </a:lnTo>
+                <a:lnTo>
+                  <a:pt x="0" y="120000"/>
+                </a:lnTo>
+                <a:close/>
+              </a:path>
+            </a:pathLst>
+          </a:custGeom>
+        </p:spPr>
+      </p:sp>
+    </p:spTree>
+  </p:cSld>
+  <p:clrMapOvr>
+    <a:masterClrMapping/>
+  </p:clrMapOvr>
+</p:notes>
+</file>
+
+<file path=ppt/notesSlides/notesSlide6.xml><?xml version="1.0" encoding="utf-8"?>
+<p:notes xmlns:a="http://schemas.openxmlformats.org/drawingml/2006/main" xmlns:r="http://schemas.openxmlformats.org/officeDocument/2006/relationships" xmlns:p="http://schemas.openxmlformats.org/presentationml/2006/main" showMasterSp="0" showMasterPhAnim="0">
+  <p:cSld>
+    <p:spTree>
+      <p:nvGrpSpPr>
+        <p:cNvPr id="1" name="Shape 271"/>
+        <p:cNvGrpSpPr/>
+        <p:nvPr/>
+      </p:nvGrpSpPr>
+      <p:grpSpPr>
+        <a:xfrm>
+          <a:off x="0" y="0"/>
+          <a:ext cx="0" cy="0"/>
+          <a:chOff x="0" y="0"/>
+          <a:chExt cx="0" cy="0"/>
+        </a:xfrm>
+      </p:grpSpPr>
+      <p:sp>
+        <p:nvSpPr>
+          <p:cNvPr id="272" name="Google Shape;272;p11:notes"/>
+          <p:cNvSpPr txBox="1">
+            <a:spLocks noGrp="1"/>
+          </p:cNvSpPr>
+          <p:nvPr>
+            <p:ph type="body" idx="1"/>
+          </p:nvPr>
+        </p:nvSpPr>
+        <p:spPr>
+          <a:xfrm>
+            <a:off x="685800" y="4343400"/>
+            <a:ext cx="5486400" cy="4114800"/>
+          </a:xfrm>
+          <a:prstGeom prst="rect">
+            <a:avLst/>
+          </a:prstGeom>
+        </p:spPr>
+        <p:txBody>
+          <a:bodyPr spcFirstLastPara="1" wrap="square" lIns="91425" tIns="91425" rIns="91425" bIns="91425" anchor="t" anchorCtr="0">
+            <a:noAutofit/>
+          </a:bodyPr>
+          <a:lstStyle/>
+          <a:p>
+            <a:pPr marL="0" lvl="0" indent="0" algn="l" rtl="0">
+              <a:spcBef>
+                <a:spcPts val="0"/>
+              </a:spcBef>
+              <a:spcAft>
+                <a:spcPts val="0"/>
+              </a:spcAft>
+              <a:buNone/>
+            </a:pPr>
+            <a:endParaRPr/>
+          </a:p>
+        </p:txBody>
+      </p:sp>
+      <p:sp>
+        <p:nvSpPr>
+          <p:cNvPr id="273" name="Google Shape;273;p11:notes"/>
+          <p:cNvSpPr>
+            <a:spLocks noGrp="1" noRot="1" noChangeAspect="1"/>
+          </p:cNvSpPr>
+          <p:nvPr>
+            <p:ph type="sldImg" idx="2"/>
+          </p:nvPr>
+        </p:nvSpPr>
+        <p:spPr>
+          <a:xfrm>
+            <a:off x="381000" y="685800"/>
+            <a:ext cx="6096000" cy="3429000"/>
+          </a:xfrm>
+          <a:custGeom>
+            <a:avLst/>
+            <a:gdLst/>
+            <a:ahLst/>
+            <a:cxnLst/>
+            <a:rect l="l" t="t" r="r" b="b"/>
+            <a:pathLst>
+              <a:path w="120000" h="120000" extrusionOk="0">
+                <a:moveTo>
+                  <a:pt x="0" y="0"/>
+                </a:moveTo>
+                <a:lnTo>
+                  <a:pt x="120000" y="0"/>
+                </a:lnTo>
+                <a:lnTo>
+                  <a:pt x="120000" y="120000"/>
+                </a:lnTo>
+                <a:lnTo>
+                  <a:pt x="0" y="120000"/>
+                </a:lnTo>
+                <a:close/>
+              </a:path>
+            </a:pathLst>
+          </a:custGeom>
+        </p:spPr>
+      </p:sp>
+    </p:spTree>
+  </p:cSld>
+  <p:clrMapOvr>
+    <a:masterClrMapping/>
+  </p:clrMapOvr>
+</p:notes>
+</file>
+
+<file path=ppt/notesSlides/notesSlide7.xml><?xml version="1.0" encoding="utf-8"?>
+<p:notes xmlns:a="http://schemas.openxmlformats.org/drawingml/2006/main" xmlns:r="http://schemas.openxmlformats.org/officeDocument/2006/relationships" xmlns:p="http://schemas.openxmlformats.org/presentationml/2006/main" showMasterSp="0" showMasterPhAnim="0">
+  <p:cSld>
+    <p:spTree>
+      <p:nvGrpSpPr>
+        <p:cNvPr id="1" name="Shape 260">
+          <a:extLst>
+            <a:ext uri="{FF2B5EF4-FFF2-40B4-BE49-F238E27FC236}">
+              <a16:creationId xmlns:a16="http://schemas.microsoft.com/office/drawing/2014/main" id="{031ADCA6-ED41-89E8-8C5D-A7C0A46EC911}"/>
+            </a:ext>
+          </a:extLst>
+        </p:cNvPr>
+        <p:cNvGrpSpPr/>
+        <p:nvPr/>
+      </p:nvGrpSpPr>
+      <p:grpSpPr>
+        <a:xfrm>
+          <a:off x="0" y="0"/>
+          <a:ext cx="0" cy="0"/>
+          <a:chOff x="0" y="0"/>
+          <a:chExt cx="0" cy="0"/>
+        </a:xfrm>
+      </p:grpSpPr>
+      <p:sp>
+        <p:nvSpPr>
+          <p:cNvPr id="261" name="Google Shape;261;p10:notes">
+            <a:extLst>
+              <a:ext uri="{FF2B5EF4-FFF2-40B4-BE49-F238E27FC236}">
+                <a16:creationId xmlns:a16="http://schemas.microsoft.com/office/drawing/2014/main" id="{76B5FB3A-981F-7241-F06A-19C82D27A25B}"/>
+              </a:ext>
+            </a:extLst>
+          </p:cNvPr>
+          <p:cNvSpPr txBox="1">
+            <a:spLocks noGrp="1"/>
+          </p:cNvSpPr>
+          <p:nvPr>
+            <p:ph type="body" idx="1"/>
+          </p:nvPr>
+        </p:nvSpPr>
+        <p:spPr>
+          <a:xfrm>
+            <a:off x="685800" y="4343400"/>
+            <a:ext cx="5486400" cy="4114800"/>
+          </a:xfrm>
+          <a:prstGeom prst="rect">
+            <a:avLst/>
+          </a:prstGeom>
+        </p:spPr>
+        <p:txBody>
+          <a:bodyPr spcFirstLastPara="1" wrap="square" lIns="91425" tIns="91425" rIns="91425" bIns="91425" anchor="t" anchorCtr="0">
+            <a:noAutofit/>
+          </a:bodyPr>
+          <a:lstStyle/>
+          <a:p>
+            <a:pPr marL="0" lvl="0" indent="0" algn="l" rtl="0">
+              <a:spcBef>
+                <a:spcPts val="0"/>
+              </a:spcBef>
+              <a:spcAft>
+                <a:spcPts val="0"/>
+              </a:spcAft>
+              <a:buNone/>
+            </a:pPr>
+            <a:endParaRPr/>
+          </a:p>
+        </p:txBody>
+      </p:sp>
+      <p:sp>
+        <p:nvSpPr>
+          <p:cNvPr id="262" name="Google Shape;262;p10:notes">
+            <a:extLst>
+              <a:ext uri="{FF2B5EF4-FFF2-40B4-BE49-F238E27FC236}">
+                <a16:creationId xmlns:a16="http://schemas.microsoft.com/office/drawing/2014/main" id="{15698202-36E2-7700-F89A-43A791D1B102}"/>
+              </a:ext>
+            </a:extLst>
+          </p:cNvPr>
+          <p:cNvSpPr>
+            <a:spLocks noGrp="1" noRot="1" noChangeAspect="1"/>
+          </p:cNvSpPr>
+          <p:nvPr>
+            <p:ph type="sldImg" idx="2"/>
+          </p:nvPr>
+        </p:nvSpPr>
+        <p:spPr>
+          <a:xfrm>
+            <a:off x="381000" y="685800"/>
+            <a:ext cx="6096000" cy="3429000"/>
+          </a:xfrm>
+          <a:custGeom>
+            <a:avLst/>
+            <a:gdLst/>
+            <a:ahLst/>
+            <a:cxnLst/>
+            <a:rect l="l" t="t" r="r" b="b"/>
+            <a:pathLst>
+              <a:path w="120000" h="120000" extrusionOk="0">
+                <a:moveTo>
+                  <a:pt x="0" y="0"/>
+                </a:moveTo>
+                <a:lnTo>
+                  <a:pt x="120000" y="0"/>
+                </a:lnTo>
+                <a:lnTo>
+                  <a:pt x="120000" y="120000"/>
+                </a:lnTo>
+                <a:lnTo>
+                  <a:pt x="0" y="120000"/>
+                </a:lnTo>
+                <a:close/>
+              </a:path>
+            </a:pathLst>
+          </a:custGeom>
+        </p:spPr>
+      </p:sp>
+    </p:spTree>
+    <p:extLst>
+      <p:ext uri="{BB962C8B-B14F-4D97-AF65-F5344CB8AC3E}">
+        <p14:creationId xmlns:p14="http://schemas.microsoft.com/office/powerpoint/2010/main" val="3532042622"/>
+      </p:ext>
+    </p:extLst>
+  </p:cSld>
+  <p:clrMapOvr>
+    <a:masterClrMapping/>
+  </p:clrMapOvr>
+</p:notes>
+</file>
+
+<file path=ppt/notesSlides/notesSlide8.xml><?xml version="1.0" encoding="utf-8"?>
+<p:notes xmlns:a="http://schemas.openxmlformats.org/drawingml/2006/main" xmlns:r="http://schemas.openxmlformats.org/officeDocument/2006/relationships" xmlns:p="http://schemas.openxmlformats.org/presentationml/2006/main" showMasterSp="0" showMasterPhAnim="0">
+  <p:cSld>
+    <p:spTree>
+      <p:nvGrpSpPr>
+        <p:cNvPr id="1" name="Shape 260">
+          <a:extLst>
+            <a:ext uri="{FF2B5EF4-FFF2-40B4-BE49-F238E27FC236}">
+              <a16:creationId xmlns:a16="http://schemas.microsoft.com/office/drawing/2014/main" id="{0E976981-14AE-3DC3-9973-EF0F0CADCAEB}"/>
+            </a:ext>
+          </a:extLst>
+        </p:cNvPr>
+        <p:cNvGrpSpPr/>
+        <p:nvPr/>
+      </p:nvGrpSpPr>
+      <p:grpSpPr>
+        <a:xfrm>
+          <a:off x="0" y="0"/>
+          <a:ext cx="0" cy="0"/>
+          <a:chOff x="0" y="0"/>
+          <a:chExt cx="0" cy="0"/>
+        </a:xfrm>
+      </p:grpSpPr>
+      <p:sp>
+        <p:nvSpPr>
+          <p:cNvPr id="261" name="Google Shape;261;p10:notes">
+            <a:extLst>
+              <a:ext uri="{FF2B5EF4-FFF2-40B4-BE49-F238E27FC236}">
+                <a16:creationId xmlns:a16="http://schemas.microsoft.com/office/drawing/2014/main" id="{FA607C5C-DCD1-5349-A7DF-6FC75E5ED5A2}"/>
+              </a:ext>
+            </a:extLst>
+          </p:cNvPr>
+          <p:cNvSpPr txBox="1">
+            <a:spLocks noGrp="1"/>
+          </p:cNvSpPr>
+          <p:nvPr>
+            <p:ph type="body" idx="1"/>
+          </p:nvPr>
+        </p:nvSpPr>
+        <p:spPr>
+          <a:xfrm>
+            <a:off x="685800" y="4343400"/>
+            <a:ext cx="5486400" cy="4114800"/>
+          </a:xfrm>
+          <a:prstGeom prst="rect">
+            <a:avLst/>
+          </a:prstGeom>
+        </p:spPr>
+        <p:txBody>
+          <a:bodyPr spcFirstLastPara="1" wrap="square" lIns="91425" tIns="91425" rIns="91425" bIns="91425" anchor="t" anchorCtr="0">
+            <a:noAutofit/>
+          </a:bodyPr>
+          <a:lstStyle/>
+          <a:p>
+            <a:pPr marL="0" lvl="0" indent="0" algn="l" rtl="0">
+              <a:spcBef>
+                <a:spcPts val="0"/>
+              </a:spcBef>
+              <a:spcAft>
+                <a:spcPts val="0"/>
+              </a:spcAft>
+              <a:buNone/>
+            </a:pPr>
+            <a:endParaRPr/>
+          </a:p>
+        </p:txBody>
+      </p:sp>
+      <p:sp>
+        <p:nvSpPr>
+          <p:cNvPr id="262" name="Google Shape;262;p10:notes">
+            <a:extLst>
+              <a:ext uri="{FF2B5EF4-FFF2-40B4-BE49-F238E27FC236}">
+                <a16:creationId xmlns:a16="http://schemas.microsoft.com/office/drawing/2014/main" id="{1C481F5B-62F5-FF71-90D8-F8B7AC3FE442}"/>
+              </a:ext>
+            </a:extLst>
+          </p:cNvPr>
+          <p:cNvSpPr>
+            <a:spLocks noGrp="1" noRot="1" noChangeAspect="1"/>
+          </p:cNvSpPr>
+          <p:nvPr>
+            <p:ph type="sldImg" idx="2"/>
+          </p:nvPr>
+        </p:nvSpPr>
+        <p:spPr>
+          <a:xfrm>
+            <a:off x="381000" y="685800"/>
+            <a:ext cx="6096000" cy="3429000"/>
+          </a:xfrm>
+          <a:custGeom>
+            <a:avLst/>
+            <a:gdLst/>
+            <a:ahLst/>
+            <a:cxnLst/>
+            <a:rect l="l" t="t" r="r" b="b"/>
+            <a:pathLst>
+              <a:path w="120000" h="120000" extrusionOk="0">
+                <a:moveTo>
+                  <a:pt x="0" y="0"/>
+                </a:moveTo>
+                <a:lnTo>
+                  <a:pt x="120000" y="0"/>
+                </a:lnTo>
+                <a:lnTo>
+                  <a:pt x="120000" y="120000"/>
+                </a:lnTo>
+                <a:lnTo>
+                  <a:pt x="0" y="120000"/>
+                </a:lnTo>
+                <a:close/>
+              </a:path>
+            </a:pathLst>
+          </a:custGeom>
+        </p:spPr>
+      </p:sp>
+    </p:spTree>
+    <p:extLst>
+      <p:ext uri="{BB962C8B-B14F-4D97-AF65-F5344CB8AC3E}">
+        <p14:creationId xmlns:p14="http://schemas.microsoft.com/office/powerpoint/2010/main" val="4262194326"/>
+      </p:ext>
+    </p:extLst>
+  </p:cSld>
+  <p:clrMapOvr>
+    <a:masterClrMapping/>
+  </p:clrMapOvr>
+</p:notes>
+</file>
+
+<file path=ppt/notesSlides/notesSlide9.xml><?xml version="1.0" encoding="utf-8"?>
+<p:notes xmlns:a="http://schemas.openxmlformats.org/drawingml/2006/main" xmlns:r="http://schemas.openxmlformats.org/officeDocument/2006/relationships" xmlns:p="http://schemas.openxmlformats.org/presentationml/2006/main" showMasterSp="0" showMasterPhAnim="0">
+  <p:cSld>
+    <p:spTree>
+      <p:nvGrpSpPr>
+        <p:cNvPr id="1" name="Shape 271">
+          <a:extLst>
+            <a:ext uri="{FF2B5EF4-FFF2-40B4-BE49-F238E27FC236}">
+              <a16:creationId xmlns:a16="http://schemas.microsoft.com/office/drawing/2014/main" id="{491CAB47-D3CB-8D12-095A-517DD5602BF3}"/>
+            </a:ext>
+          </a:extLst>
+        </p:cNvPr>
+        <p:cNvGrpSpPr/>
+        <p:nvPr/>
+      </p:nvGrpSpPr>
+      <p:grpSpPr>
+        <a:xfrm>
+          <a:off x="0" y="0"/>
+          <a:ext cx="0" cy="0"/>
+          <a:chOff x="0" y="0"/>
+          <a:chExt cx="0" cy="0"/>
+        </a:xfrm>
+      </p:grpSpPr>
+      <p:sp>
+        <p:nvSpPr>
+          <p:cNvPr id="272" name="Google Shape;272;p11:notes">
+            <a:extLst>
+              <a:ext uri="{FF2B5EF4-FFF2-40B4-BE49-F238E27FC236}">
+                <a16:creationId xmlns:a16="http://schemas.microsoft.com/office/drawing/2014/main" id="{12DFE4D8-9CD7-C8F2-B8DA-9C7304EF86EB}"/>
+              </a:ext>
+            </a:extLst>
+          </p:cNvPr>
+          <p:cNvSpPr txBox="1">
+            <a:spLocks noGrp="1"/>
+          </p:cNvSpPr>
+          <p:nvPr>
+            <p:ph type="body" idx="1"/>
+          </p:nvPr>
+        </p:nvSpPr>
+        <p:spPr>
+          <a:xfrm>
+            <a:off x="685800" y="4343400"/>
+            <a:ext cx="5486400" cy="4114800"/>
+          </a:xfrm>
+          <a:prstGeom prst="rect">
+            <a:avLst/>
+          </a:prstGeom>
+        </p:spPr>
+        <p:txBody>
+          <a:bodyPr spcFirstLastPara="1" wrap="square" lIns="91425" tIns="91425" rIns="91425" bIns="91425" anchor="t" anchorCtr="0">
+            <a:noAutofit/>
+          </a:bodyPr>
+          <a:lstStyle/>
+          <a:p>
+            <a:pPr marL="0" lvl="0" indent="0" algn="l" rtl="0">
+              <a:spcBef>
+                <a:spcPts val="0"/>
+              </a:spcBef>
+              <a:spcAft>
+                <a:spcPts val="0"/>
+              </a:spcAft>
+              <a:buNone/>
+            </a:pPr>
+            <a:endParaRPr/>
+          </a:p>
+        </p:txBody>
+      </p:sp>
+      <p:sp>
+        <p:nvSpPr>
+          <p:cNvPr id="273" name="Google Shape;273;p11:notes">
+            <a:extLst>
+              <a:ext uri="{FF2B5EF4-FFF2-40B4-BE49-F238E27FC236}">
+                <a16:creationId xmlns:a16="http://schemas.microsoft.com/office/drawing/2014/main" id="{2E3771D8-16F3-1D78-85D9-6F890316ECA3}"/>
+              </a:ext>
+            </a:extLst>
+          </p:cNvPr>
+          <p:cNvSpPr>
+            <a:spLocks noGrp="1" noRot="1" noChangeAspect="1"/>
+          </p:cNvSpPr>
+          <p:nvPr>
+            <p:ph type="sldImg" idx="2"/>
+          </p:nvPr>
+        </p:nvSpPr>
+        <p:spPr>
+          <a:xfrm>
+            <a:off x="381000" y="685800"/>
+            <a:ext cx="6096000" cy="3429000"/>
+          </a:xfrm>
+          <a:custGeom>
+            <a:avLst/>
+            <a:gdLst/>
+            <a:ahLst/>
+            <a:cxnLst/>
+            <a:rect l="l" t="t" r="r" b="b"/>
+            <a:pathLst>
+              <a:path w="120000" h="120000" extrusionOk="0">
+                <a:moveTo>
+                  <a:pt x="0" y="0"/>
+                </a:moveTo>
+                <a:lnTo>
+                  <a:pt x="120000" y="0"/>
+                </a:lnTo>
+                <a:lnTo>
+                  <a:pt x="120000" y="120000"/>
+                </a:lnTo>
+                <a:lnTo>
+                  <a:pt x="0" y="120000"/>
+                </a:lnTo>
+                <a:close/>
+              </a:path>
+            </a:pathLst>
+          </a:custGeom>
+        </p:spPr>
+      </p:sp>
+    </p:spTree>
+    <p:extLst>
+      <p:ext uri="{BB962C8B-B14F-4D97-AF65-F5344CB8AC3E}">
+        <p14:creationId xmlns:p14="http://schemas.microsoft.com/office/powerpoint/2010/main" val="4261801020"/>
+      </p:ext>
+    </p:extLst>
+  </p:cSld>
+  <p:clrMapOvr>
+    <a:masterClrMapping/>
+  </p:clrMapOvr>
+</p:notes>
 </file>
 
 <file path=ppt/slideLayouts/slideLayout1.xml><?xml version="1.0" encoding="utf-8"?>
@@ -3333,6 +5096,621 @@
   <p:cSld>
     <p:spTree>
       <p:nvGrpSpPr>
+        <p:cNvPr id="1" name="Shape 83"/>
+        <p:cNvGrpSpPr/>
+        <p:nvPr/>
+      </p:nvGrpSpPr>
+      <p:grpSpPr>
+        <a:xfrm>
+          <a:off x="0" y="0"/>
+          <a:ext cx="0" cy="0"/>
+          <a:chOff x="0" y="0"/>
+          <a:chExt cx="0" cy="0"/>
+        </a:xfrm>
+      </p:grpSpPr>
+      <p:sp>
+        <p:nvSpPr>
+          <p:cNvPr id="84" name="Google Shape;84;p13"/>
+          <p:cNvSpPr/>
+          <p:nvPr/>
+        </p:nvSpPr>
+        <p:spPr>
+          <a:xfrm>
+            <a:off x="0" y="0"/>
+            <a:ext cx="12192000" cy="6858000"/>
+          </a:xfrm>
+          <a:custGeom>
+            <a:avLst/>
+            <a:gdLst/>
+            <a:ahLst/>
+            <a:cxnLst/>
+            <a:rect l="l" t="t" r="r" b="b"/>
+            <a:pathLst>
+              <a:path w="18288000" h="10287000" extrusionOk="0">
+                <a:moveTo>
+                  <a:pt x="0" y="0"/>
+                </a:moveTo>
+                <a:lnTo>
+                  <a:pt x="18288000" y="0"/>
+                </a:lnTo>
+                <a:lnTo>
+                  <a:pt x="18288000" y="10287000"/>
+                </a:lnTo>
+                <a:lnTo>
+                  <a:pt x="0" y="10287000"/>
+                </a:lnTo>
+                <a:lnTo>
+                  <a:pt x="0" y="0"/>
+                </a:lnTo>
+                <a:close/>
+              </a:path>
+            </a:pathLst>
+          </a:custGeom>
+          <a:blipFill rotWithShape="1">
+            <a:blip r:embed="rId3">
+              <a:alphaModFix/>
+            </a:blip>
+            <a:stretch>
+              <a:fillRect t="-20652" r="-1236" b="-11174"/>
+            </a:stretch>
+          </a:blipFill>
+          <a:ln>
+            <a:noFill/>
+          </a:ln>
+        </p:spPr>
+        <p:txBody>
+          <a:bodyPr/>
+          <a:lstStyle/>
+          <a:p>
+            <a:endParaRPr lang="en-CA" sz="1200"/>
+          </a:p>
+        </p:txBody>
+      </p:sp>
+      <p:cxnSp>
+        <p:nvCxnSpPr>
+          <p:cNvPr id="86" name="Google Shape;86;p13"/>
+          <p:cNvCxnSpPr/>
+          <p:nvPr/>
+        </p:nvCxnSpPr>
+        <p:spPr>
+          <a:xfrm rot="10800000">
+            <a:off x="375613" y="-30032"/>
+            <a:ext cx="0" cy="6918064"/>
+          </a:xfrm>
+          <a:prstGeom prst="straightConnector1">
+            <a:avLst/>
+          </a:prstGeom>
+          <a:noFill/>
+          <a:ln w="19050" cap="flat" cmpd="sng">
+            <a:solidFill>
+              <a:srgbClr val="000000"/>
+            </a:solidFill>
+            <a:prstDash val="solid"/>
+            <a:round/>
+            <a:headEnd type="none" w="sm" len="sm"/>
+            <a:tailEnd type="none" w="sm" len="sm"/>
+          </a:ln>
+        </p:spPr>
+      </p:cxnSp>
+      <p:cxnSp>
+        <p:nvCxnSpPr>
+          <p:cNvPr id="87" name="Google Shape;87;p13"/>
+          <p:cNvCxnSpPr/>
+          <p:nvPr/>
+        </p:nvCxnSpPr>
+        <p:spPr>
+          <a:xfrm rot="10800000">
+            <a:off x="11816387" y="369264"/>
+            <a:ext cx="0" cy="6498481"/>
+          </a:xfrm>
+          <a:prstGeom prst="straightConnector1">
+            <a:avLst/>
+          </a:prstGeom>
+          <a:noFill/>
+          <a:ln w="19050" cap="flat" cmpd="sng">
+            <a:solidFill>
+              <a:srgbClr val="000000"/>
+            </a:solidFill>
+            <a:prstDash val="solid"/>
+            <a:round/>
+            <a:headEnd type="none" w="sm" len="sm"/>
+            <a:tailEnd type="none" w="sm" len="sm"/>
+          </a:ln>
+        </p:spPr>
+      </p:cxnSp>
+      <p:cxnSp>
+        <p:nvCxnSpPr>
+          <p:cNvPr id="88" name="Google Shape;88;p13"/>
+          <p:cNvCxnSpPr/>
+          <p:nvPr/>
+        </p:nvCxnSpPr>
+        <p:spPr>
+          <a:xfrm rot="10800000">
+            <a:off x="377794" y="375613"/>
+            <a:ext cx="11431574" cy="0"/>
+          </a:xfrm>
+          <a:prstGeom prst="straightConnector1">
+            <a:avLst/>
+          </a:prstGeom>
+          <a:noFill/>
+          <a:ln w="19050" cap="flat" cmpd="sng">
+            <a:solidFill>
+              <a:srgbClr val="000000"/>
+            </a:solidFill>
+            <a:prstDash val="solid"/>
+            <a:round/>
+            <a:headEnd type="none" w="sm" len="sm"/>
+            <a:tailEnd type="none" w="sm" len="sm"/>
+          </a:ln>
+        </p:spPr>
+      </p:cxnSp>
+      <p:grpSp>
+        <p:nvGrpSpPr>
+          <p:cNvPr id="89" name="Google Shape;89;p13"/>
+          <p:cNvGrpSpPr/>
+          <p:nvPr/>
+        </p:nvGrpSpPr>
+        <p:grpSpPr>
+          <a:xfrm>
+            <a:off x="865353" y="5986222"/>
+            <a:ext cx="6009219" cy="2177948"/>
+            <a:chOff x="0" y="-47625"/>
+            <a:chExt cx="2374012" cy="860425"/>
+          </a:xfrm>
+        </p:grpSpPr>
+        <p:sp>
+          <p:nvSpPr>
+            <p:cNvPr id="90" name="Google Shape;90;p13"/>
+            <p:cNvSpPr/>
+            <p:nvPr/>
+          </p:nvSpPr>
+          <p:spPr>
+            <a:xfrm>
+              <a:off x="0" y="0"/>
+              <a:ext cx="2374012" cy="145882"/>
+            </a:xfrm>
+            <a:custGeom>
+              <a:avLst/>
+              <a:gdLst/>
+              <a:ahLst/>
+              <a:cxnLst/>
+              <a:rect l="l" t="t" r="r" b="b"/>
+              <a:pathLst>
+                <a:path w="2374012" h="145882" extrusionOk="0">
+                  <a:moveTo>
+                    <a:pt x="0" y="0"/>
+                  </a:moveTo>
+                  <a:lnTo>
+                    <a:pt x="2374012" y="0"/>
+                  </a:lnTo>
+                  <a:lnTo>
+                    <a:pt x="2374012" y="145882"/>
+                  </a:lnTo>
+                  <a:lnTo>
+                    <a:pt x="0" y="145882"/>
+                  </a:lnTo>
+                  <a:close/>
+                </a:path>
+              </a:pathLst>
+            </a:custGeom>
+            <a:solidFill>
+              <a:srgbClr val="000000">
+                <a:alpha val="0"/>
+              </a:srgbClr>
+            </a:solidFill>
+            <a:ln w="19050" cap="flat" cmpd="sng">
+              <a:solidFill>
+                <a:srgbClr val="000000"/>
+              </a:solidFill>
+              <a:prstDash val="solid"/>
+              <a:round/>
+              <a:headEnd type="none" w="sm" len="sm"/>
+              <a:tailEnd type="none" w="sm" len="sm"/>
+            </a:ln>
+          </p:spPr>
+          <p:txBody>
+            <a:bodyPr/>
+            <a:lstStyle/>
+            <a:p>
+              <a:endParaRPr lang="en-CA" sz="1200"/>
+            </a:p>
+          </p:txBody>
+        </p:sp>
+        <p:sp>
+          <p:nvSpPr>
+            <p:cNvPr id="91" name="Google Shape;91;p13"/>
+            <p:cNvSpPr txBox="1"/>
+            <p:nvPr/>
+          </p:nvSpPr>
+          <p:spPr>
+            <a:xfrm>
+              <a:off x="0" y="-47625"/>
+              <a:ext cx="812800" cy="860425"/>
+            </a:xfrm>
+            <a:prstGeom prst="rect">
+              <a:avLst/>
+            </a:prstGeom>
+            <a:noFill/>
+            <a:ln>
+              <a:noFill/>
+            </a:ln>
+          </p:spPr>
+          <p:txBody>
+            <a:bodyPr spcFirstLastPara="1" wrap="square" lIns="33867" tIns="33867" rIns="33867" bIns="33867" anchor="ctr" anchorCtr="0">
+              <a:noAutofit/>
+            </a:bodyPr>
+            <a:lstStyle/>
+            <a:p>
+              <a:pPr algn="ctr">
+                <a:lnSpc>
+                  <a:spcPct val="186611"/>
+                </a:lnSpc>
+              </a:pPr>
+              <a:endParaRPr sz="1200">
+                <a:solidFill>
+                  <a:schemeClr val="dk1"/>
+                </a:solidFill>
+                <a:latin typeface="Calibri"/>
+                <a:ea typeface="Calibri"/>
+                <a:cs typeface="Calibri"/>
+                <a:sym typeface="Calibri"/>
+              </a:endParaRPr>
+            </a:p>
+          </p:txBody>
+        </p:sp>
+      </p:grpSp>
+      <p:cxnSp>
+        <p:nvCxnSpPr>
+          <p:cNvPr id="92" name="Google Shape;92;p13"/>
+          <p:cNvCxnSpPr/>
+          <p:nvPr/>
+        </p:nvCxnSpPr>
+        <p:spPr>
+          <a:xfrm rot="10800000">
+            <a:off x="7351611" y="-72764"/>
+            <a:ext cx="0" cy="6918064"/>
+          </a:xfrm>
+          <a:prstGeom prst="straightConnector1">
+            <a:avLst/>
+          </a:prstGeom>
+          <a:noFill/>
+          <a:ln w="19050" cap="flat" cmpd="sng">
+            <a:solidFill>
+              <a:srgbClr val="000000"/>
+            </a:solidFill>
+            <a:prstDash val="solid"/>
+            <a:round/>
+            <a:headEnd type="none" w="sm" len="sm"/>
+            <a:tailEnd type="none" w="sm" len="sm"/>
+          </a:ln>
+        </p:spPr>
+      </p:cxnSp>
+      <p:cxnSp>
+        <p:nvCxnSpPr>
+          <p:cNvPr id="93" name="Google Shape;93;p13"/>
+          <p:cNvCxnSpPr/>
+          <p:nvPr/>
+        </p:nvCxnSpPr>
+        <p:spPr>
+          <a:xfrm rot="10800000">
+            <a:off x="2694577" y="-56021"/>
+            <a:ext cx="0" cy="437985"/>
+          </a:xfrm>
+          <a:prstGeom prst="straightConnector1">
+            <a:avLst/>
+          </a:prstGeom>
+          <a:noFill/>
+          <a:ln w="19050" cap="flat" cmpd="sng">
+            <a:solidFill>
+              <a:srgbClr val="000000"/>
+            </a:solidFill>
+            <a:prstDash val="solid"/>
+            <a:round/>
+            <a:headEnd type="none" w="sm" len="sm"/>
+            <a:tailEnd type="none" w="sm" len="sm"/>
+          </a:ln>
+        </p:spPr>
+      </p:cxnSp>
+      <p:cxnSp>
+        <p:nvCxnSpPr>
+          <p:cNvPr id="94" name="Google Shape;94;p13"/>
+          <p:cNvCxnSpPr/>
+          <p:nvPr/>
+        </p:nvCxnSpPr>
+        <p:spPr>
+          <a:xfrm rot="10800000">
+            <a:off x="5019947" y="-56021"/>
+            <a:ext cx="0" cy="437985"/>
+          </a:xfrm>
+          <a:prstGeom prst="straightConnector1">
+            <a:avLst/>
+          </a:prstGeom>
+          <a:noFill/>
+          <a:ln w="19050" cap="flat" cmpd="sng">
+            <a:solidFill>
+              <a:srgbClr val="000000"/>
+            </a:solidFill>
+            <a:prstDash val="solid"/>
+            <a:round/>
+            <a:headEnd type="none" w="sm" len="sm"/>
+            <a:tailEnd type="none" w="sm" len="sm"/>
+          </a:ln>
+        </p:spPr>
+      </p:cxnSp>
+      <p:grpSp>
+        <p:nvGrpSpPr>
+          <p:cNvPr id="95" name="Google Shape;95;p13"/>
+          <p:cNvGrpSpPr/>
+          <p:nvPr/>
+        </p:nvGrpSpPr>
+        <p:grpSpPr>
+          <a:xfrm>
+            <a:off x="1304235" y="925994"/>
+            <a:ext cx="5226363" cy="4985980"/>
+            <a:chOff x="-457224" y="-6320771"/>
+            <a:chExt cx="10452727" cy="9971960"/>
+          </a:xfrm>
+        </p:grpSpPr>
+        <p:sp>
+          <p:nvSpPr>
+            <p:cNvPr id="96" name="Google Shape;96;p13"/>
+            <p:cNvSpPr txBox="1"/>
+            <p:nvPr/>
+          </p:nvSpPr>
+          <p:spPr>
+            <a:xfrm>
+              <a:off x="-457224" y="-6320771"/>
+              <a:ext cx="10452727" cy="5983176"/>
+            </a:xfrm>
+            <a:prstGeom prst="rect">
+              <a:avLst/>
+            </a:prstGeom>
+            <a:noFill/>
+            <a:ln>
+              <a:noFill/>
+            </a:ln>
+          </p:spPr>
+          <p:txBody>
+            <a:bodyPr spcFirstLastPara="1" wrap="square" lIns="0" tIns="0" rIns="0" bIns="0" anchor="t" anchorCtr="0">
+              <a:spAutoFit/>
+            </a:bodyPr>
+            <a:lstStyle/>
+            <a:p>
+              <a:pPr algn="ctr">
+                <a:lnSpc>
+                  <a:spcPct val="81000"/>
+                </a:lnSpc>
+              </a:pPr>
+              <a:r>
+                <a:rPr lang="en-US" sz="8000" b="1" dirty="0">
+                  <a:solidFill>
+                    <a:srgbClr val="000000"/>
+                  </a:solidFill>
+                  <a:latin typeface="DM Sans"/>
+                  <a:ea typeface="DM Sans"/>
+                  <a:cs typeface="DM Sans"/>
+                  <a:sym typeface="DM Sans"/>
+                </a:rPr>
+                <a:t>STROKE FACTOR</a:t>
+              </a:r>
+            </a:p>
+            <a:p>
+              <a:pPr algn="ctr">
+                <a:lnSpc>
+                  <a:spcPct val="81000"/>
+                </a:lnSpc>
+              </a:pPr>
+              <a:r>
+                <a:rPr lang="en-US" sz="8000" b="1" dirty="0">
+                  <a:solidFill>
+                    <a:srgbClr val="000000"/>
+                  </a:solidFill>
+                  <a:latin typeface="DM Sans"/>
+                  <a:sym typeface="DM Sans"/>
+                </a:rPr>
+                <a:t>ANALYSIS:</a:t>
+              </a:r>
+              <a:endParaRPr sz="1200" dirty="0"/>
+            </a:p>
+          </p:txBody>
+        </p:sp>
+        <p:sp>
+          <p:nvSpPr>
+            <p:cNvPr id="97" name="Google Shape;97;p13"/>
+            <p:cNvSpPr txBox="1"/>
+            <p:nvPr/>
+          </p:nvSpPr>
+          <p:spPr>
+            <a:xfrm>
+              <a:off x="189816" y="-337595"/>
+              <a:ext cx="9158643" cy="3988784"/>
+            </a:xfrm>
+            <a:prstGeom prst="rect">
+              <a:avLst/>
+            </a:prstGeom>
+            <a:noFill/>
+            <a:ln>
+              <a:noFill/>
+            </a:ln>
+          </p:spPr>
+          <p:txBody>
+            <a:bodyPr spcFirstLastPara="1" wrap="square" lIns="0" tIns="0" rIns="0" bIns="0" anchor="t" anchorCtr="0">
+              <a:spAutoFit/>
+            </a:bodyPr>
+            <a:lstStyle/>
+            <a:p>
+              <a:pPr algn="ctr">
+                <a:lnSpc>
+                  <a:spcPct val="81000"/>
+                </a:lnSpc>
+              </a:pPr>
+              <a:r>
+                <a:rPr lang="en-US" sz="4000" b="1" dirty="0">
+                  <a:solidFill>
+                    <a:srgbClr val="000000"/>
+                  </a:solidFill>
+                  <a:latin typeface="DM Sans"/>
+                  <a:sym typeface="DM Sans"/>
+                </a:rPr>
+                <a:t>How to address the long-term prevention of stroke risk factors</a:t>
+              </a:r>
+              <a:endParaRPr sz="4000" dirty="0"/>
+            </a:p>
+          </p:txBody>
+        </p:sp>
+      </p:grpSp>
+      <p:sp>
+        <p:nvSpPr>
+          <p:cNvPr id="98" name="Google Shape;98;p13"/>
+          <p:cNvSpPr txBox="1"/>
+          <p:nvPr/>
+        </p:nvSpPr>
+        <p:spPr>
+          <a:xfrm>
+            <a:off x="999302" y="6153610"/>
+            <a:ext cx="2870660" cy="301621"/>
+          </a:xfrm>
+          <a:prstGeom prst="rect">
+            <a:avLst/>
+          </a:prstGeom>
+          <a:noFill/>
+          <a:ln>
+            <a:noFill/>
+          </a:ln>
+        </p:spPr>
+        <p:txBody>
+          <a:bodyPr spcFirstLastPara="1" wrap="square" lIns="0" tIns="0" rIns="0" bIns="0" anchor="t" anchorCtr="0">
+            <a:spAutoFit/>
+          </a:bodyPr>
+          <a:lstStyle/>
+          <a:p>
+            <a:pPr>
+              <a:lnSpc>
+                <a:spcPct val="140000"/>
+              </a:lnSpc>
+            </a:pPr>
+            <a:r>
+              <a:rPr lang="en-US" sz="1400" dirty="0">
+                <a:solidFill>
+                  <a:srgbClr val="000000"/>
+                </a:solidFill>
+                <a:latin typeface="DM Sans"/>
+                <a:ea typeface="DM Sans"/>
+                <a:cs typeface="DM Sans"/>
+                <a:sym typeface="DM Sans"/>
+              </a:rPr>
+              <a:t>Cohort 8 – DS3</a:t>
+            </a:r>
+            <a:endParaRPr sz="1200" dirty="0"/>
+          </a:p>
+        </p:txBody>
+      </p:sp>
+      <p:sp>
+        <p:nvSpPr>
+          <p:cNvPr id="99" name="Google Shape;99;p13"/>
+          <p:cNvSpPr txBox="1"/>
+          <p:nvPr/>
+        </p:nvSpPr>
+        <p:spPr>
+          <a:xfrm>
+            <a:off x="3869963" y="6153610"/>
+            <a:ext cx="2870660" cy="301621"/>
+          </a:xfrm>
+          <a:prstGeom prst="rect">
+            <a:avLst/>
+          </a:prstGeom>
+          <a:noFill/>
+          <a:ln>
+            <a:noFill/>
+          </a:ln>
+        </p:spPr>
+        <p:txBody>
+          <a:bodyPr spcFirstLastPara="1" wrap="square" lIns="0" tIns="0" rIns="0" bIns="0" anchor="t" anchorCtr="0">
+            <a:spAutoFit/>
+          </a:bodyPr>
+          <a:lstStyle/>
+          <a:p>
+            <a:pPr algn="r">
+              <a:lnSpc>
+                <a:spcPct val="140000"/>
+              </a:lnSpc>
+            </a:pPr>
+            <a:r>
+              <a:rPr lang="en-US" sz="1400" dirty="0">
+                <a:solidFill>
+                  <a:srgbClr val="000000"/>
+                </a:solidFill>
+                <a:latin typeface="DM Sans"/>
+                <a:ea typeface="DM Sans"/>
+                <a:cs typeface="DM Sans"/>
+                <a:sym typeface="DM Sans"/>
+              </a:rPr>
+              <a:t>07/17/2023</a:t>
+            </a:r>
+            <a:endParaRPr sz="1200" dirty="0"/>
+          </a:p>
+        </p:txBody>
+      </p:sp>
+      <p:pic>
+        <p:nvPicPr>
+          <p:cNvPr id="1026" name="Picture 2" descr="Image 1: Prevalence of Smoking">
+            <a:extLst>
+              <a:ext uri="{FF2B5EF4-FFF2-40B4-BE49-F238E27FC236}">
+                <a16:creationId xmlns:a16="http://schemas.microsoft.com/office/drawing/2014/main" id="{51C2035A-3C2D-08EF-E29B-CE2A9B12D14F}"/>
+              </a:ext>
+            </a:extLst>
+          </p:cNvPr>
+          <p:cNvPicPr>
+            <a:picLocks noChangeAspect="1" noChangeArrowheads="1"/>
+          </p:cNvPicPr>
+          <p:nvPr/>
+        </p:nvPicPr>
+        <p:blipFill>
+          <a:blip r:embed="rId4">
+            <a:extLst>
+              <a:ext uri="{28A0092B-C50C-407E-A947-70E740481C1C}">
+                <a14:useLocalDpi xmlns:a14="http://schemas.microsoft.com/office/drawing/2010/main" val="0"/>
+              </a:ext>
+            </a:extLst>
+          </a:blip>
+          <a:srcRect/>
+          <a:stretch>
+            <a:fillRect/>
+          </a:stretch>
+        </p:blipFill>
+        <p:spPr bwMode="auto">
+          <a:xfrm>
+            <a:off x="7375163" y="1168929"/>
+            <a:ext cx="4405305" cy="4743045"/>
+          </a:xfrm>
+          <a:prstGeom prst="rect">
+            <a:avLst/>
+          </a:prstGeom>
+          <a:noFill/>
+          <a:extLst>
+            <a:ext uri="{909E8E84-426E-40DD-AFC4-6F175D3DCCD1}">
+              <a14:hiddenFill xmlns:a14="http://schemas.microsoft.com/office/drawing/2010/main">
+                <a:solidFill>
+                  <a:srgbClr val="FFFFFF"/>
+                </a:solidFill>
+              </a14:hiddenFill>
+            </a:ext>
+          </a:extLst>
+        </p:spPr>
+      </p:pic>
+    </p:spTree>
+  </p:cSld>
+  <p:clrMapOvr>
+    <a:masterClrMapping/>
+  </p:clrMapOvr>
+</p:sld>
+</file>
+
+<file path=ppt/slides/slide10.xml><?xml version="1.0" encoding="utf-8"?>
+<p:sld xmlns:a="http://schemas.openxmlformats.org/drawingml/2006/main" xmlns:r="http://schemas.openxmlformats.org/officeDocument/2006/relationships" xmlns:p="http://schemas.openxmlformats.org/presentationml/2006/main">
+  <p:cSld>
+    <p:spTree>
+      <p:nvGrpSpPr>
         <p:cNvPr id="1" name=""/>
         <p:cNvGrpSpPr/>
         <p:nvPr/>
@@ -3350,7 +5728,7 @@
           <p:cNvPr id="2" name="Title 1">
             <a:extLst>
               <a:ext uri="{FF2B5EF4-FFF2-40B4-BE49-F238E27FC236}">
-                <a16:creationId xmlns:a16="http://schemas.microsoft.com/office/drawing/2014/main" id="{FC18549F-5209-B5B1-1B40-275AB9E15391}"/>
+                <a16:creationId xmlns:a16="http://schemas.microsoft.com/office/drawing/2014/main" id="{01C10B9E-90C0-9670-DAA4-76A271EAE1C2}"/>
               </a:ext>
             </a:extLst>
           </p:cNvPr>
@@ -3368,250 +5746,137 @@
           <a:p>
             <a:r>
               <a:rPr lang="en-US" dirty="0"/>
-              <a:t>Cohort 8 – DS3</a:t>
-            </a:r>
-          </a:p>
-        </p:txBody>
-      </p:sp>
-      <p:sp>
-        <p:nvSpPr>
-          <p:cNvPr id="3" name="Title 1">
-            <a:extLst>
-              <a:ext uri="{FF2B5EF4-FFF2-40B4-BE49-F238E27FC236}">
-                <a16:creationId xmlns:a16="http://schemas.microsoft.com/office/drawing/2014/main" id="{69D4BBEE-D718-A844-DA71-F5642F915D3E}"/>
-              </a:ext>
-            </a:extLst>
-          </p:cNvPr>
-          <p:cNvSpPr txBox="1">
-            <a:spLocks/>
-          </p:cNvSpPr>
+              <a:t>Classification Threshold- Recall</a:t>
+            </a:r>
+          </a:p>
+        </p:txBody>
+      </p:sp>
+      <p:sp>
+        <p:nvSpPr>
+          <p:cNvPr id="7" name="TextBox 6">
+            <a:extLst>
+              <a:ext uri="{FF2B5EF4-FFF2-40B4-BE49-F238E27FC236}">
+                <a16:creationId xmlns:a16="http://schemas.microsoft.com/office/drawing/2014/main" id="{6B483A5E-4DDA-A3E0-EDFB-D0FF1AA4EAB5}"/>
+              </a:ext>
+            </a:extLst>
+          </p:cNvPr>
+          <p:cNvSpPr txBox="1"/>
           <p:nvPr/>
         </p:nvSpPr>
         <p:spPr>
           <a:xfrm>
-            <a:off x="731874" y="2427841"/>
-            <a:ext cx="10515600" cy="1325563"/>
+            <a:off x="2190306" y="5635256"/>
+            <a:ext cx="5439525" cy="1200329"/>
           </a:xfrm>
           <a:prstGeom prst="rect">
             <a:avLst/>
           </a:prstGeom>
-        </p:spPr>
-        <p:txBody>
-          <a:bodyPr vert="horz" lIns="91440" tIns="45720" rIns="91440" bIns="45720" rtlCol="0" anchor="ctr">
-            <a:normAutofit/>
+          <a:noFill/>
+        </p:spPr>
+        <p:txBody>
+          <a:bodyPr wrap="square" rtlCol="0">
+            <a:spAutoFit/>
           </a:bodyPr>
-          <a:lstStyle>
-            <a:lvl1pPr algn="l" defTabSz="914400" rtl="0" eaLnBrk="1" latinLnBrk="0" hangingPunct="1">
-              <a:lnSpc>
-                <a:spcPct val="90000"/>
-              </a:lnSpc>
-              <a:spcBef>
-                <a:spcPct val="0"/>
-              </a:spcBef>
-              <a:buNone/>
-              <a:defRPr sz="4400" kern="1200">
-                <a:solidFill>
-                  <a:schemeClr val="tx1"/>
-                </a:solidFill>
-                <a:latin typeface="+mj-lt"/>
-                <a:ea typeface="+mj-ea"/>
-                <a:cs typeface="+mj-cs"/>
-              </a:defRPr>
-            </a:lvl1pPr>
-          </a:lstStyle>
+          <a:lstStyle/>
           <a:p>
             <a:r>
               <a:rPr lang="en-US" dirty="0"/>
-              <a:t>Stroke Factors Analysis</a:t>
-            </a:r>
-          </a:p>
-        </p:txBody>
-      </p:sp>
+              <a:t>Recall: 0.8</a:t>
+            </a:r>
+          </a:p>
+          <a:p>
+            <a:r>
+              <a:rPr lang="en-US" dirty="0"/>
+              <a:t>Random Forest: Threshold: 0.24, PR-AUC: 0.22</a:t>
+            </a:r>
+          </a:p>
+          <a:p>
+            <a:r>
+              <a:rPr lang="en-US" dirty="0"/>
+              <a:t>XG Boost:              Threshold: 0.51, PR-AUC: 0.26</a:t>
+            </a:r>
+          </a:p>
+          <a:p>
+            <a:endParaRPr lang="en-US" dirty="0"/>
+          </a:p>
+        </p:txBody>
+      </p:sp>
+      <p:pic>
+        <p:nvPicPr>
+          <p:cNvPr id="5" name="Picture 4">
+            <a:extLst>
+              <a:ext uri="{FF2B5EF4-FFF2-40B4-BE49-F238E27FC236}">
+                <a16:creationId xmlns:a16="http://schemas.microsoft.com/office/drawing/2014/main" id="{C75444B8-5D86-E68B-3EBA-EF948AAAA4EC}"/>
+              </a:ext>
+            </a:extLst>
+          </p:cNvPr>
+          <p:cNvPicPr>
+            <a:picLocks noChangeAspect="1"/>
+          </p:cNvPicPr>
+          <p:nvPr/>
+        </p:nvPicPr>
+        <p:blipFill>
+          <a:blip r:embed="rId2">
+            <a:extLst>
+              <a:ext uri="{28A0092B-C50C-407E-A947-70E740481C1C}">
+                <a14:useLocalDpi xmlns:a14="http://schemas.microsoft.com/office/drawing/2010/main" val="0"/>
+              </a:ext>
+            </a:extLst>
+          </a:blip>
+          <a:stretch>
+            <a:fillRect/>
+          </a:stretch>
+        </p:blipFill>
+        <p:spPr>
+          <a:xfrm>
+            <a:off x="262106" y="1690688"/>
+            <a:ext cx="5486411" cy="3593599"/>
+          </a:xfrm>
+          <a:prstGeom prst="rect">
+            <a:avLst/>
+          </a:prstGeom>
+        </p:spPr>
+      </p:pic>
+      <p:pic>
+        <p:nvPicPr>
+          <p:cNvPr id="9" name="Picture 8">
+            <a:extLst>
+              <a:ext uri="{FF2B5EF4-FFF2-40B4-BE49-F238E27FC236}">
+                <a16:creationId xmlns:a16="http://schemas.microsoft.com/office/drawing/2014/main" id="{2675BDA9-A3D6-7D87-07BD-09F6863468E0}"/>
+              </a:ext>
+            </a:extLst>
+          </p:cNvPr>
+          <p:cNvPicPr>
+            <a:picLocks noChangeAspect="1"/>
+          </p:cNvPicPr>
+          <p:nvPr/>
+        </p:nvPicPr>
+        <p:blipFill>
+          <a:blip r:embed="rId3">
+            <a:extLst>
+              <a:ext uri="{28A0092B-C50C-407E-A947-70E740481C1C}">
+                <a14:useLocalDpi xmlns:a14="http://schemas.microsoft.com/office/drawing/2010/main" val="0"/>
+              </a:ext>
+            </a:extLst>
+          </a:blip>
+          <a:stretch>
+            <a:fillRect/>
+          </a:stretch>
+        </p:blipFill>
+        <p:spPr>
+          <a:xfrm>
+            <a:off x="5748517" y="1632200"/>
+            <a:ext cx="5605283" cy="3593599"/>
+          </a:xfrm>
+          <a:prstGeom prst="rect">
+            <a:avLst/>
+          </a:prstGeom>
+        </p:spPr>
+      </p:pic>
     </p:spTree>
     <p:extLst>
       <p:ext uri="{BB962C8B-B14F-4D97-AF65-F5344CB8AC3E}">
-        <p14:creationId xmlns:p14="http://schemas.microsoft.com/office/powerpoint/2010/main" val="2047952146"/>
-      </p:ext>
-    </p:extLst>
-  </p:cSld>
-  <p:clrMapOvr>
-    <a:masterClrMapping/>
-  </p:clrMapOvr>
-</p:sld>
-</file>
-
-<file path=ppt/slides/slide10.xml><?xml version="1.0" encoding="utf-8"?>
-<p:sld xmlns:a="http://schemas.openxmlformats.org/drawingml/2006/main" xmlns:r="http://schemas.openxmlformats.org/officeDocument/2006/relationships" xmlns:p="http://schemas.openxmlformats.org/presentationml/2006/main">
-  <p:cSld>
-    <p:spTree>
-      <p:nvGrpSpPr>
-        <p:cNvPr id="1" name="">
-          <a:extLst>
-            <a:ext uri="{FF2B5EF4-FFF2-40B4-BE49-F238E27FC236}">
-              <a16:creationId xmlns:a16="http://schemas.microsoft.com/office/drawing/2014/main" id="{353FC363-1A5C-3D83-2FC1-8E685CED44C7}"/>
-            </a:ext>
-          </a:extLst>
-        </p:cNvPr>
-        <p:cNvGrpSpPr/>
-        <p:nvPr/>
-      </p:nvGrpSpPr>
-      <p:grpSpPr>
-        <a:xfrm>
-          <a:off x="0" y="0"/>
-          <a:ext cx="0" cy="0"/>
-          <a:chOff x="0" y="0"/>
-          <a:chExt cx="0" cy="0"/>
-        </a:xfrm>
-      </p:grpSpPr>
-      <p:sp>
-        <p:nvSpPr>
-          <p:cNvPr id="2" name="Title 1">
-            <a:extLst>
-              <a:ext uri="{FF2B5EF4-FFF2-40B4-BE49-F238E27FC236}">
-                <a16:creationId xmlns:a16="http://schemas.microsoft.com/office/drawing/2014/main" id="{5B278819-1EC0-167A-15D1-1F2F71952CE5}"/>
-              </a:ext>
-            </a:extLst>
-          </p:cNvPr>
-          <p:cNvSpPr>
-            <a:spLocks noGrp="1"/>
-          </p:cNvSpPr>
-          <p:nvPr>
-            <p:ph type="title"/>
-          </p:nvPr>
-        </p:nvSpPr>
-        <p:spPr/>
-        <p:txBody>
-          <a:bodyPr/>
-          <a:lstStyle/>
-          <a:p>
-            <a:r>
-              <a:rPr lang="en-US" dirty="0"/>
-              <a:t>Classification Modeling</a:t>
-            </a:r>
-          </a:p>
-        </p:txBody>
-      </p:sp>
-      <p:sp>
-        <p:nvSpPr>
-          <p:cNvPr id="3" name="Title 1">
-            <a:extLst>
-              <a:ext uri="{FF2B5EF4-FFF2-40B4-BE49-F238E27FC236}">
-                <a16:creationId xmlns:a16="http://schemas.microsoft.com/office/drawing/2014/main" id="{22C56F1C-6A54-CD7E-1C18-A142EDF340DE}"/>
-              </a:ext>
-            </a:extLst>
-          </p:cNvPr>
-          <p:cNvSpPr txBox="1">
-            <a:spLocks/>
-          </p:cNvSpPr>
-          <p:nvPr/>
-        </p:nvSpPr>
-        <p:spPr>
-          <a:xfrm>
-            <a:off x="908538" y="1690689"/>
-            <a:ext cx="10515600" cy="4267660"/>
-          </a:xfrm>
-          <a:prstGeom prst="rect">
-            <a:avLst/>
-          </a:prstGeom>
-        </p:spPr>
-        <p:txBody>
-          <a:bodyPr vert="horz" lIns="91440" tIns="45720" rIns="91440" bIns="45720" rtlCol="0" anchor="ctr">
-            <a:normAutofit fontScale="77500" lnSpcReduction="20000"/>
-          </a:bodyPr>
-          <a:lstStyle>
-            <a:lvl1pPr algn="l" defTabSz="914400" rtl="0" eaLnBrk="1" latinLnBrk="0" hangingPunct="1">
-              <a:lnSpc>
-                <a:spcPct val="90000"/>
-              </a:lnSpc>
-              <a:spcBef>
-                <a:spcPct val="0"/>
-              </a:spcBef>
-              <a:buNone/>
-              <a:defRPr sz="4400" kern="1200">
-                <a:solidFill>
-                  <a:schemeClr val="tx1"/>
-                </a:solidFill>
-                <a:latin typeface="+mj-lt"/>
-                <a:ea typeface="+mj-ea"/>
-                <a:cs typeface="+mj-cs"/>
-              </a:defRPr>
-            </a:lvl1pPr>
-          </a:lstStyle>
-          <a:p>
-            <a:pPr marL="571500" indent="-571500">
-              <a:buFont typeface="Arial" panose="020B0604020202020204" pitchFamily="34" charset="0"/>
-              <a:buChar char="•"/>
-            </a:pPr>
-            <a:r>
-              <a:rPr lang="en-US" dirty="0"/>
-              <a:t>The dataset is highly imbalanced (5% positive class)</a:t>
-            </a:r>
-          </a:p>
-          <a:p>
-            <a:pPr marL="571500" indent="-571500">
-              <a:buFont typeface="Arial" panose="020B0604020202020204" pitchFamily="34" charset="0"/>
-              <a:buChar char="•"/>
-            </a:pPr>
-            <a:endParaRPr lang="en-US" dirty="0"/>
-          </a:p>
-          <a:p>
-            <a:pPr marL="571500" indent="-571500">
-              <a:buFont typeface="Arial" panose="020B0604020202020204" pitchFamily="34" charset="0"/>
-              <a:buChar char="•"/>
-            </a:pPr>
-            <a:r>
-              <a:rPr lang="en-US" dirty="0"/>
-              <a:t>Tree-based models best for imbalanced data. </a:t>
-            </a:r>
-          </a:p>
-          <a:p>
-            <a:pPr marL="571500" indent="-571500">
-              <a:buFont typeface="Arial" panose="020B0604020202020204" pitchFamily="34" charset="0"/>
-              <a:buChar char="•"/>
-            </a:pPr>
-            <a:endParaRPr lang="en-US" dirty="0"/>
-          </a:p>
-          <a:p>
-            <a:pPr marL="571500" indent="-571500">
-              <a:buFont typeface="Arial" panose="020B0604020202020204" pitchFamily="34" charset="0"/>
-              <a:buChar char="•"/>
-            </a:pPr>
-            <a:r>
-              <a:rPr lang="en-US" dirty="0"/>
-              <a:t>Logistic Regression performed well when using balanced class weights. </a:t>
-            </a:r>
-          </a:p>
-          <a:p>
-            <a:pPr marL="571500" indent="-571500">
-              <a:buFont typeface="Arial" panose="020B0604020202020204" pitchFamily="34" charset="0"/>
-              <a:buChar char="•"/>
-            </a:pPr>
-            <a:endParaRPr lang="en-US" dirty="0"/>
-          </a:p>
-          <a:p>
-            <a:pPr marL="571500" indent="-571500">
-              <a:buFont typeface="Arial" panose="020B0604020202020204" pitchFamily="34" charset="0"/>
-              <a:buChar char="•"/>
-            </a:pPr>
-            <a:r>
-              <a:rPr lang="en-US" dirty="0"/>
-              <a:t>Therefore, three models were selected for the analysis: </a:t>
-            </a:r>
-            <a:r>
-              <a:rPr lang="en-US" dirty="0" err="1"/>
-              <a:t>XGBoost</a:t>
-            </a:r>
-            <a:r>
-              <a:rPr lang="en-US" dirty="0"/>
-              <a:t>, Random Forest, and Logistic Regression.</a:t>
-            </a:r>
-          </a:p>
-        </p:txBody>
-      </p:sp>
-    </p:spTree>
-    <p:extLst>
-      <p:ext uri="{BB962C8B-B14F-4D97-AF65-F5344CB8AC3E}">
-        <p14:creationId xmlns:p14="http://schemas.microsoft.com/office/powerpoint/2010/main" val="3100244814"/>
+        <p14:creationId xmlns:p14="http://schemas.microsoft.com/office/powerpoint/2010/main" val="4002189813"/>
       </p:ext>
     </p:extLst>
   </p:cSld>
@@ -3643,7 +5908,7 @@
           <p:cNvPr id="2" name="Title 1">
             <a:extLst>
               <a:ext uri="{FF2B5EF4-FFF2-40B4-BE49-F238E27FC236}">
-                <a16:creationId xmlns:a16="http://schemas.microsoft.com/office/drawing/2014/main" id="{01C10B9E-90C0-9670-DAA4-76A271EAE1C2}"/>
+                <a16:creationId xmlns:a16="http://schemas.microsoft.com/office/drawing/2014/main" id="{133460DC-725D-68D9-A0E1-CA81CA68E035}"/>
               </a:ext>
             </a:extLst>
           </p:cNvPr>
@@ -3661,67 +5926,17 @@
           <a:p>
             <a:r>
               <a:rPr lang="en-US" dirty="0"/>
-              <a:t>Classification Threshold- Recall</a:t>
-            </a:r>
-          </a:p>
-        </p:txBody>
-      </p:sp>
-      <p:sp>
-        <p:nvSpPr>
-          <p:cNvPr id="7" name="TextBox 6">
-            <a:extLst>
-              <a:ext uri="{FF2B5EF4-FFF2-40B4-BE49-F238E27FC236}">
-                <a16:creationId xmlns:a16="http://schemas.microsoft.com/office/drawing/2014/main" id="{6B483A5E-4DDA-A3E0-EDFB-D0FF1AA4EAB5}"/>
-              </a:ext>
-            </a:extLst>
-          </p:cNvPr>
-          <p:cNvSpPr txBox="1"/>
-          <p:nvPr/>
-        </p:nvSpPr>
-        <p:spPr>
-          <a:xfrm>
-            <a:off x="2190306" y="5635256"/>
-            <a:ext cx="5439525" cy="1200329"/>
-          </a:xfrm>
-          <a:prstGeom prst="rect">
-            <a:avLst/>
-          </a:prstGeom>
-          <a:noFill/>
-        </p:spPr>
-        <p:txBody>
-          <a:bodyPr wrap="square" rtlCol="0">
-            <a:spAutoFit/>
-          </a:bodyPr>
-          <a:lstStyle/>
-          <a:p>
-            <a:r>
-              <a:rPr lang="en-US" dirty="0"/>
-              <a:t>Recall: 0.8</a:t>
-            </a:r>
-          </a:p>
-          <a:p>
-            <a:r>
-              <a:rPr lang="en-US" dirty="0"/>
-              <a:t>Random Forest: Threshold: 0.24, PR-AUC: 0.22</a:t>
-            </a:r>
-          </a:p>
-          <a:p>
-            <a:r>
-              <a:rPr lang="en-US" dirty="0"/>
-              <a:t>XG Boost:              Threshold: 0.51, PR-AUC: 0.26</a:t>
-            </a:r>
-          </a:p>
-          <a:p>
-            <a:endParaRPr lang="en-US" dirty="0"/>
+              <a:t>Confusion Matrix</a:t>
+            </a:r>
           </a:p>
         </p:txBody>
       </p:sp>
       <p:pic>
         <p:nvPicPr>
-          <p:cNvPr id="5" name="Picture 4">
-            <a:extLst>
-              <a:ext uri="{FF2B5EF4-FFF2-40B4-BE49-F238E27FC236}">
-                <a16:creationId xmlns:a16="http://schemas.microsoft.com/office/drawing/2014/main" id="{C75444B8-5D86-E68B-3EBA-EF948AAAA4EC}"/>
+          <p:cNvPr id="4" name="Picture 3">
+            <a:extLst>
+              <a:ext uri="{FF2B5EF4-FFF2-40B4-BE49-F238E27FC236}">
+                <a16:creationId xmlns:a16="http://schemas.microsoft.com/office/drawing/2014/main" id="{4C074982-224C-F718-2655-1ADD433920F9}"/>
               </a:ext>
             </a:extLst>
           </p:cNvPr>
@@ -3744,8 +5959,8 @@
         </p:blipFill>
         <p:spPr>
           <a:xfrm>
-            <a:off x="262106" y="1690688"/>
-            <a:ext cx="5486411" cy="3593599"/>
+            <a:off x="662652" y="1444429"/>
+            <a:ext cx="4636017" cy="4160528"/>
           </a:xfrm>
           <a:prstGeom prst="rect">
             <a:avLst/>
@@ -3754,10 +5969,10 @@
       </p:pic>
       <p:pic>
         <p:nvPicPr>
-          <p:cNvPr id="9" name="Picture 8">
-            <a:extLst>
-              <a:ext uri="{FF2B5EF4-FFF2-40B4-BE49-F238E27FC236}">
-                <a16:creationId xmlns:a16="http://schemas.microsoft.com/office/drawing/2014/main" id="{2675BDA9-A3D6-7D87-07BD-09F6863468E0}"/>
+          <p:cNvPr id="6" name="Picture 5">
+            <a:extLst>
+              <a:ext uri="{FF2B5EF4-FFF2-40B4-BE49-F238E27FC236}">
+                <a16:creationId xmlns:a16="http://schemas.microsoft.com/office/drawing/2014/main" id="{61EDA505-3CDA-18D8-27DB-EA9CCD764CE6}"/>
               </a:ext>
             </a:extLst>
           </p:cNvPr>
@@ -3780,8 +5995,8 @@
         </p:blipFill>
         <p:spPr>
           <a:xfrm>
-            <a:off x="5748517" y="1632200"/>
-            <a:ext cx="5605283" cy="3593599"/>
+            <a:off x="6096000" y="1444429"/>
+            <a:ext cx="4636017" cy="4160528"/>
           </a:xfrm>
           <a:prstGeom prst="rect">
             <a:avLst/>
@@ -3791,7 +6006,7 @@
     </p:spTree>
     <p:extLst>
       <p:ext uri="{BB962C8B-B14F-4D97-AF65-F5344CB8AC3E}">
-        <p14:creationId xmlns:p14="http://schemas.microsoft.com/office/powerpoint/2010/main" val="4002189813"/>
+        <p14:creationId xmlns:p14="http://schemas.microsoft.com/office/powerpoint/2010/main" val="3523675801"/>
       </p:ext>
     </p:extLst>
   </p:cSld>
@@ -3823,7 +6038,7 @@
           <p:cNvPr id="2" name="Title 1">
             <a:extLst>
               <a:ext uri="{FF2B5EF4-FFF2-40B4-BE49-F238E27FC236}">
-                <a16:creationId xmlns:a16="http://schemas.microsoft.com/office/drawing/2014/main" id="{133460DC-725D-68D9-A0E1-CA81CA68E035}"/>
+                <a16:creationId xmlns:a16="http://schemas.microsoft.com/office/drawing/2014/main" id="{29C9DFEB-0CA1-CB6C-4AFD-3BC259ED3B9E}"/>
               </a:ext>
             </a:extLst>
           </p:cNvPr>
@@ -3841,7 +6056,7 @@
           <a:p>
             <a:r>
               <a:rPr lang="en-US" dirty="0"/>
-              <a:t>Confusion Matrix</a:t>
+              <a:t>Precision Recall-Area Under Curve</a:t>
             </a:r>
           </a:p>
         </p:txBody>
@@ -3851,7 +6066,7 @@
           <p:cNvPr id="4" name="Picture 3">
             <a:extLst>
               <a:ext uri="{FF2B5EF4-FFF2-40B4-BE49-F238E27FC236}">
-                <a16:creationId xmlns:a16="http://schemas.microsoft.com/office/drawing/2014/main" id="{4C074982-224C-F718-2655-1ADD433920F9}"/>
+                <a16:creationId xmlns:a16="http://schemas.microsoft.com/office/drawing/2014/main" id="{534FECA0-84D6-8895-9DCD-7AAC0FE96103}"/>
               </a:ext>
             </a:extLst>
           </p:cNvPr>
@@ -3874,8 +6089,8 @@
         </p:blipFill>
         <p:spPr>
           <a:xfrm>
-            <a:off x="662652" y="1444429"/>
-            <a:ext cx="4636017" cy="4160528"/>
+            <a:off x="838200" y="2039853"/>
+            <a:ext cx="4096520" cy="4160528"/>
           </a:xfrm>
           <a:prstGeom prst="rect">
             <a:avLst/>
@@ -3887,7 +6102,7 @@
           <p:cNvPr id="6" name="Picture 5">
             <a:extLst>
               <a:ext uri="{FF2B5EF4-FFF2-40B4-BE49-F238E27FC236}">
-                <a16:creationId xmlns:a16="http://schemas.microsoft.com/office/drawing/2014/main" id="{61EDA505-3CDA-18D8-27DB-EA9CCD764CE6}"/>
+                <a16:creationId xmlns:a16="http://schemas.microsoft.com/office/drawing/2014/main" id="{EFE99F0D-6888-2FD5-992A-E287A9783734}"/>
               </a:ext>
             </a:extLst>
           </p:cNvPr>
@@ -3910,8 +6125,8 @@
         </p:blipFill>
         <p:spPr>
           <a:xfrm>
-            <a:off x="6096000" y="1444429"/>
-            <a:ext cx="4636017" cy="4160528"/>
+            <a:off x="5398075" y="2039853"/>
+            <a:ext cx="4096520" cy="4160528"/>
           </a:xfrm>
           <a:prstGeom prst="rect">
             <a:avLst/>
@@ -3921,7 +6136,7 @@
     </p:spTree>
     <p:extLst>
       <p:ext uri="{BB962C8B-B14F-4D97-AF65-F5344CB8AC3E}">
-        <p14:creationId xmlns:p14="http://schemas.microsoft.com/office/powerpoint/2010/main" val="3523675801"/>
+        <p14:creationId xmlns:p14="http://schemas.microsoft.com/office/powerpoint/2010/main" val="4289447782"/>
       </p:ext>
     </p:extLst>
   </p:cSld>
@@ -3936,7 +6151,13 @@
   <p:cSld>
     <p:spTree>
       <p:nvGrpSpPr>
-        <p:cNvPr id="1" name=""/>
+        <p:cNvPr id="1" name="Shape 274">
+          <a:extLst>
+            <a:ext uri="{FF2B5EF4-FFF2-40B4-BE49-F238E27FC236}">
+              <a16:creationId xmlns:a16="http://schemas.microsoft.com/office/drawing/2014/main" id="{1C30281B-3760-2161-5794-B3B88C1381EC}"/>
+            </a:ext>
+          </a:extLst>
+        </p:cNvPr>
         <p:cNvGrpSpPr/>
         <p:nvPr/>
       </p:nvGrpSpPr>
@@ -3950,114 +6171,264 @@
       </p:grpSpPr>
       <p:sp>
         <p:nvSpPr>
-          <p:cNvPr id="2" name="Title 1">
-            <a:extLst>
-              <a:ext uri="{FF2B5EF4-FFF2-40B4-BE49-F238E27FC236}">
-                <a16:creationId xmlns:a16="http://schemas.microsoft.com/office/drawing/2014/main" id="{29C9DFEB-0CA1-CB6C-4AFD-3BC259ED3B9E}"/>
-              </a:ext>
-            </a:extLst>
-          </p:cNvPr>
-          <p:cNvSpPr>
-            <a:spLocks noGrp="1"/>
-          </p:cNvSpPr>
-          <p:nvPr>
-            <p:ph type="title"/>
-          </p:nvPr>
-        </p:nvSpPr>
-        <p:spPr/>
+          <p:cNvPr id="275" name="Google Shape;275;p23">
+            <a:extLst>
+              <a:ext uri="{FF2B5EF4-FFF2-40B4-BE49-F238E27FC236}">
+                <a16:creationId xmlns:a16="http://schemas.microsoft.com/office/drawing/2014/main" id="{D86E0DFE-FDF5-158B-817A-893144D30C31}"/>
+              </a:ext>
+            </a:extLst>
+          </p:cNvPr>
+          <p:cNvSpPr/>
+          <p:nvPr/>
+        </p:nvSpPr>
+        <p:spPr>
+          <a:xfrm>
+            <a:off x="12700" y="0"/>
+            <a:ext cx="12192000" cy="6858000"/>
+          </a:xfrm>
+          <a:custGeom>
+            <a:avLst/>
+            <a:gdLst/>
+            <a:ahLst/>
+            <a:cxnLst/>
+            <a:rect l="l" t="t" r="r" b="b"/>
+            <a:pathLst>
+              <a:path w="18288000" h="10287000" extrusionOk="0">
+                <a:moveTo>
+                  <a:pt x="0" y="0"/>
+                </a:moveTo>
+                <a:lnTo>
+                  <a:pt x="18288000" y="0"/>
+                </a:lnTo>
+                <a:lnTo>
+                  <a:pt x="18288000" y="10287000"/>
+                </a:lnTo>
+                <a:lnTo>
+                  <a:pt x="0" y="10287000"/>
+                </a:lnTo>
+                <a:lnTo>
+                  <a:pt x="0" y="0"/>
+                </a:lnTo>
+                <a:close/>
+              </a:path>
+            </a:pathLst>
+          </a:custGeom>
+          <a:blipFill rotWithShape="1">
+            <a:blip r:embed="rId3">
+              <a:alphaModFix/>
+            </a:blip>
+            <a:stretch>
+              <a:fillRect t="-20652" r="-1236" b="-11174"/>
+            </a:stretch>
+          </a:blipFill>
+          <a:ln>
+            <a:noFill/>
+          </a:ln>
+        </p:spPr>
         <p:txBody>
           <a:bodyPr/>
           <a:lstStyle/>
           <a:p>
-            <a:r>
-              <a:rPr lang="en-US" dirty="0"/>
-              <a:t>Precision Recall-Area Under Curve</a:t>
-            </a:r>
-          </a:p>
-        </p:txBody>
-      </p:sp>
-      <p:pic>
-        <p:nvPicPr>
-          <p:cNvPr id="4" name="Picture 3">
-            <a:extLst>
-              <a:ext uri="{FF2B5EF4-FFF2-40B4-BE49-F238E27FC236}">
-                <a16:creationId xmlns:a16="http://schemas.microsoft.com/office/drawing/2014/main" id="{534FECA0-84D6-8895-9DCD-7AAC0FE96103}"/>
-              </a:ext>
-            </a:extLst>
-          </p:cNvPr>
-          <p:cNvPicPr>
-            <a:picLocks noChangeAspect="1"/>
-          </p:cNvPicPr>
+            <a:endParaRPr lang="en-CA" sz="1200"/>
+          </a:p>
+        </p:txBody>
+      </p:sp>
+      <p:cxnSp>
+        <p:nvCxnSpPr>
+          <p:cNvPr id="277" name="Google Shape;277;p23">
+            <a:extLst>
+              <a:ext uri="{FF2B5EF4-FFF2-40B4-BE49-F238E27FC236}">
+                <a16:creationId xmlns:a16="http://schemas.microsoft.com/office/drawing/2014/main" id="{AB0BA0EA-3DF6-19F9-C9DA-6139AA37C04B}"/>
+              </a:ext>
+            </a:extLst>
+          </p:cNvPr>
+          <p:cNvCxnSpPr/>
           <p:nvPr/>
-        </p:nvPicPr>
-        <p:blipFill>
-          <a:blip r:embed="rId2">
-            <a:extLst>
-              <a:ext uri="{28A0092B-C50C-407E-A947-70E740481C1C}">
-                <a14:useLocalDpi xmlns:a14="http://schemas.microsoft.com/office/drawing/2010/main" val="0"/>
-              </a:ext>
-            </a:extLst>
-          </a:blip>
-          <a:stretch>
-            <a:fillRect/>
-          </a:stretch>
-        </p:blipFill>
-        <p:spPr>
-          <a:xfrm>
-            <a:off x="838200" y="2039853"/>
-            <a:ext cx="4096520" cy="4160528"/>
+        </p:nvCxnSpPr>
+        <p:spPr>
+          <a:xfrm rot="10800000">
+            <a:off x="6096000" y="0"/>
+            <a:ext cx="12700" cy="6859420"/>
+          </a:xfrm>
+          <a:prstGeom prst="straightConnector1">
+            <a:avLst/>
+          </a:prstGeom>
+          <a:noFill/>
+          <a:ln w="19050" cap="flat" cmpd="sng">
+            <a:solidFill>
+              <a:srgbClr val="000000"/>
+            </a:solidFill>
+            <a:prstDash val="solid"/>
+            <a:round/>
+            <a:headEnd type="none" w="sm" len="sm"/>
+            <a:tailEnd type="none" w="sm" len="sm"/>
+          </a:ln>
+        </p:spPr>
+      </p:cxnSp>
+      <p:sp>
+        <p:nvSpPr>
+          <p:cNvPr id="278" name="Google Shape;278;p23">
+            <a:extLst>
+              <a:ext uri="{FF2B5EF4-FFF2-40B4-BE49-F238E27FC236}">
+                <a16:creationId xmlns:a16="http://schemas.microsoft.com/office/drawing/2014/main" id="{BDC5E0E6-5A49-9DBF-73D2-BF8F66CA890E}"/>
+              </a:ext>
+            </a:extLst>
+          </p:cNvPr>
+          <p:cNvSpPr txBox="1"/>
+          <p:nvPr/>
+        </p:nvSpPr>
+        <p:spPr>
+          <a:xfrm>
+            <a:off x="240527" y="1459230"/>
+            <a:ext cx="5627646" cy="3939540"/>
           </a:xfrm>
           <a:prstGeom prst="rect">
             <a:avLst/>
           </a:prstGeom>
-        </p:spPr>
-      </p:pic>
-      <p:pic>
-        <p:nvPicPr>
-          <p:cNvPr id="6" name="Picture 5">
-            <a:extLst>
-              <a:ext uri="{FF2B5EF4-FFF2-40B4-BE49-F238E27FC236}">
-                <a16:creationId xmlns:a16="http://schemas.microsoft.com/office/drawing/2014/main" id="{EFE99F0D-6888-2FD5-992A-E287A9783734}"/>
-              </a:ext>
-            </a:extLst>
-          </p:cNvPr>
-          <p:cNvPicPr>
-            <a:picLocks noChangeAspect="1"/>
-          </p:cNvPicPr>
+          <a:noFill/>
+          <a:ln>
+            <a:noFill/>
+          </a:ln>
+        </p:spPr>
+        <p:txBody>
+          <a:bodyPr spcFirstLastPara="1" wrap="square" lIns="0" tIns="0" rIns="0" bIns="0" anchor="t" anchorCtr="0">
+            <a:spAutoFit/>
+          </a:bodyPr>
+          <a:lstStyle/>
+          <a:p>
+            <a:pPr algn="ctr"/>
+            <a:r>
+              <a:rPr lang="en-US" sz="6400" b="1" dirty="0">
+                <a:solidFill>
+                  <a:srgbClr val="000000"/>
+                </a:solidFill>
+                <a:latin typeface="DM Sans"/>
+                <a:sym typeface="DM Sans"/>
+              </a:rPr>
+              <a:t>Key Data</a:t>
+            </a:r>
+          </a:p>
+          <a:p>
+            <a:pPr algn="ctr"/>
+            <a:r>
+              <a:rPr lang="en-US" sz="6400" b="1" dirty="0">
+                <a:solidFill>
+                  <a:srgbClr val="000000"/>
+                </a:solidFill>
+                <a:latin typeface="DM Sans"/>
+                <a:sym typeface="DM Sans"/>
+              </a:rPr>
+              <a:t>Findings</a:t>
+            </a:r>
+          </a:p>
+          <a:p>
+            <a:pPr algn="ctr"/>
+            <a:r>
+              <a:rPr lang="en-US" sz="6400" b="1" dirty="0">
+                <a:solidFill>
+                  <a:srgbClr val="000000"/>
+                </a:solidFill>
+                <a:latin typeface="DM Sans"/>
+                <a:sym typeface="DM Sans"/>
+              </a:rPr>
+              <a:t>For Stakeholders</a:t>
+            </a:r>
+            <a:endParaRPr sz="1200" dirty="0"/>
+          </a:p>
+        </p:txBody>
+      </p:sp>
+      <p:sp>
+        <p:nvSpPr>
+          <p:cNvPr id="279" name="Google Shape;279;p23">
+            <a:extLst>
+              <a:ext uri="{FF2B5EF4-FFF2-40B4-BE49-F238E27FC236}">
+                <a16:creationId xmlns:a16="http://schemas.microsoft.com/office/drawing/2014/main" id="{55D299CF-9DA6-DBEF-7627-FDF69A2D3F0C}"/>
+              </a:ext>
+            </a:extLst>
+          </p:cNvPr>
+          <p:cNvSpPr txBox="1"/>
           <p:nvPr/>
-        </p:nvPicPr>
-        <p:blipFill>
-          <a:blip r:embed="rId3">
-            <a:extLst>
-              <a:ext uri="{28A0092B-C50C-407E-A947-70E740481C1C}">
-                <a14:useLocalDpi xmlns:a14="http://schemas.microsoft.com/office/drawing/2010/main" val="0"/>
-              </a:ext>
-            </a:extLst>
-          </a:blip>
-          <a:stretch>
-            <a:fillRect/>
-          </a:stretch>
-        </p:blipFill>
-        <p:spPr>
-          <a:xfrm>
-            <a:off x="5398075" y="2039853"/>
-            <a:ext cx="4096520" cy="4160528"/>
+        </p:nvSpPr>
+        <p:spPr>
+          <a:xfrm>
+            <a:off x="6794275" y="1502197"/>
+            <a:ext cx="4712149" cy="3323987"/>
           </a:xfrm>
           <a:prstGeom prst="rect">
             <a:avLst/>
           </a:prstGeom>
-        </p:spPr>
-      </p:pic>
+          <a:noFill/>
+          <a:ln>
+            <a:noFill/>
+          </a:ln>
+        </p:spPr>
+        <p:txBody>
+          <a:bodyPr spcFirstLastPara="1" wrap="square" lIns="0" tIns="0" rIns="0" bIns="0" anchor="t" anchorCtr="0">
+            <a:spAutoFit/>
+          </a:bodyPr>
+          <a:lstStyle/>
+          <a:p>
+            <a:pPr marL="571500" indent="-571500">
+              <a:buFont typeface="Arial" panose="020B0604020202020204" pitchFamily="34" charset="0"/>
+              <a:buChar char="•"/>
+            </a:pPr>
+            <a:r>
+              <a:rPr lang="en-US" sz="2400" dirty="0"/>
+              <a:t>Blood Glucose, Old Age, High BMI</a:t>
+            </a:r>
+          </a:p>
+          <a:p>
+            <a:pPr marL="571500" indent="-571500">
+              <a:buFont typeface="Arial" panose="020B0604020202020204" pitchFamily="34" charset="0"/>
+              <a:buChar char="•"/>
+            </a:pPr>
+            <a:r>
+              <a:rPr lang="en-US" sz="2400" dirty="0"/>
+              <a:t>Different models weight age higher</a:t>
+            </a:r>
+          </a:p>
+          <a:p>
+            <a:pPr marL="571500" indent="-571500">
+              <a:buFont typeface="Arial" panose="020B0604020202020204" pitchFamily="34" charset="0"/>
+              <a:buChar char="•"/>
+            </a:pPr>
+            <a:r>
+              <a:rPr lang="en-US" sz="2400" dirty="0"/>
+              <a:t>Does age make BMI and Glucose harder to reduce?</a:t>
+            </a:r>
+          </a:p>
+          <a:p>
+            <a:pPr marL="571500" indent="-571500">
+              <a:buFont typeface="Arial" panose="020B0604020202020204" pitchFamily="34" charset="0"/>
+              <a:buChar char="•"/>
+            </a:pPr>
+            <a:r>
+              <a:rPr lang="en-US" sz="2400" dirty="0"/>
+              <a:t>What does this mean for our solution?</a:t>
+            </a:r>
+          </a:p>
+          <a:p>
+            <a:pPr marL="571500" indent="-571500">
+              <a:buFont typeface="Arial" panose="020B0604020202020204" pitchFamily="34" charset="0"/>
+              <a:buChar char="•"/>
+            </a:pPr>
+            <a:endParaRPr lang="en-US" sz="2400" dirty="0"/>
+          </a:p>
+        </p:txBody>
+      </p:sp>
     </p:spTree>
     <p:extLst>
       <p:ext uri="{BB962C8B-B14F-4D97-AF65-F5344CB8AC3E}">
-        <p14:creationId xmlns:p14="http://schemas.microsoft.com/office/powerpoint/2010/main" val="4289447782"/>
+        <p14:creationId xmlns:p14="http://schemas.microsoft.com/office/powerpoint/2010/main" val="2208245426"/>
       </p:ext>
     </p:extLst>
   </p:cSld>
   <p:clrMapOvr>
     <a:masterClrMapping/>
   </p:clrMapOvr>
+  <p:transition>
+    <p:push/>
+  </p:transition>
 </p:sld>
 </file>
 
@@ -4836,7 +7207,7 @@
   <p:cSld>
     <p:spTree>
       <p:nvGrpSpPr>
-        <p:cNvPr id="1" name=""/>
+        <p:cNvPr id="1" name="Shape 274"/>
         <p:cNvGrpSpPr/>
         <p:nvPr/>
       </p:nvGrpSpPr>
@@ -4850,85 +7221,161 @@
       </p:grpSpPr>
       <p:sp>
         <p:nvSpPr>
-          <p:cNvPr id="2" name="Title 1">
-            <a:extLst>
-              <a:ext uri="{FF2B5EF4-FFF2-40B4-BE49-F238E27FC236}">
-                <a16:creationId xmlns:a16="http://schemas.microsoft.com/office/drawing/2014/main" id="{D96CE8AB-CDD1-E1AE-429E-7D1B1EC2869C}"/>
-              </a:ext>
-            </a:extLst>
-          </p:cNvPr>
-          <p:cNvSpPr>
-            <a:spLocks noGrp="1"/>
-          </p:cNvSpPr>
-          <p:nvPr>
-            <p:ph type="title"/>
-          </p:nvPr>
-        </p:nvSpPr>
-        <p:spPr/>
+          <p:cNvPr id="275" name="Google Shape;275;p23"/>
+          <p:cNvSpPr/>
+          <p:nvPr/>
+        </p:nvSpPr>
+        <p:spPr>
+          <a:xfrm>
+            <a:off x="12700" y="0"/>
+            <a:ext cx="12192000" cy="6858000"/>
+          </a:xfrm>
+          <a:custGeom>
+            <a:avLst/>
+            <a:gdLst/>
+            <a:ahLst/>
+            <a:cxnLst/>
+            <a:rect l="l" t="t" r="r" b="b"/>
+            <a:pathLst>
+              <a:path w="18288000" h="10287000" extrusionOk="0">
+                <a:moveTo>
+                  <a:pt x="0" y="0"/>
+                </a:moveTo>
+                <a:lnTo>
+                  <a:pt x="18288000" y="0"/>
+                </a:lnTo>
+                <a:lnTo>
+                  <a:pt x="18288000" y="10287000"/>
+                </a:lnTo>
+                <a:lnTo>
+                  <a:pt x="0" y="10287000"/>
+                </a:lnTo>
+                <a:lnTo>
+                  <a:pt x="0" y="0"/>
+                </a:lnTo>
+                <a:close/>
+              </a:path>
+            </a:pathLst>
+          </a:custGeom>
+          <a:blipFill rotWithShape="1">
+            <a:blip r:embed="rId3">
+              <a:alphaModFix/>
+            </a:blip>
+            <a:stretch>
+              <a:fillRect t="-20652" r="-1236" b="-11174"/>
+            </a:stretch>
+          </a:blipFill>
+          <a:ln>
+            <a:noFill/>
+          </a:ln>
+        </p:spPr>
         <p:txBody>
           <a:bodyPr/>
           <a:lstStyle/>
           <a:p>
-            <a:r>
-              <a:rPr lang="en-US" dirty="0"/>
-              <a:t>Team Members listed by Alphabetical Order</a:t>
-            </a:r>
-          </a:p>
-        </p:txBody>
-      </p:sp>
-      <p:sp>
-        <p:nvSpPr>
-          <p:cNvPr id="4" name="Title 1">
-            <a:extLst>
-              <a:ext uri="{FF2B5EF4-FFF2-40B4-BE49-F238E27FC236}">
-                <a16:creationId xmlns:a16="http://schemas.microsoft.com/office/drawing/2014/main" id="{97C135FB-E2F4-801A-66DE-F2A714516FA3}"/>
-              </a:ext>
-            </a:extLst>
-          </p:cNvPr>
-          <p:cNvSpPr txBox="1">
-            <a:spLocks/>
-          </p:cNvSpPr>
+            <a:endParaRPr lang="en-CA" sz="1200"/>
+          </a:p>
+        </p:txBody>
+      </p:sp>
+      <p:cxnSp>
+        <p:nvCxnSpPr>
+          <p:cNvPr id="277" name="Google Shape;277;p23"/>
+          <p:cNvCxnSpPr/>
           <p:nvPr/>
-        </p:nvSpPr>
-        <p:spPr>
-          <a:xfrm>
-            <a:off x="769374" y="1690689"/>
-            <a:ext cx="10515600" cy="3933364"/>
+        </p:nvCxnSpPr>
+        <p:spPr>
+          <a:xfrm rot="10800000">
+            <a:off x="6096000" y="0"/>
+            <a:ext cx="12700" cy="6859420"/>
+          </a:xfrm>
+          <a:prstGeom prst="straightConnector1">
+            <a:avLst/>
+          </a:prstGeom>
+          <a:noFill/>
+          <a:ln w="19050" cap="flat" cmpd="sng">
+            <a:solidFill>
+              <a:srgbClr val="000000"/>
+            </a:solidFill>
+            <a:prstDash val="solid"/>
+            <a:round/>
+            <a:headEnd type="none" w="sm" len="sm"/>
+            <a:tailEnd type="none" w="sm" len="sm"/>
+          </a:ln>
+        </p:spPr>
+      </p:cxnSp>
+      <p:sp>
+        <p:nvSpPr>
+          <p:cNvPr id="278" name="Google Shape;278;p23"/>
+          <p:cNvSpPr txBox="1"/>
+          <p:nvPr/>
+        </p:nvSpPr>
+        <p:spPr>
+          <a:xfrm>
+            <a:off x="616400" y="1994640"/>
+            <a:ext cx="4863200" cy="1969770"/>
           </a:xfrm>
           <a:prstGeom prst="rect">
             <a:avLst/>
           </a:prstGeom>
-        </p:spPr>
-        <p:txBody>
-          <a:bodyPr vert="horz" lIns="91440" tIns="45720" rIns="91440" bIns="45720" rtlCol="0" anchor="ctr">
-            <a:normAutofit/>
+          <a:noFill/>
+          <a:ln>
+            <a:noFill/>
+          </a:ln>
+        </p:spPr>
+        <p:txBody>
+          <a:bodyPr spcFirstLastPara="1" wrap="square" lIns="0" tIns="0" rIns="0" bIns="0" anchor="t" anchorCtr="0">
+            <a:spAutoFit/>
           </a:bodyPr>
-          <a:lstStyle>
-            <a:lvl1pPr algn="l" defTabSz="914400" rtl="0" eaLnBrk="1" latinLnBrk="0" hangingPunct="1">
-              <a:lnSpc>
-                <a:spcPct val="90000"/>
-              </a:lnSpc>
-              <a:spcBef>
-                <a:spcPct val="0"/>
-              </a:spcBef>
-              <a:buNone/>
-              <a:defRPr sz="4400" kern="1200">
+          <a:lstStyle/>
+          <a:p>
+            <a:pPr algn="ctr"/>
+            <a:r>
+              <a:rPr lang="en-US" sz="6400" b="1" dirty="0">
                 <a:solidFill>
-                  <a:schemeClr val="tx1"/>
+                  <a:srgbClr val="000000"/>
                 </a:solidFill>
-                <a:latin typeface="+mj-lt"/>
-                <a:ea typeface="+mj-ea"/>
-                <a:cs typeface="+mj-cs"/>
-              </a:defRPr>
-            </a:lvl1pPr>
-          </a:lstStyle>
+                <a:latin typeface="DM Sans"/>
+                <a:ea typeface="DM Sans"/>
+                <a:cs typeface="DM Sans"/>
+                <a:sym typeface="DM Sans"/>
+              </a:rPr>
+              <a:t>Team Members</a:t>
+            </a:r>
+            <a:endParaRPr sz="1200" dirty="0"/>
+          </a:p>
+        </p:txBody>
+      </p:sp>
+      <p:sp>
+        <p:nvSpPr>
+          <p:cNvPr id="279" name="Google Shape;279;p23"/>
+          <p:cNvSpPr txBox="1"/>
+          <p:nvPr/>
+        </p:nvSpPr>
+        <p:spPr>
+          <a:xfrm>
+            <a:off x="6794275" y="1502197"/>
+            <a:ext cx="4712149" cy="2954655"/>
+          </a:xfrm>
+          <a:prstGeom prst="rect">
+            <a:avLst/>
+          </a:prstGeom>
+          <a:noFill/>
+          <a:ln>
+            <a:noFill/>
+          </a:ln>
+        </p:spPr>
+        <p:txBody>
+          <a:bodyPr spcFirstLastPara="1" wrap="square" lIns="0" tIns="0" rIns="0" bIns="0" anchor="t" anchorCtr="0">
+            <a:spAutoFit/>
+          </a:bodyPr>
+          <a:lstStyle/>
           <a:p>
             <a:pPr marL="571500" indent="-571500">
               <a:buFont typeface="Arial" panose="020B0604020202020204" pitchFamily="34" charset="0"/>
               <a:buChar char="•"/>
             </a:pPr>
             <a:r>
-              <a:rPr lang="en-US" sz="3600" dirty="0"/>
+              <a:rPr lang="en-US" sz="3200" dirty="0"/>
               <a:t>Adnan Takash</a:t>
             </a:r>
           </a:p>
@@ -4938,7 +7385,7 @@
               <a:buChar char="•"/>
             </a:pPr>
             <a:r>
-              <a:rPr lang="en-US" sz="3600" dirty="0"/>
+              <a:rPr lang="en-US" sz="3200" dirty="0"/>
               <a:t>Aravind Vijayaragavan</a:t>
             </a:r>
           </a:p>
@@ -4948,14 +7395,14 @@
               <a:buChar char="•"/>
             </a:pPr>
             <a:r>
-              <a:rPr lang="en-US" sz="3600" dirty="0"/>
+              <a:rPr lang="en-US" sz="3200" dirty="0"/>
               <a:t>Azadeh </a:t>
             </a:r>
             <a:r>
-              <a:rPr lang="en-US" sz="3600" dirty="0" err="1"/>
+              <a:rPr lang="en-US" sz="3200" dirty="0" err="1"/>
               <a:t>Selahvarzi</a:t>
             </a:r>
-            <a:endParaRPr lang="en-US" sz="3600" dirty="0"/>
+            <a:endParaRPr lang="en-US" sz="3200" dirty="0"/>
           </a:p>
           <a:p>
             <a:pPr marL="571500" indent="-571500">
@@ -4963,7 +7410,7 @@
               <a:buChar char="•"/>
             </a:pPr>
             <a:r>
-              <a:rPr lang="en-US" sz="3600" dirty="0"/>
+              <a:rPr lang="en-US" sz="3200" dirty="0"/>
               <a:t>Karen Huang</a:t>
             </a:r>
           </a:p>
@@ -4973,7 +7420,7 @@
               <a:buChar char="•"/>
             </a:pPr>
             <a:r>
-              <a:rPr lang="en-US" sz="3600" dirty="0"/>
+              <a:rPr lang="en-US" sz="3200" dirty="0"/>
               <a:t>Naveen Kumar Nair</a:t>
             </a:r>
           </a:p>
@@ -4983,25 +7430,20 @@
               <a:buChar char="•"/>
             </a:pPr>
             <a:r>
-              <a:rPr lang="en-US" sz="3600" dirty="0"/>
+              <a:rPr lang="en-US" sz="3200" dirty="0"/>
               <a:t>Yuli Zhang</a:t>
             </a:r>
           </a:p>
-          <a:p>
-            <a:endParaRPr lang="en-US" dirty="0"/>
-          </a:p>
         </p:txBody>
       </p:sp>
     </p:spTree>
-    <p:extLst>
-      <p:ext uri="{BB962C8B-B14F-4D97-AF65-F5344CB8AC3E}">
-        <p14:creationId xmlns:p14="http://schemas.microsoft.com/office/powerpoint/2010/main" val="2341215295"/>
-      </p:ext>
-    </p:extLst>
   </p:cSld>
   <p:clrMapOvr>
     <a:masterClrMapping/>
   </p:clrMapOvr>
+  <p:transition>
+    <p:push/>
+  </p:transition>
 </p:sld>
 </file>
 
@@ -5010,7 +7452,13 @@
   <p:cSld>
     <p:spTree>
       <p:nvGrpSpPr>
-        <p:cNvPr id="1" name=""/>
+        <p:cNvPr id="1" name="Shape 274">
+          <a:extLst>
+            <a:ext uri="{FF2B5EF4-FFF2-40B4-BE49-F238E27FC236}">
+              <a16:creationId xmlns:a16="http://schemas.microsoft.com/office/drawing/2014/main" id="{BE34003F-B0E4-9D99-7E7E-4FCB8AECCB15}"/>
+            </a:ext>
+          </a:extLst>
+        </p:cNvPr>
         <p:cNvGrpSpPr/>
         <p:nvPr/>
       </p:nvGrpSpPr>
@@ -5024,72 +7472,257 @@
       </p:grpSpPr>
       <p:sp>
         <p:nvSpPr>
-          <p:cNvPr id="2" name="Title 1">
-            <a:extLst>
-              <a:ext uri="{FF2B5EF4-FFF2-40B4-BE49-F238E27FC236}">
-                <a16:creationId xmlns:a16="http://schemas.microsoft.com/office/drawing/2014/main" id="{C3476C82-C89C-4F07-8B34-E57E83C03114}"/>
-              </a:ext>
-            </a:extLst>
-          </p:cNvPr>
-          <p:cNvSpPr>
-            <a:spLocks noGrp="1"/>
-          </p:cNvSpPr>
-          <p:nvPr>
-            <p:ph type="title"/>
-          </p:nvPr>
-        </p:nvSpPr>
-        <p:spPr>
-          <a:xfrm>
-            <a:off x="570271" y="1731809"/>
-            <a:ext cx="10783529" cy="3233481"/>
-          </a:xfrm>
-        </p:spPr>
-        <p:txBody>
-          <a:bodyPr>
-            <a:normAutofit/>
+          <p:cNvPr id="275" name="Google Shape;275;p23">
+            <a:extLst>
+              <a:ext uri="{FF2B5EF4-FFF2-40B4-BE49-F238E27FC236}">
+                <a16:creationId xmlns:a16="http://schemas.microsoft.com/office/drawing/2014/main" id="{A10F9309-2831-DD58-58AF-032CFFD9E8E5}"/>
+              </a:ext>
+            </a:extLst>
+          </p:cNvPr>
+          <p:cNvSpPr/>
+          <p:nvPr/>
+        </p:nvSpPr>
+        <p:spPr>
+          <a:xfrm>
+            <a:off x="12700" y="0"/>
+            <a:ext cx="12192000" cy="6858000"/>
+          </a:xfrm>
+          <a:custGeom>
+            <a:avLst/>
+            <a:gdLst/>
+            <a:ahLst/>
+            <a:cxnLst/>
+            <a:rect l="l" t="t" r="r" b="b"/>
+            <a:pathLst>
+              <a:path w="18288000" h="10287000" extrusionOk="0">
+                <a:moveTo>
+                  <a:pt x="0" y="0"/>
+                </a:moveTo>
+                <a:lnTo>
+                  <a:pt x="18288000" y="0"/>
+                </a:lnTo>
+                <a:lnTo>
+                  <a:pt x="18288000" y="10287000"/>
+                </a:lnTo>
+                <a:lnTo>
+                  <a:pt x="0" y="10287000"/>
+                </a:lnTo>
+                <a:lnTo>
+                  <a:pt x="0" y="0"/>
+                </a:lnTo>
+                <a:close/>
+              </a:path>
+            </a:pathLst>
+          </a:custGeom>
+          <a:blipFill rotWithShape="1">
+            <a:blip r:embed="rId3">
+              <a:alphaModFix/>
+            </a:blip>
+            <a:stretch>
+              <a:fillRect t="-20652" r="-1236" b="-11174"/>
+            </a:stretch>
+          </a:blipFill>
+          <a:ln>
+            <a:noFill/>
+          </a:ln>
+        </p:spPr>
+        <p:txBody>
+          <a:bodyPr/>
+          <a:lstStyle/>
+          <a:p>
+            <a:endParaRPr lang="en-CA" sz="1200"/>
+          </a:p>
+        </p:txBody>
+      </p:sp>
+      <p:cxnSp>
+        <p:nvCxnSpPr>
+          <p:cNvPr id="277" name="Google Shape;277;p23">
+            <a:extLst>
+              <a:ext uri="{FF2B5EF4-FFF2-40B4-BE49-F238E27FC236}">
+                <a16:creationId xmlns:a16="http://schemas.microsoft.com/office/drawing/2014/main" id="{48FA03B2-BA79-B513-672B-F678ADE015B9}"/>
+              </a:ext>
+            </a:extLst>
+          </p:cNvPr>
+          <p:cNvCxnSpPr/>
+          <p:nvPr/>
+        </p:nvCxnSpPr>
+        <p:spPr>
+          <a:xfrm rot="10800000">
+            <a:off x="6096000" y="0"/>
+            <a:ext cx="12700" cy="6859420"/>
+          </a:xfrm>
+          <a:prstGeom prst="straightConnector1">
+            <a:avLst/>
+          </a:prstGeom>
+          <a:noFill/>
+          <a:ln w="19050" cap="flat" cmpd="sng">
+            <a:solidFill>
+              <a:srgbClr val="000000"/>
+            </a:solidFill>
+            <a:prstDash val="solid"/>
+            <a:round/>
+            <a:headEnd type="none" w="sm" len="sm"/>
+            <a:tailEnd type="none" w="sm" len="sm"/>
+          </a:ln>
+        </p:spPr>
+      </p:cxnSp>
+      <p:sp>
+        <p:nvSpPr>
+          <p:cNvPr id="278" name="Google Shape;278;p23">
+            <a:extLst>
+              <a:ext uri="{FF2B5EF4-FFF2-40B4-BE49-F238E27FC236}">
+                <a16:creationId xmlns:a16="http://schemas.microsoft.com/office/drawing/2014/main" id="{3E731076-B7A8-BFFC-339F-72BC223F4891}"/>
+              </a:ext>
+            </a:extLst>
+          </p:cNvPr>
+          <p:cNvSpPr txBox="1"/>
+          <p:nvPr/>
+        </p:nvSpPr>
+        <p:spPr>
+          <a:xfrm>
+            <a:off x="240527" y="1459230"/>
+            <a:ext cx="5627646" cy="2954655"/>
+          </a:xfrm>
+          <a:prstGeom prst="rect">
+            <a:avLst/>
+          </a:prstGeom>
+          <a:noFill/>
+          <a:ln>
+            <a:noFill/>
+          </a:ln>
+        </p:spPr>
+        <p:txBody>
+          <a:bodyPr spcFirstLastPara="1" wrap="square" lIns="0" tIns="0" rIns="0" bIns="0" anchor="t" anchorCtr="0">
+            <a:spAutoFit/>
           </a:bodyPr>
           <a:lstStyle/>
           <a:p>
             <a:pPr algn="ctr"/>
             <a:r>
-              <a:rPr lang="en-US" dirty="0"/>
-              <a:t>Thank You</a:t>
-            </a:r>
-            <a:br>
-              <a:rPr lang="en-US" dirty="0"/>
-            </a:br>
-            <a:br>
-              <a:rPr lang="en-US" dirty="0"/>
-            </a:br>
-            <a:br>
-              <a:rPr lang="en-US" dirty="0"/>
-            </a:br>
-            <a:r>
-              <a:rPr lang="en-US" dirty="0"/>
-              <a:t>Questions?</a:t>
-            </a:r>
+              <a:rPr lang="en-US" sz="6400" b="1" dirty="0">
+                <a:solidFill>
+                  <a:srgbClr val="000000"/>
+                </a:solidFill>
+                <a:latin typeface="DM Sans"/>
+                <a:sym typeface="DM Sans"/>
+              </a:rPr>
+              <a:t>Solution to Business Case</a:t>
+            </a:r>
+            <a:endParaRPr lang="en-CA" sz="1200" dirty="0"/>
+          </a:p>
+        </p:txBody>
+      </p:sp>
+      <p:sp>
+        <p:nvSpPr>
+          <p:cNvPr id="279" name="Google Shape;279;p23">
+            <a:extLst>
+              <a:ext uri="{FF2B5EF4-FFF2-40B4-BE49-F238E27FC236}">
+                <a16:creationId xmlns:a16="http://schemas.microsoft.com/office/drawing/2014/main" id="{00DCE89C-87BE-BCD7-0E48-058C585160B9}"/>
+              </a:ext>
+            </a:extLst>
+          </p:cNvPr>
+          <p:cNvSpPr txBox="1"/>
+          <p:nvPr/>
+        </p:nvSpPr>
+        <p:spPr>
+          <a:xfrm>
+            <a:off x="6713539" y="701584"/>
+            <a:ext cx="4712149" cy="5170646"/>
+          </a:xfrm>
+          <a:prstGeom prst="rect">
+            <a:avLst/>
+          </a:prstGeom>
+          <a:noFill/>
+          <a:ln>
+            <a:noFill/>
+          </a:ln>
+        </p:spPr>
+        <p:txBody>
+          <a:bodyPr spcFirstLastPara="1" wrap="square" lIns="0" tIns="0" rIns="0" bIns="0" anchor="t" anchorCtr="0">
+            <a:spAutoFit/>
+          </a:bodyPr>
+          <a:lstStyle/>
+          <a:p>
+            <a:pPr marL="571500" indent="-571500">
+              <a:buFont typeface="Arial" panose="020B0604020202020204" pitchFamily="34" charset="0"/>
+              <a:buChar char="•"/>
+            </a:pPr>
+            <a:r>
+              <a:rPr lang="en-US" sz="2400" b="1" dirty="0"/>
+              <a:t>HABIT-FORMING PROGRAM:</a:t>
+            </a:r>
+          </a:p>
+          <a:p>
+            <a:pPr marL="1028700" lvl="1" indent="-571500">
+              <a:buFont typeface="Arial" panose="020B0604020202020204" pitchFamily="34" charset="0"/>
+              <a:buChar char="•"/>
+            </a:pPr>
+            <a:r>
+              <a:rPr lang="en-US" sz="2400" dirty="0"/>
+              <a:t>Focus on long-term good habit development</a:t>
+            </a:r>
+          </a:p>
+          <a:p>
+            <a:pPr marL="1028700" lvl="1" indent="-571500">
+              <a:buFont typeface="Arial" panose="020B0604020202020204" pitchFamily="34" charset="0"/>
+              <a:buChar char="•"/>
+            </a:pPr>
+            <a:r>
+              <a:rPr lang="en-US" sz="2400" dirty="0"/>
+              <a:t>Set up a program with Apple Watch or Fitbit to track changes</a:t>
+            </a:r>
+          </a:p>
+          <a:p>
+            <a:pPr marL="1028700" lvl="1" indent="-571500">
+              <a:buFont typeface="Arial" panose="020B0604020202020204" pitchFamily="34" charset="0"/>
+              <a:buChar char="•"/>
+            </a:pPr>
+            <a:r>
+              <a:rPr lang="en-US" sz="2400" dirty="0"/>
+              <a:t>Enter niche of fitness app programs, but specifically for stroke reduction</a:t>
+            </a:r>
+          </a:p>
+          <a:p>
+            <a:pPr marL="1028700" lvl="1" indent="-571500">
+              <a:buFont typeface="Arial" panose="020B0604020202020204" pitchFamily="34" charset="0"/>
+              <a:buChar char="•"/>
+            </a:pPr>
+            <a:r>
+              <a:rPr lang="en-US" sz="2400" dirty="0"/>
+              <a:t>Apps make it easy for people without a primary healthcare provider to participate</a:t>
+            </a:r>
+          </a:p>
+          <a:p>
+            <a:pPr marL="571500" indent="-571500">
+              <a:buFont typeface="Arial" panose="020B0604020202020204" pitchFamily="34" charset="0"/>
+              <a:buChar char="•"/>
+            </a:pPr>
+            <a:endParaRPr lang="en-US" sz="2400" dirty="0"/>
           </a:p>
         </p:txBody>
       </p:sp>
     </p:spTree>
     <p:extLst>
       <p:ext uri="{BB962C8B-B14F-4D97-AF65-F5344CB8AC3E}">
-        <p14:creationId xmlns:p14="http://schemas.microsoft.com/office/powerpoint/2010/main" val="3319105940"/>
+        <p14:creationId xmlns:p14="http://schemas.microsoft.com/office/powerpoint/2010/main" val="859957635"/>
       </p:ext>
     </p:extLst>
   </p:cSld>
   <p:clrMapOvr>
     <a:masterClrMapping/>
   </p:clrMapOvr>
+  <p:transition>
+    <p:push/>
+  </p:transition>
 </p:sld>
 </file>
 
-<file path=ppt/slides/slide3.xml><?xml version="1.0" encoding="utf-8"?>
+<file path=ppt/slides/slide21.xml><?xml version="1.0" encoding="utf-8"?>
 <p:sld xmlns:a="http://schemas.openxmlformats.org/drawingml/2006/main" xmlns:r="http://schemas.openxmlformats.org/officeDocument/2006/relationships" xmlns:p="http://schemas.openxmlformats.org/presentationml/2006/main">
   <p:cSld>
     <p:spTree>
       <p:nvGrpSpPr>
-        <p:cNvPr id="1" name=""/>
+        <p:cNvPr id="1" name="Shape 496"/>
         <p:cNvGrpSpPr/>
         <p:nvPr/>
       </p:nvGrpSpPr>
@@ -5103,48 +7736,297 @@
       </p:grpSpPr>
       <p:sp>
         <p:nvSpPr>
-          <p:cNvPr id="2" name="Title 1">
-            <a:extLst>
-              <a:ext uri="{FF2B5EF4-FFF2-40B4-BE49-F238E27FC236}">
-                <a16:creationId xmlns:a16="http://schemas.microsoft.com/office/drawing/2014/main" id="{79E43A91-B3C9-0454-AB88-45C9BEFB7898}"/>
-              </a:ext>
-            </a:extLst>
-          </p:cNvPr>
-          <p:cNvSpPr>
-            <a:spLocks noGrp="1"/>
-          </p:cNvSpPr>
-          <p:nvPr>
-            <p:ph type="title"/>
-          </p:nvPr>
-        </p:nvSpPr>
-        <p:spPr/>
+          <p:cNvPr id="497" name="Google Shape;497;p35"/>
+          <p:cNvSpPr/>
+          <p:nvPr/>
+        </p:nvSpPr>
+        <p:spPr>
+          <a:xfrm>
+            <a:off x="0" y="0"/>
+            <a:ext cx="12192000" cy="6858000"/>
+          </a:xfrm>
+          <a:custGeom>
+            <a:avLst/>
+            <a:gdLst/>
+            <a:ahLst/>
+            <a:cxnLst/>
+            <a:rect l="l" t="t" r="r" b="b"/>
+            <a:pathLst>
+              <a:path w="18288000" h="10287000" extrusionOk="0">
+                <a:moveTo>
+                  <a:pt x="0" y="0"/>
+                </a:moveTo>
+                <a:lnTo>
+                  <a:pt x="18288000" y="0"/>
+                </a:lnTo>
+                <a:lnTo>
+                  <a:pt x="18288000" y="10287000"/>
+                </a:lnTo>
+                <a:lnTo>
+                  <a:pt x="0" y="10287000"/>
+                </a:lnTo>
+                <a:lnTo>
+                  <a:pt x="0" y="0"/>
+                </a:lnTo>
+                <a:close/>
+              </a:path>
+            </a:pathLst>
+          </a:custGeom>
+          <a:blipFill rotWithShape="1">
+            <a:blip r:embed="rId3">
+              <a:alphaModFix/>
+            </a:blip>
+            <a:stretch>
+              <a:fillRect t="-20652" r="-1236" b="-11174"/>
+            </a:stretch>
+          </a:blipFill>
+          <a:ln>
+            <a:noFill/>
+          </a:ln>
+        </p:spPr>
         <p:txBody>
           <a:bodyPr/>
           <a:lstStyle/>
           <a:p>
-            <a:endParaRPr lang="en-US"/>
+            <a:endParaRPr lang="en-CA" sz="1200"/>
+          </a:p>
+        </p:txBody>
+      </p:sp>
+      <p:pic>
+        <p:nvPicPr>
+          <p:cNvPr id="498" name="Google Shape;498;p35"/>
+          <p:cNvPicPr preferRelativeResize="0"/>
+          <p:nvPr/>
+        </p:nvPicPr>
+        <p:blipFill>
+          <a:blip r:embed="rId4">
+            <a:alphaModFix/>
+          </a:blip>
+          <a:stretch>
+            <a:fillRect/>
+          </a:stretch>
+        </p:blipFill>
+        <p:spPr>
+          <a:xfrm>
+            <a:off x="6527632" y="682900"/>
+            <a:ext cx="5222082" cy="5484456"/>
+          </a:xfrm>
+          <a:prstGeom prst="rect">
+            <a:avLst/>
+          </a:prstGeom>
+          <a:noFill/>
+          <a:ln>
+            <a:noFill/>
+          </a:ln>
+        </p:spPr>
+      </p:pic>
+      <p:cxnSp>
+        <p:nvCxnSpPr>
+          <p:cNvPr id="499" name="Google Shape;499;p35"/>
+          <p:cNvCxnSpPr/>
+          <p:nvPr/>
+        </p:nvCxnSpPr>
+        <p:spPr>
+          <a:xfrm rot="10800000">
+            <a:off x="6102350" y="-65298"/>
+            <a:ext cx="0" cy="6955829"/>
+          </a:xfrm>
+          <a:prstGeom prst="straightConnector1">
+            <a:avLst/>
+          </a:prstGeom>
+          <a:noFill/>
+          <a:ln w="19050" cap="flat" cmpd="sng">
+            <a:solidFill>
+              <a:srgbClr val="FFFAF1"/>
+            </a:solidFill>
+            <a:prstDash val="solid"/>
+            <a:round/>
+            <a:headEnd type="none" w="sm" len="sm"/>
+            <a:tailEnd type="none" w="sm" len="sm"/>
+          </a:ln>
+        </p:spPr>
+      </p:cxnSp>
+      <p:sp>
+        <p:nvSpPr>
+          <p:cNvPr id="500" name="Google Shape;500;p35"/>
+          <p:cNvSpPr/>
+          <p:nvPr/>
+        </p:nvSpPr>
+        <p:spPr>
+          <a:xfrm>
+            <a:off x="6527800" y="685800"/>
+            <a:ext cx="5222048" cy="5486400"/>
+          </a:xfrm>
+          <a:custGeom>
+            <a:avLst/>
+            <a:gdLst/>
+            <a:ahLst/>
+            <a:cxnLst/>
+            <a:rect l="l" t="t" r="r" b="b"/>
+            <a:pathLst>
+              <a:path w="2063031" h="2167467" extrusionOk="0">
+                <a:moveTo>
+                  <a:pt x="0" y="0"/>
+                </a:moveTo>
+                <a:lnTo>
+                  <a:pt x="2063031" y="0"/>
+                </a:lnTo>
+                <a:lnTo>
+                  <a:pt x="2063031" y="2167467"/>
+                </a:lnTo>
+                <a:lnTo>
+                  <a:pt x="0" y="2167467"/>
+                </a:lnTo>
+                <a:close/>
+              </a:path>
+            </a:pathLst>
+          </a:custGeom>
+          <a:solidFill>
+            <a:srgbClr val="000000">
+              <a:alpha val="0"/>
+            </a:srgbClr>
+          </a:solidFill>
+          <a:ln w="19050" cap="flat" cmpd="sng">
+            <a:solidFill>
+              <a:srgbClr val="FFFAF1"/>
+            </a:solidFill>
+            <a:prstDash val="solid"/>
+            <a:round/>
+            <a:headEnd type="none" w="sm" len="sm"/>
+            <a:tailEnd type="none" w="sm" len="sm"/>
+          </a:ln>
+        </p:spPr>
+        <p:txBody>
+          <a:bodyPr/>
+          <a:lstStyle/>
+          <a:p>
+            <a:endParaRPr lang="en-CA" sz="1200"/>
+          </a:p>
+        </p:txBody>
+      </p:sp>
+      <p:sp>
+        <p:nvSpPr>
+          <p:cNvPr id="501" name="Google Shape;501;p35"/>
+          <p:cNvSpPr txBox="1"/>
+          <p:nvPr/>
+        </p:nvSpPr>
+        <p:spPr>
+          <a:xfrm>
+            <a:off x="418991" y="2954688"/>
+            <a:ext cx="5258068" cy="984885"/>
+          </a:xfrm>
+          <a:prstGeom prst="rect">
+            <a:avLst/>
+          </a:prstGeom>
+          <a:noFill/>
+          <a:ln>
+            <a:noFill/>
+          </a:ln>
+        </p:spPr>
+        <p:txBody>
+          <a:bodyPr spcFirstLastPara="1" wrap="square" lIns="0" tIns="0" rIns="0" bIns="0" anchor="t" anchorCtr="0">
+            <a:spAutoFit/>
+          </a:bodyPr>
+          <a:lstStyle/>
+          <a:p>
+            <a:pPr algn="ctr"/>
+            <a:r>
+              <a:rPr lang="en-US" sz="6400" b="1">
+                <a:solidFill>
+                  <a:srgbClr val="FFFAF1"/>
+                </a:solidFill>
+                <a:latin typeface="DM Sans"/>
+                <a:ea typeface="DM Sans"/>
+                <a:cs typeface="DM Sans"/>
+                <a:sym typeface="DM Sans"/>
+              </a:rPr>
+              <a:t>THANK YOU!</a:t>
+            </a:r>
+            <a:endParaRPr sz="1200"/>
+          </a:p>
+        </p:txBody>
+      </p:sp>
+      <p:sp>
+        <p:nvSpPr>
+          <p:cNvPr id="502" name="Google Shape;502;p35"/>
+          <p:cNvSpPr txBox="1"/>
+          <p:nvPr/>
+        </p:nvSpPr>
+        <p:spPr>
+          <a:xfrm>
+            <a:off x="442152" y="3764784"/>
+            <a:ext cx="5258068" cy="301621"/>
+          </a:xfrm>
+          <a:prstGeom prst="rect">
+            <a:avLst/>
+          </a:prstGeom>
+          <a:noFill/>
+          <a:ln>
+            <a:noFill/>
+          </a:ln>
+        </p:spPr>
+        <p:txBody>
+          <a:bodyPr spcFirstLastPara="1" wrap="square" lIns="0" tIns="0" rIns="0" bIns="0" anchor="t" anchorCtr="0">
+            <a:spAutoFit/>
+          </a:bodyPr>
+          <a:lstStyle/>
+          <a:p>
+            <a:pPr algn="ctr">
+              <a:lnSpc>
+                <a:spcPct val="140000"/>
+              </a:lnSpc>
+            </a:pPr>
+            <a:r>
+              <a:rPr lang="en-US" sz="1400" dirty="0">
+                <a:solidFill>
+                  <a:srgbClr val="FFFAF1"/>
+                </a:solidFill>
+                <a:latin typeface="DM Sans"/>
+                <a:ea typeface="DM Sans"/>
+                <a:cs typeface="DM Sans"/>
+                <a:sym typeface="DM Sans"/>
+              </a:rPr>
+              <a:t>We will be taking questions at </a:t>
+            </a:r>
+            <a:r>
+              <a:rPr lang="en-US" sz="1400">
+                <a:solidFill>
+                  <a:srgbClr val="FFFAF1"/>
+                </a:solidFill>
+                <a:latin typeface="DM Sans"/>
+                <a:ea typeface="DM Sans"/>
+                <a:cs typeface="DM Sans"/>
+                <a:sym typeface="DM Sans"/>
+              </a:rPr>
+              <a:t>this time.</a:t>
+            </a:r>
+            <a:endParaRPr sz="1200" dirty="0"/>
           </a:p>
         </p:txBody>
       </p:sp>
     </p:spTree>
-    <p:extLst>
-      <p:ext uri="{BB962C8B-B14F-4D97-AF65-F5344CB8AC3E}">
-        <p14:creationId xmlns:p14="http://schemas.microsoft.com/office/powerpoint/2010/main" val="133211007"/>
-      </p:ext>
-    </p:extLst>
   </p:cSld>
   <p:clrMapOvr>
     <a:masterClrMapping/>
   </p:clrMapOvr>
+  <p:transition>
+    <p:push/>
+  </p:transition>
 </p:sld>
 </file>
 
-<file path=ppt/slides/slide4.xml><?xml version="1.0" encoding="utf-8"?>
+<file path=ppt/slides/slide3.xml><?xml version="1.0" encoding="utf-8"?>
 <p:sld xmlns:a="http://schemas.openxmlformats.org/drawingml/2006/main" xmlns:r="http://schemas.openxmlformats.org/officeDocument/2006/relationships" xmlns:p="http://schemas.openxmlformats.org/presentationml/2006/main">
   <p:cSld>
     <p:spTree>
       <p:nvGrpSpPr>
-        <p:cNvPr id="1" name=""/>
+        <p:cNvPr id="1" name="Shape 274">
+          <a:extLst>
+            <a:ext uri="{FF2B5EF4-FFF2-40B4-BE49-F238E27FC236}">
+              <a16:creationId xmlns:a16="http://schemas.microsoft.com/office/drawing/2014/main" id="{8B31EF99-0A3C-FDBB-32CF-EA2C40AA6787}"/>
+            </a:ext>
+          </a:extLst>
+        </p:cNvPr>
         <p:cNvGrpSpPr/>
         <p:nvPr/>
       </p:nvGrpSpPr>
@@ -5158,48 +8040,229 @@
       </p:grpSpPr>
       <p:sp>
         <p:nvSpPr>
-          <p:cNvPr id="2" name="Title 1">
-            <a:extLst>
-              <a:ext uri="{FF2B5EF4-FFF2-40B4-BE49-F238E27FC236}">
-                <a16:creationId xmlns:a16="http://schemas.microsoft.com/office/drawing/2014/main" id="{82A03920-A48B-F3FE-9B09-5B136B90EF1D}"/>
-              </a:ext>
-            </a:extLst>
-          </p:cNvPr>
-          <p:cNvSpPr>
-            <a:spLocks noGrp="1"/>
-          </p:cNvSpPr>
-          <p:nvPr>
-            <p:ph type="title"/>
-          </p:nvPr>
-        </p:nvSpPr>
-        <p:spPr/>
+          <p:cNvPr id="275" name="Google Shape;275;p23">
+            <a:extLst>
+              <a:ext uri="{FF2B5EF4-FFF2-40B4-BE49-F238E27FC236}">
+                <a16:creationId xmlns:a16="http://schemas.microsoft.com/office/drawing/2014/main" id="{9084A8E1-AE92-B297-C212-E365FD940E83}"/>
+              </a:ext>
+            </a:extLst>
+          </p:cNvPr>
+          <p:cNvSpPr/>
+          <p:nvPr/>
+        </p:nvSpPr>
+        <p:spPr>
+          <a:xfrm>
+            <a:off x="0" y="0"/>
+            <a:ext cx="12192000" cy="6858000"/>
+          </a:xfrm>
+          <a:custGeom>
+            <a:avLst/>
+            <a:gdLst/>
+            <a:ahLst/>
+            <a:cxnLst/>
+            <a:rect l="l" t="t" r="r" b="b"/>
+            <a:pathLst>
+              <a:path w="18288000" h="10287000" extrusionOk="0">
+                <a:moveTo>
+                  <a:pt x="0" y="0"/>
+                </a:moveTo>
+                <a:lnTo>
+                  <a:pt x="18288000" y="0"/>
+                </a:lnTo>
+                <a:lnTo>
+                  <a:pt x="18288000" y="10287000"/>
+                </a:lnTo>
+                <a:lnTo>
+                  <a:pt x="0" y="10287000"/>
+                </a:lnTo>
+                <a:lnTo>
+                  <a:pt x="0" y="0"/>
+                </a:lnTo>
+                <a:close/>
+              </a:path>
+            </a:pathLst>
+          </a:custGeom>
+          <a:blipFill rotWithShape="1">
+            <a:blip r:embed="rId3">
+              <a:alphaModFix/>
+            </a:blip>
+            <a:stretch>
+              <a:fillRect t="-20652" r="-1236" b="-11174"/>
+            </a:stretch>
+          </a:blipFill>
+          <a:ln>
+            <a:noFill/>
+          </a:ln>
+        </p:spPr>
         <p:txBody>
           <a:bodyPr/>
           <a:lstStyle/>
           <a:p>
-            <a:endParaRPr lang="en-US"/>
+            <a:endParaRPr lang="en-CA" sz="1200"/>
+          </a:p>
+        </p:txBody>
+      </p:sp>
+      <p:cxnSp>
+        <p:nvCxnSpPr>
+          <p:cNvPr id="277" name="Google Shape;277;p23">
+            <a:extLst>
+              <a:ext uri="{FF2B5EF4-FFF2-40B4-BE49-F238E27FC236}">
+                <a16:creationId xmlns:a16="http://schemas.microsoft.com/office/drawing/2014/main" id="{E661C1E4-5989-5FA8-4811-B16E25889FC8}"/>
+              </a:ext>
+            </a:extLst>
+          </p:cNvPr>
+          <p:cNvCxnSpPr/>
+          <p:nvPr/>
+        </p:nvCxnSpPr>
+        <p:spPr>
+          <a:xfrm rot="10800000">
+            <a:off x="6096000" y="0"/>
+            <a:ext cx="12700" cy="6859420"/>
+          </a:xfrm>
+          <a:prstGeom prst="straightConnector1">
+            <a:avLst/>
+          </a:prstGeom>
+          <a:noFill/>
+          <a:ln w="19050" cap="flat" cmpd="sng">
+            <a:solidFill>
+              <a:srgbClr val="000000"/>
+            </a:solidFill>
+            <a:prstDash val="solid"/>
+            <a:round/>
+            <a:headEnd type="none" w="sm" len="sm"/>
+            <a:tailEnd type="none" w="sm" len="sm"/>
+          </a:ln>
+        </p:spPr>
+      </p:cxnSp>
+      <p:sp>
+        <p:nvSpPr>
+          <p:cNvPr id="278" name="Google Shape;278;p23">
+            <a:extLst>
+              <a:ext uri="{FF2B5EF4-FFF2-40B4-BE49-F238E27FC236}">
+                <a16:creationId xmlns:a16="http://schemas.microsoft.com/office/drawing/2014/main" id="{D1BB4620-696B-D377-D1DF-6F1382F0C288}"/>
+              </a:ext>
+            </a:extLst>
+          </p:cNvPr>
+          <p:cNvSpPr txBox="1"/>
+          <p:nvPr/>
+        </p:nvSpPr>
+        <p:spPr>
+          <a:xfrm>
+            <a:off x="6800625" y="2194107"/>
+            <a:ext cx="4863200" cy="1969770"/>
+          </a:xfrm>
+          <a:prstGeom prst="rect">
+            <a:avLst/>
+          </a:prstGeom>
+          <a:noFill/>
+          <a:ln>
+            <a:noFill/>
+          </a:ln>
+        </p:spPr>
+        <p:txBody>
+          <a:bodyPr spcFirstLastPara="1" wrap="square" lIns="0" tIns="0" rIns="0" bIns="0" anchor="t" anchorCtr="0">
+            <a:spAutoFit/>
+          </a:bodyPr>
+          <a:lstStyle/>
+          <a:p>
+            <a:pPr algn="ctr"/>
+            <a:r>
+              <a:rPr lang="en-US" sz="6400" b="1" dirty="0">
+                <a:solidFill>
+                  <a:srgbClr val="000000"/>
+                </a:solidFill>
+                <a:latin typeface="DM Sans"/>
+                <a:ea typeface="DM Sans"/>
+                <a:cs typeface="DM Sans"/>
+                <a:sym typeface="DM Sans"/>
+              </a:rPr>
+              <a:t>Business Case</a:t>
+            </a:r>
+            <a:endParaRPr sz="1200" dirty="0"/>
+          </a:p>
+        </p:txBody>
+      </p:sp>
+      <p:sp>
+        <p:nvSpPr>
+          <p:cNvPr id="279" name="Google Shape;279;p23">
+            <a:extLst>
+              <a:ext uri="{FF2B5EF4-FFF2-40B4-BE49-F238E27FC236}">
+                <a16:creationId xmlns:a16="http://schemas.microsoft.com/office/drawing/2014/main" id="{0AF21EBD-1FDC-2D2F-FBB8-D370362333AC}"/>
+              </a:ext>
+            </a:extLst>
+          </p:cNvPr>
+          <p:cNvSpPr txBox="1"/>
+          <p:nvPr/>
+        </p:nvSpPr>
+        <p:spPr>
+          <a:xfrm>
+            <a:off x="691925" y="1701665"/>
+            <a:ext cx="4712149" cy="3447098"/>
+          </a:xfrm>
+          <a:prstGeom prst="rect">
+            <a:avLst/>
+          </a:prstGeom>
+          <a:noFill/>
+          <a:ln>
+            <a:noFill/>
+          </a:ln>
+        </p:spPr>
+        <p:txBody>
+          <a:bodyPr spcFirstLastPara="1" wrap="square" lIns="0" tIns="0" rIns="0" bIns="0" anchor="t" anchorCtr="0">
+            <a:spAutoFit/>
+          </a:bodyPr>
+          <a:lstStyle/>
+          <a:p>
+            <a:pPr marL="571500" indent="-571500">
+              <a:buFont typeface="Arial" panose="020B0604020202020204" pitchFamily="34" charset="0"/>
+              <a:buChar char="•"/>
+            </a:pPr>
+            <a:r>
+              <a:rPr lang="en-US" sz="3200" dirty="0"/>
+              <a:t>The top 3 predictors of having a stroke – is it lifestyle-based or health-based?</a:t>
+            </a:r>
+          </a:p>
+          <a:p>
+            <a:pPr marL="571500" indent="-571500">
+              <a:buFont typeface="Arial" panose="020B0604020202020204" pitchFamily="34" charset="0"/>
+              <a:buChar char="•"/>
+            </a:pPr>
+            <a:r>
+              <a:rPr lang="en-CA" sz="3200" dirty="0"/>
+              <a:t>Proactive healthcare management, not just reactive</a:t>
+            </a:r>
+            <a:endParaRPr lang="en-US" sz="3200" dirty="0"/>
           </a:p>
         </p:txBody>
       </p:sp>
     </p:spTree>
     <p:extLst>
       <p:ext uri="{BB962C8B-B14F-4D97-AF65-F5344CB8AC3E}">
-        <p14:creationId xmlns:p14="http://schemas.microsoft.com/office/powerpoint/2010/main" val="4041828798"/>
+        <p14:creationId xmlns:p14="http://schemas.microsoft.com/office/powerpoint/2010/main" val="3083323049"/>
       </p:ext>
     </p:extLst>
   </p:cSld>
   <p:clrMapOvr>
     <a:masterClrMapping/>
   </p:clrMapOvr>
+  <p:transition>
+    <p:push/>
+  </p:transition>
 </p:sld>
 </file>
 
-<file path=ppt/slides/slide5.xml><?xml version="1.0" encoding="utf-8"?>
+<file path=ppt/slides/slide4.xml><?xml version="1.0" encoding="utf-8"?>
 <p:sld xmlns:a="http://schemas.openxmlformats.org/drawingml/2006/main" xmlns:r="http://schemas.openxmlformats.org/officeDocument/2006/relationships" xmlns:p="http://schemas.openxmlformats.org/presentationml/2006/main">
   <p:cSld>
     <p:spTree>
       <p:nvGrpSpPr>
-        <p:cNvPr id="1" name=""/>
+        <p:cNvPr id="1" name="Shape 274">
+          <a:extLst>
+            <a:ext uri="{FF2B5EF4-FFF2-40B4-BE49-F238E27FC236}">
+              <a16:creationId xmlns:a16="http://schemas.microsoft.com/office/drawing/2014/main" id="{6D4A00AE-F70E-A67D-EE6C-29747D2A7C9C}"/>
+            </a:ext>
+          </a:extLst>
+        </p:cNvPr>
         <p:cNvGrpSpPr/>
         <p:nvPr/>
       </p:nvGrpSpPr>
@@ -5213,74 +8276,106 @@
       </p:grpSpPr>
       <p:sp>
         <p:nvSpPr>
-          <p:cNvPr id="2" name="Title 1">
-            <a:extLst>
-              <a:ext uri="{FF2B5EF4-FFF2-40B4-BE49-F238E27FC236}">
-                <a16:creationId xmlns:a16="http://schemas.microsoft.com/office/drawing/2014/main" id="{8E0EC056-085F-0F32-063D-FB5BEB1009C7}"/>
-              </a:ext>
-            </a:extLst>
-          </p:cNvPr>
-          <p:cNvSpPr>
-            <a:spLocks noGrp="1"/>
-          </p:cNvSpPr>
-          <p:nvPr>
-            <p:ph type="title"/>
-          </p:nvPr>
-        </p:nvSpPr>
-        <p:spPr/>
+          <p:cNvPr id="275" name="Google Shape;275;p23">
+            <a:extLst>
+              <a:ext uri="{FF2B5EF4-FFF2-40B4-BE49-F238E27FC236}">
+                <a16:creationId xmlns:a16="http://schemas.microsoft.com/office/drawing/2014/main" id="{FDC24C37-5412-3425-6EBF-06001CBFCD38}"/>
+              </a:ext>
+            </a:extLst>
+          </p:cNvPr>
+          <p:cNvSpPr/>
+          <p:nvPr/>
+        </p:nvSpPr>
+        <p:spPr>
+          <a:xfrm>
+            <a:off x="12700" y="0"/>
+            <a:ext cx="12192000" cy="6858000"/>
+          </a:xfrm>
+          <a:custGeom>
+            <a:avLst/>
+            <a:gdLst/>
+            <a:ahLst/>
+            <a:cxnLst/>
+            <a:rect l="l" t="t" r="r" b="b"/>
+            <a:pathLst>
+              <a:path w="18288000" h="10287000" extrusionOk="0">
+                <a:moveTo>
+                  <a:pt x="0" y="0"/>
+                </a:moveTo>
+                <a:lnTo>
+                  <a:pt x="18288000" y="0"/>
+                </a:lnTo>
+                <a:lnTo>
+                  <a:pt x="18288000" y="10287000"/>
+                </a:lnTo>
+                <a:lnTo>
+                  <a:pt x="0" y="10287000"/>
+                </a:lnTo>
+                <a:lnTo>
+                  <a:pt x="0" y="0"/>
+                </a:lnTo>
+                <a:close/>
+              </a:path>
+            </a:pathLst>
+          </a:custGeom>
+          <a:blipFill rotWithShape="1">
+            <a:blip r:embed="rId3">
+              <a:alphaModFix/>
+            </a:blip>
+            <a:stretch>
+              <a:fillRect t="-20652" r="-1236" b="-11174"/>
+            </a:stretch>
+          </a:blipFill>
+          <a:ln>
+            <a:noFill/>
+          </a:ln>
+        </p:spPr>
         <p:txBody>
           <a:bodyPr/>
           <a:lstStyle/>
           <a:p>
-            <a:r>
-              <a:rPr lang="en-US" dirty="0"/>
-              <a:t>Stroke Class Distribution</a:t>
-            </a:r>
-          </a:p>
-        </p:txBody>
-      </p:sp>
-      <p:pic>
-        <p:nvPicPr>
-          <p:cNvPr id="4" name="Picture 3">
-            <a:extLst>
-              <a:ext uri="{FF2B5EF4-FFF2-40B4-BE49-F238E27FC236}">
-                <a16:creationId xmlns:a16="http://schemas.microsoft.com/office/drawing/2014/main" id="{A4B3F245-8DDD-53AB-8423-AACECF3B9218}"/>
-              </a:ext>
-            </a:extLst>
-          </p:cNvPr>
-          <p:cNvPicPr>
-            <a:picLocks noChangeAspect="1"/>
-          </p:cNvPicPr>
+            <a:endParaRPr lang="en-CA" sz="1200"/>
+          </a:p>
+        </p:txBody>
+      </p:sp>
+      <p:cxnSp>
+        <p:nvCxnSpPr>
+          <p:cNvPr id="277" name="Google Shape;277;p23">
+            <a:extLst>
+              <a:ext uri="{FF2B5EF4-FFF2-40B4-BE49-F238E27FC236}">
+                <a16:creationId xmlns:a16="http://schemas.microsoft.com/office/drawing/2014/main" id="{37309AEC-C836-C399-E326-96706B9353D1}"/>
+              </a:ext>
+            </a:extLst>
+          </p:cNvPr>
+          <p:cNvCxnSpPr/>
           <p:nvPr/>
-        </p:nvPicPr>
-        <p:blipFill>
-          <a:blip r:embed="rId2">
-            <a:extLst>
-              <a:ext uri="{28A0092B-C50C-407E-A947-70E740481C1C}">
-                <a14:useLocalDpi xmlns:a14="http://schemas.microsoft.com/office/drawing/2010/main" val="0"/>
-              </a:ext>
-            </a:extLst>
-          </a:blip>
-          <a:stretch>
-            <a:fillRect/>
-          </a:stretch>
-        </p:blipFill>
-        <p:spPr>
-          <a:xfrm>
-            <a:off x="838200" y="2095802"/>
-            <a:ext cx="5303531" cy="4160528"/>
-          </a:xfrm>
-          <a:prstGeom prst="rect">
+        </p:nvCxnSpPr>
+        <p:spPr>
+          <a:xfrm rot="10800000">
+            <a:off x="6096000" y="0"/>
+            <a:ext cx="12700" cy="6859420"/>
+          </a:xfrm>
+          <a:prstGeom prst="straightConnector1">
             <a:avLst/>
           </a:prstGeom>
-        </p:spPr>
-      </p:pic>
-      <p:sp>
-        <p:nvSpPr>
-          <p:cNvPr id="5" name="TextBox 4">
-            <a:extLst>
-              <a:ext uri="{FF2B5EF4-FFF2-40B4-BE49-F238E27FC236}">
-                <a16:creationId xmlns:a16="http://schemas.microsoft.com/office/drawing/2014/main" id="{2322F41E-E829-BDF5-12FB-66D0F18D9A14}"/>
+          <a:noFill/>
+          <a:ln w="19050" cap="flat" cmpd="sng">
+            <a:solidFill>
+              <a:srgbClr val="000000"/>
+            </a:solidFill>
+            <a:prstDash val="solid"/>
+            <a:round/>
+            <a:headEnd type="none" w="sm" len="sm"/>
+            <a:tailEnd type="none" w="sm" len="sm"/>
+          </a:ln>
+        </p:spPr>
+      </p:cxnSp>
+      <p:sp>
+        <p:nvSpPr>
+          <p:cNvPr id="278" name="Google Shape;278;p23">
+            <a:extLst>
+              <a:ext uri="{FF2B5EF4-FFF2-40B4-BE49-F238E27FC236}">
+                <a16:creationId xmlns:a16="http://schemas.microsoft.com/office/drawing/2014/main" id="{77666A4E-4AA7-EAA8-DF4A-F79A41980A60}"/>
               </a:ext>
             </a:extLst>
           </p:cNvPr>
@@ -5289,35 +8384,98 @@
         </p:nvSpPr>
         <p:spPr>
           <a:xfrm>
-            <a:off x="6801648" y="3665044"/>
-            <a:ext cx="2725810" cy="1200329"/>
+            <a:off x="616400" y="1994640"/>
+            <a:ext cx="4863200" cy="2954655"/>
           </a:xfrm>
           <a:prstGeom prst="rect">
             <a:avLst/>
           </a:prstGeom>
           <a:noFill/>
-        </p:spPr>
-        <p:txBody>
-          <a:bodyPr wrap="square" rtlCol="0">
+          <a:ln>
+            <a:noFill/>
+          </a:ln>
+        </p:spPr>
+        <p:txBody>
+          <a:bodyPr spcFirstLastPara="1" wrap="square" lIns="0" tIns="0" rIns="0" bIns="0" anchor="t" anchorCtr="0">
             <a:spAutoFit/>
           </a:bodyPr>
           <a:lstStyle/>
           <a:p>
-            <a:r>
-              <a:rPr lang="en-US" dirty="0"/>
-              <a:t>Percentage distribution: Class	      % </a:t>
-            </a:r>
-          </a:p>
-          <a:p>
-            <a:r>
-              <a:rPr lang="en-US" dirty="0"/>
-              <a:t>0	 95.13</a:t>
-            </a:r>
-          </a:p>
-          <a:p>
-            <a:r>
-              <a:rPr lang="en-US" dirty="0"/>
-              <a:t>1	 4.87</a:t>
+            <a:pPr algn="ctr"/>
+            <a:r>
+              <a:rPr lang="en-US" sz="6400" b="1" dirty="0">
+                <a:solidFill>
+                  <a:srgbClr val="000000"/>
+                </a:solidFill>
+                <a:latin typeface="DM Sans"/>
+                <a:ea typeface="DM Sans"/>
+                <a:cs typeface="DM Sans"/>
+                <a:sym typeface="DM Sans"/>
+              </a:rPr>
+              <a:t>The Problem to Tackle</a:t>
+            </a:r>
+            <a:endParaRPr sz="1200" dirty="0"/>
+          </a:p>
+        </p:txBody>
+      </p:sp>
+      <p:sp>
+        <p:nvSpPr>
+          <p:cNvPr id="279" name="Google Shape;279;p23">
+            <a:extLst>
+              <a:ext uri="{FF2B5EF4-FFF2-40B4-BE49-F238E27FC236}">
+                <a16:creationId xmlns:a16="http://schemas.microsoft.com/office/drawing/2014/main" id="{329D24F8-4AA8-BDBB-D1C3-A436C5632866}"/>
+              </a:ext>
+            </a:extLst>
+          </p:cNvPr>
+          <p:cNvSpPr txBox="1"/>
+          <p:nvPr/>
+        </p:nvSpPr>
+        <p:spPr>
+          <a:xfrm>
+            <a:off x="6794275" y="1502197"/>
+            <a:ext cx="4712149" cy="3877985"/>
+          </a:xfrm>
+          <a:prstGeom prst="rect">
+            <a:avLst/>
+          </a:prstGeom>
+          <a:noFill/>
+          <a:ln>
+            <a:noFill/>
+          </a:ln>
+        </p:spPr>
+        <p:txBody>
+          <a:bodyPr spcFirstLastPara="1" wrap="square" lIns="0" tIns="0" rIns="0" bIns="0" anchor="t" anchorCtr="0">
+            <a:spAutoFit/>
+          </a:bodyPr>
+          <a:lstStyle/>
+          <a:p>
+            <a:pPr marL="571500" indent="-571500">
+              <a:buFont typeface="Arial" panose="020B0604020202020204" pitchFamily="34" charset="0"/>
+              <a:buChar char="•"/>
+            </a:pPr>
+            <a:r>
+              <a:rPr lang="en-US" sz="2800" dirty="0"/>
+              <a:t>Stroke is the 3rd leading cause of disability and mortality worldwide with an estimated 93.8 million cases</a:t>
+            </a:r>
+          </a:p>
+          <a:p>
+            <a:pPr marL="571500" indent="-571500">
+              <a:buFont typeface="Arial" panose="020B0604020202020204" pitchFamily="34" charset="0"/>
+              <a:buChar char="•"/>
+            </a:pPr>
+            <a:r>
+              <a:rPr lang="en-US" sz="2800" dirty="0"/>
+              <a:t>Costly for patients</a:t>
+            </a:r>
+          </a:p>
+          <a:p>
+            <a:pPr marL="571500" indent="-571500">
+              <a:buFont typeface="Arial" panose="020B0604020202020204" pitchFamily="34" charset="0"/>
+              <a:buChar char="•"/>
+            </a:pPr>
+            <a:r>
+              <a:rPr lang="en-US" sz="2800" dirty="0"/>
+              <a:t>Reactive treatments far more expensive than proactive ones</a:t>
             </a:r>
           </a:p>
         </p:txBody>
@@ -5325,22 +8483,25 @@
     </p:spTree>
     <p:extLst>
       <p:ext uri="{BB962C8B-B14F-4D97-AF65-F5344CB8AC3E}">
-        <p14:creationId xmlns:p14="http://schemas.microsoft.com/office/powerpoint/2010/main" val="3280902174"/>
+        <p14:creationId xmlns:p14="http://schemas.microsoft.com/office/powerpoint/2010/main" val="1486509860"/>
       </p:ext>
     </p:extLst>
   </p:cSld>
   <p:clrMapOvr>
     <a:masterClrMapping/>
   </p:clrMapOvr>
+  <p:transition>
+    <p:push/>
+  </p:transition>
 </p:sld>
 </file>
 
-<file path=ppt/slides/slide6.xml><?xml version="1.0" encoding="utf-8"?>
+<file path=ppt/slides/slide5.xml><?xml version="1.0" encoding="utf-8"?>
 <p:sld xmlns:a="http://schemas.openxmlformats.org/drawingml/2006/main" xmlns:r="http://schemas.openxmlformats.org/officeDocument/2006/relationships" xmlns:p="http://schemas.openxmlformats.org/presentationml/2006/main">
   <p:cSld>
     <p:spTree>
       <p:nvGrpSpPr>
-        <p:cNvPr id="1" name=""/>
+        <p:cNvPr id="1" name="Shape 263"/>
         <p:cNvGrpSpPr/>
         <p:nvPr/>
       </p:nvGrpSpPr>
@@ -5354,38 +8515,154 @@
       </p:grpSpPr>
       <p:sp>
         <p:nvSpPr>
-          <p:cNvPr id="2" name="Title 1">
-            <a:extLst>
-              <a:ext uri="{FF2B5EF4-FFF2-40B4-BE49-F238E27FC236}">
-                <a16:creationId xmlns:a16="http://schemas.microsoft.com/office/drawing/2014/main" id="{ECEBE8FA-3692-BB7A-90A2-26E0BD516E51}"/>
-              </a:ext>
-            </a:extLst>
-          </p:cNvPr>
-          <p:cNvSpPr>
-            <a:spLocks noGrp="1"/>
-          </p:cNvSpPr>
-          <p:nvPr>
-            <p:ph type="title"/>
-          </p:nvPr>
-        </p:nvSpPr>
-        <p:spPr/>
+          <p:cNvPr id="264" name="Google Shape;264;p22"/>
+          <p:cNvSpPr/>
+          <p:nvPr/>
+        </p:nvSpPr>
+        <p:spPr>
+          <a:xfrm>
+            <a:off x="0" y="0"/>
+            <a:ext cx="12192000" cy="6858000"/>
+          </a:xfrm>
+          <a:custGeom>
+            <a:avLst/>
+            <a:gdLst/>
+            <a:ahLst/>
+            <a:cxnLst/>
+            <a:rect l="l" t="t" r="r" b="b"/>
+            <a:pathLst>
+              <a:path w="18288000" h="10287000" extrusionOk="0">
+                <a:moveTo>
+                  <a:pt x="0" y="0"/>
+                </a:moveTo>
+                <a:lnTo>
+                  <a:pt x="18288000" y="0"/>
+                </a:lnTo>
+                <a:lnTo>
+                  <a:pt x="18288000" y="10287000"/>
+                </a:lnTo>
+                <a:lnTo>
+                  <a:pt x="0" y="10287000"/>
+                </a:lnTo>
+                <a:lnTo>
+                  <a:pt x="0" y="0"/>
+                </a:lnTo>
+                <a:close/>
+              </a:path>
+            </a:pathLst>
+          </a:custGeom>
+          <a:blipFill rotWithShape="1">
+            <a:blip r:embed="rId3">
+              <a:alphaModFix/>
+            </a:blip>
+            <a:stretch>
+              <a:fillRect t="-20652" r="-1236" b="-11174"/>
+            </a:stretch>
+          </a:blipFill>
+          <a:ln>
+            <a:noFill/>
+          </a:ln>
+        </p:spPr>
         <p:txBody>
           <a:bodyPr/>
           <a:lstStyle/>
           <a:p>
-            <a:r>
-              <a:rPr lang="en-US" dirty="0"/>
-              <a:t>Normalized Box Plot</a:t>
-            </a:r>
+            <a:endParaRPr lang="en-CA" sz="1200" dirty="0"/>
+          </a:p>
+        </p:txBody>
+      </p:sp>
+      <p:cxnSp>
+        <p:nvCxnSpPr>
+          <p:cNvPr id="266" name="Google Shape;266;p22"/>
+          <p:cNvCxnSpPr/>
+          <p:nvPr/>
+        </p:nvCxnSpPr>
+        <p:spPr>
+          <a:xfrm rot="10800000">
+            <a:off x="-63217" y="3422650"/>
+            <a:ext cx="12293931" cy="0"/>
+          </a:xfrm>
+          <a:prstGeom prst="straightConnector1">
+            <a:avLst/>
+          </a:prstGeom>
+          <a:noFill/>
+          <a:ln w="19050" cap="flat" cmpd="sng">
+            <a:solidFill>
+              <a:srgbClr val="000000"/>
+            </a:solidFill>
+            <a:prstDash val="solid"/>
+            <a:round/>
+            <a:headEnd type="none" w="sm" len="sm"/>
+            <a:tailEnd type="none" w="sm" len="sm"/>
+          </a:ln>
+        </p:spPr>
+      </p:cxnSp>
+      <p:cxnSp>
+        <p:nvCxnSpPr>
+          <p:cNvPr id="267" name="Google Shape;267;p22"/>
+          <p:cNvCxnSpPr/>
+          <p:nvPr/>
+        </p:nvCxnSpPr>
+        <p:spPr>
+          <a:xfrm rot="10800000">
+            <a:off x="6096000" y="0"/>
+            <a:ext cx="12700" cy="6859420"/>
+          </a:xfrm>
+          <a:prstGeom prst="straightConnector1">
+            <a:avLst/>
+          </a:prstGeom>
+          <a:noFill/>
+          <a:ln w="19050" cap="flat" cmpd="sng">
+            <a:solidFill>
+              <a:srgbClr val="000000"/>
+            </a:solidFill>
+            <a:prstDash val="solid"/>
+            <a:round/>
+            <a:headEnd type="none" w="sm" len="sm"/>
+            <a:tailEnd type="none" w="sm" len="sm"/>
+          </a:ln>
+        </p:spPr>
+      </p:cxnSp>
+      <p:sp>
+        <p:nvSpPr>
+          <p:cNvPr id="268" name="Google Shape;268;p22"/>
+          <p:cNvSpPr txBox="1"/>
+          <p:nvPr/>
+        </p:nvSpPr>
+        <p:spPr>
+          <a:xfrm>
+            <a:off x="610277" y="585856"/>
+            <a:ext cx="4863193" cy="2031325"/>
+          </a:xfrm>
+          <a:prstGeom prst="rect">
+            <a:avLst/>
+          </a:prstGeom>
+          <a:noFill/>
+          <a:ln>
+            <a:noFill/>
+          </a:ln>
+        </p:spPr>
+        <p:txBody>
+          <a:bodyPr spcFirstLastPara="1" wrap="square" lIns="0" tIns="0" rIns="0" bIns="0" anchor="t" anchorCtr="0">
+            <a:spAutoFit/>
+          </a:bodyPr>
+          <a:lstStyle/>
+          <a:p>
+            <a:pPr algn="ctr"/>
+            <a:r>
+              <a:rPr lang="en-US" sz="6600" dirty="0"/>
+              <a:t>Stroke Class Distribution</a:t>
+            </a:r>
+            <a:endParaRPr sz="1200" dirty="0"/>
           </a:p>
         </p:txBody>
       </p:sp>
       <p:pic>
         <p:nvPicPr>
-          <p:cNvPr id="4" name="Picture 3">
-            <a:extLst>
-              <a:ext uri="{FF2B5EF4-FFF2-40B4-BE49-F238E27FC236}">
-                <a16:creationId xmlns:a16="http://schemas.microsoft.com/office/drawing/2014/main" id="{576EB070-C1B4-0D9E-118D-8F3F0CD3CDF4}"/>
+          <p:cNvPr id="2" name="Picture 1">
+            <a:extLst>
+              <a:ext uri="{FF2B5EF4-FFF2-40B4-BE49-F238E27FC236}">
+                <a16:creationId xmlns:a16="http://schemas.microsoft.com/office/drawing/2014/main" id="{71A07D56-E8C5-9FF7-C661-6D8888A99021}"/>
               </a:ext>
             </a:extLst>
           </p:cNvPr>
@@ -5395,7 +8672,7 @@
           <p:nvPr/>
         </p:nvPicPr>
         <p:blipFill>
-          <a:blip r:embed="rId2">
+          <a:blip r:embed="rId4">
             <a:extLst>
               <a:ext uri="{28A0092B-C50C-407E-A947-70E740481C1C}">
                 <a14:useLocalDpi xmlns:a14="http://schemas.microsoft.com/office/drawing/2010/main" val="0"/>
@@ -5408,33 +8685,122 @@
         </p:blipFill>
         <p:spPr>
           <a:xfrm>
-            <a:off x="1777792" y="1839434"/>
-            <a:ext cx="8597669" cy="4653442"/>
+            <a:off x="1042211" y="3573829"/>
+            <a:ext cx="3999323" cy="3137400"/>
           </a:xfrm>
           <a:prstGeom prst="rect">
             <a:avLst/>
           </a:prstGeom>
+          <a:ln w="19050">
+            <a:solidFill>
+              <a:schemeClr val="tx1"/>
+            </a:solidFill>
+          </a:ln>
         </p:spPr>
       </p:pic>
+      <p:sp>
+        <p:nvSpPr>
+          <p:cNvPr id="3" name="TextBox 2">
+            <a:extLst>
+              <a:ext uri="{FF2B5EF4-FFF2-40B4-BE49-F238E27FC236}">
+                <a16:creationId xmlns:a16="http://schemas.microsoft.com/office/drawing/2014/main" id="{AD85F488-7E4C-8F44-ED85-A8704FF7952D}"/>
+              </a:ext>
+            </a:extLst>
+          </p:cNvPr>
+          <p:cNvSpPr txBox="1"/>
+          <p:nvPr/>
+        </p:nvSpPr>
+        <p:spPr>
+          <a:xfrm>
+            <a:off x="7957786" y="4540161"/>
+            <a:ext cx="2725810" cy="1200329"/>
+          </a:xfrm>
+          <a:prstGeom prst="rect">
+            <a:avLst/>
+          </a:prstGeom>
+          <a:noFill/>
+        </p:spPr>
+        <p:txBody>
+          <a:bodyPr wrap="square" rtlCol="0">
+            <a:spAutoFit/>
+          </a:bodyPr>
+          <a:lstStyle/>
+          <a:p>
+            <a:r>
+              <a:rPr lang="en-US" dirty="0"/>
+              <a:t>Percentage distribution: Class	      	      % </a:t>
+            </a:r>
+          </a:p>
+          <a:p>
+            <a:r>
+              <a:rPr lang="en-US" dirty="0"/>
+              <a:t>0 (No stroke)	 95.13</a:t>
+            </a:r>
+          </a:p>
+          <a:p>
+            <a:r>
+              <a:rPr lang="en-US" dirty="0"/>
+              <a:t>1 (Stroke)	 4.87</a:t>
+            </a:r>
+          </a:p>
+        </p:txBody>
+      </p:sp>
+      <p:sp>
+        <p:nvSpPr>
+          <p:cNvPr id="4" name="TextBox 3">
+            <a:extLst>
+              <a:ext uri="{FF2B5EF4-FFF2-40B4-BE49-F238E27FC236}">
+                <a16:creationId xmlns:a16="http://schemas.microsoft.com/office/drawing/2014/main" id="{C590DB31-32DA-7922-B217-9A1505A0685E}"/>
+              </a:ext>
+            </a:extLst>
+          </p:cNvPr>
+          <p:cNvSpPr txBox="1"/>
+          <p:nvPr/>
+        </p:nvSpPr>
+        <p:spPr>
+          <a:xfrm>
+            <a:off x="6874212" y="1117510"/>
+            <a:ext cx="4695257" cy="646331"/>
+          </a:xfrm>
+          <a:prstGeom prst="rect">
+            <a:avLst/>
+          </a:prstGeom>
+          <a:noFill/>
+        </p:spPr>
+        <p:txBody>
+          <a:bodyPr wrap="square" rtlCol="0">
+            <a:spAutoFit/>
+          </a:bodyPr>
+          <a:lstStyle/>
+          <a:p>
+            <a:pPr marL="571500" indent="-571500">
+              <a:buFont typeface="Arial" panose="020B0604020202020204" pitchFamily="34" charset="0"/>
+              <a:buChar char="•"/>
+            </a:pPr>
+            <a:r>
+              <a:rPr lang="en-US" dirty="0"/>
+              <a:t>The dataset is highly imbalanced (5% positive class)</a:t>
+            </a:r>
+          </a:p>
+        </p:txBody>
+      </p:sp>
     </p:spTree>
-    <p:extLst>
-      <p:ext uri="{BB962C8B-B14F-4D97-AF65-F5344CB8AC3E}">
-        <p14:creationId xmlns:p14="http://schemas.microsoft.com/office/powerpoint/2010/main" val="1187541308"/>
-      </p:ext>
-    </p:extLst>
   </p:cSld>
   <p:clrMapOvr>
     <a:masterClrMapping/>
   </p:clrMapOvr>
+  <p:transition>
+    <p:push/>
+  </p:transition>
 </p:sld>
 </file>
 
-<file path=ppt/slides/slide7.xml><?xml version="1.0" encoding="utf-8"?>
+<file path=ppt/slides/slide6.xml><?xml version="1.0" encoding="utf-8"?>
 <p:sld xmlns:a="http://schemas.openxmlformats.org/drawingml/2006/main" xmlns:r="http://schemas.openxmlformats.org/officeDocument/2006/relationships" xmlns:p="http://schemas.openxmlformats.org/presentationml/2006/main">
   <p:cSld>
     <p:spTree>
       <p:nvGrpSpPr>
-        <p:cNvPr id="1" name=""/>
+        <p:cNvPr id="1" name="Shape 274"/>
         <p:cNvGrpSpPr/>
         <p:nvPr/>
       </p:nvGrpSpPr>
@@ -5448,110 +8814,149 @@
       </p:grpSpPr>
       <p:sp>
         <p:nvSpPr>
-          <p:cNvPr id="2" name="Title 1">
-            <a:extLst>
-              <a:ext uri="{FF2B5EF4-FFF2-40B4-BE49-F238E27FC236}">
-                <a16:creationId xmlns:a16="http://schemas.microsoft.com/office/drawing/2014/main" id="{8D57C393-384C-21C7-9583-BD885425F068}"/>
-              </a:ext>
-            </a:extLst>
-          </p:cNvPr>
-          <p:cNvSpPr>
-            <a:spLocks noGrp="1"/>
-          </p:cNvSpPr>
-          <p:nvPr>
-            <p:ph type="title"/>
-          </p:nvPr>
-        </p:nvSpPr>
-        <p:spPr/>
+          <p:cNvPr id="275" name="Google Shape;275;p23"/>
+          <p:cNvSpPr/>
+          <p:nvPr/>
+        </p:nvSpPr>
+        <p:spPr>
+          <a:xfrm>
+            <a:off x="0" y="0"/>
+            <a:ext cx="12192000" cy="6858000"/>
+          </a:xfrm>
+          <a:custGeom>
+            <a:avLst/>
+            <a:gdLst/>
+            <a:ahLst/>
+            <a:cxnLst/>
+            <a:rect l="l" t="t" r="r" b="b"/>
+            <a:pathLst>
+              <a:path w="18288000" h="10287000" extrusionOk="0">
+                <a:moveTo>
+                  <a:pt x="0" y="0"/>
+                </a:moveTo>
+                <a:lnTo>
+                  <a:pt x="18288000" y="0"/>
+                </a:lnTo>
+                <a:lnTo>
+                  <a:pt x="18288000" y="10287000"/>
+                </a:lnTo>
+                <a:lnTo>
+                  <a:pt x="0" y="10287000"/>
+                </a:lnTo>
+                <a:lnTo>
+                  <a:pt x="0" y="0"/>
+                </a:lnTo>
+                <a:close/>
+              </a:path>
+            </a:pathLst>
+          </a:custGeom>
+          <a:blipFill rotWithShape="1">
+            <a:blip r:embed="rId3">
+              <a:alphaModFix/>
+            </a:blip>
+            <a:stretch>
+              <a:fillRect t="-20652" r="-1236" b="-11174"/>
+            </a:stretch>
+          </a:blipFill>
+          <a:ln>
+            <a:noFill/>
+          </a:ln>
+        </p:spPr>
         <p:txBody>
           <a:bodyPr/>
           <a:lstStyle/>
           <a:p>
-            <a:r>
-              <a:rPr lang="en-US" dirty="0"/>
-              <a:t>Box Plot by Class</a:t>
-            </a:r>
+            <a:endParaRPr lang="en-CA" sz="1200"/>
+          </a:p>
+        </p:txBody>
+      </p:sp>
+      <p:cxnSp>
+        <p:nvCxnSpPr>
+          <p:cNvPr id="277" name="Google Shape;277;p23"/>
+          <p:cNvCxnSpPr/>
+          <p:nvPr/>
+        </p:nvCxnSpPr>
+        <p:spPr>
+          <a:xfrm rot="10800000">
+            <a:off x="8034163" y="-10202"/>
+            <a:ext cx="12700" cy="6859420"/>
+          </a:xfrm>
+          <a:prstGeom prst="straightConnector1">
+            <a:avLst/>
+          </a:prstGeom>
+          <a:noFill/>
+          <a:ln w="19050" cap="flat" cmpd="sng">
+            <a:solidFill>
+              <a:srgbClr val="000000"/>
+            </a:solidFill>
+            <a:prstDash val="solid"/>
+            <a:round/>
+            <a:headEnd type="none" w="sm" len="sm"/>
+            <a:tailEnd type="none" w="sm" len="sm"/>
+          </a:ln>
+        </p:spPr>
+      </p:cxnSp>
+      <p:sp>
+        <p:nvSpPr>
+          <p:cNvPr id="278" name="Google Shape;278;p23"/>
+          <p:cNvSpPr txBox="1"/>
+          <p:nvPr/>
+        </p:nvSpPr>
+        <p:spPr>
+          <a:xfrm>
+            <a:off x="7514014" y="977462"/>
+            <a:ext cx="5161461" cy="1231106"/>
+          </a:xfrm>
+          <a:prstGeom prst="rect">
+            <a:avLst/>
+          </a:prstGeom>
+          <a:noFill/>
+          <a:ln>
+            <a:noFill/>
+          </a:ln>
+        </p:spPr>
+        <p:txBody>
+          <a:bodyPr spcFirstLastPara="1" wrap="square" lIns="0" tIns="0" rIns="0" bIns="0" anchor="t" anchorCtr="0">
+            <a:spAutoFit/>
+          </a:bodyPr>
+          <a:lstStyle/>
+          <a:p>
+            <a:pPr algn="ctr"/>
+            <a:r>
+              <a:rPr lang="en-US" sz="4000" b="1" dirty="0">
+                <a:solidFill>
+                  <a:srgbClr val="000000"/>
+                </a:solidFill>
+                <a:latin typeface="DM Sans"/>
+                <a:ea typeface="DM Sans"/>
+                <a:cs typeface="DM Sans"/>
+                <a:sym typeface="DM Sans"/>
+              </a:rPr>
+              <a:t>Normalized</a:t>
+            </a:r>
+          </a:p>
+          <a:p>
+            <a:pPr algn="ctr"/>
+            <a:r>
+              <a:rPr lang="en-US" sz="4000" b="1" dirty="0">
+                <a:solidFill>
+                  <a:srgbClr val="000000"/>
+                </a:solidFill>
+                <a:latin typeface="DM Sans"/>
+                <a:sym typeface="DM Sans"/>
+              </a:rPr>
+              <a:t>Box Plot</a:t>
+            </a:r>
+            <a:endParaRPr sz="4000" dirty="0"/>
           </a:p>
         </p:txBody>
       </p:sp>
       <p:pic>
         <p:nvPicPr>
-          <p:cNvPr id="4" name="Picture 3">
-            <a:extLst>
-              <a:ext uri="{FF2B5EF4-FFF2-40B4-BE49-F238E27FC236}">
-                <a16:creationId xmlns:a16="http://schemas.microsoft.com/office/drawing/2014/main" id="{858E656D-BAC2-BCA8-74AB-AE92C2A52B7C}"/>
-              </a:ext>
-            </a:extLst>
-          </p:cNvPr>
-          <p:cNvPicPr>
-            <a:picLocks noChangeAspect="1"/>
-          </p:cNvPicPr>
-          <p:nvPr/>
-        </p:nvPicPr>
-        <p:blipFill>
-          <a:blip r:embed="rId2">
-            <a:extLst>
-              <a:ext uri="{28A0092B-C50C-407E-A947-70E740481C1C}">
-                <a14:useLocalDpi xmlns:a14="http://schemas.microsoft.com/office/drawing/2010/main" val="0"/>
-              </a:ext>
-            </a:extLst>
-          </a:blip>
-          <a:stretch>
-            <a:fillRect/>
-          </a:stretch>
-        </p:blipFill>
-        <p:spPr>
-          <a:xfrm>
-            <a:off x="325140" y="1853534"/>
-            <a:ext cx="3437272" cy="2543969"/>
-          </a:xfrm>
-          <a:prstGeom prst="rect">
-            <a:avLst/>
-          </a:prstGeom>
-        </p:spPr>
-      </p:pic>
-      <p:pic>
-        <p:nvPicPr>
-          <p:cNvPr id="6" name="Picture 5">
-            <a:extLst>
-              <a:ext uri="{FF2B5EF4-FFF2-40B4-BE49-F238E27FC236}">
-                <a16:creationId xmlns:a16="http://schemas.microsoft.com/office/drawing/2014/main" id="{F6D7F127-7CFF-D693-1011-280CD6380DBB}"/>
-              </a:ext>
-            </a:extLst>
-          </p:cNvPr>
-          <p:cNvPicPr>
-            <a:picLocks noChangeAspect="1"/>
-          </p:cNvPicPr>
-          <p:nvPr/>
-        </p:nvPicPr>
-        <p:blipFill>
-          <a:blip r:embed="rId3">
-            <a:extLst>
-              <a:ext uri="{28A0092B-C50C-407E-A947-70E740481C1C}">
-                <a14:useLocalDpi xmlns:a14="http://schemas.microsoft.com/office/drawing/2010/main" val="0"/>
-              </a:ext>
-            </a:extLst>
-          </a:blip>
-          <a:stretch>
-            <a:fillRect/>
-          </a:stretch>
-        </p:blipFill>
-        <p:spPr>
-          <a:xfrm>
-            <a:off x="3762412" y="1811114"/>
-            <a:ext cx="3854805" cy="2805441"/>
-          </a:xfrm>
-          <a:prstGeom prst="rect">
-            <a:avLst/>
-          </a:prstGeom>
-        </p:spPr>
-      </p:pic>
-      <p:pic>
-        <p:nvPicPr>
-          <p:cNvPr id="8" name="Picture 7">
-            <a:extLst>
-              <a:ext uri="{FF2B5EF4-FFF2-40B4-BE49-F238E27FC236}">
-                <a16:creationId xmlns:a16="http://schemas.microsoft.com/office/drawing/2014/main" id="{63689DEB-E838-7006-4D44-F5CD99529BE1}"/>
+          <p:cNvPr id="2" name="Picture 1">
+            <a:extLst>
+              <a:ext uri="{FF2B5EF4-FFF2-40B4-BE49-F238E27FC236}">
+                <a16:creationId xmlns:a16="http://schemas.microsoft.com/office/drawing/2014/main" id="{3013F98F-F016-44BD-F010-15306E3E37AC}"/>
               </a:ext>
             </a:extLst>
           </p:cNvPr>
@@ -5574,33 +8979,92 @@
         </p:blipFill>
         <p:spPr>
           <a:xfrm>
-            <a:off x="7617216" y="1825430"/>
-            <a:ext cx="3653295" cy="2658787"/>
+            <a:off x="298261" y="1430141"/>
+            <a:ext cx="7351082" cy="3978734"/>
           </a:xfrm>
           <a:prstGeom prst="rect">
             <a:avLst/>
           </a:prstGeom>
+          <a:noFill/>
+          <a:ln w="19050">
+            <a:solidFill>
+              <a:schemeClr val="tx1"/>
+            </a:solidFill>
+          </a:ln>
         </p:spPr>
       </p:pic>
+      <p:sp>
+        <p:nvSpPr>
+          <p:cNvPr id="3" name="TextBox 2">
+            <a:extLst>
+              <a:ext uri="{FF2B5EF4-FFF2-40B4-BE49-F238E27FC236}">
+                <a16:creationId xmlns:a16="http://schemas.microsoft.com/office/drawing/2014/main" id="{4D96EB63-2418-7F70-8C36-AF98EA97CC75}"/>
+              </a:ext>
+            </a:extLst>
+          </p:cNvPr>
+          <p:cNvSpPr txBox="1"/>
+          <p:nvPr/>
+        </p:nvSpPr>
+        <p:spPr>
+          <a:xfrm>
+            <a:off x="8555421" y="3037490"/>
+            <a:ext cx="2938515" cy="1754326"/>
+          </a:xfrm>
+          <a:prstGeom prst="rect">
+            <a:avLst/>
+          </a:prstGeom>
+          <a:noFill/>
+        </p:spPr>
+        <p:txBody>
+          <a:bodyPr wrap="square" rtlCol="0">
+            <a:spAutoFit/>
+          </a:bodyPr>
+          <a:lstStyle/>
+          <a:p>
+            <a:pPr marL="285750" indent="-285750">
+              <a:buFontTx/>
+              <a:buChar char="-"/>
+            </a:pPr>
+            <a:r>
+              <a:rPr lang="en-CA" dirty="0"/>
+              <a:t>Note how age is largely devoid of outliers, but glucose and BMI are not</a:t>
+            </a:r>
+          </a:p>
+          <a:p>
+            <a:pPr marL="285750" indent="-285750">
+              <a:buFontTx/>
+              <a:buChar char="-"/>
+            </a:pPr>
+            <a:r>
+              <a:rPr lang="en-CA" dirty="0"/>
+              <a:t>How does age affect these factors, and how resilient they are?</a:t>
+            </a:r>
+          </a:p>
+        </p:txBody>
+      </p:sp>
     </p:spTree>
-    <p:extLst>
-      <p:ext uri="{BB962C8B-B14F-4D97-AF65-F5344CB8AC3E}">
-        <p14:creationId xmlns:p14="http://schemas.microsoft.com/office/powerpoint/2010/main" val="3816312345"/>
-      </p:ext>
-    </p:extLst>
   </p:cSld>
   <p:clrMapOvr>
     <a:masterClrMapping/>
   </p:clrMapOvr>
+  <p:transition>
+    <p:push/>
+  </p:transition>
 </p:sld>
 </file>
 
-<file path=ppt/slides/slide8.xml><?xml version="1.0" encoding="utf-8"?>
+<file path=ppt/slides/slide7.xml><?xml version="1.0" encoding="utf-8"?>
 <p:sld xmlns:a="http://schemas.openxmlformats.org/drawingml/2006/main" xmlns:r="http://schemas.openxmlformats.org/officeDocument/2006/relationships" xmlns:p="http://schemas.openxmlformats.org/presentationml/2006/main">
   <p:cSld>
     <p:spTree>
       <p:nvGrpSpPr>
-        <p:cNvPr id="1" name=""/>
+        <p:cNvPr id="1" name="Shape 263">
+          <a:extLst>
+            <a:ext uri="{FF2B5EF4-FFF2-40B4-BE49-F238E27FC236}">
+              <a16:creationId xmlns:a16="http://schemas.microsoft.com/office/drawing/2014/main" id="{947DD4A1-7A93-C10E-5A07-4EC5C681639F}"/>
+            </a:ext>
+          </a:extLst>
+        </p:cNvPr>
         <p:cNvGrpSpPr/>
         <p:nvPr/>
       </p:nvGrpSpPr>
@@ -5614,43 +9078,178 @@
       </p:grpSpPr>
       <p:sp>
         <p:nvSpPr>
-          <p:cNvPr id="2" name="Title 1">
-            <a:extLst>
-              <a:ext uri="{FF2B5EF4-FFF2-40B4-BE49-F238E27FC236}">
-                <a16:creationId xmlns:a16="http://schemas.microsoft.com/office/drawing/2014/main" id="{7265E4E6-FAAA-7E9D-7F63-701795397158}"/>
-              </a:ext>
-            </a:extLst>
-          </p:cNvPr>
-          <p:cNvSpPr>
-            <a:spLocks noGrp="1"/>
-          </p:cNvSpPr>
-          <p:nvPr>
-            <p:ph type="title"/>
-          </p:nvPr>
-        </p:nvSpPr>
-        <p:spPr>
-          <a:xfrm>
-            <a:off x="838200" y="365125"/>
-            <a:ext cx="10515600" cy="910893"/>
-          </a:xfrm>
+          <p:cNvPr id="264" name="Google Shape;264;p22">
+            <a:extLst>
+              <a:ext uri="{FF2B5EF4-FFF2-40B4-BE49-F238E27FC236}">
+                <a16:creationId xmlns:a16="http://schemas.microsoft.com/office/drawing/2014/main" id="{EBFD45E9-ADE4-AC8A-B210-9D09ADFCCFDC}"/>
+              </a:ext>
+            </a:extLst>
+          </p:cNvPr>
+          <p:cNvSpPr/>
+          <p:nvPr/>
+        </p:nvSpPr>
+        <p:spPr>
+          <a:xfrm>
+            <a:off x="0" y="0"/>
+            <a:ext cx="12192000" cy="6858000"/>
+          </a:xfrm>
+          <a:custGeom>
+            <a:avLst/>
+            <a:gdLst/>
+            <a:ahLst/>
+            <a:cxnLst/>
+            <a:rect l="l" t="t" r="r" b="b"/>
+            <a:pathLst>
+              <a:path w="18288000" h="10287000" extrusionOk="0">
+                <a:moveTo>
+                  <a:pt x="0" y="0"/>
+                </a:moveTo>
+                <a:lnTo>
+                  <a:pt x="18288000" y="0"/>
+                </a:lnTo>
+                <a:lnTo>
+                  <a:pt x="18288000" y="10287000"/>
+                </a:lnTo>
+                <a:lnTo>
+                  <a:pt x="0" y="10287000"/>
+                </a:lnTo>
+                <a:lnTo>
+                  <a:pt x="0" y="0"/>
+                </a:lnTo>
+                <a:close/>
+              </a:path>
+            </a:pathLst>
+          </a:custGeom>
+          <a:blipFill rotWithShape="1">
+            <a:blip r:embed="rId3">
+              <a:alphaModFix/>
+            </a:blip>
+            <a:stretch>
+              <a:fillRect t="-20652" r="-1236" b="-11174"/>
+            </a:stretch>
+          </a:blipFill>
+          <a:ln>
+            <a:noFill/>
+          </a:ln>
         </p:spPr>
         <p:txBody>
           <a:bodyPr/>
           <a:lstStyle/>
           <a:p>
-            <a:r>
-              <a:rPr lang="en-US" dirty="0"/>
-              <a:t>Correlation</a:t>
-            </a:r>
+            <a:endParaRPr lang="en-CA" sz="1200" dirty="0"/>
+          </a:p>
+        </p:txBody>
+      </p:sp>
+      <p:cxnSp>
+        <p:nvCxnSpPr>
+          <p:cNvPr id="266" name="Google Shape;266;p22">
+            <a:extLst>
+              <a:ext uri="{FF2B5EF4-FFF2-40B4-BE49-F238E27FC236}">
+                <a16:creationId xmlns:a16="http://schemas.microsoft.com/office/drawing/2014/main" id="{4720075E-3549-58CE-84BB-F4BF021C35F2}"/>
+              </a:ext>
+            </a:extLst>
+          </p:cNvPr>
+          <p:cNvCxnSpPr/>
+          <p:nvPr/>
+        </p:nvCxnSpPr>
+        <p:spPr>
+          <a:xfrm rot="10800000">
+            <a:off x="-63217" y="3422650"/>
+            <a:ext cx="12293931" cy="0"/>
+          </a:xfrm>
+          <a:prstGeom prst="straightConnector1">
+            <a:avLst/>
+          </a:prstGeom>
+          <a:noFill/>
+          <a:ln w="19050" cap="flat" cmpd="sng">
+            <a:solidFill>
+              <a:srgbClr val="000000"/>
+            </a:solidFill>
+            <a:prstDash val="solid"/>
+            <a:round/>
+            <a:headEnd type="none" w="sm" len="sm"/>
+            <a:tailEnd type="none" w="sm" len="sm"/>
+          </a:ln>
+        </p:spPr>
+      </p:cxnSp>
+      <p:cxnSp>
+        <p:nvCxnSpPr>
+          <p:cNvPr id="267" name="Google Shape;267;p22">
+            <a:extLst>
+              <a:ext uri="{FF2B5EF4-FFF2-40B4-BE49-F238E27FC236}">
+                <a16:creationId xmlns:a16="http://schemas.microsoft.com/office/drawing/2014/main" id="{60A48628-491D-52BC-6A6C-51D0ABB32F30}"/>
+              </a:ext>
+            </a:extLst>
+          </p:cNvPr>
+          <p:cNvCxnSpPr/>
+          <p:nvPr/>
+        </p:nvCxnSpPr>
+        <p:spPr>
+          <a:xfrm rot="10800000">
+            <a:off x="6096000" y="0"/>
+            <a:ext cx="12700" cy="6859420"/>
+          </a:xfrm>
+          <a:prstGeom prst="straightConnector1">
+            <a:avLst/>
+          </a:prstGeom>
+          <a:noFill/>
+          <a:ln w="19050" cap="flat" cmpd="sng">
+            <a:solidFill>
+              <a:srgbClr val="000000"/>
+            </a:solidFill>
+            <a:prstDash val="solid"/>
+            <a:round/>
+            <a:headEnd type="none" w="sm" len="sm"/>
+            <a:tailEnd type="none" w="sm" len="sm"/>
+          </a:ln>
+        </p:spPr>
+      </p:cxnSp>
+      <p:sp>
+        <p:nvSpPr>
+          <p:cNvPr id="268" name="Google Shape;268;p22">
+            <a:extLst>
+              <a:ext uri="{FF2B5EF4-FFF2-40B4-BE49-F238E27FC236}">
+                <a16:creationId xmlns:a16="http://schemas.microsoft.com/office/drawing/2014/main" id="{2C79D34E-94D8-D801-ABDE-B73F1E41CFCB}"/>
+              </a:ext>
+            </a:extLst>
+          </p:cNvPr>
+          <p:cNvSpPr txBox="1"/>
+          <p:nvPr/>
+        </p:nvSpPr>
+        <p:spPr>
+          <a:xfrm>
+            <a:off x="610277" y="585856"/>
+            <a:ext cx="4863193" cy="2031325"/>
+          </a:xfrm>
+          <a:prstGeom prst="rect">
+            <a:avLst/>
+          </a:prstGeom>
+          <a:noFill/>
+          <a:ln>
+            <a:noFill/>
+          </a:ln>
+        </p:spPr>
+        <p:txBody>
+          <a:bodyPr spcFirstLastPara="1" wrap="square" lIns="0" tIns="0" rIns="0" bIns="0" anchor="t" anchorCtr="0">
+            <a:spAutoFit/>
+          </a:bodyPr>
+          <a:lstStyle/>
+          <a:p>
+            <a:pPr algn="ctr"/>
+            <a:r>
+              <a:rPr lang="en-US" sz="6600" dirty="0"/>
+              <a:t>Bar Plot by Class</a:t>
+            </a:r>
+            <a:endParaRPr sz="1200" dirty="0"/>
           </a:p>
         </p:txBody>
       </p:sp>
       <p:pic>
         <p:nvPicPr>
-          <p:cNvPr id="4" name="Picture 3">
-            <a:extLst>
-              <a:ext uri="{FF2B5EF4-FFF2-40B4-BE49-F238E27FC236}">
-                <a16:creationId xmlns:a16="http://schemas.microsoft.com/office/drawing/2014/main" id="{10460AC3-D760-3A84-D680-B75A6A3E99F4}"/>
+          <p:cNvPr id="5" name="Picture 4">
+            <a:extLst>
+              <a:ext uri="{FF2B5EF4-FFF2-40B4-BE49-F238E27FC236}">
+                <a16:creationId xmlns:a16="http://schemas.microsoft.com/office/drawing/2014/main" id="{B6F19372-0553-7137-2291-67799FF3C010}"/>
               </a:ext>
             </a:extLst>
           </p:cNvPr>
@@ -5660,7 +9259,7 @@
           <p:nvPr/>
         </p:nvPicPr>
         <p:blipFill>
-          <a:blip r:embed="rId2">
+          <a:blip r:embed="rId4">
             <a:extLst>
               <a:ext uri="{28A0092B-C50C-407E-A947-70E740481C1C}">
                 <a14:useLocalDpi xmlns:a14="http://schemas.microsoft.com/office/drawing/2010/main" val="0"/>
@@ -5673,12 +9272,17 @@
         </p:blipFill>
         <p:spPr>
           <a:xfrm>
-            <a:off x="5943601" y="1584250"/>
-            <a:ext cx="5748730" cy="4992113"/>
+            <a:off x="1150323" y="3809474"/>
+            <a:ext cx="3437272" cy="2543969"/>
           </a:xfrm>
           <a:prstGeom prst="rect">
             <a:avLst/>
           </a:prstGeom>
+          <a:ln w="19050">
+            <a:solidFill>
+              <a:srgbClr val="000000"/>
+            </a:solidFill>
+          </a:ln>
         </p:spPr>
       </p:pic>
       <p:pic>
@@ -5686,7 +9290,7 @@
           <p:cNvPr id="6" name="Picture 5">
             <a:extLst>
               <a:ext uri="{FF2B5EF4-FFF2-40B4-BE49-F238E27FC236}">
-                <a16:creationId xmlns:a16="http://schemas.microsoft.com/office/drawing/2014/main" id="{0233239C-F206-BA47-1204-1CE55B34386C}"/>
+                <a16:creationId xmlns:a16="http://schemas.microsoft.com/office/drawing/2014/main" id="{BF2D48C9-B9D9-3D2B-9218-FC264F29C9D4}"/>
               </a:ext>
             </a:extLst>
           </p:cNvPr>
@@ -5696,7 +9300,7 @@
           <p:nvPr/>
         </p:nvPicPr>
         <p:blipFill>
-          <a:blip r:embed="rId3">
+          <a:blip r:embed="rId5">
             <a:extLst>
               <a:ext uri="{28A0092B-C50C-407E-A947-70E740481C1C}">
                 <a14:useLocalDpi xmlns:a14="http://schemas.microsoft.com/office/drawing/2010/main" val="0"/>
@@ -5709,33 +9313,88 @@
         </p:blipFill>
         <p:spPr>
           <a:xfrm>
-            <a:off x="172409" y="1714041"/>
-            <a:ext cx="5923591" cy="5143959"/>
+            <a:off x="7466260" y="3809474"/>
+            <a:ext cx="3626836" cy="2639530"/>
           </a:xfrm>
           <a:prstGeom prst="rect">
             <a:avLst/>
           </a:prstGeom>
+          <a:ln w="19050">
+            <a:solidFill>
+              <a:srgbClr val="000000"/>
+            </a:solidFill>
+          </a:ln>
+        </p:spPr>
+      </p:pic>
+      <p:pic>
+        <p:nvPicPr>
+          <p:cNvPr id="7" name="Picture 6">
+            <a:extLst>
+              <a:ext uri="{FF2B5EF4-FFF2-40B4-BE49-F238E27FC236}">
+                <a16:creationId xmlns:a16="http://schemas.microsoft.com/office/drawing/2014/main" id="{0B9634D9-7FC0-117B-8A62-3B88358535A7}"/>
+              </a:ext>
+            </a:extLst>
+          </p:cNvPr>
+          <p:cNvPicPr>
+            <a:picLocks noChangeAspect="1"/>
+          </p:cNvPicPr>
+          <p:nvPr/>
+        </p:nvPicPr>
+        <p:blipFill>
+          <a:blip r:embed="rId6">
+            <a:extLst>
+              <a:ext uri="{28A0092B-C50C-407E-A947-70E740481C1C}">
+                <a14:useLocalDpi xmlns:a14="http://schemas.microsoft.com/office/drawing/2010/main" val="0"/>
+              </a:ext>
+            </a:extLst>
+          </a:blip>
+          <a:stretch>
+            <a:fillRect/>
+          </a:stretch>
+        </p:blipFill>
+        <p:spPr>
+          <a:xfrm>
+            <a:off x="7466260" y="272124"/>
+            <a:ext cx="3653295" cy="2658787"/>
+          </a:xfrm>
+          <a:prstGeom prst="rect">
+            <a:avLst/>
+          </a:prstGeom>
+          <a:ln w="19050">
+            <a:solidFill>
+              <a:srgbClr val="000000"/>
+            </a:solidFill>
+          </a:ln>
         </p:spPr>
       </p:pic>
     </p:spTree>
     <p:extLst>
       <p:ext uri="{BB962C8B-B14F-4D97-AF65-F5344CB8AC3E}">
-        <p14:creationId xmlns:p14="http://schemas.microsoft.com/office/powerpoint/2010/main" val="3324611659"/>
+        <p14:creationId xmlns:p14="http://schemas.microsoft.com/office/powerpoint/2010/main" val="2137934500"/>
       </p:ext>
     </p:extLst>
   </p:cSld>
   <p:clrMapOvr>
     <a:masterClrMapping/>
   </p:clrMapOvr>
+  <p:transition>
+    <p:push/>
+  </p:transition>
 </p:sld>
 </file>
 
-<file path=ppt/slides/slide9.xml><?xml version="1.0" encoding="utf-8"?>
+<file path=ppt/slides/slide8.xml><?xml version="1.0" encoding="utf-8"?>
 <p:sld xmlns:a="http://schemas.openxmlformats.org/drawingml/2006/main" xmlns:r="http://schemas.openxmlformats.org/officeDocument/2006/relationships" xmlns:p="http://schemas.openxmlformats.org/presentationml/2006/main">
   <p:cSld>
     <p:spTree>
       <p:nvGrpSpPr>
-        <p:cNvPr id="1" name=""/>
+        <p:cNvPr id="1" name="Shape 263">
+          <a:extLst>
+            <a:ext uri="{FF2B5EF4-FFF2-40B4-BE49-F238E27FC236}">
+              <a16:creationId xmlns:a16="http://schemas.microsoft.com/office/drawing/2014/main" id="{1683D3BF-B4ED-42E6-86A6-2A1EAF00F992}"/>
+            </a:ext>
+          </a:extLst>
+        </p:cNvPr>
         <p:cNvGrpSpPr/>
         <p:nvPr/>
       </p:nvGrpSpPr>
@@ -5749,39 +9408,583 @@
       </p:grpSpPr>
       <p:sp>
         <p:nvSpPr>
-          <p:cNvPr id="2" name="Title 1">
-            <a:extLst>
-              <a:ext uri="{FF2B5EF4-FFF2-40B4-BE49-F238E27FC236}">
-                <a16:creationId xmlns:a16="http://schemas.microsoft.com/office/drawing/2014/main" id="{DF05875B-A98D-9A28-D847-8F7CF17E2796}"/>
-              </a:ext>
-            </a:extLst>
-          </p:cNvPr>
-          <p:cNvSpPr>
-            <a:spLocks noGrp="1"/>
-          </p:cNvSpPr>
-          <p:nvPr>
-            <p:ph type="title"/>
-          </p:nvPr>
-        </p:nvSpPr>
-        <p:spPr/>
+          <p:cNvPr id="264" name="Google Shape;264;p22">
+            <a:extLst>
+              <a:ext uri="{FF2B5EF4-FFF2-40B4-BE49-F238E27FC236}">
+                <a16:creationId xmlns:a16="http://schemas.microsoft.com/office/drawing/2014/main" id="{47F06743-0682-79DA-65F4-CB71B094E101}"/>
+              </a:ext>
+            </a:extLst>
+          </p:cNvPr>
+          <p:cNvSpPr/>
+          <p:nvPr/>
+        </p:nvSpPr>
+        <p:spPr>
+          <a:xfrm>
+            <a:off x="0" y="0"/>
+            <a:ext cx="12192000" cy="6858000"/>
+          </a:xfrm>
+          <a:custGeom>
+            <a:avLst/>
+            <a:gdLst/>
+            <a:ahLst/>
+            <a:cxnLst/>
+            <a:rect l="l" t="t" r="r" b="b"/>
+            <a:pathLst>
+              <a:path w="18288000" h="10287000" extrusionOk="0">
+                <a:moveTo>
+                  <a:pt x="0" y="0"/>
+                </a:moveTo>
+                <a:lnTo>
+                  <a:pt x="18288000" y="0"/>
+                </a:lnTo>
+                <a:lnTo>
+                  <a:pt x="18288000" y="10287000"/>
+                </a:lnTo>
+                <a:lnTo>
+                  <a:pt x="0" y="10287000"/>
+                </a:lnTo>
+                <a:lnTo>
+                  <a:pt x="0" y="0"/>
+                </a:lnTo>
+                <a:close/>
+              </a:path>
+            </a:pathLst>
+          </a:custGeom>
+          <a:blipFill rotWithShape="1">
+            <a:blip r:embed="rId3">
+              <a:alphaModFix/>
+            </a:blip>
+            <a:stretch>
+              <a:fillRect t="-20652" r="-1236" b="-11174"/>
+            </a:stretch>
+          </a:blipFill>
+          <a:ln>
+            <a:noFill/>
+          </a:ln>
+        </p:spPr>
         <p:txBody>
           <a:bodyPr/>
           <a:lstStyle/>
           <a:p>
-            <a:endParaRPr lang="en-US"/>
+            <a:endParaRPr lang="en-CA" sz="1200" dirty="0"/>
+          </a:p>
+        </p:txBody>
+      </p:sp>
+      <p:cxnSp>
+        <p:nvCxnSpPr>
+          <p:cNvPr id="266" name="Google Shape;266;p22">
+            <a:extLst>
+              <a:ext uri="{FF2B5EF4-FFF2-40B4-BE49-F238E27FC236}">
+                <a16:creationId xmlns:a16="http://schemas.microsoft.com/office/drawing/2014/main" id="{6C4CB194-3F99-F963-06DC-A6BAC75D6959}"/>
+              </a:ext>
+            </a:extLst>
+          </p:cNvPr>
+          <p:cNvCxnSpPr/>
+          <p:nvPr/>
+        </p:nvCxnSpPr>
+        <p:spPr>
+          <a:xfrm rot="10800000">
+            <a:off x="-274340" y="1619976"/>
+            <a:ext cx="12293931" cy="0"/>
+          </a:xfrm>
+          <a:prstGeom prst="straightConnector1">
+            <a:avLst/>
+          </a:prstGeom>
+          <a:noFill/>
+          <a:ln w="19050" cap="flat" cmpd="sng">
+            <a:solidFill>
+              <a:srgbClr val="000000"/>
+            </a:solidFill>
+            <a:prstDash val="solid"/>
+            <a:round/>
+            <a:headEnd type="none" w="sm" len="sm"/>
+            <a:tailEnd type="none" w="sm" len="sm"/>
+          </a:ln>
+        </p:spPr>
+      </p:cxnSp>
+      <p:cxnSp>
+        <p:nvCxnSpPr>
+          <p:cNvPr id="267" name="Google Shape;267;p22">
+            <a:extLst>
+              <a:ext uri="{FF2B5EF4-FFF2-40B4-BE49-F238E27FC236}">
+                <a16:creationId xmlns:a16="http://schemas.microsoft.com/office/drawing/2014/main" id="{BAA337C0-DD81-20FF-0DC1-703222A2DE86}"/>
+              </a:ext>
+            </a:extLst>
+          </p:cNvPr>
+          <p:cNvCxnSpPr/>
+          <p:nvPr/>
+        </p:nvCxnSpPr>
+        <p:spPr>
+          <a:xfrm rot="10800000">
+            <a:off x="6096000" y="0"/>
+            <a:ext cx="12700" cy="6859420"/>
+          </a:xfrm>
+          <a:prstGeom prst="straightConnector1">
+            <a:avLst/>
+          </a:prstGeom>
+          <a:noFill/>
+          <a:ln w="19050" cap="flat" cmpd="sng">
+            <a:solidFill>
+              <a:srgbClr val="000000"/>
+            </a:solidFill>
+            <a:prstDash val="solid"/>
+            <a:round/>
+            <a:headEnd type="none" w="sm" len="sm"/>
+            <a:tailEnd type="none" w="sm" len="sm"/>
+          </a:ln>
+        </p:spPr>
+      </p:cxnSp>
+      <p:sp>
+        <p:nvSpPr>
+          <p:cNvPr id="268" name="Google Shape;268;p22">
+            <a:extLst>
+              <a:ext uri="{FF2B5EF4-FFF2-40B4-BE49-F238E27FC236}">
+                <a16:creationId xmlns:a16="http://schemas.microsoft.com/office/drawing/2014/main" id="{36797858-C2D6-AD12-CC43-19AC586EB4A4}"/>
+              </a:ext>
+            </a:extLst>
+          </p:cNvPr>
+          <p:cNvSpPr txBox="1"/>
+          <p:nvPr/>
+        </p:nvSpPr>
+        <p:spPr>
+          <a:xfrm>
+            <a:off x="616403" y="215328"/>
+            <a:ext cx="4863193" cy="1231106"/>
+          </a:xfrm>
+          <a:prstGeom prst="rect">
+            <a:avLst/>
+          </a:prstGeom>
+          <a:noFill/>
+          <a:ln>
+            <a:noFill/>
+          </a:ln>
+        </p:spPr>
+        <p:txBody>
+          <a:bodyPr spcFirstLastPara="1" wrap="square" lIns="0" tIns="0" rIns="0" bIns="0" anchor="t" anchorCtr="0">
+            <a:spAutoFit/>
+          </a:bodyPr>
+          <a:lstStyle/>
+          <a:p>
+            <a:pPr algn="ctr"/>
+            <a:r>
+              <a:rPr lang="en-US" sz="4000" dirty="0"/>
+              <a:t>Correlation</a:t>
+            </a:r>
+          </a:p>
+          <a:p>
+            <a:pPr algn="ctr"/>
+            <a:r>
+              <a:rPr lang="en-US" sz="4000" dirty="0"/>
+              <a:t>Plots</a:t>
+            </a:r>
+          </a:p>
+        </p:txBody>
+      </p:sp>
+      <p:pic>
+        <p:nvPicPr>
+          <p:cNvPr id="2" name="Picture 1">
+            <a:extLst>
+              <a:ext uri="{FF2B5EF4-FFF2-40B4-BE49-F238E27FC236}">
+                <a16:creationId xmlns:a16="http://schemas.microsoft.com/office/drawing/2014/main" id="{98E9E19C-C61E-9265-7C44-B705FBED9971}"/>
+              </a:ext>
+            </a:extLst>
+          </p:cNvPr>
+          <p:cNvPicPr>
+            <a:picLocks noChangeAspect="1"/>
+          </p:cNvPicPr>
+          <p:nvPr/>
+        </p:nvPicPr>
+        <p:blipFill>
+          <a:blip r:embed="rId4">
+            <a:extLst>
+              <a:ext uri="{28A0092B-C50C-407E-A947-70E740481C1C}">
+                <a14:useLocalDpi xmlns:a14="http://schemas.microsoft.com/office/drawing/2010/main" val="0"/>
+              </a:ext>
+            </a:extLst>
+          </a:blip>
+          <a:stretch>
+            <a:fillRect/>
+          </a:stretch>
+        </p:blipFill>
+        <p:spPr>
+          <a:xfrm>
+            <a:off x="465688" y="1888443"/>
+            <a:ext cx="5013908" cy="4354004"/>
+          </a:xfrm>
+          <a:prstGeom prst="rect">
+            <a:avLst/>
+          </a:prstGeom>
+          <a:ln w="19050">
+            <a:solidFill>
+              <a:srgbClr val="000000"/>
+            </a:solidFill>
+          </a:ln>
+        </p:spPr>
+      </p:pic>
+      <p:pic>
+        <p:nvPicPr>
+          <p:cNvPr id="3" name="Picture 2">
+            <a:extLst>
+              <a:ext uri="{FF2B5EF4-FFF2-40B4-BE49-F238E27FC236}">
+                <a16:creationId xmlns:a16="http://schemas.microsoft.com/office/drawing/2014/main" id="{F87FEBCD-AFA2-ADAD-BFA3-A9AACDD09556}"/>
+              </a:ext>
+            </a:extLst>
+          </p:cNvPr>
+          <p:cNvPicPr>
+            <a:picLocks noChangeAspect="1"/>
+          </p:cNvPicPr>
+          <p:nvPr/>
+        </p:nvPicPr>
+        <p:blipFill>
+          <a:blip r:embed="rId5">
+            <a:extLst>
+              <a:ext uri="{28A0092B-C50C-407E-A947-70E740481C1C}">
+                <a14:useLocalDpi xmlns:a14="http://schemas.microsoft.com/office/drawing/2010/main" val="0"/>
+              </a:ext>
+            </a:extLst>
+          </a:blip>
+          <a:stretch>
+            <a:fillRect/>
+          </a:stretch>
+        </p:blipFill>
+        <p:spPr>
+          <a:xfrm>
+            <a:off x="6725103" y="1888443"/>
+            <a:ext cx="5013908" cy="4354004"/>
+          </a:xfrm>
+          <a:prstGeom prst="rect">
+            <a:avLst/>
+          </a:prstGeom>
+          <a:ln w="19050">
+            <a:solidFill>
+              <a:srgbClr val="000000"/>
+            </a:solidFill>
+          </a:ln>
+        </p:spPr>
+      </p:pic>
+      <p:sp>
+        <p:nvSpPr>
+          <p:cNvPr id="4" name="TextBox 3">
+            <a:extLst>
+              <a:ext uri="{FF2B5EF4-FFF2-40B4-BE49-F238E27FC236}">
+                <a16:creationId xmlns:a16="http://schemas.microsoft.com/office/drawing/2014/main" id="{BE31FBEF-70B0-2A0D-07F3-5A0102AC4CDC}"/>
+              </a:ext>
+            </a:extLst>
+          </p:cNvPr>
+          <p:cNvSpPr txBox="1"/>
+          <p:nvPr/>
+        </p:nvSpPr>
+        <p:spPr>
+          <a:xfrm>
+            <a:off x="6725103" y="215328"/>
+            <a:ext cx="4850492" cy="923330"/>
+          </a:xfrm>
+          <a:prstGeom prst="rect">
+            <a:avLst/>
+          </a:prstGeom>
+          <a:noFill/>
+        </p:spPr>
+        <p:txBody>
+          <a:bodyPr wrap="square" rtlCol="0">
+            <a:spAutoFit/>
+          </a:bodyPr>
+          <a:lstStyle/>
+          <a:p>
+            <a:pPr marL="285750" indent="-285750">
+              <a:buFontTx/>
+              <a:buChar char="-"/>
+            </a:pPr>
+            <a:r>
+              <a:rPr lang="en-CA" dirty="0"/>
+              <a:t>Spearman (nonlinear) vs Pearson (linear)</a:t>
+            </a:r>
+          </a:p>
+          <a:p>
+            <a:pPr marL="285750" indent="-285750">
+              <a:buFontTx/>
+              <a:buChar char="-"/>
+            </a:pPr>
+            <a:r>
+              <a:rPr lang="en-CA" dirty="0"/>
+              <a:t>Does this suggest non-linear relations between comorbid health factors?</a:t>
+            </a:r>
           </a:p>
         </p:txBody>
       </p:sp>
     </p:spTree>
     <p:extLst>
       <p:ext uri="{BB962C8B-B14F-4D97-AF65-F5344CB8AC3E}">
-        <p14:creationId xmlns:p14="http://schemas.microsoft.com/office/powerpoint/2010/main" val="4063274077"/>
+        <p14:creationId xmlns:p14="http://schemas.microsoft.com/office/powerpoint/2010/main" val="587567508"/>
       </p:ext>
     </p:extLst>
   </p:cSld>
   <p:clrMapOvr>
     <a:masterClrMapping/>
   </p:clrMapOvr>
+  <p:transition>
+    <p:push/>
+  </p:transition>
+</p:sld>
+</file>
+
+<file path=ppt/slides/slide9.xml><?xml version="1.0" encoding="utf-8"?>
+<p:sld xmlns:a="http://schemas.openxmlformats.org/drawingml/2006/main" xmlns:r="http://schemas.openxmlformats.org/officeDocument/2006/relationships" xmlns:p="http://schemas.openxmlformats.org/presentationml/2006/main">
+  <p:cSld>
+    <p:spTree>
+      <p:nvGrpSpPr>
+        <p:cNvPr id="1" name="Shape 274">
+          <a:extLst>
+            <a:ext uri="{FF2B5EF4-FFF2-40B4-BE49-F238E27FC236}">
+              <a16:creationId xmlns:a16="http://schemas.microsoft.com/office/drawing/2014/main" id="{D4560813-2923-7F73-656A-6594E575DBC9}"/>
+            </a:ext>
+          </a:extLst>
+        </p:cNvPr>
+        <p:cNvGrpSpPr/>
+        <p:nvPr/>
+      </p:nvGrpSpPr>
+      <p:grpSpPr>
+        <a:xfrm>
+          <a:off x="0" y="0"/>
+          <a:ext cx="0" cy="0"/>
+          <a:chOff x="0" y="0"/>
+          <a:chExt cx="0" cy="0"/>
+        </a:xfrm>
+      </p:grpSpPr>
+      <p:sp>
+        <p:nvSpPr>
+          <p:cNvPr id="275" name="Google Shape;275;p23">
+            <a:extLst>
+              <a:ext uri="{FF2B5EF4-FFF2-40B4-BE49-F238E27FC236}">
+                <a16:creationId xmlns:a16="http://schemas.microsoft.com/office/drawing/2014/main" id="{D7BB96CD-9DEB-E7E6-42D7-3F1D4400D5E1}"/>
+              </a:ext>
+            </a:extLst>
+          </p:cNvPr>
+          <p:cNvSpPr/>
+          <p:nvPr/>
+        </p:nvSpPr>
+        <p:spPr>
+          <a:xfrm>
+            <a:off x="12700" y="0"/>
+            <a:ext cx="12192000" cy="6858000"/>
+          </a:xfrm>
+          <a:custGeom>
+            <a:avLst/>
+            <a:gdLst/>
+            <a:ahLst/>
+            <a:cxnLst/>
+            <a:rect l="l" t="t" r="r" b="b"/>
+            <a:pathLst>
+              <a:path w="18288000" h="10287000" extrusionOk="0">
+                <a:moveTo>
+                  <a:pt x="0" y="0"/>
+                </a:moveTo>
+                <a:lnTo>
+                  <a:pt x="18288000" y="0"/>
+                </a:lnTo>
+                <a:lnTo>
+                  <a:pt x="18288000" y="10287000"/>
+                </a:lnTo>
+                <a:lnTo>
+                  <a:pt x="0" y="10287000"/>
+                </a:lnTo>
+                <a:lnTo>
+                  <a:pt x="0" y="0"/>
+                </a:lnTo>
+                <a:close/>
+              </a:path>
+            </a:pathLst>
+          </a:custGeom>
+          <a:blipFill rotWithShape="1">
+            <a:blip r:embed="rId3">
+              <a:alphaModFix/>
+            </a:blip>
+            <a:stretch>
+              <a:fillRect t="-20652" r="-1236" b="-11174"/>
+            </a:stretch>
+          </a:blipFill>
+          <a:ln>
+            <a:noFill/>
+          </a:ln>
+        </p:spPr>
+        <p:txBody>
+          <a:bodyPr/>
+          <a:lstStyle/>
+          <a:p>
+            <a:endParaRPr lang="en-CA" sz="1200"/>
+          </a:p>
+        </p:txBody>
+      </p:sp>
+      <p:cxnSp>
+        <p:nvCxnSpPr>
+          <p:cNvPr id="277" name="Google Shape;277;p23">
+            <a:extLst>
+              <a:ext uri="{FF2B5EF4-FFF2-40B4-BE49-F238E27FC236}">
+                <a16:creationId xmlns:a16="http://schemas.microsoft.com/office/drawing/2014/main" id="{CF70B52E-A1F7-3BF5-3764-BF1C1FB04C02}"/>
+              </a:ext>
+            </a:extLst>
+          </p:cNvPr>
+          <p:cNvCxnSpPr/>
+          <p:nvPr/>
+        </p:nvCxnSpPr>
+        <p:spPr>
+          <a:xfrm rot="10800000">
+            <a:off x="6096000" y="0"/>
+            <a:ext cx="12700" cy="6859420"/>
+          </a:xfrm>
+          <a:prstGeom prst="straightConnector1">
+            <a:avLst/>
+          </a:prstGeom>
+          <a:noFill/>
+          <a:ln w="19050" cap="flat" cmpd="sng">
+            <a:solidFill>
+              <a:srgbClr val="000000"/>
+            </a:solidFill>
+            <a:prstDash val="solid"/>
+            <a:round/>
+            <a:headEnd type="none" w="sm" len="sm"/>
+            <a:tailEnd type="none" w="sm" len="sm"/>
+          </a:ln>
+        </p:spPr>
+      </p:cxnSp>
+      <p:sp>
+        <p:nvSpPr>
+          <p:cNvPr id="278" name="Google Shape;278;p23">
+            <a:extLst>
+              <a:ext uri="{FF2B5EF4-FFF2-40B4-BE49-F238E27FC236}">
+                <a16:creationId xmlns:a16="http://schemas.microsoft.com/office/drawing/2014/main" id="{CEC4A98B-F1A1-0DEB-A3FE-E6F2991CED65}"/>
+              </a:ext>
+            </a:extLst>
+          </p:cNvPr>
+          <p:cNvSpPr txBox="1"/>
+          <p:nvPr/>
+        </p:nvSpPr>
+        <p:spPr>
+          <a:xfrm>
+            <a:off x="240527" y="1963861"/>
+            <a:ext cx="5627646" cy="2954655"/>
+          </a:xfrm>
+          <a:prstGeom prst="rect">
+            <a:avLst/>
+          </a:prstGeom>
+          <a:noFill/>
+          <a:ln>
+            <a:noFill/>
+          </a:ln>
+        </p:spPr>
+        <p:txBody>
+          <a:bodyPr spcFirstLastPara="1" wrap="square" lIns="0" tIns="0" rIns="0" bIns="0" anchor="t" anchorCtr="0">
+            <a:spAutoFit/>
+          </a:bodyPr>
+          <a:lstStyle/>
+          <a:p>
+            <a:pPr algn="ctr"/>
+            <a:r>
+              <a:rPr lang="en-US" sz="6400" b="1" dirty="0">
+                <a:solidFill>
+                  <a:srgbClr val="000000"/>
+                </a:solidFill>
+                <a:latin typeface="DM Sans"/>
+                <a:sym typeface="DM Sans"/>
+              </a:rPr>
+              <a:t>Classification Modelling Findings</a:t>
+            </a:r>
+            <a:endParaRPr sz="1200" dirty="0"/>
+          </a:p>
+        </p:txBody>
+      </p:sp>
+      <p:sp>
+        <p:nvSpPr>
+          <p:cNvPr id="279" name="Google Shape;279;p23">
+            <a:extLst>
+              <a:ext uri="{FF2B5EF4-FFF2-40B4-BE49-F238E27FC236}">
+                <a16:creationId xmlns:a16="http://schemas.microsoft.com/office/drawing/2014/main" id="{80C2D2E7-712E-6CB3-00B2-3EA19C4F4F3F}"/>
+              </a:ext>
+            </a:extLst>
+          </p:cNvPr>
+          <p:cNvSpPr txBox="1"/>
+          <p:nvPr/>
+        </p:nvSpPr>
+        <p:spPr>
+          <a:xfrm>
+            <a:off x="6794275" y="1502197"/>
+            <a:ext cx="4712149" cy="4062651"/>
+          </a:xfrm>
+          <a:prstGeom prst="rect">
+            <a:avLst/>
+          </a:prstGeom>
+          <a:noFill/>
+          <a:ln>
+            <a:noFill/>
+          </a:ln>
+        </p:spPr>
+        <p:txBody>
+          <a:bodyPr spcFirstLastPara="1" wrap="square" lIns="0" tIns="0" rIns="0" bIns="0" anchor="t" anchorCtr="0">
+            <a:spAutoFit/>
+          </a:bodyPr>
+          <a:lstStyle/>
+          <a:p>
+            <a:pPr marL="571500" indent="-571500">
+              <a:buFont typeface="Arial" panose="020B0604020202020204" pitchFamily="34" charset="0"/>
+              <a:buChar char="•"/>
+            </a:pPr>
+            <a:r>
+              <a:rPr lang="en-US" sz="2400" dirty="0"/>
+              <a:t>The dataset is highly imbalanced (5% positive class)</a:t>
+            </a:r>
+          </a:p>
+          <a:p>
+            <a:pPr marL="571500" indent="-571500">
+              <a:buFont typeface="Arial" panose="020B0604020202020204" pitchFamily="34" charset="0"/>
+              <a:buChar char="•"/>
+            </a:pPr>
+            <a:r>
+              <a:rPr lang="en-US" sz="2400" dirty="0"/>
+              <a:t>Tree-based models best for imbalanced data. </a:t>
+            </a:r>
+          </a:p>
+          <a:p>
+            <a:pPr marL="571500" indent="-571500">
+              <a:buFont typeface="Arial" panose="020B0604020202020204" pitchFamily="34" charset="0"/>
+              <a:buChar char="•"/>
+            </a:pPr>
+            <a:r>
+              <a:rPr lang="en-US" sz="2400" dirty="0"/>
+              <a:t>Logistic Regression performed well when using balanced class weights. </a:t>
+            </a:r>
+          </a:p>
+          <a:p>
+            <a:pPr marL="571500" indent="-571500">
+              <a:buFont typeface="Arial" panose="020B0604020202020204" pitchFamily="34" charset="0"/>
+              <a:buChar char="•"/>
+            </a:pPr>
+            <a:r>
+              <a:rPr lang="en-US" sz="2400" dirty="0"/>
+              <a:t>Therefore, three models were selected for the analysis: </a:t>
+            </a:r>
+            <a:r>
+              <a:rPr lang="en-US" sz="2400" dirty="0" err="1"/>
+              <a:t>XGBoost</a:t>
+            </a:r>
+            <a:r>
+              <a:rPr lang="en-US" sz="2400" dirty="0"/>
+              <a:t>, Random Forest, and Logistic Regression.</a:t>
+            </a:r>
+          </a:p>
+        </p:txBody>
+      </p:sp>
+    </p:spTree>
+    <p:extLst>
+      <p:ext uri="{BB962C8B-B14F-4D97-AF65-F5344CB8AC3E}">
+        <p14:creationId xmlns:p14="http://schemas.microsoft.com/office/powerpoint/2010/main" val="4218661914"/>
+      </p:ext>
+    </p:extLst>
+  </p:cSld>
+  <p:clrMapOvr>
+    <a:masterClrMapping/>
+  </p:clrMapOvr>
+  <p:transition>
+    <p:push/>
+  </p:transition>
 </p:sld>
 </file>
 
@@ -6098,4 +10301,319 @@
     </a:ext>
   </a:extLst>
 </a:theme>
+</file>
+
+<file path=ppt/theme/theme2.xml><?xml version="1.0" encoding="utf-8"?>
+<a:theme xmlns:a="http://schemas.openxmlformats.org/drawingml/2006/main" name="Office Theme">
+  <a:themeElements>
+    <a:clrScheme name="Office">
+      <a:dk1>
+        <a:sysClr val="windowText" lastClr="000000"/>
+      </a:dk1>
+      <a:lt1>
+        <a:sysClr val="window" lastClr="FFFFFF"/>
+      </a:lt1>
+      <a:dk2>
+        <a:srgbClr val="0E2841"/>
+      </a:dk2>
+      <a:lt2>
+        <a:srgbClr val="E8E8E8"/>
+      </a:lt2>
+      <a:accent1>
+        <a:srgbClr val="156082"/>
+      </a:accent1>
+      <a:accent2>
+        <a:srgbClr val="E97132"/>
+      </a:accent2>
+      <a:accent3>
+        <a:srgbClr val="196B24"/>
+      </a:accent3>
+      <a:accent4>
+        <a:srgbClr val="0F9ED5"/>
+      </a:accent4>
+      <a:accent5>
+        <a:srgbClr val="A02B93"/>
+      </a:accent5>
+      <a:accent6>
+        <a:srgbClr val="4EA72E"/>
+      </a:accent6>
+      <a:hlink>
+        <a:srgbClr val="467886"/>
+      </a:hlink>
+      <a:folHlink>
+        <a:srgbClr val="96607D"/>
+      </a:folHlink>
+    </a:clrScheme>
+    <a:fontScheme name="Office">
+      <a:majorFont>
+        <a:latin typeface="Aptos Display" panose="02110004020202020204"/>
+        <a:ea typeface=""/>
+        <a:cs typeface=""/>
+        <a:font script="Jpan" typeface="游ゴシック Light"/>
+        <a:font script="Hang" typeface="맑은 고딕"/>
+        <a:font script="Hans" typeface="等线 Light"/>
+        <a:font script="Hant" typeface="新細明體"/>
+        <a:font script="Arab" typeface="Times New Roman"/>
+        <a:font script="Hebr" typeface="Times New Roman"/>
+        <a:font script="Thai" typeface="Angsana New"/>
+        <a:font script="Ethi" typeface="Nyala"/>
+        <a:font script="Beng" typeface="Vrinda"/>
+        <a:font script="Gujr" typeface="Shruti"/>
+        <a:font script="Khmr" typeface="MoolBoran"/>
+        <a:font script="Knda" typeface="Tunga"/>
+        <a:font script="Guru" typeface="Raavi"/>
+        <a:font script="Cans" typeface="Euphemia"/>
+        <a:font script="Cher" typeface="Plantagenet Cherokee"/>
+        <a:font script="Yiii" typeface="Microsoft Yi Baiti"/>
+        <a:font script="Tibt" typeface="Microsoft Himalaya"/>
+        <a:font script="Thaa" typeface="MV Boli"/>
+        <a:font script="Deva" typeface="Mangal"/>
+        <a:font script="Telu" typeface="Gautami"/>
+        <a:font script="Taml" typeface="Latha"/>
+        <a:font script="Syrc" typeface="Estrangelo Edessa"/>
+        <a:font script="Orya" typeface="Kalinga"/>
+        <a:font script="Mlym" typeface="Kartika"/>
+        <a:font script="Laoo" typeface="DokChampa"/>
+        <a:font script="Sinh" typeface="Iskoola Pota"/>
+        <a:font script="Mong" typeface="Mongolian Baiti"/>
+        <a:font script="Viet" typeface="Times New Roman"/>
+        <a:font script="Uigh" typeface="Microsoft Uighur"/>
+        <a:font script="Geor" typeface="Sylfaen"/>
+        <a:font script="Armn" typeface="Arial"/>
+        <a:font script="Bugi" typeface="Leelawadee UI"/>
+        <a:font script="Bopo" typeface="Microsoft JhengHei"/>
+        <a:font script="Java" typeface="Javanese Text"/>
+        <a:font script="Lisu" typeface="Segoe UI"/>
+        <a:font script="Mymr" typeface="Myanmar Text"/>
+        <a:font script="Nkoo" typeface="Ebrima"/>
+        <a:font script="Olck" typeface="Nirmala UI"/>
+        <a:font script="Osma" typeface="Ebrima"/>
+        <a:font script="Phag" typeface="Phagspa"/>
+        <a:font script="Syrn" typeface="Estrangelo Edessa"/>
+        <a:font script="Syrj" typeface="Estrangelo Edessa"/>
+        <a:font script="Syre" typeface="Estrangelo Edessa"/>
+        <a:font script="Sora" typeface="Nirmala UI"/>
+        <a:font script="Tale" typeface="Microsoft Tai Le"/>
+        <a:font script="Talu" typeface="Microsoft New Tai Lue"/>
+        <a:font script="Tfng" typeface="Ebrima"/>
+      </a:majorFont>
+      <a:minorFont>
+        <a:latin typeface="Aptos" panose="02110004020202020204"/>
+        <a:ea typeface=""/>
+        <a:cs typeface=""/>
+        <a:font script="Jpan" typeface="游ゴシック"/>
+        <a:font script="Hang" typeface="맑은 고딕"/>
+        <a:font script="Hans" typeface="等线"/>
+        <a:font script="Hant" typeface="新細明體"/>
+        <a:font script="Arab" typeface="Arial"/>
+        <a:font script="Hebr" typeface="Arial"/>
+        <a:font script="Thai" typeface="Cordia New"/>
+        <a:font script="Ethi" typeface="Nyala"/>
+        <a:font script="Beng" typeface="Vrinda"/>
+        <a:font script="Gujr" typeface="Shruti"/>
+        <a:font script="Khmr" typeface="DaunPenh"/>
+        <a:font script="Knda" typeface="Tunga"/>
+        <a:font script="Guru" typeface="Raavi"/>
+        <a:font script="Cans" typeface="Euphemia"/>
+        <a:font script="Cher" typeface="Plantagenet Cherokee"/>
+        <a:font script="Yiii" typeface="Microsoft Yi Baiti"/>
+        <a:font script="Tibt" typeface="Microsoft Himalaya"/>
+        <a:font script="Thaa" typeface="MV Boli"/>
+        <a:font script="Deva" typeface="Mangal"/>
+        <a:font script="Telu" typeface="Gautami"/>
+        <a:font script="Taml" typeface="Latha"/>
+        <a:font script="Syrc" typeface="Estrangelo Edessa"/>
+        <a:font script="Orya" typeface="Kalinga"/>
+        <a:font script="Mlym" typeface="Kartika"/>
+        <a:font script="Laoo" typeface="DokChampa"/>
+        <a:font script="Sinh" typeface="Iskoola Pota"/>
+        <a:font script="Mong" typeface="Mongolian Baiti"/>
+        <a:font script="Viet" typeface="Arial"/>
+        <a:font script="Uigh" typeface="Microsoft Uighur"/>
+        <a:font script="Geor" typeface="Sylfaen"/>
+        <a:font script="Armn" typeface="Arial"/>
+        <a:font script="Bugi" typeface="Leelawadee UI"/>
+        <a:font script="Bopo" typeface="Microsoft JhengHei"/>
+        <a:font script="Java" typeface="Javanese Text"/>
+        <a:font script="Lisu" typeface="Segoe UI"/>
+        <a:font script="Mymr" typeface="Myanmar Text"/>
+        <a:font script="Nkoo" typeface="Ebrima"/>
+        <a:font script="Olck" typeface="Nirmala UI"/>
+        <a:font script="Osma" typeface="Ebrima"/>
+        <a:font script="Phag" typeface="Phagspa"/>
+        <a:font script="Syrn" typeface="Estrangelo Edessa"/>
+        <a:font script="Syrj" typeface="Estrangelo Edessa"/>
+        <a:font script="Syre" typeface="Estrangelo Edessa"/>
+        <a:font script="Sora" typeface="Nirmala UI"/>
+        <a:font script="Tale" typeface="Microsoft Tai Le"/>
+        <a:font script="Talu" typeface="Microsoft New Tai Lue"/>
+        <a:font script="Tfng" typeface="Ebrima"/>
+      </a:minorFont>
+    </a:fontScheme>
+    <a:fmtScheme name="Office">
+      <a:fillStyleLst>
+        <a:solidFill>
+          <a:schemeClr val="phClr"/>
+        </a:solidFill>
+        <a:gradFill rotWithShape="1">
+          <a:gsLst>
+            <a:gs pos="0">
+              <a:schemeClr val="phClr">
+                <a:lumMod val="110000"/>
+                <a:satMod val="105000"/>
+                <a:tint val="67000"/>
+              </a:schemeClr>
+            </a:gs>
+            <a:gs pos="50000">
+              <a:schemeClr val="phClr">
+                <a:lumMod val="105000"/>
+                <a:satMod val="103000"/>
+                <a:tint val="73000"/>
+              </a:schemeClr>
+            </a:gs>
+            <a:gs pos="100000">
+              <a:schemeClr val="phClr">
+                <a:lumMod val="105000"/>
+                <a:satMod val="109000"/>
+                <a:tint val="81000"/>
+              </a:schemeClr>
+            </a:gs>
+          </a:gsLst>
+          <a:lin ang="5400000" scaled="0"/>
+        </a:gradFill>
+        <a:gradFill rotWithShape="1">
+          <a:gsLst>
+            <a:gs pos="0">
+              <a:schemeClr val="phClr">
+                <a:satMod val="103000"/>
+                <a:lumMod val="102000"/>
+                <a:tint val="94000"/>
+              </a:schemeClr>
+            </a:gs>
+            <a:gs pos="50000">
+              <a:schemeClr val="phClr">
+                <a:satMod val="110000"/>
+                <a:lumMod val="100000"/>
+                <a:shade val="100000"/>
+              </a:schemeClr>
+            </a:gs>
+            <a:gs pos="100000">
+              <a:schemeClr val="phClr">
+                <a:lumMod val="99000"/>
+                <a:satMod val="120000"/>
+                <a:shade val="78000"/>
+              </a:schemeClr>
+            </a:gs>
+          </a:gsLst>
+          <a:lin ang="5400000" scaled="0"/>
+        </a:gradFill>
+      </a:fillStyleLst>
+      <a:lnStyleLst>
+        <a:ln w="12700" cap="flat" cmpd="sng" algn="ctr">
+          <a:solidFill>
+            <a:schemeClr val="phClr"/>
+          </a:solidFill>
+          <a:prstDash val="solid"/>
+          <a:miter lim="800000"/>
+        </a:ln>
+        <a:ln w="19050" cap="flat" cmpd="sng" algn="ctr">
+          <a:solidFill>
+            <a:schemeClr val="phClr"/>
+          </a:solidFill>
+          <a:prstDash val="solid"/>
+          <a:miter lim="800000"/>
+        </a:ln>
+        <a:ln w="25400" cap="flat" cmpd="sng" algn="ctr">
+          <a:solidFill>
+            <a:schemeClr val="phClr"/>
+          </a:solidFill>
+          <a:prstDash val="solid"/>
+          <a:miter lim="800000"/>
+        </a:ln>
+      </a:lnStyleLst>
+      <a:effectStyleLst>
+        <a:effectStyle>
+          <a:effectLst/>
+        </a:effectStyle>
+        <a:effectStyle>
+          <a:effectLst/>
+        </a:effectStyle>
+        <a:effectStyle>
+          <a:effectLst>
+            <a:outerShdw blurRad="57150" dist="19050" dir="5400000" algn="ctr" rotWithShape="0">
+              <a:srgbClr val="000000">
+                <a:alpha val="63000"/>
+              </a:srgbClr>
+            </a:outerShdw>
+          </a:effectLst>
+        </a:effectStyle>
+      </a:effectStyleLst>
+      <a:bgFillStyleLst>
+        <a:solidFill>
+          <a:schemeClr val="phClr"/>
+        </a:solidFill>
+        <a:solidFill>
+          <a:schemeClr val="phClr">
+            <a:tint val="95000"/>
+            <a:satMod val="170000"/>
+          </a:schemeClr>
+        </a:solidFill>
+        <a:gradFill rotWithShape="1">
+          <a:gsLst>
+            <a:gs pos="0">
+              <a:schemeClr val="phClr">
+                <a:tint val="93000"/>
+                <a:satMod val="150000"/>
+                <a:shade val="98000"/>
+                <a:lumMod val="102000"/>
+              </a:schemeClr>
+            </a:gs>
+            <a:gs pos="50000">
+              <a:schemeClr val="phClr">
+                <a:tint val="98000"/>
+                <a:satMod val="130000"/>
+                <a:shade val="90000"/>
+                <a:lumMod val="103000"/>
+              </a:schemeClr>
+            </a:gs>
+            <a:gs pos="100000">
+              <a:schemeClr val="phClr">
+                <a:shade val="63000"/>
+                <a:satMod val="120000"/>
+              </a:schemeClr>
+            </a:gs>
+          </a:gsLst>
+          <a:lin ang="5400000" scaled="0"/>
+        </a:gradFill>
+      </a:bgFillStyleLst>
+    </a:fmtScheme>
+  </a:themeElements>
+  <a:objectDefaults>
+    <a:lnDef>
+      <a:spPr/>
+      <a:bodyPr/>
+      <a:lstStyle/>
+      <a:style>
+        <a:lnRef idx="2">
+          <a:schemeClr val="accent1"/>
+        </a:lnRef>
+        <a:fillRef idx="0">
+          <a:schemeClr val="accent1"/>
+        </a:fillRef>
+        <a:effectRef idx="1">
+          <a:schemeClr val="accent1"/>
+        </a:effectRef>
+        <a:fontRef idx="minor">
+          <a:schemeClr val="tx1"/>
+        </a:fontRef>
+      </a:style>
+    </a:lnDef>
+  </a:objectDefaults>
+  <a:extraClrSchemeLst/>
+  <a:extLst>
+    <a:ext uri="{05A4C25C-085E-4340-85A3-A5531E510DB2}">
+      <thm15:themeFamily xmlns:thm15="http://schemas.microsoft.com/office/thememl/2012/main" name="Office Theme" id="{2E142A2C-CD16-42D6-873A-C26D2A0506FA}" vid="{1BDDFF52-6CD6-40A5-AB3C-68EB2F1E4D0A}"/>
+    </a:ext>
+  </a:extLst>
+</a:theme>
 </file>
--- a/report_and_presentation/Cohort8_DS3_Presentation.pptx
+++ b/report_and_presentation/Cohort8_DS3_Presentation.pptx
@@ -2,29 +2,33 @@
 <file path=ppt/presentation.xml><?xml version="1.0" encoding="utf-8"?>
 <p:presentation xmlns:a="http://schemas.openxmlformats.org/drawingml/2006/main" xmlns:r="http://schemas.openxmlformats.org/officeDocument/2006/relationships" xmlns:p="http://schemas.openxmlformats.org/presentationml/2006/main" saveSubsetFonts="1">
   <p:sldMasterIdLst>
-    <p:sldMasterId id="2147483648" r:id="rId1"/>
+    <p:sldMasterId id="2147483792" r:id="rId1"/>
   </p:sldMasterIdLst>
+  <p:notesMasterIdLst>
+    <p:notesMasterId r:id="rId23"/>
+  </p:notesMasterIdLst>
   <p:sldIdLst>
-    <p:sldId id="258" r:id="rId2"/>
-    <p:sldId id="273" r:id="rId3"/>
-    <p:sldId id="274" r:id="rId4"/>
-    <p:sldId id="271" r:id="rId5"/>
-    <p:sldId id="261" r:id="rId6"/>
-    <p:sldId id="266" r:id="rId7"/>
-    <p:sldId id="260" r:id="rId8"/>
-    <p:sldId id="262" r:id="rId9"/>
-    <p:sldId id="263" r:id="rId10"/>
-    <p:sldId id="275" r:id="rId11"/>
-    <p:sldId id="265" r:id="rId12"/>
-    <p:sldId id="267" r:id="rId13"/>
-    <p:sldId id="270" r:id="rId14"/>
+    <p:sldId id="279" r:id="rId2"/>
+    <p:sldId id="266" r:id="rId3"/>
+    <p:sldId id="283" r:id="rId4"/>
+    <p:sldId id="291" r:id="rId5"/>
+    <p:sldId id="280" r:id="rId6"/>
+    <p:sldId id="282" r:id="rId7"/>
+    <p:sldId id="285" r:id="rId8"/>
+    <p:sldId id="286" r:id="rId9"/>
+    <p:sldId id="287" r:id="rId10"/>
+    <p:sldId id="265" r:id="rId11"/>
+    <p:sldId id="267" r:id="rId12"/>
+    <p:sldId id="270" r:id="rId13"/>
+    <p:sldId id="288" r:id="rId14"/>
     <p:sldId id="268" r:id="rId15"/>
     <p:sldId id="269" r:id="rId16"/>
     <p:sldId id="256" r:id="rId17"/>
     <p:sldId id="257" r:id="rId18"/>
     <p:sldId id="276" r:id="rId19"/>
     <p:sldId id="278" r:id="rId20"/>
-    <p:sldId id="277" r:id="rId21"/>
+    <p:sldId id="289" r:id="rId21"/>
+    <p:sldId id="290" r:id="rId22"/>
   </p:sldIdLst>
   <p:sldSz cx="12192000" cy="6858000"/>
   <p:notesSz cx="6858000" cy="9144000"/>
@@ -125,10 +129,1780 @@
   </p:defaultTextStyle>
   <p:extLst>
     <p:ext uri="{EFAFB233-063F-42B5-8137-9DF3F51BA10A}">
-      <p15:sldGuideLst xmlns:p15="http://schemas.microsoft.com/office/powerpoint/2012/main"/>
+      <p15:sldGuideLst xmlns:p15="http://schemas.microsoft.com/office/powerpoint/2012/main">
+        <p15:guide id="1" orient="horz" pos="2160">
+          <p15:clr>
+            <a:srgbClr val="A4A3A4"/>
+          </p15:clr>
+        </p15:guide>
+        <p15:guide id="2" pos="3840">
+          <p15:clr>
+            <a:srgbClr val="A4A3A4"/>
+          </p15:clr>
+        </p15:guide>
+      </p15:sldGuideLst>
     </p:ext>
   </p:extLst>
 </p:presentation>
+</file>
+
+<file path=ppt/notesMasters/notesMaster1.xml><?xml version="1.0" encoding="utf-8"?>
+<p:notesMaster xmlns:a="http://schemas.openxmlformats.org/drawingml/2006/main" xmlns:r="http://schemas.openxmlformats.org/officeDocument/2006/relationships" xmlns:p="http://schemas.openxmlformats.org/presentationml/2006/main">
+  <p:cSld>
+    <p:bg>
+      <p:bgRef idx="1001">
+        <a:schemeClr val="bg1"/>
+      </p:bgRef>
+    </p:bg>
+    <p:spTree>
+      <p:nvGrpSpPr>
+        <p:cNvPr id="1" name=""/>
+        <p:cNvGrpSpPr/>
+        <p:nvPr/>
+      </p:nvGrpSpPr>
+      <p:grpSpPr>
+        <a:xfrm>
+          <a:off x="0" y="0"/>
+          <a:ext cx="0" cy="0"/>
+          <a:chOff x="0" y="0"/>
+          <a:chExt cx="0" cy="0"/>
+        </a:xfrm>
+      </p:grpSpPr>
+      <p:sp>
+        <p:nvSpPr>
+          <p:cNvPr id="2" name="Header Placeholder 1"/>
+          <p:cNvSpPr>
+            <a:spLocks noGrp="1"/>
+          </p:cNvSpPr>
+          <p:nvPr>
+            <p:ph type="hdr" sz="quarter"/>
+          </p:nvPr>
+        </p:nvSpPr>
+        <p:spPr>
+          <a:xfrm>
+            <a:off x="0" y="0"/>
+            <a:ext cx="2971800" cy="458788"/>
+          </a:xfrm>
+          <a:prstGeom prst="rect">
+            <a:avLst/>
+          </a:prstGeom>
+        </p:spPr>
+        <p:txBody>
+          <a:bodyPr vert="horz" lIns="91440" tIns="45720" rIns="91440" bIns="45720" rtlCol="0"/>
+          <a:lstStyle>
+            <a:lvl1pPr algn="l">
+              <a:defRPr sz="1200"/>
+            </a:lvl1pPr>
+          </a:lstStyle>
+          <a:p>
+            <a:endParaRPr lang="en-CA"/>
+          </a:p>
+        </p:txBody>
+      </p:sp>
+      <p:sp>
+        <p:nvSpPr>
+          <p:cNvPr id="3" name="Date Placeholder 2"/>
+          <p:cNvSpPr>
+            <a:spLocks noGrp="1"/>
+          </p:cNvSpPr>
+          <p:nvPr>
+            <p:ph type="dt" idx="1"/>
+          </p:nvPr>
+        </p:nvSpPr>
+        <p:spPr>
+          <a:xfrm>
+            <a:off x="3884613" y="0"/>
+            <a:ext cx="2971800" cy="458788"/>
+          </a:xfrm>
+          <a:prstGeom prst="rect">
+            <a:avLst/>
+          </a:prstGeom>
+        </p:spPr>
+        <p:txBody>
+          <a:bodyPr vert="horz" lIns="91440" tIns="45720" rIns="91440" bIns="45720" rtlCol="0"/>
+          <a:lstStyle>
+            <a:lvl1pPr algn="r">
+              <a:defRPr sz="1200"/>
+            </a:lvl1pPr>
+          </a:lstStyle>
+          <a:p>
+            <a:fld id="{318D9752-18F5-491D-A8FE-927E5AB031AE}" type="datetimeFigureOut">
+              <a:rPr lang="en-CA" smtClean="0"/>
+              <a:t>2026-03-06</a:t>
+            </a:fld>
+            <a:endParaRPr lang="en-CA"/>
+          </a:p>
+        </p:txBody>
+      </p:sp>
+      <p:sp>
+        <p:nvSpPr>
+          <p:cNvPr id="4" name="Slide Image Placeholder 3"/>
+          <p:cNvSpPr>
+            <a:spLocks noGrp="1" noRot="1" noChangeAspect="1"/>
+          </p:cNvSpPr>
+          <p:nvPr>
+            <p:ph type="sldImg" idx="2"/>
+          </p:nvPr>
+        </p:nvSpPr>
+        <p:spPr>
+          <a:xfrm>
+            <a:off x="685800" y="1143000"/>
+            <a:ext cx="5486400" cy="3086100"/>
+          </a:xfrm>
+          <a:prstGeom prst="rect">
+            <a:avLst/>
+          </a:prstGeom>
+          <a:noFill/>
+          <a:ln w="12700">
+            <a:solidFill>
+              <a:prstClr val="black"/>
+            </a:solidFill>
+          </a:ln>
+        </p:spPr>
+        <p:txBody>
+          <a:bodyPr vert="horz" lIns="91440" tIns="45720" rIns="91440" bIns="45720" rtlCol="0" anchor="ctr"/>
+          <a:lstStyle/>
+          <a:p>
+            <a:endParaRPr lang="en-CA"/>
+          </a:p>
+        </p:txBody>
+      </p:sp>
+      <p:sp>
+        <p:nvSpPr>
+          <p:cNvPr id="5" name="Notes Placeholder 4"/>
+          <p:cNvSpPr>
+            <a:spLocks noGrp="1"/>
+          </p:cNvSpPr>
+          <p:nvPr>
+            <p:ph type="body" sz="quarter" idx="3"/>
+          </p:nvPr>
+        </p:nvSpPr>
+        <p:spPr>
+          <a:xfrm>
+            <a:off x="685800" y="4400550"/>
+            <a:ext cx="5486400" cy="3600450"/>
+          </a:xfrm>
+          <a:prstGeom prst="rect">
+            <a:avLst/>
+          </a:prstGeom>
+        </p:spPr>
+        <p:txBody>
+          <a:bodyPr vert="horz" lIns="91440" tIns="45720" rIns="91440" bIns="45720" rtlCol="0"/>
+          <a:lstStyle/>
+          <a:p>
+            <a:pPr lvl="0"/>
+            <a:r>
+              <a:rPr lang="en-US"/>
+              <a:t>Click to edit Master text styles</a:t>
+            </a:r>
+          </a:p>
+          <a:p>
+            <a:pPr lvl="1"/>
+            <a:r>
+              <a:rPr lang="en-US"/>
+              <a:t>Second level</a:t>
+            </a:r>
+          </a:p>
+          <a:p>
+            <a:pPr lvl="2"/>
+            <a:r>
+              <a:rPr lang="en-US"/>
+              <a:t>Third level</a:t>
+            </a:r>
+          </a:p>
+          <a:p>
+            <a:pPr lvl="3"/>
+            <a:r>
+              <a:rPr lang="en-US"/>
+              <a:t>Fourth level</a:t>
+            </a:r>
+          </a:p>
+          <a:p>
+            <a:pPr lvl="4"/>
+            <a:r>
+              <a:rPr lang="en-US"/>
+              <a:t>Fifth level</a:t>
+            </a:r>
+            <a:endParaRPr lang="en-CA"/>
+          </a:p>
+        </p:txBody>
+      </p:sp>
+      <p:sp>
+        <p:nvSpPr>
+          <p:cNvPr id="6" name="Footer Placeholder 5"/>
+          <p:cNvSpPr>
+            <a:spLocks noGrp="1"/>
+          </p:cNvSpPr>
+          <p:nvPr>
+            <p:ph type="ftr" sz="quarter" idx="4"/>
+          </p:nvPr>
+        </p:nvSpPr>
+        <p:spPr>
+          <a:xfrm>
+            <a:off x="0" y="8685213"/>
+            <a:ext cx="2971800" cy="458787"/>
+          </a:xfrm>
+          <a:prstGeom prst="rect">
+            <a:avLst/>
+          </a:prstGeom>
+        </p:spPr>
+        <p:txBody>
+          <a:bodyPr vert="horz" lIns="91440" tIns="45720" rIns="91440" bIns="45720" rtlCol="0" anchor="b"/>
+          <a:lstStyle>
+            <a:lvl1pPr algn="l">
+              <a:defRPr sz="1200"/>
+            </a:lvl1pPr>
+          </a:lstStyle>
+          <a:p>
+            <a:endParaRPr lang="en-CA"/>
+          </a:p>
+        </p:txBody>
+      </p:sp>
+      <p:sp>
+        <p:nvSpPr>
+          <p:cNvPr id="7" name="Slide Number Placeholder 6"/>
+          <p:cNvSpPr>
+            <a:spLocks noGrp="1"/>
+          </p:cNvSpPr>
+          <p:nvPr>
+            <p:ph type="sldNum" sz="quarter" idx="5"/>
+          </p:nvPr>
+        </p:nvSpPr>
+        <p:spPr>
+          <a:xfrm>
+            <a:off x="3884613" y="8685213"/>
+            <a:ext cx="2971800" cy="458787"/>
+          </a:xfrm>
+          <a:prstGeom prst="rect">
+            <a:avLst/>
+          </a:prstGeom>
+        </p:spPr>
+        <p:txBody>
+          <a:bodyPr vert="horz" lIns="91440" tIns="45720" rIns="91440" bIns="45720" rtlCol="0" anchor="b"/>
+          <a:lstStyle>
+            <a:lvl1pPr algn="r">
+              <a:defRPr sz="1200"/>
+            </a:lvl1pPr>
+          </a:lstStyle>
+          <a:p>
+            <a:fld id="{8D82D4E7-790C-4BF0-9AE4-9CFCBBC847E0}" type="slidenum">
+              <a:rPr lang="en-CA" smtClean="0"/>
+              <a:t>‹#›</a:t>
+            </a:fld>
+            <a:endParaRPr lang="en-CA"/>
+          </a:p>
+        </p:txBody>
+      </p:sp>
+    </p:spTree>
+    <p:extLst>
+      <p:ext uri="{BB962C8B-B14F-4D97-AF65-F5344CB8AC3E}">
+        <p14:creationId xmlns:p14="http://schemas.microsoft.com/office/powerpoint/2010/main" val="4266718113"/>
+      </p:ext>
+    </p:extLst>
+  </p:cSld>
+  <p:clrMap bg1="lt1" tx1="dk1" bg2="lt2" tx2="dk2" accent1="accent1" accent2="accent2" accent3="accent3" accent4="accent4" accent5="accent5" accent6="accent6" hlink="hlink" folHlink="folHlink"/>
+  <p:notesStyle>
+    <a:lvl1pPr marL="0" algn="l" defTabSz="914400" rtl="0" eaLnBrk="1" latinLnBrk="0" hangingPunct="1">
+      <a:defRPr sz="1200" kern="1200">
+        <a:solidFill>
+          <a:schemeClr val="tx1"/>
+        </a:solidFill>
+        <a:latin typeface="+mn-lt"/>
+        <a:ea typeface="+mn-ea"/>
+        <a:cs typeface="+mn-cs"/>
+      </a:defRPr>
+    </a:lvl1pPr>
+    <a:lvl2pPr marL="457200" algn="l" defTabSz="914400" rtl="0" eaLnBrk="1" latinLnBrk="0" hangingPunct="1">
+      <a:defRPr sz="1200" kern="1200">
+        <a:solidFill>
+          <a:schemeClr val="tx1"/>
+        </a:solidFill>
+        <a:latin typeface="+mn-lt"/>
+        <a:ea typeface="+mn-ea"/>
+        <a:cs typeface="+mn-cs"/>
+      </a:defRPr>
+    </a:lvl2pPr>
+    <a:lvl3pPr marL="914400" algn="l" defTabSz="914400" rtl="0" eaLnBrk="1" latinLnBrk="0" hangingPunct="1">
+      <a:defRPr sz="1200" kern="1200">
+        <a:solidFill>
+          <a:schemeClr val="tx1"/>
+        </a:solidFill>
+        <a:latin typeface="+mn-lt"/>
+        <a:ea typeface="+mn-ea"/>
+        <a:cs typeface="+mn-cs"/>
+      </a:defRPr>
+    </a:lvl3pPr>
+    <a:lvl4pPr marL="1371600" algn="l" defTabSz="914400" rtl="0" eaLnBrk="1" latinLnBrk="0" hangingPunct="1">
+      <a:defRPr sz="1200" kern="1200">
+        <a:solidFill>
+          <a:schemeClr val="tx1"/>
+        </a:solidFill>
+        <a:latin typeface="+mn-lt"/>
+        <a:ea typeface="+mn-ea"/>
+        <a:cs typeface="+mn-cs"/>
+      </a:defRPr>
+    </a:lvl4pPr>
+    <a:lvl5pPr marL="1828800" algn="l" defTabSz="914400" rtl="0" eaLnBrk="1" latinLnBrk="0" hangingPunct="1">
+      <a:defRPr sz="1200" kern="1200">
+        <a:solidFill>
+          <a:schemeClr val="tx1"/>
+        </a:solidFill>
+        <a:latin typeface="+mn-lt"/>
+        <a:ea typeface="+mn-ea"/>
+        <a:cs typeface="+mn-cs"/>
+      </a:defRPr>
+    </a:lvl5pPr>
+    <a:lvl6pPr marL="2286000" algn="l" defTabSz="914400" rtl="0" eaLnBrk="1" latinLnBrk="0" hangingPunct="1">
+      <a:defRPr sz="1200" kern="1200">
+        <a:solidFill>
+          <a:schemeClr val="tx1"/>
+        </a:solidFill>
+        <a:latin typeface="+mn-lt"/>
+        <a:ea typeface="+mn-ea"/>
+        <a:cs typeface="+mn-cs"/>
+      </a:defRPr>
+    </a:lvl6pPr>
+    <a:lvl7pPr marL="2743200" algn="l" defTabSz="914400" rtl="0" eaLnBrk="1" latinLnBrk="0" hangingPunct="1">
+      <a:defRPr sz="1200" kern="1200">
+        <a:solidFill>
+          <a:schemeClr val="tx1"/>
+        </a:solidFill>
+        <a:latin typeface="+mn-lt"/>
+        <a:ea typeface="+mn-ea"/>
+        <a:cs typeface="+mn-cs"/>
+      </a:defRPr>
+    </a:lvl7pPr>
+    <a:lvl8pPr marL="3200400" algn="l" defTabSz="914400" rtl="0" eaLnBrk="1" latinLnBrk="0" hangingPunct="1">
+      <a:defRPr sz="1200" kern="1200">
+        <a:solidFill>
+          <a:schemeClr val="tx1"/>
+        </a:solidFill>
+        <a:latin typeface="+mn-lt"/>
+        <a:ea typeface="+mn-ea"/>
+        <a:cs typeface="+mn-cs"/>
+      </a:defRPr>
+    </a:lvl8pPr>
+    <a:lvl9pPr marL="3657600" algn="l" defTabSz="914400" rtl="0" eaLnBrk="1" latinLnBrk="0" hangingPunct="1">
+      <a:defRPr sz="1200" kern="1200">
+        <a:solidFill>
+          <a:schemeClr val="tx1"/>
+        </a:solidFill>
+        <a:latin typeface="+mn-lt"/>
+        <a:ea typeface="+mn-ea"/>
+        <a:cs typeface="+mn-cs"/>
+      </a:defRPr>
+    </a:lvl9pPr>
+  </p:notesStyle>
+</p:notesMaster>
+</file>
+
+<file path=ppt/notesSlides/notesSlide1.xml><?xml version="1.0" encoding="utf-8"?>
+<p:notes xmlns:a="http://schemas.openxmlformats.org/drawingml/2006/main" xmlns:r="http://schemas.openxmlformats.org/officeDocument/2006/relationships" xmlns:p="http://schemas.openxmlformats.org/presentationml/2006/main" showMasterSp="0" showMasterPhAnim="0">
+  <p:cSld>
+    <p:spTree>
+      <p:nvGrpSpPr>
+        <p:cNvPr id="1" name="Shape 80"/>
+        <p:cNvGrpSpPr/>
+        <p:nvPr/>
+      </p:nvGrpSpPr>
+      <p:grpSpPr>
+        <a:xfrm>
+          <a:off x="0" y="0"/>
+          <a:ext cx="0" cy="0"/>
+          <a:chOff x="0" y="0"/>
+          <a:chExt cx="0" cy="0"/>
+        </a:xfrm>
+      </p:grpSpPr>
+      <p:sp>
+        <p:nvSpPr>
+          <p:cNvPr id="81" name="Google Shape;81;p1:notes"/>
+          <p:cNvSpPr txBox="1">
+            <a:spLocks noGrp="1"/>
+          </p:cNvSpPr>
+          <p:nvPr>
+            <p:ph type="body" idx="1"/>
+          </p:nvPr>
+        </p:nvSpPr>
+        <p:spPr>
+          <a:xfrm>
+            <a:off x="685800" y="4343400"/>
+            <a:ext cx="5486400" cy="4114800"/>
+          </a:xfrm>
+          <a:prstGeom prst="rect">
+            <a:avLst/>
+          </a:prstGeom>
+        </p:spPr>
+        <p:txBody>
+          <a:bodyPr spcFirstLastPara="1" wrap="square" lIns="91425" tIns="91425" rIns="91425" bIns="91425" anchor="t" anchorCtr="0">
+            <a:noAutofit/>
+          </a:bodyPr>
+          <a:lstStyle/>
+          <a:p>
+            <a:pPr marL="0" lvl="0" indent="0" algn="l" rtl="0">
+              <a:spcBef>
+                <a:spcPts val="0"/>
+              </a:spcBef>
+              <a:spcAft>
+                <a:spcPts val="0"/>
+              </a:spcAft>
+              <a:buNone/>
+            </a:pPr>
+            <a:endParaRPr/>
+          </a:p>
+        </p:txBody>
+      </p:sp>
+      <p:sp>
+        <p:nvSpPr>
+          <p:cNvPr id="82" name="Google Shape;82;p1:notes"/>
+          <p:cNvSpPr>
+            <a:spLocks noGrp="1" noRot="1" noChangeAspect="1"/>
+          </p:cNvSpPr>
+          <p:nvPr>
+            <p:ph type="sldImg" idx="2"/>
+          </p:nvPr>
+        </p:nvSpPr>
+        <p:spPr>
+          <a:xfrm>
+            <a:off x="381000" y="685800"/>
+            <a:ext cx="6096000" cy="3429000"/>
+          </a:xfrm>
+          <a:custGeom>
+            <a:avLst/>
+            <a:gdLst/>
+            <a:ahLst/>
+            <a:cxnLst/>
+            <a:rect l="l" t="t" r="r" b="b"/>
+            <a:pathLst>
+              <a:path w="120000" h="120000" extrusionOk="0">
+                <a:moveTo>
+                  <a:pt x="0" y="0"/>
+                </a:moveTo>
+                <a:lnTo>
+                  <a:pt x="120000" y="0"/>
+                </a:lnTo>
+                <a:lnTo>
+                  <a:pt x="120000" y="120000"/>
+                </a:lnTo>
+                <a:lnTo>
+                  <a:pt x="0" y="120000"/>
+                </a:lnTo>
+                <a:close/>
+              </a:path>
+            </a:pathLst>
+          </a:custGeom>
+        </p:spPr>
+      </p:sp>
+    </p:spTree>
+  </p:cSld>
+  <p:clrMapOvr>
+    <a:masterClrMapping/>
+  </p:clrMapOvr>
+</p:notes>
+</file>
+
+<file path=ppt/notesSlides/notesSlide10.xml><?xml version="1.0" encoding="utf-8"?>
+<p:notes xmlns:a="http://schemas.openxmlformats.org/drawingml/2006/main" xmlns:r="http://schemas.openxmlformats.org/officeDocument/2006/relationships" xmlns:p="http://schemas.openxmlformats.org/presentationml/2006/main" showMasterSp="0" showMasterPhAnim="0">
+  <p:cSld>
+    <p:spTree>
+      <p:nvGrpSpPr>
+        <p:cNvPr id="1" name="Shape 271">
+          <a:extLst>
+            <a:ext uri="{FF2B5EF4-FFF2-40B4-BE49-F238E27FC236}">
+              <a16:creationId xmlns:a16="http://schemas.microsoft.com/office/drawing/2014/main" id="{30E5B0FF-7F6A-5BBA-FD84-E67D98E0CA07}"/>
+            </a:ext>
+          </a:extLst>
+        </p:cNvPr>
+        <p:cNvGrpSpPr/>
+        <p:nvPr/>
+      </p:nvGrpSpPr>
+      <p:grpSpPr>
+        <a:xfrm>
+          <a:off x="0" y="0"/>
+          <a:ext cx="0" cy="0"/>
+          <a:chOff x="0" y="0"/>
+          <a:chExt cx="0" cy="0"/>
+        </a:xfrm>
+      </p:grpSpPr>
+      <p:sp>
+        <p:nvSpPr>
+          <p:cNvPr id="272" name="Google Shape;272;p11:notes">
+            <a:extLst>
+              <a:ext uri="{FF2B5EF4-FFF2-40B4-BE49-F238E27FC236}">
+                <a16:creationId xmlns:a16="http://schemas.microsoft.com/office/drawing/2014/main" id="{58156EA9-AE74-DAA2-37EE-FD21A1D01AE0}"/>
+              </a:ext>
+            </a:extLst>
+          </p:cNvPr>
+          <p:cNvSpPr txBox="1">
+            <a:spLocks noGrp="1"/>
+          </p:cNvSpPr>
+          <p:nvPr>
+            <p:ph type="body" idx="1"/>
+          </p:nvPr>
+        </p:nvSpPr>
+        <p:spPr>
+          <a:xfrm>
+            <a:off x="685800" y="4343400"/>
+            <a:ext cx="5486400" cy="4114800"/>
+          </a:xfrm>
+          <a:prstGeom prst="rect">
+            <a:avLst/>
+          </a:prstGeom>
+        </p:spPr>
+        <p:txBody>
+          <a:bodyPr spcFirstLastPara="1" wrap="square" lIns="91425" tIns="91425" rIns="91425" bIns="91425" anchor="t" anchorCtr="0">
+            <a:noAutofit/>
+          </a:bodyPr>
+          <a:lstStyle/>
+          <a:p>
+            <a:pPr marL="0" lvl="0" indent="0" algn="l" rtl="0">
+              <a:spcBef>
+                <a:spcPts val="0"/>
+              </a:spcBef>
+              <a:spcAft>
+                <a:spcPts val="0"/>
+              </a:spcAft>
+              <a:buNone/>
+            </a:pPr>
+            <a:endParaRPr/>
+          </a:p>
+        </p:txBody>
+      </p:sp>
+      <p:sp>
+        <p:nvSpPr>
+          <p:cNvPr id="273" name="Google Shape;273;p11:notes">
+            <a:extLst>
+              <a:ext uri="{FF2B5EF4-FFF2-40B4-BE49-F238E27FC236}">
+                <a16:creationId xmlns:a16="http://schemas.microsoft.com/office/drawing/2014/main" id="{4D6DA1AF-9CBF-94BE-DAF7-11CC472703EE}"/>
+              </a:ext>
+            </a:extLst>
+          </p:cNvPr>
+          <p:cNvSpPr>
+            <a:spLocks noGrp="1" noRot="1" noChangeAspect="1"/>
+          </p:cNvSpPr>
+          <p:nvPr>
+            <p:ph type="sldImg" idx="2"/>
+          </p:nvPr>
+        </p:nvSpPr>
+        <p:spPr>
+          <a:xfrm>
+            <a:off x="381000" y="685800"/>
+            <a:ext cx="6096000" cy="3429000"/>
+          </a:xfrm>
+          <a:custGeom>
+            <a:avLst/>
+            <a:gdLst/>
+            <a:ahLst/>
+            <a:cxnLst/>
+            <a:rect l="l" t="t" r="r" b="b"/>
+            <a:pathLst>
+              <a:path w="120000" h="120000" extrusionOk="0">
+                <a:moveTo>
+                  <a:pt x="0" y="0"/>
+                </a:moveTo>
+                <a:lnTo>
+                  <a:pt x="120000" y="0"/>
+                </a:lnTo>
+                <a:lnTo>
+                  <a:pt x="120000" y="120000"/>
+                </a:lnTo>
+                <a:lnTo>
+                  <a:pt x="0" y="120000"/>
+                </a:lnTo>
+                <a:close/>
+              </a:path>
+            </a:pathLst>
+          </a:custGeom>
+        </p:spPr>
+      </p:sp>
+    </p:spTree>
+    <p:extLst>
+      <p:ext uri="{BB962C8B-B14F-4D97-AF65-F5344CB8AC3E}">
+        <p14:creationId xmlns:p14="http://schemas.microsoft.com/office/powerpoint/2010/main" val="796792180"/>
+      </p:ext>
+    </p:extLst>
+  </p:cSld>
+  <p:clrMapOvr>
+    <a:masterClrMapping/>
+  </p:clrMapOvr>
+</p:notes>
+</file>
+
+<file path=ppt/notesSlides/notesSlide11.xml><?xml version="1.0" encoding="utf-8"?>
+<p:notes xmlns:a="http://schemas.openxmlformats.org/drawingml/2006/main" xmlns:r="http://schemas.openxmlformats.org/officeDocument/2006/relationships" xmlns:p="http://schemas.openxmlformats.org/presentationml/2006/main" showMasterSp="0" showMasterPhAnim="0">
+  <p:cSld>
+    <p:spTree>
+      <p:nvGrpSpPr>
+        <p:cNvPr id="1" name="Shape 271">
+          <a:extLst>
+            <a:ext uri="{FF2B5EF4-FFF2-40B4-BE49-F238E27FC236}">
+              <a16:creationId xmlns:a16="http://schemas.microsoft.com/office/drawing/2014/main" id="{0B5CE19B-28C4-4D25-EB9B-439810A6455F}"/>
+            </a:ext>
+          </a:extLst>
+        </p:cNvPr>
+        <p:cNvGrpSpPr/>
+        <p:nvPr/>
+      </p:nvGrpSpPr>
+      <p:grpSpPr>
+        <a:xfrm>
+          <a:off x="0" y="0"/>
+          <a:ext cx="0" cy="0"/>
+          <a:chOff x="0" y="0"/>
+          <a:chExt cx="0" cy="0"/>
+        </a:xfrm>
+      </p:grpSpPr>
+      <p:sp>
+        <p:nvSpPr>
+          <p:cNvPr id="272" name="Google Shape;272;p11:notes">
+            <a:extLst>
+              <a:ext uri="{FF2B5EF4-FFF2-40B4-BE49-F238E27FC236}">
+                <a16:creationId xmlns:a16="http://schemas.microsoft.com/office/drawing/2014/main" id="{73B21E0F-8B08-FC1B-D07F-7E6E02321723}"/>
+              </a:ext>
+            </a:extLst>
+          </p:cNvPr>
+          <p:cNvSpPr txBox="1">
+            <a:spLocks noGrp="1"/>
+          </p:cNvSpPr>
+          <p:nvPr>
+            <p:ph type="body" idx="1"/>
+          </p:nvPr>
+        </p:nvSpPr>
+        <p:spPr>
+          <a:xfrm>
+            <a:off x="685800" y="4343400"/>
+            <a:ext cx="5486400" cy="4114800"/>
+          </a:xfrm>
+          <a:prstGeom prst="rect">
+            <a:avLst/>
+          </a:prstGeom>
+        </p:spPr>
+        <p:txBody>
+          <a:bodyPr spcFirstLastPara="1" wrap="square" lIns="91425" tIns="91425" rIns="91425" bIns="91425" anchor="t" anchorCtr="0">
+            <a:noAutofit/>
+          </a:bodyPr>
+          <a:lstStyle/>
+          <a:p>
+            <a:pPr marL="0" lvl="0" indent="0" algn="l" rtl="0">
+              <a:spcBef>
+                <a:spcPts val="0"/>
+              </a:spcBef>
+              <a:spcAft>
+                <a:spcPts val="0"/>
+              </a:spcAft>
+              <a:buNone/>
+            </a:pPr>
+            <a:endParaRPr/>
+          </a:p>
+        </p:txBody>
+      </p:sp>
+      <p:sp>
+        <p:nvSpPr>
+          <p:cNvPr id="273" name="Google Shape;273;p11:notes">
+            <a:extLst>
+              <a:ext uri="{FF2B5EF4-FFF2-40B4-BE49-F238E27FC236}">
+                <a16:creationId xmlns:a16="http://schemas.microsoft.com/office/drawing/2014/main" id="{243BF204-1B95-C87B-6715-B2949BED2E18}"/>
+              </a:ext>
+            </a:extLst>
+          </p:cNvPr>
+          <p:cNvSpPr>
+            <a:spLocks noGrp="1" noRot="1" noChangeAspect="1"/>
+          </p:cNvSpPr>
+          <p:nvPr>
+            <p:ph type="sldImg" idx="2"/>
+          </p:nvPr>
+        </p:nvSpPr>
+        <p:spPr>
+          <a:xfrm>
+            <a:off x="381000" y="685800"/>
+            <a:ext cx="6096000" cy="3429000"/>
+          </a:xfrm>
+          <a:custGeom>
+            <a:avLst/>
+            <a:gdLst/>
+            <a:ahLst/>
+            <a:cxnLst/>
+            <a:rect l="l" t="t" r="r" b="b"/>
+            <a:pathLst>
+              <a:path w="120000" h="120000" extrusionOk="0">
+                <a:moveTo>
+                  <a:pt x="0" y="0"/>
+                </a:moveTo>
+                <a:lnTo>
+                  <a:pt x="120000" y="0"/>
+                </a:lnTo>
+                <a:lnTo>
+                  <a:pt x="120000" y="120000"/>
+                </a:lnTo>
+                <a:lnTo>
+                  <a:pt x="0" y="120000"/>
+                </a:lnTo>
+                <a:close/>
+              </a:path>
+            </a:pathLst>
+          </a:custGeom>
+        </p:spPr>
+      </p:sp>
+    </p:spTree>
+    <p:extLst>
+      <p:ext uri="{BB962C8B-B14F-4D97-AF65-F5344CB8AC3E}">
+        <p14:creationId xmlns:p14="http://schemas.microsoft.com/office/powerpoint/2010/main" val="914700190"/>
+      </p:ext>
+    </p:extLst>
+  </p:cSld>
+  <p:clrMapOvr>
+    <a:masterClrMapping/>
+  </p:clrMapOvr>
+</p:notes>
+</file>
+
+<file path=ppt/notesSlides/notesSlide12.xml><?xml version="1.0" encoding="utf-8"?>
+<p:notes xmlns:a="http://schemas.openxmlformats.org/drawingml/2006/main" xmlns:r="http://schemas.openxmlformats.org/officeDocument/2006/relationships" xmlns:p="http://schemas.openxmlformats.org/presentationml/2006/main" showMasterSp="0" showMasterPhAnim="0">
+  <p:cSld>
+    <p:spTree>
+      <p:nvGrpSpPr>
+        <p:cNvPr id="1" name="Shape 493"/>
+        <p:cNvGrpSpPr/>
+        <p:nvPr/>
+      </p:nvGrpSpPr>
+      <p:grpSpPr>
+        <a:xfrm>
+          <a:off x="0" y="0"/>
+          <a:ext cx="0" cy="0"/>
+          <a:chOff x="0" y="0"/>
+          <a:chExt cx="0" cy="0"/>
+        </a:xfrm>
+      </p:grpSpPr>
+      <p:sp>
+        <p:nvSpPr>
+          <p:cNvPr id="494" name="Google Shape;494;p23:notes"/>
+          <p:cNvSpPr txBox="1">
+            <a:spLocks noGrp="1"/>
+          </p:cNvSpPr>
+          <p:nvPr>
+            <p:ph type="body" idx="1"/>
+          </p:nvPr>
+        </p:nvSpPr>
+        <p:spPr>
+          <a:xfrm>
+            <a:off x="685800" y="4343400"/>
+            <a:ext cx="5486400" cy="4114800"/>
+          </a:xfrm>
+          <a:prstGeom prst="rect">
+            <a:avLst/>
+          </a:prstGeom>
+        </p:spPr>
+        <p:txBody>
+          <a:bodyPr spcFirstLastPara="1" wrap="square" lIns="91425" tIns="91425" rIns="91425" bIns="91425" anchor="t" anchorCtr="0">
+            <a:noAutofit/>
+          </a:bodyPr>
+          <a:lstStyle/>
+          <a:p>
+            <a:pPr marL="0" lvl="0" indent="0" algn="l" rtl="0">
+              <a:spcBef>
+                <a:spcPts val="0"/>
+              </a:spcBef>
+              <a:spcAft>
+                <a:spcPts val="0"/>
+              </a:spcAft>
+              <a:buNone/>
+            </a:pPr>
+            <a:endParaRPr/>
+          </a:p>
+        </p:txBody>
+      </p:sp>
+      <p:sp>
+        <p:nvSpPr>
+          <p:cNvPr id="495" name="Google Shape;495;p23:notes"/>
+          <p:cNvSpPr>
+            <a:spLocks noGrp="1" noRot="1" noChangeAspect="1"/>
+          </p:cNvSpPr>
+          <p:nvPr>
+            <p:ph type="sldImg" idx="2"/>
+          </p:nvPr>
+        </p:nvSpPr>
+        <p:spPr>
+          <a:xfrm>
+            <a:off x="381000" y="685800"/>
+            <a:ext cx="6096000" cy="3429000"/>
+          </a:xfrm>
+          <a:custGeom>
+            <a:avLst/>
+            <a:gdLst/>
+            <a:ahLst/>
+            <a:cxnLst/>
+            <a:rect l="l" t="t" r="r" b="b"/>
+            <a:pathLst>
+              <a:path w="120000" h="120000" extrusionOk="0">
+                <a:moveTo>
+                  <a:pt x="0" y="0"/>
+                </a:moveTo>
+                <a:lnTo>
+                  <a:pt x="120000" y="0"/>
+                </a:lnTo>
+                <a:lnTo>
+                  <a:pt x="120000" y="120000"/>
+                </a:lnTo>
+                <a:lnTo>
+                  <a:pt x="0" y="120000"/>
+                </a:lnTo>
+                <a:close/>
+              </a:path>
+            </a:pathLst>
+          </a:custGeom>
+        </p:spPr>
+      </p:sp>
+    </p:spTree>
+  </p:cSld>
+  <p:clrMapOvr>
+    <a:masterClrMapping/>
+  </p:clrMapOvr>
+</p:notes>
+</file>
+
+<file path=ppt/notesSlides/notesSlide2.xml><?xml version="1.0" encoding="utf-8"?>
+<p:notes xmlns:a="http://schemas.openxmlformats.org/drawingml/2006/main" xmlns:r="http://schemas.openxmlformats.org/officeDocument/2006/relationships" xmlns:p="http://schemas.openxmlformats.org/presentationml/2006/main" showMasterSp="0" showMasterPhAnim="0">
+  <p:cSld>
+    <p:spTree>
+      <p:nvGrpSpPr>
+        <p:cNvPr id="1" name="Shape 271"/>
+        <p:cNvGrpSpPr/>
+        <p:nvPr/>
+      </p:nvGrpSpPr>
+      <p:grpSpPr>
+        <a:xfrm>
+          <a:off x="0" y="0"/>
+          <a:ext cx="0" cy="0"/>
+          <a:chOff x="0" y="0"/>
+          <a:chExt cx="0" cy="0"/>
+        </a:xfrm>
+      </p:grpSpPr>
+      <p:sp>
+        <p:nvSpPr>
+          <p:cNvPr id="272" name="Google Shape;272;p11:notes"/>
+          <p:cNvSpPr txBox="1">
+            <a:spLocks noGrp="1"/>
+          </p:cNvSpPr>
+          <p:nvPr>
+            <p:ph type="body" idx="1"/>
+          </p:nvPr>
+        </p:nvSpPr>
+        <p:spPr>
+          <a:xfrm>
+            <a:off x="685800" y="4343400"/>
+            <a:ext cx="5486400" cy="4114800"/>
+          </a:xfrm>
+          <a:prstGeom prst="rect">
+            <a:avLst/>
+          </a:prstGeom>
+        </p:spPr>
+        <p:txBody>
+          <a:bodyPr spcFirstLastPara="1" wrap="square" lIns="91425" tIns="91425" rIns="91425" bIns="91425" anchor="t" anchorCtr="0">
+            <a:noAutofit/>
+          </a:bodyPr>
+          <a:lstStyle/>
+          <a:p>
+            <a:pPr marL="0" lvl="0" indent="0" algn="l" rtl="0">
+              <a:spcBef>
+                <a:spcPts val="0"/>
+              </a:spcBef>
+              <a:spcAft>
+                <a:spcPts val="0"/>
+              </a:spcAft>
+              <a:buNone/>
+            </a:pPr>
+            <a:endParaRPr/>
+          </a:p>
+        </p:txBody>
+      </p:sp>
+      <p:sp>
+        <p:nvSpPr>
+          <p:cNvPr id="273" name="Google Shape;273;p11:notes"/>
+          <p:cNvSpPr>
+            <a:spLocks noGrp="1" noRot="1" noChangeAspect="1"/>
+          </p:cNvSpPr>
+          <p:nvPr>
+            <p:ph type="sldImg" idx="2"/>
+          </p:nvPr>
+        </p:nvSpPr>
+        <p:spPr>
+          <a:xfrm>
+            <a:off x="381000" y="685800"/>
+            <a:ext cx="6096000" cy="3429000"/>
+          </a:xfrm>
+          <a:custGeom>
+            <a:avLst/>
+            <a:gdLst/>
+            <a:ahLst/>
+            <a:cxnLst/>
+            <a:rect l="l" t="t" r="r" b="b"/>
+            <a:pathLst>
+              <a:path w="120000" h="120000" extrusionOk="0">
+                <a:moveTo>
+                  <a:pt x="0" y="0"/>
+                </a:moveTo>
+                <a:lnTo>
+                  <a:pt x="120000" y="0"/>
+                </a:lnTo>
+                <a:lnTo>
+                  <a:pt x="120000" y="120000"/>
+                </a:lnTo>
+                <a:lnTo>
+                  <a:pt x="0" y="120000"/>
+                </a:lnTo>
+                <a:close/>
+              </a:path>
+            </a:pathLst>
+          </a:custGeom>
+        </p:spPr>
+      </p:sp>
+    </p:spTree>
+  </p:cSld>
+  <p:clrMapOvr>
+    <a:masterClrMapping/>
+  </p:clrMapOvr>
+</p:notes>
+</file>
+
+<file path=ppt/notesSlides/notesSlide3.xml><?xml version="1.0" encoding="utf-8"?>
+<p:notes xmlns:a="http://schemas.openxmlformats.org/drawingml/2006/main" xmlns:r="http://schemas.openxmlformats.org/officeDocument/2006/relationships" xmlns:p="http://schemas.openxmlformats.org/presentationml/2006/main" showMasterSp="0" showMasterPhAnim="0">
+  <p:cSld>
+    <p:spTree>
+      <p:nvGrpSpPr>
+        <p:cNvPr id="1" name="Shape 271">
+          <a:extLst>
+            <a:ext uri="{FF2B5EF4-FFF2-40B4-BE49-F238E27FC236}">
+              <a16:creationId xmlns:a16="http://schemas.microsoft.com/office/drawing/2014/main" id="{92943E5C-15F6-54E9-B745-B30B17AAB483}"/>
+            </a:ext>
+          </a:extLst>
+        </p:cNvPr>
+        <p:cNvGrpSpPr/>
+        <p:nvPr/>
+      </p:nvGrpSpPr>
+      <p:grpSpPr>
+        <a:xfrm>
+          <a:off x="0" y="0"/>
+          <a:ext cx="0" cy="0"/>
+          <a:chOff x="0" y="0"/>
+          <a:chExt cx="0" cy="0"/>
+        </a:xfrm>
+      </p:grpSpPr>
+      <p:sp>
+        <p:nvSpPr>
+          <p:cNvPr id="272" name="Google Shape;272;p11:notes">
+            <a:extLst>
+              <a:ext uri="{FF2B5EF4-FFF2-40B4-BE49-F238E27FC236}">
+                <a16:creationId xmlns:a16="http://schemas.microsoft.com/office/drawing/2014/main" id="{43D16254-6F56-28A8-E72D-69E13CA5F982}"/>
+              </a:ext>
+            </a:extLst>
+          </p:cNvPr>
+          <p:cNvSpPr txBox="1">
+            <a:spLocks noGrp="1"/>
+          </p:cNvSpPr>
+          <p:nvPr>
+            <p:ph type="body" idx="1"/>
+          </p:nvPr>
+        </p:nvSpPr>
+        <p:spPr>
+          <a:xfrm>
+            <a:off x="685800" y="4343400"/>
+            <a:ext cx="5486400" cy="4114800"/>
+          </a:xfrm>
+          <a:prstGeom prst="rect">
+            <a:avLst/>
+          </a:prstGeom>
+        </p:spPr>
+        <p:txBody>
+          <a:bodyPr spcFirstLastPara="1" wrap="square" lIns="91425" tIns="91425" rIns="91425" bIns="91425" anchor="t" anchorCtr="0">
+            <a:noAutofit/>
+          </a:bodyPr>
+          <a:lstStyle/>
+          <a:p>
+            <a:pPr marL="0" lvl="0" indent="0" algn="l" rtl="0">
+              <a:spcBef>
+                <a:spcPts val="0"/>
+              </a:spcBef>
+              <a:spcAft>
+                <a:spcPts val="0"/>
+              </a:spcAft>
+              <a:buNone/>
+            </a:pPr>
+            <a:endParaRPr/>
+          </a:p>
+        </p:txBody>
+      </p:sp>
+      <p:sp>
+        <p:nvSpPr>
+          <p:cNvPr id="273" name="Google Shape;273;p11:notes">
+            <a:extLst>
+              <a:ext uri="{FF2B5EF4-FFF2-40B4-BE49-F238E27FC236}">
+                <a16:creationId xmlns:a16="http://schemas.microsoft.com/office/drawing/2014/main" id="{6A221F69-FA65-4CC9-B4D5-4663971FD65F}"/>
+              </a:ext>
+            </a:extLst>
+          </p:cNvPr>
+          <p:cNvSpPr>
+            <a:spLocks noGrp="1" noRot="1" noChangeAspect="1"/>
+          </p:cNvSpPr>
+          <p:nvPr>
+            <p:ph type="sldImg" idx="2"/>
+          </p:nvPr>
+        </p:nvSpPr>
+        <p:spPr>
+          <a:xfrm>
+            <a:off x="381000" y="685800"/>
+            <a:ext cx="6096000" cy="3429000"/>
+          </a:xfrm>
+          <a:custGeom>
+            <a:avLst/>
+            <a:gdLst/>
+            <a:ahLst/>
+            <a:cxnLst/>
+            <a:rect l="l" t="t" r="r" b="b"/>
+            <a:pathLst>
+              <a:path w="120000" h="120000" extrusionOk="0">
+                <a:moveTo>
+                  <a:pt x="0" y="0"/>
+                </a:moveTo>
+                <a:lnTo>
+                  <a:pt x="120000" y="0"/>
+                </a:lnTo>
+                <a:lnTo>
+                  <a:pt x="120000" y="120000"/>
+                </a:lnTo>
+                <a:lnTo>
+                  <a:pt x="0" y="120000"/>
+                </a:lnTo>
+                <a:close/>
+              </a:path>
+            </a:pathLst>
+          </a:custGeom>
+        </p:spPr>
+      </p:sp>
+    </p:spTree>
+    <p:extLst>
+      <p:ext uri="{BB962C8B-B14F-4D97-AF65-F5344CB8AC3E}">
+        <p14:creationId xmlns:p14="http://schemas.microsoft.com/office/powerpoint/2010/main" val="788900450"/>
+      </p:ext>
+    </p:extLst>
+  </p:cSld>
+  <p:clrMapOvr>
+    <a:masterClrMapping/>
+  </p:clrMapOvr>
+</p:notes>
+</file>
+
+<file path=ppt/notesSlides/notesSlide4.xml><?xml version="1.0" encoding="utf-8"?>
+<p:notes xmlns:a="http://schemas.openxmlformats.org/drawingml/2006/main" xmlns:r="http://schemas.openxmlformats.org/officeDocument/2006/relationships" xmlns:p="http://schemas.openxmlformats.org/presentationml/2006/main" showMasterSp="0" showMasterPhAnim="0">
+  <p:cSld>
+    <p:spTree>
+      <p:nvGrpSpPr>
+        <p:cNvPr id="1" name="Shape 271">
+          <a:extLst>
+            <a:ext uri="{FF2B5EF4-FFF2-40B4-BE49-F238E27FC236}">
+              <a16:creationId xmlns:a16="http://schemas.microsoft.com/office/drawing/2014/main" id="{92943E5C-15F6-54E9-B745-B30B17AAB483}"/>
+            </a:ext>
+          </a:extLst>
+        </p:cNvPr>
+        <p:cNvGrpSpPr/>
+        <p:nvPr/>
+      </p:nvGrpSpPr>
+      <p:grpSpPr>
+        <a:xfrm>
+          <a:off x="0" y="0"/>
+          <a:ext cx="0" cy="0"/>
+          <a:chOff x="0" y="0"/>
+          <a:chExt cx="0" cy="0"/>
+        </a:xfrm>
+      </p:grpSpPr>
+      <p:sp>
+        <p:nvSpPr>
+          <p:cNvPr id="272" name="Google Shape;272;p11:notes">
+            <a:extLst>
+              <a:ext uri="{FF2B5EF4-FFF2-40B4-BE49-F238E27FC236}">
+                <a16:creationId xmlns:a16="http://schemas.microsoft.com/office/drawing/2014/main" id="{43D16254-6F56-28A8-E72D-69E13CA5F982}"/>
+              </a:ext>
+            </a:extLst>
+          </p:cNvPr>
+          <p:cNvSpPr txBox="1">
+            <a:spLocks noGrp="1"/>
+          </p:cNvSpPr>
+          <p:nvPr>
+            <p:ph type="body" idx="1"/>
+          </p:nvPr>
+        </p:nvSpPr>
+        <p:spPr>
+          <a:xfrm>
+            <a:off x="685800" y="4343400"/>
+            <a:ext cx="5486400" cy="4114800"/>
+          </a:xfrm>
+          <a:prstGeom prst="rect">
+            <a:avLst/>
+          </a:prstGeom>
+        </p:spPr>
+        <p:txBody>
+          <a:bodyPr spcFirstLastPara="1" wrap="square" lIns="91425" tIns="91425" rIns="91425" bIns="91425" anchor="t" anchorCtr="0">
+            <a:noAutofit/>
+          </a:bodyPr>
+          <a:lstStyle/>
+          <a:p>
+            <a:pPr marL="0" lvl="0" indent="0" algn="l" rtl="0">
+              <a:spcBef>
+                <a:spcPts val="0"/>
+              </a:spcBef>
+              <a:spcAft>
+                <a:spcPts val="0"/>
+              </a:spcAft>
+              <a:buNone/>
+            </a:pPr>
+            <a:endParaRPr/>
+          </a:p>
+        </p:txBody>
+      </p:sp>
+      <p:sp>
+        <p:nvSpPr>
+          <p:cNvPr id="273" name="Google Shape;273;p11:notes">
+            <a:extLst>
+              <a:ext uri="{FF2B5EF4-FFF2-40B4-BE49-F238E27FC236}">
+                <a16:creationId xmlns:a16="http://schemas.microsoft.com/office/drawing/2014/main" id="{6A221F69-FA65-4CC9-B4D5-4663971FD65F}"/>
+              </a:ext>
+            </a:extLst>
+          </p:cNvPr>
+          <p:cNvSpPr>
+            <a:spLocks noGrp="1" noRot="1" noChangeAspect="1"/>
+          </p:cNvSpPr>
+          <p:nvPr>
+            <p:ph type="sldImg" idx="2"/>
+          </p:nvPr>
+        </p:nvSpPr>
+        <p:spPr>
+          <a:xfrm>
+            <a:off x="381000" y="685800"/>
+            <a:ext cx="6096000" cy="3429000"/>
+          </a:xfrm>
+          <a:custGeom>
+            <a:avLst/>
+            <a:gdLst/>
+            <a:ahLst/>
+            <a:cxnLst/>
+            <a:rect l="l" t="t" r="r" b="b"/>
+            <a:pathLst>
+              <a:path w="120000" h="120000" extrusionOk="0">
+                <a:moveTo>
+                  <a:pt x="0" y="0"/>
+                </a:moveTo>
+                <a:lnTo>
+                  <a:pt x="120000" y="0"/>
+                </a:lnTo>
+                <a:lnTo>
+                  <a:pt x="120000" y="120000"/>
+                </a:lnTo>
+                <a:lnTo>
+                  <a:pt x="0" y="120000"/>
+                </a:lnTo>
+                <a:close/>
+              </a:path>
+            </a:pathLst>
+          </a:custGeom>
+        </p:spPr>
+      </p:sp>
+    </p:spTree>
+    <p:extLst>
+      <p:ext uri="{BB962C8B-B14F-4D97-AF65-F5344CB8AC3E}">
+        <p14:creationId xmlns:p14="http://schemas.microsoft.com/office/powerpoint/2010/main" val="788900450"/>
+      </p:ext>
+    </p:extLst>
+  </p:cSld>
+  <p:clrMapOvr>
+    <a:masterClrMapping/>
+  </p:clrMapOvr>
+</p:notes>
+</file>
+
+<file path=ppt/notesSlides/notesSlide5.xml><?xml version="1.0" encoding="utf-8"?>
+<p:notes xmlns:a="http://schemas.openxmlformats.org/drawingml/2006/main" xmlns:r="http://schemas.openxmlformats.org/officeDocument/2006/relationships" xmlns:p="http://schemas.openxmlformats.org/presentationml/2006/main" showMasterSp="0" showMasterPhAnim="0">
+  <p:cSld>
+    <p:spTree>
+      <p:nvGrpSpPr>
+        <p:cNvPr id="1" name="Shape 260"/>
+        <p:cNvGrpSpPr/>
+        <p:nvPr/>
+      </p:nvGrpSpPr>
+      <p:grpSpPr>
+        <a:xfrm>
+          <a:off x="0" y="0"/>
+          <a:ext cx="0" cy="0"/>
+          <a:chOff x="0" y="0"/>
+          <a:chExt cx="0" cy="0"/>
+        </a:xfrm>
+      </p:grpSpPr>
+      <p:sp>
+        <p:nvSpPr>
+          <p:cNvPr id="261" name="Google Shape;261;p10:notes"/>
+          <p:cNvSpPr txBox="1">
+            <a:spLocks noGrp="1"/>
+          </p:cNvSpPr>
+          <p:nvPr>
+            <p:ph type="body" idx="1"/>
+          </p:nvPr>
+        </p:nvSpPr>
+        <p:spPr>
+          <a:xfrm>
+            <a:off x="685800" y="4343400"/>
+            <a:ext cx="5486400" cy="4114800"/>
+          </a:xfrm>
+          <a:prstGeom prst="rect">
+            <a:avLst/>
+          </a:prstGeom>
+        </p:spPr>
+        <p:txBody>
+          <a:bodyPr spcFirstLastPara="1" wrap="square" lIns="91425" tIns="91425" rIns="91425" bIns="91425" anchor="t" anchorCtr="0">
+            <a:noAutofit/>
+          </a:bodyPr>
+          <a:lstStyle/>
+          <a:p>
+            <a:pPr marL="0" lvl="0" indent="0" algn="l" rtl="0">
+              <a:spcBef>
+                <a:spcPts val="0"/>
+              </a:spcBef>
+              <a:spcAft>
+                <a:spcPts val="0"/>
+              </a:spcAft>
+              <a:buNone/>
+            </a:pPr>
+            <a:endParaRPr/>
+          </a:p>
+        </p:txBody>
+      </p:sp>
+      <p:sp>
+        <p:nvSpPr>
+          <p:cNvPr id="262" name="Google Shape;262;p10:notes"/>
+          <p:cNvSpPr>
+            <a:spLocks noGrp="1" noRot="1" noChangeAspect="1"/>
+          </p:cNvSpPr>
+          <p:nvPr>
+            <p:ph type="sldImg" idx="2"/>
+          </p:nvPr>
+        </p:nvSpPr>
+        <p:spPr>
+          <a:xfrm>
+            <a:off x="381000" y="685800"/>
+            <a:ext cx="6096000" cy="3429000"/>
+          </a:xfrm>
+          <a:custGeom>
+            <a:avLst/>
+            <a:gdLst/>
+            <a:ahLst/>
+            <a:cxnLst/>
+            <a:rect l="l" t="t" r="r" b="b"/>
+            <a:pathLst>
+              <a:path w="120000" h="120000" extrusionOk="0">
+                <a:moveTo>
+                  <a:pt x="0" y="0"/>
+                </a:moveTo>
+                <a:lnTo>
+                  <a:pt x="120000" y="0"/>
+                </a:lnTo>
+                <a:lnTo>
+                  <a:pt x="120000" y="120000"/>
+                </a:lnTo>
+                <a:lnTo>
+                  <a:pt x="0" y="120000"/>
+                </a:lnTo>
+                <a:close/>
+              </a:path>
+            </a:pathLst>
+          </a:custGeom>
+        </p:spPr>
+      </p:sp>
+    </p:spTree>
+  </p:cSld>
+  <p:clrMapOvr>
+    <a:masterClrMapping/>
+  </p:clrMapOvr>
+</p:notes>
+</file>
+
+<file path=ppt/notesSlides/notesSlide6.xml><?xml version="1.0" encoding="utf-8"?>
+<p:notes xmlns:a="http://schemas.openxmlformats.org/drawingml/2006/main" xmlns:r="http://schemas.openxmlformats.org/officeDocument/2006/relationships" xmlns:p="http://schemas.openxmlformats.org/presentationml/2006/main" showMasterSp="0" showMasterPhAnim="0">
+  <p:cSld>
+    <p:spTree>
+      <p:nvGrpSpPr>
+        <p:cNvPr id="1" name="Shape 271"/>
+        <p:cNvGrpSpPr/>
+        <p:nvPr/>
+      </p:nvGrpSpPr>
+      <p:grpSpPr>
+        <a:xfrm>
+          <a:off x="0" y="0"/>
+          <a:ext cx="0" cy="0"/>
+          <a:chOff x="0" y="0"/>
+          <a:chExt cx="0" cy="0"/>
+        </a:xfrm>
+      </p:grpSpPr>
+      <p:sp>
+        <p:nvSpPr>
+          <p:cNvPr id="272" name="Google Shape;272;p11:notes"/>
+          <p:cNvSpPr txBox="1">
+            <a:spLocks noGrp="1"/>
+          </p:cNvSpPr>
+          <p:nvPr>
+            <p:ph type="body" idx="1"/>
+          </p:nvPr>
+        </p:nvSpPr>
+        <p:spPr>
+          <a:xfrm>
+            <a:off x="685800" y="4343400"/>
+            <a:ext cx="5486400" cy="4114800"/>
+          </a:xfrm>
+          <a:prstGeom prst="rect">
+            <a:avLst/>
+          </a:prstGeom>
+        </p:spPr>
+        <p:txBody>
+          <a:bodyPr spcFirstLastPara="1" wrap="square" lIns="91425" tIns="91425" rIns="91425" bIns="91425" anchor="t" anchorCtr="0">
+            <a:noAutofit/>
+          </a:bodyPr>
+          <a:lstStyle/>
+          <a:p>
+            <a:pPr marL="0" lvl="0" indent="0" algn="l" rtl="0">
+              <a:spcBef>
+                <a:spcPts val="0"/>
+              </a:spcBef>
+              <a:spcAft>
+                <a:spcPts val="0"/>
+              </a:spcAft>
+              <a:buNone/>
+            </a:pPr>
+            <a:endParaRPr/>
+          </a:p>
+        </p:txBody>
+      </p:sp>
+      <p:sp>
+        <p:nvSpPr>
+          <p:cNvPr id="273" name="Google Shape;273;p11:notes"/>
+          <p:cNvSpPr>
+            <a:spLocks noGrp="1" noRot="1" noChangeAspect="1"/>
+          </p:cNvSpPr>
+          <p:nvPr>
+            <p:ph type="sldImg" idx="2"/>
+          </p:nvPr>
+        </p:nvSpPr>
+        <p:spPr>
+          <a:xfrm>
+            <a:off x="381000" y="685800"/>
+            <a:ext cx="6096000" cy="3429000"/>
+          </a:xfrm>
+          <a:custGeom>
+            <a:avLst/>
+            <a:gdLst/>
+            <a:ahLst/>
+            <a:cxnLst/>
+            <a:rect l="l" t="t" r="r" b="b"/>
+            <a:pathLst>
+              <a:path w="120000" h="120000" extrusionOk="0">
+                <a:moveTo>
+                  <a:pt x="0" y="0"/>
+                </a:moveTo>
+                <a:lnTo>
+                  <a:pt x="120000" y="0"/>
+                </a:lnTo>
+                <a:lnTo>
+                  <a:pt x="120000" y="120000"/>
+                </a:lnTo>
+                <a:lnTo>
+                  <a:pt x="0" y="120000"/>
+                </a:lnTo>
+                <a:close/>
+              </a:path>
+            </a:pathLst>
+          </a:custGeom>
+        </p:spPr>
+      </p:sp>
+    </p:spTree>
+  </p:cSld>
+  <p:clrMapOvr>
+    <a:masterClrMapping/>
+  </p:clrMapOvr>
+</p:notes>
+</file>
+
+<file path=ppt/notesSlides/notesSlide7.xml><?xml version="1.0" encoding="utf-8"?>
+<p:notes xmlns:a="http://schemas.openxmlformats.org/drawingml/2006/main" xmlns:r="http://schemas.openxmlformats.org/officeDocument/2006/relationships" xmlns:p="http://schemas.openxmlformats.org/presentationml/2006/main" showMasterSp="0" showMasterPhAnim="0">
+  <p:cSld>
+    <p:spTree>
+      <p:nvGrpSpPr>
+        <p:cNvPr id="1" name="Shape 260">
+          <a:extLst>
+            <a:ext uri="{FF2B5EF4-FFF2-40B4-BE49-F238E27FC236}">
+              <a16:creationId xmlns:a16="http://schemas.microsoft.com/office/drawing/2014/main" id="{031ADCA6-ED41-89E8-8C5D-A7C0A46EC911}"/>
+            </a:ext>
+          </a:extLst>
+        </p:cNvPr>
+        <p:cNvGrpSpPr/>
+        <p:nvPr/>
+      </p:nvGrpSpPr>
+      <p:grpSpPr>
+        <a:xfrm>
+          <a:off x="0" y="0"/>
+          <a:ext cx="0" cy="0"/>
+          <a:chOff x="0" y="0"/>
+          <a:chExt cx="0" cy="0"/>
+        </a:xfrm>
+      </p:grpSpPr>
+      <p:sp>
+        <p:nvSpPr>
+          <p:cNvPr id="261" name="Google Shape;261;p10:notes">
+            <a:extLst>
+              <a:ext uri="{FF2B5EF4-FFF2-40B4-BE49-F238E27FC236}">
+                <a16:creationId xmlns:a16="http://schemas.microsoft.com/office/drawing/2014/main" id="{76B5FB3A-981F-7241-F06A-19C82D27A25B}"/>
+              </a:ext>
+            </a:extLst>
+          </p:cNvPr>
+          <p:cNvSpPr txBox="1">
+            <a:spLocks noGrp="1"/>
+          </p:cNvSpPr>
+          <p:nvPr>
+            <p:ph type="body" idx="1"/>
+          </p:nvPr>
+        </p:nvSpPr>
+        <p:spPr>
+          <a:xfrm>
+            <a:off x="685800" y="4343400"/>
+            <a:ext cx="5486400" cy="4114800"/>
+          </a:xfrm>
+          <a:prstGeom prst="rect">
+            <a:avLst/>
+          </a:prstGeom>
+        </p:spPr>
+        <p:txBody>
+          <a:bodyPr spcFirstLastPara="1" wrap="square" lIns="91425" tIns="91425" rIns="91425" bIns="91425" anchor="t" anchorCtr="0">
+            <a:noAutofit/>
+          </a:bodyPr>
+          <a:lstStyle/>
+          <a:p>
+            <a:pPr marL="0" lvl="0" indent="0" algn="l" rtl="0">
+              <a:spcBef>
+                <a:spcPts val="0"/>
+              </a:spcBef>
+              <a:spcAft>
+                <a:spcPts val="0"/>
+              </a:spcAft>
+              <a:buNone/>
+            </a:pPr>
+            <a:endParaRPr/>
+          </a:p>
+        </p:txBody>
+      </p:sp>
+      <p:sp>
+        <p:nvSpPr>
+          <p:cNvPr id="262" name="Google Shape;262;p10:notes">
+            <a:extLst>
+              <a:ext uri="{FF2B5EF4-FFF2-40B4-BE49-F238E27FC236}">
+                <a16:creationId xmlns:a16="http://schemas.microsoft.com/office/drawing/2014/main" id="{15698202-36E2-7700-F89A-43A791D1B102}"/>
+              </a:ext>
+            </a:extLst>
+          </p:cNvPr>
+          <p:cNvSpPr>
+            <a:spLocks noGrp="1" noRot="1" noChangeAspect="1"/>
+          </p:cNvSpPr>
+          <p:nvPr>
+            <p:ph type="sldImg" idx="2"/>
+          </p:nvPr>
+        </p:nvSpPr>
+        <p:spPr>
+          <a:xfrm>
+            <a:off x="381000" y="685800"/>
+            <a:ext cx="6096000" cy="3429000"/>
+          </a:xfrm>
+          <a:custGeom>
+            <a:avLst/>
+            <a:gdLst/>
+            <a:ahLst/>
+            <a:cxnLst/>
+            <a:rect l="l" t="t" r="r" b="b"/>
+            <a:pathLst>
+              <a:path w="120000" h="120000" extrusionOk="0">
+                <a:moveTo>
+                  <a:pt x="0" y="0"/>
+                </a:moveTo>
+                <a:lnTo>
+                  <a:pt x="120000" y="0"/>
+                </a:lnTo>
+                <a:lnTo>
+                  <a:pt x="120000" y="120000"/>
+                </a:lnTo>
+                <a:lnTo>
+                  <a:pt x="0" y="120000"/>
+                </a:lnTo>
+                <a:close/>
+              </a:path>
+            </a:pathLst>
+          </a:custGeom>
+        </p:spPr>
+      </p:sp>
+    </p:spTree>
+    <p:extLst>
+      <p:ext uri="{BB962C8B-B14F-4D97-AF65-F5344CB8AC3E}">
+        <p14:creationId xmlns:p14="http://schemas.microsoft.com/office/powerpoint/2010/main" val="3532042622"/>
+      </p:ext>
+    </p:extLst>
+  </p:cSld>
+  <p:clrMapOvr>
+    <a:masterClrMapping/>
+  </p:clrMapOvr>
+</p:notes>
+</file>
+
+<file path=ppt/notesSlides/notesSlide8.xml><?xml version="1.0" encoding="utf-8"?>
+<p:notes xmlns:a="http://schemas.openxmlformats.org/drawingml/2006/main" xmlns:r="http://schemas.openxmlformats.org/officeDocument/2006/relationships" xmlns:p="http://schemas.openxmlformats.org/presentationml/2006/main" showMasterSp="0" showMasterPhAnim="0">
+  <p:cSld>
+    <p:spTree>
+      <p:nvGrpSpPr>
+        <p:cNvPr id="1" name="Shape 260">
+          <a:extLst>
+            <a:ext uri="{FF2B5EF4-FFF2-40B4-BE49-F238E27FC236}">
+              <a16:creationId xmlns:a16="http://schemas.microsoft.com/office/drawing/2014/main" id="{0E976981-14AE-3DC3-9973-EF0F0CADCAEB}"/>
+            </a:ext>
+          </a:extLst>
+        </p:cNvPr>
+        <p:cNvGrpSpPr/>
+        <p:nvPr/>
+      </p:nvGrpSpPr>
+      <p:grpSpPr>
+        <a:xfrm>
+          <a:off x="0" y="0"/>
+          <a:ext cx="0" cy="0"/>
+          <a:chOff x="0" y="0"/>
+          <a:chExt cx="0" cy="0"/>
+        </a:xfrm>
+      </p:grpSpPr>
+      <p:sp>
+        <p:nvSpPr>
+          <p:cNvPr id="261" name="Google Shape;261;p10:notes">
+            <a:extLst>
+              <a:ext uri="{FF2B5EF4-FFF2-40B4-BE49-F238E27FC236}">
+                <a16:creationId xmlns:a16="http://schemas.microsoft.com/office/drawing/2014/main" id="{FA607C5C-DCD1-5349-A7DF-6FC75E5ED5A2}"/>
+              </a:ext>
+            </a:extLst>
+          </p:cNvPr>
+          <p:cNvSpPr txBox="1">
+            <a:spLocks noGrp="1"/>
+          </p:cNvSpPr>
+          <p:nvPr>
+            <p:ph type="body" idx="1"/>
+          </p:nvPr>
+        </p:nvSpPr>
+        <p:spPr>
+          <a:xfrm>
+            <a:off x="685800" y="4343400"/>
+            <a:ext cx="5486400" cy="4114800"/>
+          </a:xfrm>
+          <a:prstGeom prst="rect">
+            <a:avLst/>
+          </a:prstGeom>
+        </p:spPr>
+        <p:txBody>
+          <a:bodyPr spcFirstLastPara="1" wrap="square" lIns="91425" tIns="91425" rIns="91425" bIns="91425" anchor="t" anchorCtr="0">
+            <a:noAutofit/>
+          </a:bodyPr>
+          <a:lstStyle/>
+          <a:p>
+            <a:pPr marL="0" lvl="0" indent="0" algn="l" rtl="0">
+              <a:spcBef>
+                <a:spcPts val="0"/>
+              </a:spcBef>
+              <a:spcAft>
+                <a:spcPts val="0"/>
+              </a:spcAft>
+              <a:buNone/>
+            </a:pPr>
+            <a:endParaRPr/>
+          </a:p>
+        </p:txBody>
+      </p:sp>
+      <p:sp>
+        <p:nvSpPr>
+          <p:cNvPr id="262" name="Google Shape;262;p10:notes">
+            <a:extLst>
+              <a:ext uri="{FF2B5EF4-FFF2-40B4-BE49-F238E27FC236}">
+                <a16:creationId xmlns:a16="http://schemas.microsoft.com/office/drawing/2014/main" id="{1C481F5B-62F5-FF71-90D8-F8B7AC3FE442}"/>
+              </a:ext>
+            </a:extLst>
+          </p:cNvPr>
+          <p:cNvSpPr>
+            <a:spLocks noGrp="1" noRot="1" noChangeAspect="1"/>
+          </p:cNvSpPr>
+          <p:nvPr>
+            <p:ph type="sldImg" idx="2"/>
+          </p:nvPr>
+        </p:nvSpPr>
+        <p:spPr>
+          <a:xfrm>
+            <a:off x="381000" y="685800"/>
+            <a:ext cx="6096000" cy="3429000"/>
+          </a:xfrm>
+          <a:custGeom>
+            <a:avLst/>
+            <a:gdLst/>
+            <a:ahLst/>
+            <a:cxnLst/>
+            <a:rect l="l" t="t" r="r" b="b"/>
+            <a:pathLst>
+              <a:path w="120000" h="120000" extrusionOk="0">
+                <a:moveTo>
+                  <a:pt x="0" y="0"/>
+                </a:moveTo>
+                <a:lnTo>
+                  <a:pt x="120000" y="0"/>
+                </a:lnTo>
+                <a:lnTo>
+                  <a:pt x="120000" y="120000"/>
+                </a:lnTo>
+                <a:lnTo>
+                  <a:pt x="0" y="120000"/>
+                </a:lnTo>
+                <a:close/>
+              </a:path>
+            </a:pathLst>
+          </a:custGeom>
+        </p:spPr>
+      </p:sp>
+    </p:spTree>
+    <p:extLst>
+      <p:ext uri="{BB962C8B-B14F-4D97-AF65-F5344CB8AC3E}">
+        <p14:creationId xmlns:p14="http://schemas.microsoft.com/office/powerpoint/2010/main" val="4262194326"/>
+      </p:ext>
+    </p:extLst>
+  </p:cSld>
+  <p:clrMapOvr>
+    <a:masterClrMapping/>
+  </p:clrMapOvr>
+</p:notes>
+</file>
+
+<file path=ppt/notesSlides/notesSlide9.xml><?xml version="1.0" encoding="utf-8"?>
+<p:notes xmlns:a="http://schemas.openxmlformats.org/drawingml/2006/main" xmlns:r="http://schemas.openxmlformats.org/officeDocument/2006/relationships" xmlns:p="http://schemas.openxmlformats.org/presentationml/2006/main" showMasterSp="0" showMasterPhAnim="0">
+  <p:cSld>
+    <p:spTree>
+      <p:nvGrpSpPr>
+        <p:cNvPr id="1" name="Shape 271">
+          <a:extLst>
+            <a:ext uri="{FF2B5EF4-FFF2-40B4-BE49-F238E27FC236}">
+              <a16:creationId xmlns:a16="http://schemas.microsoft.com/office/drawing/2014/main" id="{491CAB47-D3CB-8D12-095A-517DD5602BF3}"/>
+            </a:ext>
+          </a:extLst>
+        </p:cNvPr>
+        <p:cNvGrpSpPr/>
+        <p:nvPr/>
+      </p:nvGrpSpPr>
+      <p:grpSpPr>
+        <a:xfrm>
+          <a:off x="0" y="0"/>
+          <a:ext cx="0" cy="0"/>
+          <a:chOff x="0" y="0"/>
+          <a:chExt cx="0" cy="0"/>
+        </a:xfrm>
+      </p:grpSpPr>
+      <p:sp>
+        <p:nvSpPr>
+          <p:cNvPr id="272" name="Google Shape;272;p11:notes">
+            <a:extLst>
+              <a:ext uri="{FF2B5EF4-FFF2-40B4-BE49-F238E27FC236}">
+                <a16:creationId xmlns:a16="http://schemas.microsoft.com/office/drawing/2014/main" id="{12DFE4D8-9CD7-C8F2-B8DA-9C7304EF86EB}"/>
+              </a:ext>
+            </a:extLst>
+          </p:cNvPr>
+          <p:cNvSpPr txBox="1">
+            <a:spLocks noGrp="1"/>
+          </p:cNvSpPr>
+          <p:nvPr>
+            <p:ph type="body" idx="1"/>
+          </p:nvPr>
+        </p:nvSpPr>
+        <p:spPr>
+          <a:xfrm>
+            <a:off x="685800" y="4343400"/>
+            <a:ext cx="5486400" cy="4114800"/>
+          </a:xfrm>
+          <a:prstGeom prst="rect">
+            <a:avLst/>
+          </a:prstGeom>
+        </p:spPr>
+        <p:txBody>
+          <a:bodyPr spcFirstLastPara="1" wrap="square" lIns="91425" tIns="91425" rIns="91425" bIns="91425" anchor="t" anchorCtr="0">
+            <a:noAutofit/>
+          </a:bodyPr>
+          <a:lstStyle/>
+          <a:p>
+            <a:pPr marL="0" lvl="0" indent="0" algn="l" rtl="0">
+              <a:spcBef>
+                <a:spcPts val="0"/>
+              </a:spcBef>
+              <a:spcAft>
+                <a:spcPts val="0"/>
+              </a:spcAft>
+              <a:buNone/>
+            </a:pPr>
+            <a:endParaRPr/>
+          </a:p>
+        </p:txBody>
+      </p:sp>
+      <p:sp>
+        <p:nvSpPr>
+          <p:cNvPr id="273" name="Google Shape;273;p11:notes">
+            <a:extLst>
+              <a:ext uri="{FF2B5EF4-FFF2-40B4-BE49-F238E27FC236}">
+                <a16:creationId xmlns:a16="http://schemas.microsoft.com/office/drawing/2014/main" id="{2E3771D8-16F3-1D78-85D9-6F890316ECA3}"/>
+              </a:ext>
+            </a:extLst>
+          </p:cNvPr>
+          <p:cNvSpPr>
+            <a:spLocks noGrp="1" noRot="1" noChangeAspect="1"/>
+          </p:cNvSpPr>
+          <p:nvPr>
+            <p:ph type="sldImg" idx="2"/>
+          </p:nvPr>
+        </p:nvSpPr>
+        <p:spPr>
+          <a:xfrm>
+            <a:off x="381000" y="685800"/>
+            <a:ext cx="6096000" cy="3429000"/>
+          </a:xfrm>
+          <a:custGeom>
+            <a:avLst/>
+            <a:gdLst/>
+            <a:ahLst/>
+            <a:cxnLst/>
+            <a:rect l="l" t="t" r="r" b="b"/>
+            <a:pathLst>
+              <a:path w="120000" h="120000" extrusionOk="0">
+                <a:moveTo>
+                  <a:pt x="0" y="0"/>
+                </a:moveTo>
+                <a:lnTo>
+                  <a:pt x="120000" y="0"/>
+                </a:lnTo>
+                <a:lnTo>
+                  <a:pt x="120000" y="120000"/>
+                </a:lnTo>
+                <a:lnTo>
+                  <a:pt x="0" y="120000"/>
+                </a:lnTo>
+                <a:close/>
+              </a:path>
+            </a:pathLst>
+          </a:custGeom>
+        </p:spPr>
+      </p:sp>
+    </p:spTree>
+    <p:extLst>
+      <p:ext uri="{BB962C8B-B14F-4D97-AF65-F5344CB8AC3E}">
+        <p14:creationId xmlns:p14="http://schemas.microsoft.com/office/powerpoint/2010/main" val="4261801020"/>
+      </p:ext>
+    </p:extLst>
+  </p:cSld>
+  <p:clrMapOvr>
+    <a:masterClrMapping/>
+  </p:clrMapOvr>
+</p:notes>
 </file>
 
 <file path=ppt/slideLayouts/slideLayout1.xml><?xml version="1.0" encoding="utf-8"?>
@@ -150,13 +1924,7 @@
       </p:grpSpPr>
       <p:sp>
         <p:nvSpPr>
-          <p:cNvPr id="2" name="Title 1">
-            <a:extLst>
-              <a:ext uri="{FF2B5EF4-FFF2-40B4-BE49-F238E27FC236}">
-                <a16:creationId xmlns:a16="http://schemas.microsoft.com/office/drawing/2014/main" id="{67CCDF1C-718C-94AC-3A27-2D2A681119E0}"/>
-              </a:ext>
-            </a:extLst>
-          </p:cNvPr>
+          <p:cNvPr id="2" name="Title 1"/>
           <p:cNvSpPr>
             <a:spLocks noGrp="1"/>
           </p:cNvSpPr>
@@ -166,15 +1934,17 @@
         </p:nvSpPr>
         <p:spPr>
           <a:xfrm>
-            <a:off x="1524000" y="1122363"/>
-            <a:ext cx="9144000" cy="2387600"/>
-          </a:xfrm>
-        </p:spPr>
-        <p:txBody>
-          <a:bodyPr anchor="b"/>
+            <a:off x="914400" y="1371601"/>
+            <a:ext cx="10464800" cy="1927225"/>
+          </a:xfrm>
+        </p:spPr>
+        <p:txBody>
+          <a:bodyPr anchor="b">
+            <a:noAutofit/>
+          </a:bodyPr>
           <a:lstStyle>
-            <a:lvl1pPr algn="ctr">
-              <a:defRPr sz="6000"/>
+            <a:lvl1pPr>
+              <a:defRPr sz="5400" cap="all" baseline="0"/>
             </a:lvl1pPr>
           </a:lstStyle>
           <a:p>
@@ -182,18 +1952,13 @@
               <a:rPr lang="en-US"/>
               <a:t>Click to edit Master title style</a:t>
             </a:r>
-          </a:p>
-        </p:txBody>
-      </p:sp>
-      <p:sp>
-        <p:nvSpPr>
-          <p:cNvPr id="3" name="Subtitle 2">
-            <a:extLst>
-              <a:ext uri="{FF2B5EF4-FFF2-40B4-BE49-F238E27FC236}">
-                <a16:creationId xmlns:a16="http://schemas.microsoft.com/office/drawing/2014/main" id="{ED598FAA-380F-304E-5046-2E349C3EAD6E}"/>
-              </a:ext>
-            </a:extLst>
-          </p:cNvPr>
+            <a:endParaRPr lang="en-US" dirty="0"/>
+          </a:p>
+        </p:txBody>
+      </p:sp>
+      <p:sp>
+        <p:nvSpPr>
+          <p:cNvPr id="3" name="Subtitle 2"/>
           <p:cNvSpPr>
             <a:spLocks noGrp="1"/>
           </p:cNvSpPr>
@@ -203,48 +1968,103 @@
         </p:nvSpPr>
         <p:spPr>
           <a:xfrm>
-            <a:off x="1524000" y="3602038"/>
-            <a:ext cx="9144000" cy="1655762"/>
+            <a:off x="914400" y="3505200"/>
+            <a:ext cx="8534400" cy="1752600"/>
           </a:xfrm>
         </p:spPr>
         <p:txBody>
           <a:bodyPr/>
           <a:lstStyle>
-            <a:lvl1pPr marL="0" indent="0" algn="ctr">
+            <a:lvl1pPr marL="0" indent="0" algn="l">
               <a:buNone/>
-              <a:defRPr sz="2400"/>
+              <a:defRPr>
+                <a:solidFill>
+                  <a:schemeClr val="tx1">
+                    <a:lumMod val="75000"/>
+                    <a:lumOff val="25000"/>
+                  </a:schemeClr>
+                </a:solidFill>
+              </a:defRPr>
             </a:lvl1pPr>
             <a:lvl2pPr marL="457200" indent="0" algn="ctr">
               <a:buNone/>
-              <a:defRPr sz="2000"/>
+              <a:defRPr>
+                <a:solidFill>
+                  <a:schemeClr val="tx1">
+                    <a:tint val="75000"/>
+                  </a:schemeClr>
+                </a:solidFill>
+              </a:defRPr>
             </a:lvl2pPr>
             <a:lvl3pPr marL="914400" indent="0" algn="ctr">
               <a:buNone/>
-              <a:defRPr sz="1800"/>
+              <a:defRPr>
+                <a:solidFill>
+                  <a:schemeClr val="tx1">
+                    <a:tint val="75000"/>
+                  </a:schemeClr>
+                </a:solidFill>
+              </a:defRPr>
             </a:lvl3pPr>
             <a:lvl4pPr marL="1371600" indent="0" algn="ctr">
               <a:buNone/>
-              <a:defRPr sz="1600"/>
+              <a:defRPr>
+                <a:solidFill>
+                  <a:schemeClr val="tx1">
+                    <a:tint val="75000"/>
+                  </a:schemeClr>
+                </a:solidFill>
+              </a:defRPr>
             </a:lvl4pPr>
             <a:lvl5pPr marL="1828800" indent="0" algn="ctr">
               <a:buNone/>
-              <a:defRPr sz="1600"/>
+              <a:defRPr>
+                <a:solidFill>
+                  <a:schemeClr val="tx1">
+                    <a:tint val="75000"/>
+                  </a:schemeClr>
+                </a:solidFill>
+              </a:defRPr>
             </a:lvl5pPr>
             <a:lvl6pPr marL="2286000" indent="0" algn="ctr">
               <a:buNone/>
-              <a:defRPr sz="1600"/>
+              <a:defRPr>
+                <a:solidFill>
+                  <a:schemeClr val="tx1">
+                    <a:tint val="75000"/>
+                  </a:schemeClr>
+                </a:solidFill>
+              </a:defRPr>
             </a:lvl6pPr>
             <a:lvl7pPr marL="2743200" indent="0" algn="ctr">
               <a:buNone/>
-              <a:defRPr sz="1600"/>
+              <a:defRPr>
+                <a:solidFill>
+                  <a:schemeClr val="tx1">
+                    <a:tint val="75000"/>
+                  </a:schemeClr>
+                </a:solidFill>
+              </a:defRPr>
             </a:lvl7pPr>
             <a:lvl8pPr marL="3200400" indent="0" algn="ctr">
               <a:buNone/>
-              <a:defRPr sz="1600"/>
+              <a:defRPr>
+                <a:solidFill>
+                  <a:schemeClr val="tx1">
+                    <a:tint val="75000"/>
+                  </a:schemeClr>
+                </a:solidFill>
+              </a:defRPr>
             </a:lvl8pPr>
             <a:lvl9pPr marL="3657600" indent="0" algn="ctr">
               <a:buNone/>
-              <a:defRPr sz="1600"/>
+              <a:defRPr>
+                <a:solidFill>
+                  <a:schemeClr val="tx1">
+                    <a:tint val="75000"/>
+                  </a:schemeClr>
+                </a:solidFill>
+              </a:defRPr>
             </a:lvl9pPr>
           </a:lstStyle>
           <a:p>
@@ -252,18 +2072,13 @@
               <a:rPr lang="en-US"/>
               <a:t>Click to edit Master subtitle style</a:t>
             </a:r>
-          </a:p>
-        </p:txBody>
-      </p:sp>
-      <p:sp>
-        <p:nvSpPr>
-          <p:cNvPr id="4" name="Date Placeholder 3">
-            <a:extLst>
-              <a:ext uri="{FF2B5EF4-FFF2-40B4-BE49-F238E27FC236}">
-                <a16:creationId xmlns:a16="http://schemas.microsoft.com/office/drawing/2014/main" id="{B7E4701A-5B37-2E3F-CDFE-7D2D897C9417}"/>
-              </a:ext>
-            </a:extLst>
-          </p:cNvPr>
+            <a:endParaRPr lang="en-US" dirty="0"/>
+          </a:p>
+        </p:txBody>
+      </p:sp>
+      <p:sp>
+        <p:nvSpPr>
+          <p:cNvPr id="4" name="Date Placeholder 3"/>
           <p:cNvSpPr>
             <a:spLocks noGrp="1"/>
           </p:cNvSpPr>
@@ -278,7 +2093,7 @@
           <a:p>
             <a:fld id="{F4D18BF0-D309-41FF-AA8C-FC2AA1806513}" type="datetimeFigureOut">
               <a:rPr lang="en-US" smtClean="0"/>
-              <a:t>3/5/2026</a:t>
+              <a:t>3/6/2026</a:t>
             </a:fld>
             <a:endParaRPr lang="en-US"/>
           </a:p>
@@ -286,13 +2101,7 @@
       </p:sp>
       <p:sp>
         <p:nvSpPr>
-          <p:cNvPr id="5" name="Footer Placeholder 4">
-            <a:extLst>
-              <a:ext uri="{FF2B5EF4-FFF2-40B4-BE49-F238E27FC236}">
-                <a16:creationId xmlns:a16="http://schemas.microsoft.com/office/drawing/2014/main" id="{6D7EA0E1-DC03-56A0-7C53-7D1D38B21ACF}"/>
-              </a:ext>
-            </a:extLst>
-          </p:cNvPr>
+          <p:cNvPr id="5" name="Footer Placeholder 4"/>
           <p:cNvSpPr>
             <a:spLocks noGrp="1"/>
           </p:cNvSpPr>
@@ -311,13 +2120,7 @@
       </p:sp>
       <p:sp>
         <p:nvSpPr>
-          <p:cNvPr id="6" name="Slide Number Placeholder 5">
-            <a:extLst>
-              <a:ext uri="{FF2B5EF4-FFF2-40B4-BE49-F238E27FC236}">
-                <a16:creationId xmlns:a16="http://schemas.microsoft.com/office/drawing/2014/main" id="{92C62E86-B622-9BE3-1F5E-775DCE85D62B}"/>
-              </a:ext>
-            </a:extLst>
-          </p:cNvPr>
+          <p:cNvPr id="6" name="Slide Number Placeholder 5"/>
           <p:cNvSpPr>
             <a:spLocks noGrp="1"/>
           </p:cNvSpPr>
@@ -338,12 +2141,42 @@
           </a:p>
         </p:txBody>
       </p:sp>
+      <p:cxnSp>
+        <p:nvCxnSpPr>
+          <p:cNvPr id="8" name="Straight Connector 7"/>
+          <p:cNvCxnSpPr/>
+          <p:nvPr/>
+        </p:nvCxnSpPr>
+        <p:spPr>
+          <a:xfrm>
+            <a:off x="914400" y="3398520"/>
+            <a:ext cx="10464800" cy="1588"/>
+          </a:xfrm>
+          <a:prstGeom prst="line">
+            <a:avLst/>
+          </a:prstGeom>
+          <a:ln w="19050">
+            <a:solidFill>
+              <a:schemeClr val="tx2"/>
+            </a:solidFill>
+          </a:ln>
+        </p:spPr>
+        <p:style>
+          <a:lnRef idx="1">
+            <a:schemeClr val="accent1"/>
+          </a:lnRef>
+          <a:fillRef idx="0">
+            <a:schemeClr val="accent1"/>
+          </a:fillRef>
+          <a:effectRef idx="0">
+            <a:schemeClr val="accent1"/>
+          </a:effectRef>
+          <a:fontRef idx="minor">
+            <a:schemeClr val="tx1"/>
+          </a:fontRef>
+        </p:style>
+      </p:cxnSp>
     </p:spTree>
-    <p:extLst>
-      <p:ext uri="{BB962C8B-B14F-4D97-AF65-F5344CB8AC3E}">
-        <p14:creationId xmlns:p14="http://schemas.microsoft.com/office/powerpoint/2010/main" val="314974857"/>
-      </p:ext>
-    </p:extLst>
   </p:cSld>
   <p:clrMapOvr>
     <a:masterClrMapping/>
@@ -370,13 +2203,7 @@
       </p:grpSpPr>
       <p:sp>
         <p:nvSpPr>
-          <p:cNvPr id="2" name="Title 1">
-            <a:extLst>
-              <a:ext uri="{FF2B5EF4-FFF2-40B4-BE49-F238E27FC236}">
-                <a16:creationId xmlns:a16="http://schemas.microsoft.com/office/drawing/2014/main" id="{6163DE49-7DF7-6063-6C71-5B0F9B7B2FB2}"/>
-              </a:ext>
-            </a:extLst>
-          </p:cNvPr>
+          <p:cNvPr id="2" name="Title 1"/>
           <p:cNvSpPr>
             <a:spLocks noGrp="1"/>
           </p:cNvSpPr>
@@ -398,13 +2225,7 @@
       </p:sp>
       <p:sp>
         <p:nvSpPr>
-          <p:cNvPr id="3" name="Vertical Text Placeholder 2">
-            <a:extLst>
-              <a:ext uri="{FF2B5EF4-FFF2-40B4-BE49-F238E27FC236}">
-                <a16:creationId xmlns:a16="http://schemas.microsoft.com/office/drawing/2014/main" id="{B20619B4-EB80-298E-82CD-A02A601D609E}"/>
-              </a:ext>
-            </a:extLst>
-          </p:cNvPr>
+          <p:cNvPr id="3" name="Vertical Text Placeholder 2"/>
           <p:cNvSpPr>
             <a:spLocks noGrp="1"/>
           </p:cNvSpPr>
@@ -455,13 +2276,7 @@
       </p:sp>
       <p:sp>
         <p:nvSpPr>
-          <p:cNvPr id="4" name="Date Placeholder 3">
-            <a:extLst>
-              <a:ext uri="{FF2B5EF4-FFF2-40B4-BE49-F238E27FC236}">
-                <a16:creationId xmlns:a16="http://schemas.microsoft.com/office/drawing/2014/main" id="{94D1C2DC-0EE7-42C0-9ACC-702D7D067AE8}"/>
-              </a:ext>
-            </a:extLst>
-          </p:cNvPr>
+          <p:cNvPr id="4" name="Date Placeholder 3"/>
           <p:cNvSpPr>
             <a:spLocks noGrp="1"/>
           </p:cNvSpPr>
@@ -476,7 +2291,7 @@
           <a:p>
             <a:fld id="{F4D18BF0-D309-41FF-AA8C-FC2AA1806513}" type="datetimeFigureOut">
               <a:rPr lang="en-US" smtClean="0"/>
-              <a:t>3/5/2026</a:t>
+              <a:t>3/6/2026</a:t>
             </a:fld>
             <a:endParaRPr lang="en-US"/>
           </a:p>
@@ -484,13 +2299,7 @@
       </p:sp>
       <p:sp>
         <p:nvSpPr>
-          <p:cNvPr id="5" name="Footer Placeholder 4">
-            <a:extLst>
-              <a:ext uri="{FF2B5EF4-FFF2-40B4-BE49-F238E27FC236}">
-                <a16:creationId xmlns:a16="http://schemas.microsoft.com/office/drawing/2014/main" id="{82FECCC8-A7C8-E8A8-41A5-0F12D6B1C597}"/>
-              </a:ext>
-            </a:extLst>
-          </p:cNvPr>
+          <p:cNvPr id="5" name="Footer Placeholder 4"/>
           <p:cNvSpPr>
             <a:spLocks noGrp="1"/>
           </p:cNvSpPr>
@@ -509,13 +2318,7 @@
       </p:sp>
       <p:sp>
         <p:nvSpPr>
-          <p:cNvPr id="6" name="Slide Number Placeholder 5">
-            <a:extLst>
-              <a:ext uri="{FF2B5EF4-FFF2-40B4-BE49-F238E27FC236}">
-                <a16:creationId xmlns:a16="http://schemas.microsoft.com/office/drawing/2014/main" id="{0DA586E0-F511-1383-4EF9-E19571FB9DD6}"/>
-              </a:ext>
-            </a:extLst>
-          </p:cNvPr>
+          <p:cNvPr id="6" name="Slide Number Placeholder 5"/>
           <p:cNvSpPr>
             <a:spLocks noGrp="1"/>
           </p:cNvSpPr>
@@ -537,11 +2340,6 @@
         </p:txBody>
       </p:sp>
     </p:spTree>
-    <p:extLst>
-      <p:ext uri="{BB962C8B-B14F-4D97-AF65-F5344CB8AC3E}">
-        <p14:creationId xmlns:p14="http://schemas.microsoft.com/office/powerpoint/2010/main" val="3412784313"/>
-      </p:ext>
-    </p:extLst>
   </p:cSld>
   <p:clrMapOvr>
     <a:masterClrMapping/>
@@ -568,13 +2366,7 @@
       </p:grpSpPr>
       <p:sp>
         <p:nvSpPr>
-          <p:cNvPr id="2" name="Vertical Title 1">
-            <a:extLst>
-              <a:ext uri="{FF2B5EF4-FFF2-40B4-BE49-F238E27FC236}">
-                <a16:creationId xmlns:a16="http://schemas.microsoft.com/office/drawing/2014/main" id="{8282CD87-0B2B-444E-393F-21F3551D4164}"/>
-              </a:ext>
-            </a:extLst>
-          </p:cNvPr>
+          <p:cNvPr id="2" name="Vertical Title 1"/>
           <p:cNvSpPr>
             <a:spLocks noGrp="1"/>
           </p:cNvSpPr>
@@ -584,30 +2376,25 @@
         </p:nvSpPr>
         <p:spPr>
           <a:xfrm>
-            <a:off x="8724900" y="365125"/>
-            <a:ext cx="2628900" cy="5811838"/>
-          </a:xfrm>
-        </p:spPr>
-        <p:txBody>
-          <a:bodyPr vert="eaVert"/>
+            <a:off x="8839200" y="609600"/>
+            <a:ext cx="2743200" cy="5867400"/>
+          </a:xfrm>
+        </p:spPr>
+        <p:txBody>
+          <a:bodyPr vert="eaVert" anchor="b"/>
           <a:lstStyle/>
           <a:p>
             <a:r>
               <a:rPr lang="en-US"/>
               <a:t>Click to edit Master title style</a:t>
             </a:r>
-          </a:p>
-        </p:txBody>
-      </p:sp>
-      <p:sp>
-        <p:nvSpPr>
-          <p:cNvPr id="3" name="Vertical Text Placeholder 2">
-            <a:extLst>
-              <a:ext uri="{FF2B5EF4-FFF2-40B4-BE49-F238E27FC236}">
-                <a16:creationId xmlns:a16="http://schemas.microsoft.com/office/drawing/2014/main" id="{4466851B-7CA1-1F54-4B83-CFF8E1DFEA53}"/>
-              </a:ext>
-            </a:extLst>
-          </p:cNvPr>
+            <a:endParaRPr lang="en-US" dirty="0"/>
+          </a:p>
+        </p:txBody>
+      </p:sp>
+      <p:sp>
+        <p:nvSpPr>
+          <p:cNvPr id="3" name="Vertical Text Placeholder 2"/>
           <p:cNvSpPr>
             <a:spLocks noGrp="1"/>
           </p:cNvSpPr>
@@ -617,8 +2404,8 @@
         </p:nvSpPr>
         <p:spPr>
           <a:xfrm>
-            <a:off x="838200" y="365125"/>
-            <a:ext cx="7734300" cy="5811838"/>
+            <a:off x="609600" y="609600"/>
+            <a:ext cx="8026400" cy="5867400"/>
           </a:xfrm>
         </p:spPr>
         <p:txBody>
@@ -658,18 +2445,13 @@
               <a:rPr lang="en-US"/>
               <a:t>Fifth level</a:t>
             </a:r>
-          </a:p>
-        </p:txBody>
-      </p:sp>
-      <p:sp>
-        <p:nvSpPr>
-          <p:cNvPr id="4" name="Date Placeholder 3">
-            <a:extLst>
-              <a:ext uri="{FF2B5EF4-FFF2-40B4-BE49-F238E27FC236}">
-                <a16:creationId xmlns:a16="http://schemas.microsoft.com/office/drawing/2014/main" id="{3F179A2C-3863-F54E-F475-C7938E61960F}"/>
-              </a:ext>
-            </a:extLst>
-          </p:cNvPr>
+            <a:endParaRPr lang="en-US" dirty="0"/>
+          </a:p>
+        </p:txBody>
+      </p:sp>
+      <p:sp>
+        <p:nvSpPr>
+          <p:cNvPr id="4" name="Date Placeholder 3"/>
           <p:cNvSpPr>
             <a:spLocks noGrp="1"/>
           </p:cNvSpPr>
@@ -684,7 +2466,7 @@
           <a:p>
             <a:fld id="{F4D18BF0-D309-41FF-AA8C-FC2AA1806513}" type="datetimeFigureOut">
               <a:rPr lang="en-US" smtClean="0"/>
-              <a:t>3/5/2026</a:t>
+              <a:t>3/6/2026</a:t>
             </a:fld>
             <a:endParaRPr lang="en-US"/>
           </a:p>
@@ -692,13 +2474,7 @@
       </p:sp>
       <p:sp>
         <p:nvSpPr>
-          <p:cNvPr id="5" name="Footer Placeholder 4">
-            <a:extLst>
-              <a:ext uri="{FF2B5EF4-FFF2-40B4-BE49-F238E27FC236}">
-                <a16:creationId xmlns:a16="http://schemas.microsoft.com/office/drawing/2014/main" id="{ED26251F-14CD-B74A-EC7F-94B48D33F351}"/>
-              </a:ext>
-            </a:extLst>
-          </p:cNvPr>
+          <p:cNvPr id="5" name="Footer Placeholder 4"/>
           <p:cNvSpPr>
             <a:spLocks noGrp="1"/>
           </p:cNvSpPr>
@@ -717,13 +2493,7 @@
       </p:sp>
       <p:sp>
         <p:nvSpPr>
-          <p:cNvPr id="6" name="Slide Number Placeholder 5">
-            <a:extLst>
-              <a:ext uri="{FF2B5EF4-FFF2-40B4-BE49-F238E27FC236}">
-                <a16:creationId xmlns:a16="http://schemas.microsoft.com/office/drawing/2014/main" id="{B29DAFB0-5ADA-535B-0050-632995D6B432}"/>
-              </a:ext>
-            </a:extLst>
-          </p:cNvPr>
+          <p:cNvPr id="6" name="Slide Number Placeholder 5"/>
           <p:cNvSpPr>
             <a:spLocks noGrp="1"/>
           </p:cNvSpPr>
@@ -745,11 +2515,6 @@
         </p:txBody>
       </p:sp>
     </p:spTree>
-    <p:extLst>
-      <p:ext uri="{BB962C8B-B14F-4D97-AF65-F5344CB8AC3E}">
-        <p14:creationId xmlns:p14="http://schemas.microsoft.com/office/powerpoint/2010/main" val="1264339278"/>
-      </p:ext>
-    </p:extLst>
   </p:cSld>
   <p:clrMapOvr>
     <a:masterClrMapping/>
@@ -776,13 +2541,7 @@
       </p:grpSpPr>
       <p:sp>
         <p:nvSpPr>
-          <p:cNvPr id="2" name="Title 1">
-            <a:extLst>
-              <a:ext uri="{FF2B5EF4-FFF2-40B4-BE49-F238E27FC236}">
-                <a16:creationId xmlns:a16="http://schemas.microsoft.com/office/drawing/2014/main" id="{254DE831-42DE-D5A0-EE5A-124E5063CBD8}"/>
-              </a:ext>
-            </a:extLst>
-          </p:cNvPr>
+          <p:cNvPr id="2" name="Title 1"/>
           <p:cNvSpPr>
             <a:spLocks noGrp="1"/>
           </p:cNvSpPr>
@@ -804,13 +2563,7 @@
       </p:sp>
       <p:sp>
         <p:nvSpPr>
-          <p:cNvPr id="3" name="Content Placeholder 2">
-            <a:extLst>
-              <a:ext uri="{FF2B5EF4-FFF2-40B4-BE49-F238E27FC236}">
-                <a16:creationId xmlns:a16="http://schemas.microsoft.com/office/drawing/2014/main" id="{E9C034C4-7F64-2899-1889-240D1474FA57}"/>
-              </a:ext>
-            </a:extLst>
-          </p:cNvPr>
+          <p:cNvPr id="3" name="Content Placeholder 2"/>
           <p:cNvSpPr>
             <a:spLocks noGrp="1"/>
           </p:cNvSpPr>
@@ -861,13 +2614,7 @@
       </p:sp>
       <p:sp>
         <p:nvSpPr>
-          <p:cNvPr id="4" name="Date Placeholder 3">
-            <a:extLst>
-              <a:ext uri="{FF2B5EF4-FFF2-40B4-BE49-F238E27FC236}">
-                <a16:creationId xmlns:a16="http://schemas.microsoft.com/office/drawing/2014/main" id="{4B68D1E8-17A6-50EE-05C6-2370BBDB36B6}"/>
-              </a:ext>
-            </a:extLst>
-          </p:cNvPr>
+          <p:cNvPr id="4" name="Date Placeholder 3"/>
           <p:cNvSpPr>
             <a:spLocks noGrp="1"/>
           </p:cNvSpPr>
@@ -882,7 +2629,7 @@
           <a:p>
             <a:fld id="{F4D18BF0-D309-41FF-AA8C-FC2AA1806513}" type="datetimeFigureOut">
               <a:rPr lang="en-US" smtClean="0"/>
-              <a:t>3/5/2026</a:t>
+              <a:t>3/6/2026</a:t>
             </a:fld>
             <a:endParaRPr lang="en-US"/>
           </a:p>
@@ -890,13 +2637,7 @@
       </p:sp>
       <p:sp>
         <p:nvSpPr>
-          <p:cNvPr id="5" name="Footer Placeholder 4">
-            <a:extLst>
-              <a:ext uri="{FF2B5EF4-FFF2-40B4-BE49-F238E27FC236}">
-                <a16:creationId xmlns:a16="http://schemas.microsoft.com/office/drawing/2014/main" id="{15447504-AD6B-2C3C-8376-AF67EC184DE9}"/>
-              </a:ext>
-            </a:extLst>
-          </p:cNvPr>
+          <p:cNvPr id="5" name="Footer Placeholder 4"/>
           <p:cNvSpPr>
             <a:spLocks noGrp="1"/>
           </p:cNvSpPr>
@@ -915,13 +2656,7 @@
       </p:sp>
       <p:sp>
         <p:nvSpPr>
-          <p:cNvPr id="6" name="Slide Number Placeholder 5">
-            <a:extLst>
-              <a:ext uri="{FF2B5EF4-FFF2-40B4-BE49-F238E27FC236}">
-                <a16:creationId xmlns:a16="http://schemas.microsoft.com/office/drawing/2014/main" id="{51B1C33E-E26C-4FCD-AA6E-3BBD7E7895D3}"/>
-              </a:ext>
-            </a:extLst>
-          </p:cNvPr>
+          <p:cNvPr id="6" name="Slide Number Placeholder 5"/>
           <p:cNvSpPr>
             <a:spLocks noGrp="1"/>
           </p:cNvSpPr>
@@ -943,11 +2678,6 @@
         </p:txBody>
       </p:sp>
     </p:spTree>
-    <p:extLst>
-      <p:ext uri="{BB962C8B-B14F-4D97-AF65-F5344CB8AC3E}">
-        <p14:creationId xmlns:p14="http://schemas.microsoft.com/office/powerpoint/2010/main" val="1298816308"/>
-      </p:ext>
-    </p:extLst>
   </p:cSld>
   <p:clrMapOvr>
     <a:masterClrMapping/>
@@ -958,6 +2688,11 @@
 <file path=ppt/slideLayouts/slideLayout3.xml><?xml version="1.0" encoding="utf-8"?>
 <p:sldLayout xmlns:a="http://schemas.openxmlformats.org/drawingml/2006/main" xmlns:r="http://schemas.openxmlformats.org/officeDocument/2006/relationships" xmlns:p="http://schemas.openxmlformats.org/presentationml/2006/main" type="secHead" preserve="1">
   <p:cSld name="Section Header">
+    <p:bg>
+      <p:bgRef idx="1001">
+        <a:schemeClr val="bg2"/>
+      </p:bgRef>
+    </p:bg>
     <p:spTree>
       <p:nvGrpSpPr>
         <p:cNvPr id="1" name=""/>
@@ -974,13 +2709,7 @@
       </p:grpSpPr>
       <p:sp>
         <p:nvSpPr>
-          <p:cNvPr id="2" name="Title 1">
-            <a:extLst>
-              <a:ext uri="{FF2B5EF4-FFF2-40B4-BE49-F238E27FC236}">
-                <a16:creationId xmlns:a16="http://schemas.microsoft.com/office/drawing/2014/main" id="{D0252302-8B14-264E-BDFD-379DDF327CA3}"/>
-              </a:ext>
-            </a:extLst>
-          </p:cNvPr>
+          <p:cNvPr id="2" name="Title 1"/>
           <p:cNvSpPr>
             <a:spLocks noGrp="1"/>
           </p:cNvSpPr>
@@ -990,15 +2719,17 @@
         </p:nvSpPr>
         <p:spPr>
           <a:xfrm>
-            <a:off x="831850" y="1709738"/>
-            <a:ext cx="10515600" cy="2852737"/>
-          </a:xfrm>
-        </p:spPr>
-        <p:txBody>
-          <a:bodyPr anchor="b"/>
+            <a:off x="963084" y="2362201"/>
+            <a:ext cx="10363200" cy="2200275"/>
+          </a:xfrm>
+        </p:spPr>
+        <p:txBody>
+          <a:bodyPr anchor="b">
+            <a:normAutofit/>
+          </a:bodyPr>
           <a:lstStyle>
-            <a:lvl1pPr>
-              <a:defRPr sz="6000"/>
+            <a:lvl1pPr algn="l">
+              <a:defRPr sz="4800" b="0" cap="all"/>
             </a:lvl1pPr>
           </a:lstStyle>
           <a:p>
@@ -1006,18 +2737,13 @@
               <a:rPr lang="en-US"/>
               <a:t>Click to edit Master title style</a:t>
             </a:r>
-          </a:p>
-        </p:txBody>
-      </p:sp>
-      <p:sp>
-        <p:nvSpPr>
-          <p:cNvPr id="3" name="Text Placeholder 2">
-            <a:extLst>
-              <a:ext uri="{FF2B5EF4-FFF2-40B4-BE49-F238E27FC236}">
-                <a16:creationId xmlns:a16="http://schemas.microsoft.com/office/drawing/2014/main" id="{F2C19065-1492-9FF2-00DC-BC71C01B1FBB}"/>
-              </a:ext>
-            </a:extLst>
-          </p:cNvPr>
+            <a:endParaRPr lang="en-US" dirty="0"/>
+          </a:p>
+        </p:txBody>
+      </p:sp>
+      <p:sp>
+        <p:nvSpPr>
+          <p:cNvPr id="3" name="Text Placeholder 2"/>
           <p:cNvSpPr>
             <a:spLocks noGrp="1"/>
           </p:cNvSpPr>
@@ -1027,99 +2753,99 @@
         </p:nvSpPr>
         <p:spPr>
           <a:xfrm>
-            <a:off x="831850" y="4589463"/>
-            <a:ext cx="10515600" cy="1500187"/>
-          </a:xfrm>
-        </p:spPr>
-        <p:txBody>
-          <a:bodyPr/>
+            <a:off x="963084" y="4626865"/>
+            <a:ext cx="10363200" cy="1500187"/>
+          </a:xfrm>
+        </p:spPr>
+        <p:txBody>
+          <a:bodyPr anchor="t">
+            <a:normAutofit/>
+          </a:bodyPr>
           <a:lstStyle>
             <a:lvl1pPr marL="0" indent="0">
               <a:buNone/>
               <a:defRPr sz="2400">
                 <a:solidFill>
-                  <a:schemeClr val="tx1">
-                    <a:tint val="82000"/>
-                  </a:schemeClr>
+                  <a:schemeClr val="tx2"/>
                 </a:solidFill>
               </a:defRPr>
             </a:lvl1pPr>
             <a:lvl2pPr marL="457200" indent="0">
               <a:buNone/>
-              <a:defRPr sz="2000">
+              <a:defRPr sz="1800">
                 <a:solidFill>
                   <a:schemeClr val="tx1">
-                    <a:tint val="82000"/>
+                    <a:tint val="75000"/>
                   </a:schemeClr>
                 </a:solidFill>
               </a:defRPr>
             </a:lvl2pPr>
             <a:lvl3pPr marL="914400" indent="0">
               <a:buNone/>
-              <a:defRPr sz="1800">
+              <a:defRPr sz="1600">
                 <a:solidFill>
                   <a:schemeClr val="tx1">
-                    <a:tint val="82000"/>
+                    <a:tint val="75000"/>
                   </a:schemeClr>
                 </a:solidFill>
               </a:defRPr>
             </a:lvl3pPr>
             <a:lvl4pPr marL="1371600" indent="0">
               <a:buNone/>
-              <a:defRPr sz="1600">
+              <a:defRPr sz="1400">
                 <a:solidFill>
                   <a:schemeClr val="tx1">
-                    <a:tint val="82000"/>
+                    <a:tint val="75000"/>
                   </a:schemeClr>
                 </a:solidFill>
               </a:defRPr>
             </a:lvl4pPr>
             <a:lvl5pPr marL="1828800" indent="0">
               <a:buNone/>
-              <a:defRPr sz="1600">
+              <a:defRPr sz="1400">
                 <a:solidFill>
                   <a:schemeClr val="tx1">
-                    <a:tint val="82000"/>
+                    <a:tint val="75000"/>
                   </a:schemeClr>
                 </a:solidFill>
               </a:defRPr>
             </a:lvl5pPr>
             <a:lvl6pPr marL="2286000" indent="0">
               <a:buNone/>
-              <a:defRPr sz="1600">
+              <a:defRPr sz="1400">
                 <a:solidFill>
                   <a:schemeClr val="tx1">
-                    <a:tint val="82000"/>
+                    <a:tint val="75000"/>
                   </a:schemeClr>
                 </a:solidFill>
               </a:defRPr>
             </a:lvl6pPr>
             <a:lvl7pPr marL="2743200" indent="0">
               <a:buNone/>
-              <a:defRPr sz="1600">
+              <a:defRPr sz="1400">
                 <a:solidFill>
                   <a:schemeClr val="tx1">
-                    <a:tint val="82000"/>
+                    <a:tint val="75000"/>
                   </a:schemeClr>
                 </a:solidFill>
               </a:defRPr>
             </a:lvl7pPr>
             <a:lvl8pPr marL="3200400" indent="0">
               <a:buNone/>
-              <a:defRPr sz="1600">
+              <a:defRPr sz="1400">
                 <a:solidFill>
                   <a:schemeClr val="tx1">
-                    <a:tint val="82000"/>
+                    <a:tint val="75000"/>
                   </a:schemeClr>
                 </a:solidFill>
               </a:defRPr>
             </a:lvl8pPr>
             <a:lvl9pPr marL="3657600" indent="0">
               <a:buNone/>
-              <a:defRPr sz="1600">
+              <a:defRPr sz="1400">
                 <a:solidFill>
                   <a:schemeClr val="tx1">
-                    <a:tint val="82000"/>
+                    <a:tint val="75000"/>
                   </a:schemeClr>
                 </a:solidFill>
               </a:defRPr>
@@ -1136,13 +2862,7 @@
       </p:sp>
       <p:sp>
         <p:nvSpPr>
-          <p:cNvPr id="4" name="Date Placeholder 3">
-            <a:extLst>
-              <a:ext uri="{FF2B5EF4-FFF2-40B4-BE49-F238E27FC236}">
-                <a16:creationId xmlns:a16="http://schemas.microsoft.com/office/drawing/2014/main" id="{AFC15107-7184-ABED-40BD-0C23889FF7ED}"/>
-              </a:ext>
-            </a:extLst>
-          </p:cNvPr>
+          <p:cNvPr id="4" name="Date Placeholder 3"/>
           <p:cNvSpPr>
             <a:spLocks noGrp="1"/>
           </p:cNvSpPr>
@@ -1157,7 +2877,7 @@
           <a:p>
             <a:fld id="{F4D18BF0-D309-41FF-AA8C-FC2AA1806513}" type="datetimeFigureOut">
               <a:rPr lang="en-US" smtClean="0"/>
-              <a:t>3/5/2026</a:t>
+              <a:t>3/6/2026</a:t>
             </a:fld>
             <a:endParaRPr lang="en-US"/>
           </a:p>
@@ -1165,13 +2885,7 @@
       </p:sp>
       <p:sp>
         <p:nvSpPr>
-          <p:cNvPr id="5" name="Footer Placeholder 4">
-            <a:extLst>
-              <a:ext uri="{FF2B5EF4-FFF2-40B4-BE49-F238E27FC236}">
-                <a16:creationId xmlns:a16="http://schemas.microsoft.com/office/drawing/2014/main" id="{80232CF1-6FD9-ABD0-8161-42F3F38B4AD1}"/>
-              </a:ext>
-            </a:extLst>
-          </p:cNvPr>
+          <p:cNvPr id="5" name="Footer Placeholder 4"/>
           <p:cNvSpPr>
             <a:spLocks noGrp="1"/>
           </p:cNvSpPr>
@@ -1190,13 +2904,7 @@
       </p:sp>
       <p:sp>
         <p:nvSpPr>
-          <p:cNvPr id="6" name="Slide Number Placeholder 5">
-            <a:extLst>
-              <a:ext uri="{FF2B5EF4-FFF2-40B4-BE49-F238E27FC236}">
-                <a16:creationId xmlns:a16="http://schemas.microsoft.com/office/drawing/2014/main" id="{DB82E57D-D5C8-FA06-078B-87F7378DDCC9}"/>
-              </a:ext>
-            </a:extLst>
-          </p:cNvPr>
+          <p:cNvPr id="6" name="Slide Number Placeholder 5"/>
           <p:cNvSpPr>
             <a:spLocks noGrp="1"/>
           </p:cNvSpPr>
@@ -1217,15 +2925,45 @@
           </a:p>
         </p:txBody>
       </p:sp>
+      <p:cxnSp>
+        <p:nvCxnSpPr>
+          <p:cNvPr id="7" name="Straight Connector 6"/>
+          <p:cNvCxnSpPr/>
+          <p:nvPr/>
+        </p:nvCxnSpPr>
+        <p:spPr>
+          <a:xfrm>
+            <a:off x="975360" y="4599432"/>
+            <a:ext cx="10464800" cy="1588"/>
+          </a:xfrm>
+          <a:prstGeom prst="line">
+            <a:avLst/>
+          </a:prstGeom>
+          <a:ln w="19050">
+            <a:solidFill>
+              <a:schemeClr val="tx2"/>
+            </a:solidFill>
+          </a:ln>
+        </p:spPr>
+        <p:style>
+          <a:lnRef idx="1">
+            <a:schemeClr val="accent1"/>
+          </a:lnRef>
+          <a:fillRef idx="0">
+            <a:schemeClr val="accent1"/>
+          </a:fillRef>
+          <a:effectRef idx="0">
+            <a:schemeClr val="accent1"/>
+          </a:effectRef>
+          <a:fontRef idx="minor">
+            <a:schemeClr val="tx1"/>
+          </a:fontRef>
+        </p:style>
+      </p:cxnSp>
     </p:spTree>
-    <p:extLst>
-      <p:ext uri="{BB962C8B-B14F-4D97-AF65-F5344CB8AC3E}">
-        <p14:creationId xmlns:p14="http://schemas.microsoft.com/office/powerpoint/2010/main" val="1884513497"/>
-      </p:ext>
-    </p:extLst>
   </p:cSld>
   <p:clrMapOvr>
-    <a:masterClrMapping/>
+    <a:overrideClrMapping bg1="dk1" tx1="lt1" bg2="dk2" tx2="lt2" accent1="accent1" accent2="accent2" accent3="accent3" accent4="accent4" accent5="accent5" accent6="accent6" hlink="hlink" folHlink="folHlink"/>
   </p:clrMapOvr>
 </p:sldLayout>
 </file>
@@ -1249,13 +2987,7 @@
       </p:grpSpPr>
       <p:sp>
         <p:nvSpPr>
-          <p:cNvPr id="2" name="Title 1">
-            <a:extLst>
-              <a:ext uri="{FF2B5EF4-FFF2-40B4-BE49-F238E27FC236}">
-                <a16:creationId xmlns:a16="http://schemas.microsoft.com/office/drawing/2014/main" id="{AECD8D81-3BFD-9602-34C1-5DB439F52C8D}"/>
-              </a:ext>
-            </a:extLst>
-          </p:cNvPr>
+          <p:cNvPr id="2" name="Title 1"/>
           <p:cNvSpPr>
             <a:spLocks noGrp="1"/>
           </p:cNvSpPr>
@@ -1277,13 +3009,7 @@
       </p:sp>
       <p:sp>
         <p:nvSpPr>
-          <p:cNvPr id="3" name="Content Placeholder 2">
-            <a:extLst>
-              <a:ext uri="{FF2B5EF4-FFF2-40B4-BE49-F238E27FC236}">
-                <a16:creationId xmlns:a16="http://schemas.microsoft.com/office/drawing/2014/main" id="{E8533672-F167-D0E5-B435-BC2CF3DD6E01}"/>
-              </a:ext>
-            </a:extLst>
-          </p:cNvPr>
+          <p:cNvPr id="3" name="Content Placeholder 2"/>
           <p:cNvSpPr>
             <a:spLocks noGrp="1"/>
           </p:cNvSpPr>
@@ -1293,13 +3019,41 @@
         </p:nvSpPr>
         <p:spPr>
           <a:xfrm>
-            <a:off x="838200" y="1825625"/>
-            <a:ext cx="5181600" cy="4351338"/>
+            <a:off x="609600" y="1673352"/>
+            <a:ext cx="5384800" cy="4718304"/>
           </a:xfrm>
         </p:spPr>
         <p:txBody>
           <a:bodyPr/>
-          <a:lstStyle/>
+          <a:lstStyle>
+            <a:lvl1pPr>
+              <a:defRPr sz="2800"/>
+            </a:lvl1pPr>
+            <a:lvl2pPr>
+              <a:defRPr sz="2400"/>
+            </a:lvl2pPr>
+            <a:lvl3pPr>
+              <a:defRPr sz="2000"/>
+            </a:lvl3pPr>
+            <a:lvl4pPr>
+              <a:defRPr sz="1800"/>
+            </a:lvl4pPr>
+            <a:lvl5pPr>
+              <a:defRPr sz="1800"/>
+            </a:lvl5pPr>
+            <a:lvl6pPr>
+              <a:defRPr sz="1800"/>
+            </a:lvl6pPr>
+            <a:lvl7pPr>
+              <a:defRPr sz="1800"/>
+            </a:lvl7pPr>
+            <a:lvl8pPr>
+              <a:defRPr sz="1800"/>
+            </a:lvl8pPr>
+            <a:lvl9pPr>
+              <a:defRPr sz="1800"/>
+            </a:lvl9pPr>
+          </a:lstStyle>
           <a:p>
             <a:pPr lvl="0"/>
             <a:r>
@@ -1334,18 +3088,13 @@
               <a:rPr lang="en-US"/>
               <a:t>Fifth level</a:t>
             </a:r>
-          </a:p>
-        </p:txBody>
-      </p:sp>
-      <p:sp>
-        <p:nvSpPr>
-          <p:cNvPr id="4" name="Content Placeholder 3">
-            <a:extLst>
-              <a:ext uri="{FF2B5EF4-FFF2-40B4-BE49-F238E27FC236}">
-                <a16:creationId xmlns:a16="http://schemas.microsoft.com/office/drawing/2014/main" id="{4C651D0F-938F-86A2-846F-863F9152ADCC}"/>
-              </a:ext>
-            </a:extLst>
-          </p:cNvPr>
+            <a:endParaRPr lang="en-US" dirty="0"/>
+          </a:p>
+        </p:txBody>
+      </p:sp>
+      <p:sp>
+        <p:nvSpPr>
+          <p:cNvPr id="4" name="Content Placeholder 3"/>
           <p:cNvSpPr>
             <a:spLocks noGrp="1"/>
           </p:cNvSpPr>
@@ -1355,13 +3104,41 @@
         </p:nvSpPr>
         <p:spPr>
           <a:xfrm>
-            <a:off x="6172200" y="1825625"/>
-            <a:ext cx="5181600" cy="4351338"/>
+            <a:off x="6197600" y="1673352"/>
+            <a:ext cx="5384800" cy="4718304"/>
           </a:xfrm>
         </p:spPr>
         <p:txBody>
           <a:bodyPr/>
-          <a:lstStyle/>
+          <a:lstStyle>
+            <a:lvl1pPr>
+              <a:defRPr sz="2800"/>
+            </a:lvl1pPr>
+            <a:lvl2pPr>
+              <a:defRPr sz="2400"/>
+            </a:lvl2pPr>
+            <a:lvl3pPr>
+              <a:defRPr sz="2000"/>
+            </a:lvl3pPr>
+            <a:lvl4pPr>
+              <a:defRPr sz="1800"/>
+            </a:lvl4pPr>
+            <a:lvl5pPr>
+              <a:defRPr sz="1800"/>
+            </a:lvl5pPr>
+            <a:lvl6pPr>
+              <a:defRPr sz="1800"/>
+            </a:lvl6pPr>
+            <a:lvl7pPr>
+              <a:defRPr sz="1800"/>
+            </a:lvl7pPr>
+            <a:lvl8pPr>
+              <a:defRPr sz="1800"/>
+            </a:lvl8pPr>
+            <a:lvl9pPr>
+              <a:defRPr sz="1800"/>
+            </a:lvl9pPr>
+          </a:lstStyle>
           <a:p>
             <a:pPr lvl="0"/>
             <a:r>
@@ -1396,18 +3173,13 @@
               <a:rPr lang="en-US"/>
               <a:t>Fifth level</a:t>
             </a:r>
-          </a:p>
-        </p:txBody>
-      </p:sp>
-      <p:sp>
-        <p:nvSpPr>
-          <p:cNvPr id="5" name="Date Placeholder 4">
-            <a:extLst>
-              <a:ext uri="{FF2B5EF4-FFF2-40B4-BE49-F238E27FC236}">
-                <a16:creationId xmlns:a16="http://schemas.microsoft.com/office/drawing/2014/main" id="{4D78AB40-5035-2C42-947B-D7E0736F138E}"/>
-              </a:ext>
-            </a:extLst>
-          </p:cNvPr>
+            <a:endParaRPr lang="en-US" dirty="0"/>
+          </a:p>
+        </p:txBody>
+      </p:sp>
+      <p:sp>
+        <p:nvSpPr>
+          <p:cNvPr id="5" name="Date Placeholder 4"/>
           <p:cNvSpPr>
             <a:spLocks noGrp="1"/>
           </p:cNvSpPr>
@@ -1422,7 +3194,7 @@
           <a:p>
             <a:fld id="{F4D18BF0-D309-41FF-AA8C-FC2AA1806513}" type="datetimeFigureOut">
               <a:rPr lang="en-US" smtClean="0"/>
-              <a:t>3/5/2026</a:t>
+              <a:t>3/6/2026</a:t>
             </a:fld>
             <a:endParaRPr lang="en-US"/>
           </a:p>
@@ -1430,13 +3202,7 @@
       </p:sp>
       <p:sp>
         <p:nvSpPr>
-          <p:cNvPr id="6" name="Footer Placeholder 5">
-            <a:extLst>
-              <a:ext uri="{FF2B5EF4-FFF2-40B4-BE49-F238E27FC236}">
-                <a16:creationId xmlns:a16="http://schemas.microsoft.com/office/drawing/2014/main" id="{9CEF934F-82A6-CD41-2146-68D7211CAF1D}"/>
-              </a:ext>
-            </a:extLst>
-          </p:cNvPr>
+          <p:cNvPr id="6" name="Footer Placeholder 5"/>
           <p:cNvSpPr>
             <a:spLocks noGrp="1"/>
           </p:cNvSpPr>
@@ -1455,13 +3221,7 @@
       </p:sp>
       <p:sp>
         <p:nvSpPr>
-          <p:cNvPr id="7" name="Slide Number Placeholder 6">
-            <a:extLst>
-              <a:ext uri="{FF2B5EF4-FFF2-40B4-BE49-F238E27FC236}">
-                <a16:creationId xmlns:a16="http://schemas.microsoft.com/office/drawing/2014/main" id="{4846D295-CE35-1495-1D63-B66E67BB2296}"/>
-              </a:ext>
-            </a:extLst>
-          </p:cNvPr>
+          <p:cNvPr id="7" name="Slide Number Placeholder 6"/>
           <p:cNvSpPr>
             <a:spLocks noGrp="1"/>
           </p:cNvSpPr>
@@ -1483,11 +3243,6 @@
         </p:txBody>
       </p:sp>
     </p:spTree>
-    <p:extLst>
-      <p:ext uri="{BB962C8B-B14F-4D97-AF65-F5344CB8AC3E}">
-        <p14:creationId xmlns:p14="http://schemas.microsoft.com/office/powerpoint/2010/main" val="2438902380"/>
-      </p:ext>
-    </p:extLst>
   </p:cSld>
   <p:clrMapOvr>
     <a:masterClrMapping/>
@@ -1514,13 +3269,7 @@
       </p:grpSpPr>
       <p:sp>
         <p:nvSpPr>
-          <p:cNvPr id="2" name="Title 1">
-            <a:extLst>
-              <a:ext uri="{FF2B5EF4-FFF2-40B4-BE49-F238E27FC236}">
-                <a16:creationId xmlns:a16="http://schemas.microsoft.com/office/drawing/2014/main" id="{C0414EED-9176-B156-C480-F6CF222174D6}"/>
-              </a:ext>
-            </a:extLst>
-          </p:cNvPr>
+          <p:cNvPr id="2" name="Title 1"/>
           <p:cNvSpPr>
             <a:spLocks noGrp="1"/>
           </p:cNvSpPr>
@@ -1528,32 +3277,26 @@
             <p:ph type="title"/>
           </p:nvPr>
         </p:nvSpPr>
-        <p:spPr>
-          <a:xfrm>
-            <a:off x="839788" y="365125"/>
-            <a:ext cx="10515600" cy="1325563"/>
-          </a:xfrm>
-        </p:spPr>
+        <p:spPr/>
         <p:txBody>
           <a:bodyPr/>
-          <a:lstStyle/>
+          <a:lstStyle>
+            <a:lvl1pPr>
+              <a:defRPr/>
+            </a:lvl1pPr>
+          </a:lstStyle>
           <a:p>
             <a:r>
               <a:rPr lang="en-US"/>
               <a:t>Click to edit Master title style</a:t>
             </a:r>
-          </a:p>
-        </p:txBody>
-      </p:sp>
-      <p:sp>
-        <p:nvSpPr>
-          <p:cNvPr id="3" name="Text Placeholder 2">
-            <a:extLst>
-              <a:ext uri="{FF2B5EF4-FFF2-40B4-BE49-F238E27FC236}">
-                <a16:creationId xmlns:a16="http://schemas.microsoft.com/office/drawing/2014/main" id="{DF8F3364-366E-533C-B24A-48DD7AB90FEE}"/>
-              </a:ext>
-            </a:extLst>
-          </p:cNvPr>
+            <a:endParaRPr lang="en-US" dirty="0"/>
+          </a:p>
+        </p:txBody>
+      </p:sp>
+      <p:sp>
+        <p:nvSpPr>
+          <p:cNvPr id="3" name="Text Placeholder 2"/>
           <p:cNvSpPr>
             <a:spLocks noGrp="1"/>
           </p:cNvSpPr>
@@ -1563,16 +3306,39 @@
         </p:nvSpPr>
         <p:spPr>
           <a:xfrm>
-            <a:off x="839788" y="1681163"/>
-            <a:ext cx="5157787" cy="823912"/>
-          </a:xfrm>
-        </p:spPr>
-        <p:txBody>
-          <a:bodyPr anchor="b"/>
+            <a:off x="609600" y="1676400"/>
+            <a:ext cx="5242560" cy="639762"/>
+          </a:xfrm>
+          <a:noFill/>
+          <a:ln>
+            <a:noFill/>
+          </a:ln>
+          <a:effectLst/>
+        </p:spPr>
+        <p:style>
+          <a:lnRef idx="3">
+            <a:schemeClr val="lt1"/>
+          </a:lnRef>
+          <a:fillRef idx="1">
+            <a:schemeClr val="accent2"/>
+          </a:fillRef>
+          <a:effectRef idx="1">
+            <a:schemeClr val="accent2"/>
+          </a:effectRef>
+          <a:fontRef idx="none"/>
+        </p:style>
+        <p:txBody>
+          <a:bodyPr anchor="ctr">
+            <a:normAutofit/>
+          </a:bodyPr>
           <a:lstStyle>
-            <a:lvl1pPr marL="0" indent="0">
+            <a:lvl1pPr marL="0" indent="0" algn="ctr">
               <a:buNone/>
-              <a:defRPr sz="2400" b="1"/>
+              <a:defRPr sz="2000" b="0">
+                <a:solidFill>
+                  <a:schemeClr val="tx2"/>
+                </a:solidFill>
+              </a:defRPr>
             </a:lvl1pPr>
             <a:lvl2pPr marL="457200" indent="0">
               <a:buNone/>
@@ -1618,13 +3384,7 @@
       </p:sp>
       <p:sp>
         <p:nvSpPr>
-          <p:cNvPr id="4" name="Content Placeholder 3">
-            <a:extLst>
-              <a:ext uri="{FF2B5EF4-FFF2-40B4-BE49-F238E27FC236}">
-                <a16:creationId xmlns:a16="http://schemas.microsoft.com/office/drawing/2014/main" id="{FA008853-9D88-A322-9F13-153EE6785231}"/>
-              </a:ext>
-            </a:extLst>
-          </p:cNvPr>
+          <p:cNvPr id="4" name="Content Placeholder 3"/>
           <p:cNvSpPr>
             <a:spLocks noGrp="1"/>
           </p:cNvSpPr>
@@ -1634,13 +3394,41 @@
         </p:nvSpPr>
         <p:spPr>
           <a:xfrm>
-            <a:off x="839788" y="2505075"/>
-            <a:ext cx="5157787" cy="3684588"/>
+            <a:off x="609600" y="2438400"/>
+            <a:ext cx="5242560" cy="3951288"/>
           </a:xfrm>
         </p:spPr>
         <p:txBody>
           <a:bodyPr/>
-          <a:lstStyle/>
+          <a:lstStyle>
+            <a:lvl1pPr>
+              <a:defRPr sz="2400"/>
+            </a:lvl1pPr>
+            <a:lvl2pPr>
+              <a:defRPr sz="2000"/>
+            </a:lvl2pPr>
+            <a:lvl3pPr>
+              <a:defRPr sz="1800"/>
+            </a:lvl3pPr>
+            <a:lvl4pPr>
+              <a:defRPr sz="1600"/>
+            </a:lvl4pPr>
+            <a:lvl5pPr>
+              <a:defRPr sz="1600"/>
+            </a:lvl5pPr>
+            <a:lvl6pPr>
+              <a:defRPr sz="1600"/>
+            </a:lvl6pPr>
+            <a:lvl7pPr>
+              <a:defRPr sz="1600"/>
+            </a:lvl7pPr>
+            <a:lvl8pPr>
+              <a:defRPr sz="1600"/>
+            </a:lvl8pPr>
+            <a:lvl9pPr>
+              <a:defRPr sz="1600"/>
+            </a:lvl9pPr>
+          </a:lstStyle>
           <a:p>
             <a:pPr lvl="0"/>
             <a:r>
@@ -1675,18 +3463,13 @@
               <a:rPr lang="en-US"/>
               <a:t>Fifth level</a:t>
             </a:r>
-          </a:p>
-        </p:txBody>
-      </p:sp>
-      <p:sp>
-        <p:nvSpPr>
-          <p:cNvPr id="5" name="Text Placeholder 4">
-            <a:extLst>
-              <a:ext uri="{FF2B5EF4-FFF2-40B4-BE49-F238E27FC236}">
-                <a16:creationId xmlns:a16="http://schemas.microsoft.com/office/drawing/2014/main" id="{CA2793E3-A113-1215-1CF5-606FF6C6254C}"/>
-              </a:ext>
-            </a:extLst>
-          </p:cNvPr>
+            <a:endParaRPr lang="en-US" dirty="0"/>
+          </a:p>
+        </p:txBody>
+      </p:sp>
+      <p:sp>
+        <p:nvSpPr>
+          <p:cNvPr id="5" name="Text Placeholder 4"/>
           <p:cNvSpPr>
             <a:spLocks noGrp="1"/>
           </p:cNvSpPr>
@@ -1696,16 +3479,42 @@
         </p:nvSpPr>
         <p:spPr>
           <a:xfrm>
-            <a:off x="6172200" y="1681163"/>
-            <a:ext cx="5183188" cy="823912"/>
-          </a:xfrm>
-        </p:spPr>
-        <p:txBody>
-          <a:bodyPr anchor="b"/>
+            <a:off x="6339840" y="1676400"/>
+            <a:ext cx="5242560" cy="639762"/>
+          </a:xfrm>
+          <a:noFill/>
+          <a:ln>
+            <a:noFill/>
+          </a:ln>
+          <a:effectLst/>
+        </p:spPr>
+        <p:style>
+          <a:lnRef idx="3">
+            <a:schemeClr val="lt1"/>
+          </a:lnRef>
+          <a:fillRef idx="1">
+            <a:schemeClr val="accent2"/>
+          </a:fillRef>
+          <a:effectRef idx="1">
+            <a:schemeClr val="accent2"/>
+          </a:effectRef>
+          <a:fontRef idx="none"/>
+        </p:style>
+        <p:txBody>
+          <a:bodyPr anchor="ctr">
+            <a:normAutofit/>
+          </a:bodyPr>
           <a:lstStyle>
-            <a:lvl1pPr marL="0" indent="0">
+            <a:lvl1pPr marL="0" indent="0" algn="ctr">
               <a:buNone/>
-              <a:defRPr sz="2400" b="1"/>
+              <a:defRPr lang="en-US" sz="2000" b="0" kern="1200" dirty="0" smtClean="0">
+                <a:solidFill>
+                  <a:schemeClr val="tx2"/>
+                </a:solidFill>
+                <a:latin typeface="+mn-lt"/>
+                <a:ea typeface="+mn-ea"/>
+                <a:cs typeface="+mn-cs"/>
+              </a:defRPr>
             </a:lvl1pPr>
             <a:lvl2pPr marL="457200" indent="0">
               <a:buNone/>
@@ -1751,13 +3560,7 @@
       </p:sp>
       <p:sp>
         <p:nvSpPr>
-          <p:cNvPr id="6" name="Content Placeholder 5">
-            <a:extLst>
-              <a:ext uri="{FF2B5EF4-FFF2-40B4-BE49-F238E27FC236}">
-                <a16:creationId xmlns:a16="http://schemas.microsoft.com/office/drawing/2014/main" id="{636B7144-A25E-832B-CDDB-FAA26397092C}"/>
-              </a:ext>
-            </a:extLst>
-          </p:cNvPr>
+          <p:cNvPr id="6" name="Content Placeholder 5"/>
           <p:cNvSpPr>
             <a:spLocks noGrp="1"/>
           </p:cNvSpPr>
@@ -1767,13 +3570,41 @@
         </p:nvSpPr>
         <p:spPr>
           <a:xfrm>
-            <a:off x="6172200" y="2505075"/>
-            <a:ext cx="5183188" cy="3684588"/>
+            <a:off x="6339840" y="2438400"/>
+            <a:ext cx="5242560" cy="3951288"/>
           </a:xfrm>
         </p:spPr>
         <p:txBody>
           <a:bodyPr/>
-          <a:lstStyle/>
+          <a:lstStyle>
+            <a:lvl1pPr>
+              <a:defRPr sz="2400"/>
+            </a:lvl1pPr>
+            <a:lvl2pPr>
+              <a:defRPr sz="2000"/>
+            </a:lvl2pPr>
+            <a:lvl3pPr>
+              <a:defRPr sz="1800"/>
+            </a:lvl3pPr>
+            <a:lvl4pPr>
+              <a:defRPr sz="1600"/>
+            </a:lvl4pPr>
+            <a:lvl5pPr>
+              <a:defRPr sz="1600"/>
+            </a:lvl5pPr>
+            <a:lvl6pPr>
+              <a:defRPr sz="1600"/>
+            </a:lvl6pPr>
+            <a:lvl7pPr>
+              <a:defRPr sz="1600"/>
+            </a:lvl7pPr>
+            <a:lvl8pPr>
+              <a:defRPr sz="1600"/>
+            </a:lvl8pPr>
+            <a:lvl9pPr>
+              <a:defRPr sz="1600"/>
+            </a:lvl9pPr>
+          </a:lstStyle>
           <a:p>
             <a:pPr lvl="0"/>
             <a:r>
@@ -1808,18 +3639,13 @@
               <a:rPr lang="en-US"/>
               <a:t>Fifth level</a:t>
             </a:r>
-          </a:p>
-        </p:txBody>
-      </p:sp>
-      <p:sp>
-        <p:nvSpPr>
-          <p:cNvPr id="7" name="Date Placeholder 6">
-            <a:extLst>
-              <a:ext uri="{FF2B5EF4-FFF2-40B4-BE49-F238E27FC236}">
-                <a16:creationId xmlns:a16="http://schemas.microsoft.com/office/drawing/2014/main" id="{41C9EFC8-12C3-B521-C859-A4A81E4D8ED2}"/>
-              </a:ext>
-            </a:extLst>
-          </p:cNvPr>
+            <a:endParaRPr lang="en-US" dirty="0"/>
+          </a:p>
+        </p:txBody>
+      </p:sp>
+      <p:sp>
+        <p:nvSpPr>
+          <p:cNvPr id="7" name="Date Placeholder 6"/>
           <p:cNvSpPr>
             <a:spLocks noGrp="1"/>
           </p:cNvSpPr>
@@ -1834,7 +3660,7 @@
           <a:p>
             <a:fld id="{F4D18BF0-D309-41FF-AA8C-FC2AA1806513}" type="datetimeFigureOut">
               <a:rPr lang="en-US" smtClean="0"/>
-              <a:t>3/5/2026</a:t>
+              <a:t>3/6/2026</a:t>
             </a:fld>
             <a:endParaRPr lang="en-US"/>
           </a:p>
@@ -1842,13 +3668,7 @@
       </p:sp>
       <p:sp>
         <p:nvSpPr>
-          <p:cNvPr id="8" name="Footer Placeholder 7">
-            <a:extLst>
-              <a:ext uri="{FF2B5EF4-FFF2-40B4-BE49-F238E27FC236}">
-                <a16:creationId xmlns:a16="http://schemas.microsoft.com/office/drawing/2014/main" id="{91C09AA6-13F6-108D-7E74-E6CF8D1910B0}"/>
-              </a:ext>
-            </a:extLst>
-          </p:cNvPr>
+          <p:cNvPr id="8" name="Footer Placeholder 7"/>
           <p:cNvSpPr>
             <a:spLocks noGrp="1"/>
           </p:cNvSpPr>
@@ -1867,13 +3687,7 @@
       </p:sp>
       <p:sp>
         <p:nvSpPr>
-          <p:cNvPr id="9" name="Slide Number Placeholder 8">
-            <a:extLst>
-              <a:ext uri="{FF2B5EF4-FFF2-40B4-BE49-F238E27FC236}">
-                <a16:creationId xmlns:a16="http://schemas.microsoft.com/office/drawing/2014/main" id="{15B0EBED-BC82-0D78-CB82-FEC46DCE0389}"/>
-              </a:ext>
-            </a:extLst>
-          </p:cNvPr>
+          <p:cNvPr id="9" name="Slide Number Placeholder 8"/>
           <p:cNvSpPr>
             <a:spLocks noGrp="1"/>
           </p:cNvSpPr>
@@ -1894,12 +3708,42 @@
           </a:p>
         </p:txBody>
       </p:sp>
+      <p:cxnSp>
+        <p:nvCxnSpPr>
+          <p:cNvPr id="11" name="Straight Connector 10"/>
+          <p:cNvCxnSpPr/>
+          <p:nvPr/>
+        </p:nvCxnSpPr>
+        <p:spPr>
+          <a:xfrm rot="5400000">
+            <a:off x="3741949" y="4045691"/>
+            <a:ext cx="4709160" cy="1059"/>
+          </a:xfrm>
+          <a:prstGeom prst="line">
+            <a:avLst/>
+          </a:prstGeom>
+          <a:ln w="19050">
+            <a:solidFill>
+              <a:schemeClr val="tx2"/>
+            </a:solidFill>
+          </a:ln>
+        </p:spPr>
+        <p:style>
+          <a:lnRef idx="1">
+            <a:schemeClr val="accent1"/>
+          </a:lnRef>
+          <a:fillRef idx="0">
+            <a:schemeClr val="accent1"/>
+          </a:fillRef>
+          <a:effectRef idx="0">
+            <a:schemeClr val="accent1"/>
+          </a:effectRef>
+          <a:fontRef idx="minor">
+            <a:schemeClr val="tx1"/>
+          </a:fontRef>
+        </p:style>
+      </p:cxnSp>
     </p:spTree>
-    <p:extLst>
-      <p:ext uri="{BB962C8B-B14F-4D97-AF65-F5344CB8AC3E}">
-        <p14:creationId xmlns:p14="http://schemas.microsoft.com/office/powerpoint/2010/main" val="1275876801"/>
-      </p:ext>
-    </p:extLst>
   </p:cSld>
   <p:clrMapOvr>
     <a:masterClrMapping/>
@@ -1926,13 +3770,7 @@
       </p:grpSpPr>
       <p:sp>
         <p:nvSpPr>
-          <p:cNvPr id="2" name="Title 1">
-            <a:extLst>
-              <a:ext uri="{FF2B5EF4-FFF2-40B4-BE49-F238E27FC236}">
-                <a16:creationId xmlns:a16="http://schemas.microsoft.com/office/drawing/2014/main" id="{473DFFF4-E746-9BD4-290C-B04FF02DF205}"/>
-              </a:ext>
-            </a:extLst>
-          </p:cNvPr>
+          <p:cNvPr id="2" name="Title 1"/>
           <p:cNvSpPr>
             <a:spLocks noGrp="1"/>
           </p:cNvSpPr>
@@ -1954,13 +3792,7 @@
       </p:sp>
       <p:sp>
         <p:nvSpPr>
-          <p:cNvPr id="3" name="Date Placeholder 2">
-            <a:extLst>
-              <a:ext uri="{FF2B5EF4-FFF2-40B4-BE49-F238E27FC236}">
-                <a16:creationId xmlns:a16="http://schemas.microsoft.com/office/drawing/2014/main" id="{FDF26024-AC9A-311A-F4A1-BA36F57E3FDC}"/>
-              </a:ext>
-            </a:extLst>
-          </p:cNvPr>
+          <p:cNvPr id="3" name="Date Placeholder 2"/>
           <p:cNvSpPr>
             <a:spLocks noGrp="1"/>
           </p:cNvSpPr>
@@ -1975,7 +3807,7 @@
           <a:p>
             <a:fld id="{F4D18BF0-D309-41FF-AA8C-FC2AA1806513}" type="datetimeFigureOut">
               <a:rPr lang="en-US" smtClean="0"/>
-              <a:t>3/5/2026</a:t>
+              <a:t>3/6/2026</a:t>
             </a:fld>
             <a:endParaRPr lang="en-US"/>
           </a:p>
@@ -1983,13 +3815,7 @@
       </p:sp>
       <p:sp>
         <p:nvSpPr>
-          <p:cNvPr id="4" name="Footer Placeholder 3">
-            <a:extLst>
-              <a:ext uri="{FF2B5EF4-FFF2-40B4-BE49-F238E27FC236}">
-                <a16:creationId xmlns:a16="http://schemas.microsoft.com/office/drawing/2014/main" id="{400AAC82-375A-659C-9086-406E18D91E90}"/>
-              </a:ext>
-            </a:extLst>
-          </p:cNvPr>
+          <p:cNvPr id="4" name="Footer Placeholder 3"/>
           <p:cNvSpPr>
             <a:spLocks noGrp="1"/>
           </p:cNvSpPr>
@@ -2008,13 +3834,7 @@
       </p:sp>
       <p:sp>
         <p:nvSpPr>
-          <p:cNvPr id="5" name="Slide Number Placeholder 4">
-            <a:extLst>
-              <a:ext uri="{FF2B5EF4-FFF2-40B4-BE49-F238E27FC236}">
-                <a16:creationId xmlns:a16="http://schemas.microsoft.com/office/drawing/2014/main" id="{BAA367FF-771B-1F4A-0E35-D33BEEB8A2BE}"/>
-              </a:ext>
-            </a:extLst>
-          </p:cNvPr>
+          <p:cNvPr id="5" name="Slide Number Placeholder 4"/>
           <p:cNvSpPr>
             <a:spLocks noGrp="1"/>
           </p:cNvSpPr>
@@ -2036,11 +3856,6 @@
         </p:txBody>
       </p:sp>
     </p:spTree>
-    <p:extLst>
-      <p:ext uri="{BB962C8B-B14F-4D97-AF65-F5344CB8AC3E}">
-        <p14:creationId xmlns:p14="http://schemas.microsoft.com/office/powerpoint/2010/main" val="1948038839"/>
-      </p:ext>
-    </p:extLst>
   </p:cSld>
   <p:clrMapOvr>
     <a:masterClrMapping/>
@@ -2067,13 +3882,7 @@
       </p:grpSpPr>
       <p:sp>
         <p:nvSpPr>
-          <p:cNvPr id="2" name="Date Placeholder 1">
-            <a:extLst>
-              <a:ext uri="{FF2B5EF4-FFF2-40B4-BE49-F238E27FC236}">
-                <a16:creationId xmlns:a16="http://schemas.microsoft.com/office/drawing/2014/main" id="{AB8F6561-20CB-CA62-E2F9-0660D9346333}"/>
-              </a:ext>
-            </a:extLst>
-          </p:cNvPr>
+          <p:cNvPr id="2" name="Date Placeholder 1"/>
           <p:cNvSpPr>
             <a:spLocks noGrp="1"/>
           </p:cNvSpPr>
@@ -2088,7 +3897,7 @@
           <a:p>
             <a:fld id="{F4D18BF0-D309-41FF-AA8C-FC2AA1806513}" type="datetimeFigureOut">
               <a:rPr lang="en-US" smtClean="0"/>
-              <a:t>3/5/2026</a:t>
+              <a:t>3/6/2026</a:t>
             </a:fld>
             <a:endParaRPr lang="en-US"/>
           </a:p>
@@ -2096,13 +3905,7 @@
       </p:sp>
       <p:sp>
         <p:nvSpPr>
-          <p:cNvPr id="3" name="Footer Placeholder 2">
-            <a:extLst>
-              <a:ext uri="{FF2B5EF4-FFF2-40B4-BE49-F238E27FC236}">
-                <a16:creationId xmlns:a16="http://schemas.microsoft.com/office/drawing/2014/main" id="{A24BD4E5-1BDD-285C-D908-34E71D3DF66A}"/>
-              </a:ext>
-            </a:extLst>
-          </p:cNvPr>
+          <p:cNvPr id="3" name="Footer Placeholder 2"/>
           <p:cNvSpPr>
             <a:spLocks noGrp="1"/>
           </p:cNvSpPr>
@@ -2121,13 +3924,7 @@
       </p:sp>
       <p:sp>
         <p:nvSpPr>
-          <p:cNvPr id="4" name="Slide Number Placeholder 3">
-            <a:extLst>
-              <a:ext uri="{FF2B5EF4-FFF2-40B4-BE49-F238E27FC236}">
-                <a16:creationId xmlns:a16="http://schemas.microsoft.com/office/drawing/2014/main" id="{AC175B67-6335-71E6-1ADB-FF328CA2D64D}"/>
-              </a:ext>
-            </a:extLst>
-          </p:cNvPr>
+          <p:cNvPr id="4" name="Slide Number Placeholder 3"/>
           <p:cNvSpPr>
             <a:spLocks noGrp="1"/>
           </p:cNvSpPr>
@@ -2149,11 +3946,6 @@
         </p:txBody>
       </p:sp>
     </p:spTree>
-    <p:extLst>
-      <p:ext uri="{BB962C8B-B14F-4D97-AF65-F5344CB8AC3E}">
-        <p14:creationId xmlns:p14="http://schemas.microsoft.com/office/powerpoint/2010/main" val="2743218599"/>
-      </p:ext>
-    </p:extLst>
   </p:cSld>
   <p:clrMapOvr>
     <a:masterClrMapping/>
@@ -2180,13 +3972,7 @@
       </p:grpSpPr>
       <p:sp>
         <p:nvSpPr>
-          <p:cNvPr id="2" name="Title 1">
-            <a:extLst>
-              <a:ext uri="{FF2B5EF4-FFF2-40B4-BE49-F238E27FC236}">
-                <a16:creationId xmlns:a16="http://schemas.microsoft.com/office/drawing/2014/main" id="{BF4F42E3-35E2-7EFE-165C-7A93F3CB07C2}"/>
-              </a:ext>
-            </a:extLst>
-          </p:cNvPr>
+          <p:cNvPr id="2" name="Title 1"/>
           <p:cNvSpPr>
             <a:spLocks noGrp="1"/>
           </p:cNvSpPr>
@@ -2196,15 +3982,17 @@
         </p:nvSpPr>
         <p:spPr>
           <a:xfrm>
-            <a:off x="839788" y="457200"/>
-            <a:ext cx="3932237" cy="1600200"/>
-          </a:xfrm>
-        </p:spPr>
-        <p:txBody>
-          <a:bodyPr anchor="b"/>
+            <a:off x="609600" y="792080"/>
+            <a:ext cx="2852928" cy="1261872"/>
+          </a:xfrm>
+        </p:spPr>
+        <p:txBody>
+          <a:bodyPr anchor="b">
+            <a:noAutofit/>
+          </a:bodyPr>
           <a:lstStyle>
-            <a:lvl1pPr>
-              <a:defRPr sz="3200"/>
+            <a:lvl1pPr algn="l">
+              <a:defRPr sz="2400" b="0"/>
             </a:lvl1pPr>
           </a:lstStyle>
           <a:p>
@@ -2212,18 +4000,13 @@
               <a:rPr lang="en-US"/>
               <a:t>Click to edit Master title style</a:t>
             </a:r>
-          </a:p>
-        </p:txBody>
-      </p:sp>
-      <p:sp>
-        <p:nvSpPr>
-          <p:cNvPr id="3" name="Content Placeholder 2">
-            <a:extLst>
-              <a:ext uri="{FF2B5EF4-FFF2-40B4-BE49-F238E27FC236}">
-                <a16:creationId xmlns:a16="http://schemas.microsoft.com/office/drawing/2014/main" id="{845A07B2-5002-DEED-489F-FD9E075E08A8}"/>
-              </a:ext>
-            </a:extLst>
-          </p:cNvPr>
+            <a:endParaRPr lang="en-US" dirty="0"/>
+          </a:p>
+        </p:txBody>
+      </p:sp>
+      <p:sp>
+        <p:nvSpPr>
+          <p:cNvPr id="3" name="Content Placeholder 2"/>
           <p:cNvSpPr>
             <a:spLocks noGrp="1"/>
           </p:cNvSpPr>
@@ -2233,8 +4016,8 @@
         </p:nvSpPr>
         <p:spPr>
           <a:xfrm>
-            <a:off x="5183188" y="987425"/>
-            <a:ext cx="6172200" cy="4873625"/>
+            <a:off x="3962400" y="792080"/>
+            <a:ext cx="7620000" cy="5577840"/>
           </a:xfrm>
         </p:spPr>
         <p:txBody>
@@ -2302,18 +4085,13 @@
               <a:rPr lang="en-US"/>
               <a:t>Fifth level</a:t>
             </a:r>
-          </a:p>
-        </p:txBody>
-      </p:sp>
-      <p:sp>
-        <p:nvSpPr>
-          <p:cNvPr id="4" name="Text Placeholder 3">
-            <a:extLst>
-              <a:ext uri="{FF2B5EF4-FFF2-40B4-BE49-F238E27FC236}">
-                <a16:creationId xmlns:a16="http://schemas.microsoft.com/office/drawing/2014/main" id="{A7E601A1-8443-DFED-8700-9233226315B6}"/>
-              </a:ext>
-            </a:extLst>
-          </p:cNvPr>
+            <a:endParaRPr lang="en-US" dirty="0"/>
+          </a:p>
+        </p:txBody>
+      </p:sp>
+      <p:sp>
+        <p:nvSpPr>
+          <p:cNvPr id="4" name="Text Placeholder 3"/>
           <p:cNvSpPr>
             <a:spLocks noGrp="1"/>
           </p:cNvSpPr>
@@ -2323,8 +4101,8 @@
         </p:nvSpPr>
         <p:spPr>
           <a:xfrm>
-            <a:off x="839788" y="2057400"/>
-            <a:ext cx="3932237" cy="3811588"/>
+            <a:off x="609601" y="2130553"/>
+            <a:ext cx="2852928" cy="4243615"/>
           </a:xfrm>
         </p:spPr>
         <p:txBody>
@@ -2332,39 +4110,39 @@
           <a:lstStyle>
             <a:lvl1pPr marL="0" indent="0">
               <a:buNone/>
-              <a:defRPr sz="1600"/>
+              <a:defRPr sz="1400"/>
             </a:lvl1pPr>
             <a:lvl2pPr marL="457200" indent="0">
               <a:buNone/>
-              <a:defRPr sz="1400"/>
+              <a:defRPr sz="1200"/>
             </a:lvl2pPr>
             <a:lvl3pPr marL="914400" indent="0">
               <a:buNone/>
-              <a:defRPr sz="1200"/>
+              <a:defRPr sz="1000"/>
             </a:lvl3pPr>
             <a:lvl4pPr marL="1371600" indent="0">
               <a:buNone/>
-              <a:defRPr sz="1000"/>
+              <a:defRPr sz="900"/>
             </a:lvl4pPr>
             <a:lvl5pPr marL="1828800" indent="0">
               <a:buNone/>
-              <a:defRPr sz="1000"/>
+              <a:defRPr sz="900"/>
             </a:lvl5pPr>
             <a:lvl6pPr marL="2286000" indent="0">
               <a:buNone/>
-              <a:defRPr sz="1000"/>
+              <a:defRPr sz="900"/>
             </a:lvl6pPr>
             <a:lvl7pPr marL="2743200" indent="0">
               <a:buNone/>
-              <a:defRPr sz="1000"/>
+              <a:defRPr sz="900"/>
             </a:lvl7pPr>
             <a:lvl8pPr marL="3200400" indent="0">
               <a:buNone/>
-              <a:defRPr sz="1000"/>
+              <a:defRPr sz="900"/>
             </a:lvl8pPr>
             <a:lvl9pPr marL="3657600" indent="0">
               <a:buNone/>
-              <a:defRPr sz="1000"/>
+              <a:defRPr sz="900"/>
             </a:lvl9pPr>
           </a:lstStyle>
           <a:p>
@@ -2378,13 +4156,7 @@
       </p:sp>
       <p:sp>
         <p:nvSpPr>
-          <p:cNvPr id="5" name="Date Placeholder 4">
-            <a:extLst>
-              <a:ext uri="{FF2B5EF4-FFF2-40B4-BE49-F238E27FC236}">
-                <a16:creationId xmlns:a16="http://schemas.microsoft.com/office/drawing/2014/main" id="{763610FF-36F0-7F1F-86F4-1A8AC53C6281}"/>
-              </a:ext>
-            </a:extLst>
-          </p:cNvPr>
+          <p:cNvPr id="5" name="Date Placeholder 4"/>
           <p:cNvSpPr>
             <a:spLocks noGrp="1"/>
           </p:cNvSpPr>
@@ -2399,7 +4171,7 @@
           <a:p>
             <a:fld id="{F4D18BF0-D309-41FF-AA8C-FC2AA1806513}" type="datetimeFigureOut">
               <a:rPr lang="en-US" smtClean="0"/>
-              <a:t>3/5/2026</a:t>
+              <a:t>3/6/2026</a:t>
             </a:fld>
             <a:endParaRPr lang="en-US"/>
           </a:p>
@@ -2407,13 +4179,7 @@
       </p:sp>
       <p:sp>
         <p:nvSpPr>
-          <p:cNvPr id="6" name="Footer Placeholder 5">
-            <a:extLst>
-              <a:ext uri="{FF2B5EF4-FFF2-40B4-BE49-F238E27FC236}">
-                <a16:creationId xmlns:a16="http://schemas.microsoft.com/office/drawing/2014/main" id="{A71D477D-EBEC-8139-C42E-AD488FD02BB4}"/>
-              </a:ext>
-            </a:extLst>
-          </p:cNvPr>
+          <p:cNvPr id="6" name="Footer Placeholder 5"/>
           <p:cNvSpPr>
             <a:spLocks noGrp="1"/>
           </p:cNvSpPr>
@@ -2432,13 +4198,7 @@
       </p:sp>
       <p:sp>
         <p:nvSpPr>
-          <p:cNvPr id="7" name="Slide Number Placeholder 6">
-            <a:extLst>
-              <a:ext uri="{FF2B5EF4-FFF2-40B4-BE49-F238E27FC236}">
-                <a16:creationId xmlns:a16="http://schemas.microsoft.com/office/drawing/2014/main" id="{830F3470-E8FA-9920-FF29-D08C3CB3DA07}"/>
-              </a:ext>
-            </a:extLst>
-          </p:cNvPr>
+          <p:cNvPr id="7" name="Slide Number Placeholder 6"/>
           <p:cNvSpPr>
             <a:spLocks noGrp="1"/>
           </p:cNvSpPr>
@@ -2459,12 +4219,42 @@
           </a:p>
         </p:txBody>
       </p:sp>
+      <p:cxnSp>
+        <p:nvCxnSpPr>
+          <p:cNvPr id="9" name="Straight Connector 8"/>
+          <p:cNvCxnSpPr/>
+          <p:nvPr/>
+        </p:nvCxnSpPr>
+        <p:spPr>
+          <a:xfrm rot="5400000">
+            <a:off x="912152" y="3579942"/>
+            <a:ext cx="5577840" cy="2117"/>
+          </a:xfrm>
+          <a:prstGeom prst="line">
+            <a:avLst/>
+          </a:prstGeom>
+          <a:ln w="19050">
+            <a:solidFill>
+              <a:schemeClr val="tx2"/>
+            </a:solidFill>
+          </a:ln>
+        </p:spPr>
+        <p:style>
+          <a:lnRef idx="1">
+            <a:schemeClr val="accent1"/>
+          </a:lnRef>
+          <a:fillRef idx="0">
+            <a:schemeClr val="accent1"/>
+          </a:fillRef>
+          <a:effectRef idx="0">
+            <a:schemeClr val="accent1"/>
+          </a:effectRef>
+          <a:fontRef idx="minor">
+            <a:schemeClr val="tx1"/>
+          </a:fontRef>
+        </p:style>
+      </p:cxnSp>
     </p:spTree>
-    <p:extLst>
-      <p:ext uri="{BB962C8B-B14F-4D97-AF65-F5344CB8AC3E}">
-        <p14:creationId xmlns:p14="http://schemas.microsoft.com/office/powerpoint/2010/main" val="3347428727"/>
-      </p:ext>
-    </p:extLst>
   </p:cSld>
   <p:clrMapOvr>
     <a:masterClrMapping/>
@@ -2491,13 +4281,7 @@
       </p:grpSpPr>
       <p:sp>
         <p:nvSpPr>
-          <p:cNvPr id="2" name="Title 1">
-            <a:extLst>
-              <a:ext uri="{FF2B5EF4-FFF2-40B4-BE49-F238E27FC236}">
-                <a16:creationId xmlns:a16="http://schemas.microsoft.com/office/drawing/2014/main" id="{E65DE163-4A36-3265-8AA6-35C02F6081CF}"/>
-              </a:ext>
-            </a:extLst>
-          </p:cNvPr>
+          <p:cNvPr id="2" name="Title 1"/>
           <p:cNvSpPr>
             <a:spLocks noGrp="1"/>
           </p:cNvSpPr>
@@ -2507,15 +4291,17 @@
         </p:nvSpPr>
         <p:spPr>
           <a:xfrm>
-            <a:off x="839788" y="457200"/>
-            <a:ext cx="3932237" cy="1600200"/>
-          </a:xfrm>
-        </p:spPr>
-        <p:txBody>
-          <a:bodyPr anchor="b"/>
+            <a:off x="609600" y="792480"/>
+            <a:ext cx="2856907" cy="1264920"/>
+          </a:xfrm>
+        </p:spPr>
+        <p:txBody>
+          <a:bodyPr anchor="b">
+            <a:normAutofit/>
+          </a:bodyPr>
           <a:lstStyle>
-            <a:lvl1pPr>
-              <a:defRPr sz="3200"/>
+            <a:lvl1pPr algn="l">
+              <a:defRPr sz="2400" b="0"/>
             </a:lvl1pPr>
           </a:lstStyle>
           <a:p>
@@ -2523,18 +4309,13 @@
               <a:rPr lang="en-US"/>
               <a:t>Click to edit Master title style</a:t>
             </a:r>
-          </a:p>
-        </p:txBody>
-      </p:sp>
-      <p:sp>
-        <p:nvSpPr>
-          <p:cNvPr id="3" name="Picture Placeholder 2">
-            <a:extLst>
-              <a:ext uri="{FF2B5EF4-FFF2-40B4-BE49-F238E27FC236}">
-                <a16:creationId xmlns:a16="http://schemas.microsoft.com/office/drawing/2014/main" id="{E2D945DE-DB7E-71BE-EFF2-1E2F90C38E10}"/>
-              </a:ext>
-            </a:extLst>
-          </p:cNvPr>
+            <a:endParaRPr lang="en-US" dirty="0"/>
+          </a:p>
+        </p:txBody>
+      </p:sp>
+      <p:sp>
+        <p:nvSpPr>
+          <p:cNvPr id="3" name="Picture Placeholder 2"/>
           <p:cNvSpPr>
             <a:spLocks noGrp="1"/>
           </p:cNvSpPr>
@@ -2544,9 +4325,25 @@
         </p:nvSpPr>
         <p:spPr>
           <a:xfrm>
-            <a:off x="5183188" y="987425"/>
-            <a:ext cx="6172200" cy="4873625"/>
-          </a:xfrm>
+            <a:off x="3811480" y="838201"/>
+            <a:ext cx="7872520" cy="5500456"/>
+          </a:xfrm>
+          <a:solidFill>
+            <a:schemeClr val="bg2"/>
+          </a:solidFill>
+          <a:ln w="76200">
+            <a:solidFill>
+              <a:srgbClr val="FFFFFF"/>
+            </a:solidFill>
+            <a:miter lim="800000"/>
+          </a:ln>
+          <a:effectLst>
+            <a:outerShdw blurRad="50800" dist="12700" dir="5400000" algn="t" rotWithShape="0">
+              <a:prstClr val="black">
+                <a:alpha val="59000"/>
+              </a:prstClr>
+            </a:outerShdw>
+          </a:effectLst>
         </p:spPr>
         <p:txBody>
           <a:bodyPr/>
@@ -2589,19 +4386,17 @@
             </a:lvl9pPr>
           </a:lstStyle>
           <a:p>
-            <a:endParaRPr lang="en-US"/>
-          </a:p>
-        </p:txBody>
-      </p:sp>
-      <p:sp>
-        <p:nvSpPr>
-          <p:cNvPr id="4" name="Text Placeholder 3">
-            <a:extLst>
-              <a:ext uri="{FF2B5EF4-FFF2-40B4-BE49-F238E27FC236}">
-                <a16:creationId xmlns:a16="http://schemas.microsoft.com/office/drawing/2014/main" id="{3205DAA4-684C-9441-BB11-778CCB912674}"/>
-              </a:ext>
-            </a:extLst>
-          </p:cNvPr>
+            <a:r>
+              <a:rPr lang="en-US"/>
+              <a:t>Click icon to add picture</a:t>
+            </a:r>
+            <a:endParaRPr lang="en-US" dirty="0"/>
+          </a:p>
+        </p:txBody>
+      </p:sp>
+      <p:sp>
+        <p:nvSpPr>
+          <p:cNvPr id="4" name="Text Placeholder 3"/>
           <p:cNvSpPr>
             <a:spLocks noGrp="1"/>
           </p:cNvSpPr>
@@ -2611,8 +4406,8 @@
         </p:nvSpPr>
         <p:spPr>
           <a:xfrm>
-            <a:off x="839788" y="2057400"/>
-            <a:ext cx="3932237" cy="3811588"/>
+            <a:off x="609600" y="2133600"/>
+            <a:ext cx="2852928" cy="4242816"/>
           </a:xfrm>
         </p:spPr>
         <p:txBody>
@@ -2620,39 +4415,39 @@
           <a:lstStyle>
             <a:lvl1pPr marL="0" indent="0">
               <a:buNone/>
-              <a:defRPr sz="1600"/>
+              <a:defRPr sz="1400"/>
             </a:lvl1pPr>
             <a:lvl2pPr marL="457200" indent="0">
               <a:buNone/>
-              <a:defRPr sz="1400"/>
+              <a:defRPr sz="1200"/>
             </a:lvl2pPr>
             <a:lvl3pPr marL="914400" indent="0">
               <a:buNone/>
-              <a:defRPr sz="1200"/>
+              <a:defRPr sz="1000"/>
             </a:lvl3pPr>
             <a:lvl4pPr marL="1371600" indent="0">
               <a:buNone/>
-              <a:defRPr sz="1000"/>
+              <a:defRPr sz="900"/>
             </a:lvl4pPr>
             <a:lvl5pPr marL="1828800" indent="0">
               <a:buNone/>
-              <a:defRPr sz="1000"/>
+              <a:defRPr sz="900"/>
             </a:lvl5pPr>
             <a:lvl6pPr marL="2286000" indent="0">
               <a:buNone/>
-              <a:defRPr sz="1000"/>
+              <a:defRPr sz="900"/>
             </a:lvl6pPr>
             <a:lvl7pPr marL="2743200" indent="0">
               <a:buNone/>
-              <a:defRPr sz="1000"/>
+              <a:defRPr sz="900"/>
             </a:lvl7pPr>
             <a:lvl8pPr marL="3200400" indent="0">
               <a:buNone/>
-              <a:defRPr sz="1000"/>
+              <a:defRPr sz="900"/>
             </a:lvl8pPr>
             <a:lvl9pPr marL="3657600" indent="0">
               <a:buNone/>
-              <a:defRPr sz="1000"/>
+              <a:defRPr sz="900"/>
             </a:lvl9pPr>
           </a:lstStyle>
           <a:p>
@@ -2666,13 +4461,7 @@
       </p:sp>
       <p:sp>
         <p:nvSpPr>
-          <p:cNvPr id="5" name="Date Placeholder 4">
-            <a:extLst>
-              <a:ext uri="{FF2B5EF4-FFF2-40B4-BE49-F238E27FC236}">
-                <a16:creationId xmlns:a16="http://schemas.microsoft.com/office/drawing/2014/main" id="{6A91BB1E-258B-7FE5-B5C8-89AAAD00E618}"/>
-              </a:ext>
-            </a:extLst>
-          </p:cNvPr>
+          <p:cNvPr id="5" name="Date Placeholder 4"/>
           <p:cNvSpPr>
             <a:spLocks noGrp="1"/>
           </p:cNvSpPr>
@@ -2687,7 +4476,7 @@
           <a:p>
             <a:fld id="{F4D18BF0-D309-41FF-AA8C-FC2AA1806513}" type="datetimeFigureOut">
               <a:rPr lang="en-US" smtClean="0"/>
-              <a:t>3/5/2026</a:t>
+              <a:t>3/6/2026</a:t>
             </a:fld>
             <a:endParaRPr lang="en-US"/>
           </a:p>
@@ -2695,13 +4484,7 @@
       </p:sp>
       <p:sp>
         <p:nvSpPr>
-          <p:cNvPr id="6" name="Footer Placeholder 5">
-            <a:extLst>
-              <a:ext uri="{FF2B5EF4-FFF2-40B4-BE49-F238E27FC236}">
-                <a16:creationId xmlns:a16="http://schemas.microsoft.com/office/drawing/2014/main" id="{7720D976-AAA8-DBCA-B0A4-DD258D654D7D}"/>
-              </a:ext>
-            </a:extLst>
-          </p:cNvPr>
+          <p:cNvPr id="6" name="Footer Placeholder 5"/>
           <p:cNvSpPr>
             <a:spLocks noGrp="1"/>
           </p:cNvSpPr>
@@ -2720,13 +4503,7 @@
       </p:sp>
       <p:sp>
         <p:nvSpPr>
-          <p:cNvPr id="7" name="Slide Number Placeholder 6">
-            <a:extLst>
-              <a:ext uri="{FF2B5EF4-FFF2-40B4-BE49-F238E27FC236}">
-                <a16:creationId xmlns:a16="http://schemas.microsoft.com/office/drawing/2014/main" id="{F9740993-0E96-D12A-694A-0778B560D859}"/>
-              </a:ext>
-            </a:extLst>
-          </p:cNvPr>
+          <p:cNvPr id="7" name="Slide Number Placeholder 6"/>
           <p:cNvSpPr>
             <a:spLocks noGrp="1"/>
           </p:cNvSpPr>
@@ -2748,11 +4525,6 @@
         </p:txBody>
       </p:sp>
     </p:spTree>
-    <p:extLst>
-      <p:ext uri="{BB962C8B-B14F-4D97-AF65-F5344CB8AC3E}">
-        <p14:creationId xmlns:p14="http://schemas.microsoft.com/office/powerpoint/2010/main" val="4162582897"/>
-      </p:ext>
-    </p:extLst>
   </p:cSld>
   <p:clrMapOvr>
     <a:masterClrMapping/>
@@ -2784,13 +4556,53 @@
       </p:grpSpPr>
       <p:sp>
         <p:nvSpPr>
-          <p:cNvPr id="2" name="Title Placeholder 1">
-            <a:extLst>
-              <a:ext uri="{FF2B5EF4-FFF2-40B4-BE49-F238E27FC236}">
-                <a16:creationId xmlns:a16="http://schemas.microsoft.com/office/drawing/2014/main" id="{6E075477-E04C-F07F-86B8-977C7753DE60}"/>
-              </a:ext>
-            </a:extLst>
-          </p:cNvPr>
+          <p:cNvPr id="10" name="Rectangle 9"/>
+          <p:cNvSpPr/>
+          <p:nvPr/>
+        </p:nvSpPr>
+        <p:spPr>
+          <a:xfrm>
+            <a:off x="0" y="220786"/>
+            <a:ext cx="12192000" cy="228600"/>
+          </a:xfrm>
+          <a:prstGeom prst="rect">
+            <a:avLst/>
+          </a:prstGeom>
+          <a:solidFill>
+            <a:srgbClr val="FFFFFF"/>
+          </a:solidFill>
+          <a:ln>
+            <a:noFill/>
+          </a:ln>
+        </p:spPr>
+        <p:style>
+          <a:lnRef idx="2">
+            <a:schemeClr val="accent1">
+              <a:shade val="50000"/>
+            </a:schemeClr>
+          </a:lnRef>
+          <a:fillRef idx="1">
+            <a:schemeClr val="accent1"/>
+          </a:fillRef>
+          <a:effectRef idx="0">
+            <a:schemeClr val="accent1"/>
+          </a:effectRef>
+          <a:fontRef idx="minor">
+            <a:schemeClr val="lt1"/>
+          </a:fontRef>
+        </p:style>
+        <p:txBody>
+          <a:bodyPr rtlCol="0" anchor="ctr"/>
+          <a:lstStyle/>
+          <a:p>
+            <a:pPr algn="ctr"/>
+            <a:endParaRPr lang="en-US"/>
+          </a:p>
+        </p:txBody>
+      </p:sp>
+      <p:sp>
+        <p:nvSpPr>
+          <p:cNvPr id="2" name="Title Placeholder 1"/>
           <p:cNvSpPr>
             <a:spLocks noGrp="1"/>
           </p:cNvSpPr>
@@ -2800,8 +4612,8 @@
         </p:nvSpPr>
         <p:spPr>
           <a:xfrm>
-            <a:off x="838200" y="365125"/>
-            <a:ext cx="10515600" cy="1325563"/>
+            <a:off x="609600" y="533400"/>
+            <a:ext cx="10972800" cy="990600"/>
           </a:xfrm>
           <a:prstGeom prst="rect">
             <a:avLst/>
@@ -2817,18 +4629,13 @@
               <a:rPr lang="en-US"/>
               <a:t>Click to edit Master title style</a:t>
             </a:r>
-          </a:p>
-        </p:txBody>
-      </p:sp>
-      <p:sp>
-        <p:nvSpPr>
-          <p:cNvPr id="3" name="Text Placeholder 2">
-            <a:extLst>
-              <a:ext uri="{FF2B5EF4-FFF2-40B4-BE49-F238E27FC236}">
-                <a16:creationId xmlns:a16="http://schemas.microsoft.com/office/drawing/2014/main" id="{091A5CCC-6E5F-4E77-3245-330828A751C5}"/>
-              </a:ext>
-            </a:extLst>
-          </p:cNvPr>
+            <a:endParaRPr lang="en-US" dirty="0"/>
+          </a:p>
+        </p:txBody>
+      </p:sp>
+      <p:sp>
+        <p:nvSpPr>
+          <p:cNvPr id="3" name="Text Placeholder 2"/>
           <p:cNvSpPr>
             <a:spLocks noGrp="1"/>
           </p:cNvSpPr>
@@ -2838,8 +4645,8 @@
         </p:nvSpPr>
         <p:spPr>
           <a:xfrm>
-            <a:off x="838200" y="1825625"/>
-            <a:ext cx="10515600" cy="4351338"/>
+            <a:off x="609600" y="1600200"/>
+            <a:ext cx="10972800" cy="4876800"/>
           </a:xfrm>
           <a:prstGeom prst="rect">
             <a:avLst/>
@@ -2884,18 +4691,59 @@
               <a:rPr lang="en-US"/>
               <a:t>Fifth level</a:t>
             </a:r>
-          </a:p>
-        </p:txBody>
-      </p:sp>
-      <p:sp>
-        <p:nvSpPr>
-          <p:cNvPr id="4" name="Date Placeholder 3">
-            <a:extLst>
-              <a:ext uri="{FF2B5EF4-FFF2-40B4-BE49-F238E27FC236}">
-                <a16:creationId xmlns:a16="http://schemas.microsoft.com/office/drawing/2014/main" id="{0F0385D5-D424-161E-5CA3-896528850401}"/>
-              </a:ext>
-            </a:extLst>
-          </p:cNvPr>
+            <a:endParaRPr lang="en-US" dirty="0"/>
+          </a:p>
+        </p:txBody>
+      </p:sp>
+      <p:sp>
+        <p:nvSpPr>
+          <p:cNvPr id="7" name="Rectangle 6"/>
+          <p:cNvSpPr/>
+          <p:nvPr/>
+        </p:nvSpPr>
+        <p:spPr>
+          <a:xfrm>
+            <a:off x="0" y="0"/>
+            <a:ext cx="12192000" cy="365760"/>
+          </a:xfrm>
+          <a:prstGeom prst="rect">
+            <a:avLst/>
+          </a:prstGeom>
+          <a:solidFill>
+            <a:schemeClr val="accent1"/>
+          </a:solidFill>
+          <a:ln>
+            <a:noFill/>
+          </a:ln>
+        </p:spPr>
+        <p:style>
+          <a:lnRef idx="2">
+            <a:schemeClr val="accent1">
+              <a:shade val="50000"/>
+            </a:schemeClr>
+          </a:lnRef>
+          <a:fillRef idx="1">
+            <a:schemeClr val="accent1"/>
+          </a:fillRef>
+          <a:effectRef idx="0">
+            <a:schemeClr val="accent1"/>
+          </a:effectRef>
+          <a:fontRef idx="minor">
+            <a:schemeClr val="lt1"/>
+          </a:fontRef>
+        </p:style>
+        <p:txBody>
+          <a:bodyPr rtlCol="0" anchor="ctr"/>
+          <a:lstStyle/>
+          <a:p>
+            <a:pPr algn="ctr"/>
+            <a:endParaRPr lang="en-US"/>
+          </a:p>
+        </p:txBody>
+      </p:sp>
+      <p:sp>
+        <p:nvSpPr>
+          <p:cNvPr id="4" name="Date Placeholder 3"/>
           <p:cNvSpPr>
             <a:spLocks noGrp="1"/>
           </p:cNvSpPr>
@@ -2905,8 +4753,8 @@
         </p:nvSpPr>
         <p:spPr>
           <a:xfrm>
-            <a:off x="838200" y="6356350"/>
-            <a:ext cx="2743200" cy="365125"/>
+            <a:off x="609600" y="18288"/>
+            <a:ext cx="3860800" cy="329184"/>
           </a:xfrm>
           <a:prstGeom prst="rect">
             <a:avLst/>
@@ -2918,9 +4766,7 @@
             <a:lvl1pPr algn="l">
               <a:defRPr sz="1200">
                 <a:solidFill>
-                  <a:schemeClr val="tx1">
-                    <a:tint val="82000"/>
-                  </a:schemeClr>
+                  <a:srgbClr val="FFFFFF"/>
                 </a:solidFill>
               </a:defRPr>
             </a:lvl1pPr>
@@ -2928,7 +4774,7 @@
           <a:p>
             <a:fld id="{F4D18BF0-D309-41FF-AA8C-FC2AA1806513}" type="datetimeFigureOut">
               <a:rPr lang="en-US" smtClean="0"/>
-              <a:t>3/5/2026</a:t>
+              <a:t>3/6/2026</a:t>
             </a:fld>
             <a:endParaRPr lang="en-US"/>
           </a:p>
@@ -2936,13 +4782,7 @@
       </p:sp>
       <p:sp>
         <p:nvSpPr>
-          <p:cNvPr id="5" name="Footer Placeholder 4">
-            <a:extLst>
-              <a:ext uri="{FF2B5EF4-FFF2-40B4-BE49-F238E27FC236}">
-                <a16:creationId xmlns:a16="http://schemas.microsoft.com/office/drawing/2014/main" id="{C5075974-0F76-E645-DAB7-BF1217A0566B}"/>
-              </a:ext>
-            </a:extLst>
-          </p:cNvPr>
+          <p:cNvPr id="5" name="Footer Placeholder 4"/>
           <p:cNvSpPr>
             <a:spLocks noGrp="1"/>
           </p:cNvSpPr>
@@ -2952,8 +4792,8 @@
         </p:nvSpPr>
         <p:spPr>
           <a:xfrm>
-            <a:off x="4038600" y="6356350"/>
-            <a:ext cx="4114800" cy="365125"/>
+            <a:off x="4572000" y="18288"/>
+            <a:ext cx="5486400" cy="329184"/>
           </a:xfrm>
           <a:prstGeom prst="rect">
             <a:avLst/>
@@ -2965,9 +4805,7 @@
             <a:lvl1pPr algn="ctr">
               <a:defRPr sz="1200">
                 <a:solidFill>
-                  <a:schemeClr val="tx1">
-                    <a:tint val="82000"/>
-                  </a:schemeClr>
+                  <a:srgbClr val="FFFFFF"/>
                 </a:solidFill>
               </a:defRPr>
             </a:lvl1pPr>
@@ -2979,13 +4817,7 @@
       </p:sp>
       <p:sp>
         <p:nvSpPr>
-          <p:cNvPr id="6" name="Slide Number Placeholder 5">
-            <a:extLst>
-              <a:ext uri="{FF2B5EF4-FFF2-40B4-BE49-F238E27FC236}">
-                <a16:creationId xmlns:a16="http://schemas.microsoft.com/office/drawing/2014/main" id="{DBA383BC-75C6-4411-4471-5A9766C75003}"/>
-              </a:ext>
-            </a:extLst>
-          </p:cNvPr>
+          <p:cNvPr id="6" name="Slide Number Placeholder 5"/>
           <p:cNvSpPr>
             <a:spLocks noGrp="1"/>
           </p:cNvSpPr>
@@ -2995,8 +4827,8 @@
         </p:nvSpPr>
         <p:spPr>
           <a:xfrm>
-            <a:off x="8610600" y="6356350"/>
-            <a:ext cx="2743200" cy="365125"/>
+            <a:off x="10160000" y="18288"/>
+            <a:ext cx="1422400" cy="329184"/>
           </a:xfrm>
           <a:prstGeom prst="rect">
             <a:avLst/>
@@ -3005,12 +4837,10 @@
         <p:txBody>
           <a:bodyPr vert="horz" lIns="91440" tIns="45720" rIns="91440" bIns="45720" rtlCol="0" anchor="ctr"/>
           <a:lstStyle>
-            <a:lvl1pPr algn="r">
-              <a:defRPr sz="1200">
+            <a:lvl1pPr algn="l">
+              <a:defRPr sz="1400" b="1">
                 <a:solidFill>
-                  <a:schemeClr val="tx1">
-                    <a:tint val="82000"/>
-                  </a:schemeClr>
+                  <a:srgbClr val="FFFFFF"/>
                 </a:solidFill>
               </a:defRPr>
             </a:lvl1pPr>
@@ -3025,39 +4855,31 @@
         </p:txBody>
       </p:sp>
     </p:spTree>
-    <p:extLst>
-      <p:ext uri="{BB962C8B-B14F-4D97-AF65-F5344CB8AC3E}">
-        <p14:creationId xmlns:p14="http://schemas.microsoft.com/office/powerpoint/2010/main" val="3120496159"/>
-      </p:ext>
-    </p:extLst>
   </p:cSld>
   <p:clrMap bg1="lt1" tx1="dk1" bg2="lt2" tx2="dk2" accent1="accent1" accent2="accent2" accent3="accent3" accent4="accent4" accent5="accent5" accent6="accent6" hlink="hlink" folHlink="folHlink"/>
   <p:sldLayoutIdLst>
-    <p:sldLayoutId id="2147483649" r:id="rId1"/>
-    <p:sldLayoutId id="2147483650" r:id="rId2"/>
-    <p:sldLayoutId id="2147483651" r:id="rId3"/>
-    <p:sldLayoutId id="2147483652" r:id="rId4"/>
-    <p:sldLayoutId id="2147483653" r:id="rId5"/>
-    <p:sldLayoutId id="2147483654" r:id="rId6"/>
-    <p:sldLayoutId id="2147483655" r:id="rId7"/>
-    <p:sldLayoutId id="2147483656" r:id="rId8"/>
-    <p:sldLayoutId id="2147483657" r:id="rId9"/>
-    <p:sldLayoutId id="2147483658" r:id="rId10"/>
-    <p:sldLayoutId id="2147483659" r:id="rId11"/>
+    <p:sldLayoutId id="2147483793" r:id="rId1"/>
+    <p:sldLayoutId id="2147483794" r:id="rId2"/>
+    <p:sldLayoutId id="2147483795" r:id="rId3"/>
+    <p:sldLayoutId id="2147483796" r:id="rId4"/>
+    <p:sldLayoutId id="2147483797" r:id="rId5"/>
+    <p:sldLayoutId id="2147483798" r:id="rId6"/>
+    <p:sldLayoutId id="2147483799" r:id="rId7"/>
+    <p:sldLayoutId id="2147483800" r:id="rId8"/>
+    <p:sldLayoutId id="2147483801" r:id="rId9"/>
+    <p:sldLayoutId id="2147483802" r:id="rId10"/>
+    <p:sldLayoutId id="2147483803" r:id="rId11"/>
   </p:sldLayoutIdLst>
   <p:txStyles>
     <p:titleStyle>
       <a:lvl1pPr algn="l" defTabSz="914400" rtl="0" eaLnBrk="1" latinLnBrk="0" hangingPunct="1">
-        <a:lnSpc>
-          <a:spcPct val="90000"/>
-        </a:lnSpc>
         <a:spcBef>
           <a:spcPct val="0"/>
         </a:spcBef>
         <a:buNone/>
-        <a:defRPr sz="4400" kern="1200">
+        <a:defRPr sz="4000" kern="1200" spc="-100" baseline="0">
           <a:solidFill>
-            <a:schemeClr val="tx1"/>
+            <a:schemeClr val="tx2"/>
           </a:solidFill>
           <a:latin typeface="+mj-lt"/>
           <a:ea typeface="+mj-ea"/>
@@ -3066,32 +4888,15 @@
       </a:lvl1pPr>
     </p:titleStyle>
     <p:bodyStyle>
-      <a:lvl1pPr marL="228600" indent="-228600" algn="l" defTabSz="914400" rtl="0" eaLnBrk="1" latinLnBrk="0" hangingPunct="1">
-        <a:lnSpc>
-          <a:spcPct val="90000"/>
-        </a:lnSpc>
+      <a:lvl1pPr marL="182880" indent="-182880" algn="l" defTabSz="914400" rtl="0" eaLnBrk="1" latinLnBrk="0" hangingPunct="1">
         <a:spcBef>
-          <a:spcPts val="1000"/>
+          <a:spcPct val="20000"/>
         </a:spcBef>
-        <a:buFont typeface="Arial" panose="020B0604020202020204" pitchFamily="34" charset="0"/>
-        <a:buChar char="•"/>
-        <a:defRPr sz="2800" kern="1200">
-          <a:solidFill>
-            <a:schemeClr val="tx1"/>
-          </a:solidFill>
-          <a:latin typeface="+mn-lt"/>
-          <a:ea typeface="+mn-ea"/>
-          <a:cs typeface="+mn-cs"/>
-        </a:defRPr>
-      </a:lvl1pPr>
-      <a:lvl2pPr marL="685800" indent="-228600" algn="l" defTabSz="914400" rtl="0" eaLnBrk="1" latinLnBrk="0" hangingPunct="1">
-        <a:lnSpc>
-          <a:spcPct val="90000"/>
-        </a:lnSpc>
-        <a:spcBef>
-          <a:spcPts val="500"/>
-        </a:spcBef>
-        <a:buFont typeface="Arial" panose="020B0604020202020204" pitchFamily="34" charset="0"/>
+        <a:buClr>
+          <a:schemeClr val="accent1"/>
+        </a:buClr>
+        <a:buSzPct val="85000"/>
+        <a:buFont typeface="Arial" pitchFamily="34" charset="0"/>
         <a:buChar char="•"/>
         <a:defRPr sz="2400" kern="1200">
           <a:solidFill>
@@ -3101,15 +4906,16 @@
           <a:ea typeface="+mn-ea"/>
           <a:cs typeface="+mn-cs"/>
         </a:defRPr>
-      </a:lvl2pPr>
-      <a:lvl3pPr marL="1143000" indent="-228600" algn="l" defTabSz="914400" rtl="0" eaLnBrk="1" latinLnBrk="0" hangingPunct="1">
-        <a:lnSpc>
-          <a:spcPct val="90000"/>
-        </a:lnSpc>
+      </a:lvl1pPr>
+      <a:lvl2pPr marL="457200" indent="-182880" algn="l" defTabSz="914400" rtl="0" eaLnBrk="1" latinLnBrk="0" hangingPunct="1">
         <a:spcBef>
-          <a:spcPts val="500"/>
+          <a:spcPct val="20000"/>
         </a:spcBef>
-        <a:buFont typeface="Arial" panose="020B0604020202020204" pitchFamily="34" charset="0"/>
+        <a:buClr>
+          <a:schemeClr val="accent1"/>
+        </a:buClr>
+        <a:buSzPct val="85000"/>
+        <a:buFont typeface="Arial" pitchFamily="34" charset="0"/>
         <a:buChar char="•"/>
         <a:defRPr sz="2000" kern="1200">
           <a:solidFill>
@@ -3119,15 +4925,16 @@
           <a:ea typeface="+mn-ea"/>
           <a:cs typeface="+mn-cs"/>
         </a:defRPr>
-      </a:lvl3pPr>
-      <a:lvl4pPr marL="1600200" indent="-228600" algn="l" defTabSz="914400" rtl="0" eaLnBrk="1" latinLnBrk="0" hangingPunct="1">
-        <a:lnSpc>
-          <a:spcPct val="90000"/>
-        </a:lnSpc>
+      </a:lvl2pPr>
+      <a:lvl3pPr marL="731520" indent="-182880" algn="l" defTabSz="914400" rtl="0" eaLnBrk="1" latinLnBrk="0" hangingPunct="1">
         <a:spcBef>
-          <a:spcPts val="500"/>
+          <a:spcPct val="20000"/>
         </a:spcBef>
-        <a:buFont typeface="Arial" panose="020B0604020202020204" pitchFamily="34" charset="0"/>
+        <a:buClr>
+          <a:schemeClr val="accent1"/>
+        </a:buClr>
+        <a:buSzPct val="90000"/>
+        <a:buFont typeface="Arial" pitchFamily="34" charset="0"/>
         <a:buChar char="•"/>
         <a:defRPr sz="1800" kern="1200">
           <a:solidFill>
@@ -3137,17 +4944,36 @@
           <a:ea typeface="+mn-ea"/>
           <a:cs typeface="+mn-cs"/>
         </a:defRPr>
+      </a:lvl3pPr>
+      <a:lvl4pPr marL="1005840" indent="-182880" algn="l" defTabSz="914400" rtl="0" eaLnBrk="1" latinLnBrk="0" hangingPunct="1">
+        <a:spcBef>
+          <a:spcPct val="20000"/>
+        </a:spcBef>
+        <a:buClr>
+          <a:schemeClr val="accent1"/>
+        </a:buClr>
+        <a:buFont typeface="Arial" pitchFamily="34" charset="0"/>
+        <a:buChar char="•"/>
+        <a:defRPr sz="1600" kern="1200">
+          <a:solidFill>
+            <a:schemeClr val="tx1"/>
+          </a:solidFill>
+          <a:latin typeface="+mn-lt"/>
+          <a:ea typeface="+mn-ea"/>
+          <a:cs typeface="+mn-cs"/>
+        </a:defRPr>
       </a:lvl4pPr>
-      <a:lvl5pPr marL="2057400" indent="-228600" algn="l" defTabSz="914400" rtl="0" eaLnBrk="1" latinLnBrk="0" hangingPunct="1">
-        <a:lnSpc>
-          <a:spcPct val="90000"/>
-        </a:lnSpc>
+      <a:lvl5pPr marL="1188720" indent="-137160" algn="l" defTabSz="914400" rtl="0" eaLnBrk="1" latinLnBrk="0" hangingPunct="1">
         <a:spcBef>
-          <a:spcPts val="500"/>
+          <a:spcPct val="20000"/>
         </a:spcBef>
-        <a:buFont typeface="Arial" panose="020B0604020202020204" pitchFamily="34" charset="0"/>
+        <a:buClr>
+          <a:schemeClr val="accent1"/>
+        </a:buClr>
+        <a:buSzPct val="100000"/>
+        <a:buFont typeface="Arial" pitchFamily="34" charset="0"/>
         <a:buChar char="•"/>
-        <a:defRPr sz="1800" kern="1200">
+        <a:defRPr sz="1400" kern="1200" baseline="0">
           <a:solidFill>
             <a:schemeClr val="tx1"/>
           </a:solidFill>
@@ -3156,16 +4982,16 @@
           <a:cs typeface="+mn-cs"/>
         </a:defRPr>
       </a:lvl5pPr>
-      <a:lvl6pPr marL="2514600" indent="-228600" algn="l" defTabSz="914400" rtl="0" eaLnBrk="1" latinLnBrk="0" hangingPunct="1">
-        <a:lnSpc>
-          <a:spcPct val="90000"/>
-        </a:lnSpc>
+      <a:lvl6pPr marL="1371600" indent="-182880" algn="l" defTabSz="914400" rtl="0" eaLnBrk="1" latinLnBrk="0" hangingPunct="1">
         <a:spcBef>
-          <a:spcPts val="500"/>
+          <a:spcPct val="20000"/>
         </a:spcBef>
-        <a:buFont typeface="Arial" panose="020B0604020202020204" pitchFamily="34" charset="0"/>
+        <a:buClr>
+          <a:schemeClr val="accent1"/>
+        </a:buClr>
+        <a:buFont typeface="Arial" pitchFamily="34" charset="0"/>
         <a:buChar char="•"/>
-        <a:defRPr sz="1800" kern="1200">
+        <a:defRPr sz="1300" kern="1200">
           <a:solidFill>
             <a:schemeClr val="tx1"/>
           </a:solidFill>
@@ -3174,16 +5000,16 @@
           <a:cs typeface="+mn-cs"/>
         </a:defRPr>
       </a:lvl6pPr>
-      <a:lvl7pPr marL="2971800" indent="-228600" algn="l" defTabSz="914400" rtl="0" eaLnBrk="1" latinLnBrk="0" hangingPunct="1">
-        <a:lnSpc>
-          <a:spcPct val="90000"/>
-        </a:lnSpc>
+      <a:lvl7pPr marL="1554480" indent="-182880" algn="l" defTabSz="914400" rtl="0" eaLnBrk="1" latinLnBrk="0" hangingPunct="1">
         <a:spcBef>
-          <a:spcPts val="500"/>
+          <a:spcPct val="20000"/>
         </a:spcBef>
-        <a:buFont typeface="Arial" panose="020B0604020202020204" pitchFamily="34" charset="0"/>
+        <a:buClr>
+          <a:schemeClr val="accent1"/>
+        </a:buClr>
+        <a:buFont typeface="Arial" pitchFamily="34" charset="0"/>
         <a:buChar char="•"/>
-        <a:defRPr sz="1800" kern="1200">
+        <a:defRPr sz="1300" kern="1200">
           <a:solidFill>
             <a:schemeClr val="tx1"/>
           </a:solidFill>
@@ -3192,16 +5018,16 @@
           <a:cs typeface="+mn-cs"/>
         </a:defRPr>
       </a:lvl7pPr>
-      <a:lvl8pPr marL="3429000" indent="-228600" algn="l" defTabSz="914400" rtl="0" eaLnBrk="1" latinLnBrk="0" hangingPunct="1">
-        <a:lnSpc>
-          <a:spcPct val="90000"/>
-        </a:lnSpc>
+      <a:lvl8pPr marL="1737360" indent="-182880" algn="l" defTabSz="914400" rtl="0" eaLnBrk="1" latinLnBrk="0" hangingPunct="1">
         <a:spcBef>
-          <a:spcPts val="500"/>
+          <a:spcPct val="20000"/>
         </a:spcBef>
-        <a:buFont typeface="Arial" panose="020B0604020202020204" pitchFamily="34" charset="0"/>
+        <a:buClr>
+          <a:schemeClr val="accent1"/>
+        </a:buClr>
+        <a:buFont typeface="Arial" pitchFamily="34" charset="0"/>
         <a:buChar char="•"/>
-        <a:defRPr sz="1800" kern="1200">
+        <a:defRPr sz="1300" kern="1200">
           <a:solidFill>
             <a:schemeClr val="tx1"/>
           </a:solidFill>
@@ -3210,16 +5036,16 @@
           <a:cs typeface="+mn-cs"/>
         </a:defRPr>
       </a:lvl8pPr>
-      <a:lvl9pPr marL="3886200" indent="-228600" algn="l" defTabSz="914400" rtl="0" eaLnBrk="1" latinLnBrk="0" hangingPunct="1">
-        <a:lnSpc>
-          <a:spcPct val="90000"/>
-        </a:lnSpc>
+      <a:lvl9pPr marL="1920240" indent="-182880" algn="l" defTabSz="914400" rtl="0" eaLnBrk="1" latinLnBrk="0" hangingPunct="1">
         <a:spcBef>
-          <a:spcPts val="500"/>
+          <a:spcPct val="20000"/>
         </a:spcBef>
-        <a:buFont typeface="Arial" panose="020B0604020202020204" pitchFamily="34" charset="0"/>
+        <a:buClr>
+          <a:schemeClr val="accent1"/>
+        </a:buClr>
+        <a:buFont typeface="Arial" pitchFamily="34" charset="0"/>
         <a:buChar char="•"/>
-        <a:defRPr sz="1800" kern="1200">
+        <a:defRPr sz="1300" kern="1200">
           <a:solidFill>
             <a:schemeClr val="tx1"/>
           </a:solidFill>
@@ -3333,7 +5159,7 @@
   <p:cSld>
     <p:spTree>
       <p:nvGrpSpPr>
-        <p:cNvPr id="1" name=""/>
+        <p:cNvPr id="1" name="Shape 83"/>
         <p:cNvGrpSpPr/>
         <p:nvPr/>
       </p:nvGrpSpPr>
@@ -3345,94 +5171,522 @@
           <a:chExt cx="0" cy="0"/>
         </a:xfrm>
       </p:grpSpPr>
-      <p:sp>
-        <p:nvSpPr>
-          <p:cNvPr id="2" name="Title 1">
+      <p:cxnSp>
+        <p:nvCxnSpPr>
+          <p:cNvPr id="86" name="Google Shape;86;p13"/>
+          <p:cNvCxnSpPr/>
+          <p:nvPr/>
+        </p:nvCxnSpPr>
+        <p:spPr>
+          <a:xfrm rot="10800000">
+            <a:off x="375613" y="-30032"/>
+            <a:ext cx="0" cy="6918064"/>
+          </a:xfrm>
+          <a:prstGeom prst="straightConnector1">
+            <a:avLst/>
+          </a:prstGeom>
+          <a:noFill/>
+          <a:ln w="19050" cap="flat" cmpd="sng">
+            <a:solidFill>
+              <a:srgbClr val="000000"/>
+            </a:solidFill>
+            <a:prstDash val="solid"/>
+            <a:round/>
+            <a:headEnd type="none" w="sm" len="sm"/>
+            <a:tailEnd type="none" w="sm" len="sm"/>
+          </a:ln>
+        </p:spPr>
+      </p:cxnSp>
+      <p:cxnSp>
+        <p:nvCxnSpPr>
+          <p:cNvPr id="87" name="Google Shape;87;p13"/>
+          <p:cNvCxnSpPr/>
+          <p:nvPr/>
+        </p:nvCxnSpPr>
+        <p:spPr>
+          <a:xfrm rot="10800000">
+            <a:off x="11816387" y="369264"/>
+            <a:ext cx="0" cy="6498481"/>
+          </a:xfrm>
+          <a:prstGeom prst="straightConnector1">
+            <a:avLst/>
+          </a:prstGeom>
+          <a:noFill/>
+          <a:ln w="19050" cap="flat" cmpd="sng">
+            <a:solidFill>
+              <a:srgbClr val="000000"/>
+            </a:solidFill>
+            <a:prstDash val="solid"/>
+            <a:round/>
+            <a:headEnd type="none" w="sm" len="sm"/>
+            <a:tailEnd type="none" w="sm" len="sm"/>
+          </a:ln>
+        </p:spPr>
+      </p:cxnSp>
+      <p:cxnSp>
+        <p:nvCxnSpPr>
+          <p:cNvPr id="88" name="Google Shape;88;p13"/>
+          <p:cNvCxnSpPr/>
+          <p:nvPr/>
+        </p:nvCxnSpPr>
+        <p:spPr>
+          <a:xfrm rot="10800000">
+            <a:off x="377794" y="375613"/>
+            <a:ext cx="11431574" cy="0"/>
+          </a:xfrm>
+          <a:prstGeom prst="straightConnector1">
+            <a:avLst/>
+          </a:prstGeom>
+          <a:noFill/>
+          <a:ln w="19050" cap="flat" cmpd="sng">
+            <a:solidFill>
+              <a:srgbClr val="000000"/>
+            </a:solidFill>
+            <a:prstDash val="solid"/>
+            <a:round/>
+            <a:headEnd type="none" w="sm" len="sm"/>
+            <a:tailEnd type="none" w="sm" len="sm"/>
+          </a:ln>
+        </p:spPr>
+      </p:cxnSp>
+      <p:grpSp>
+        <p:nvGrpSpPr>
+          <p:cNvPr id="89" name="Google Shape;89;p13"/>
+          <p:cNvGrpSpPr/>
+          <p:nvPr/>
+        </p:nvGrpSpPr>
+        <p:grpSpPr>
+          <a:xfrm>
+            <a:off x="865353" y="5986222"/>
+            <a:ext cx="6009219" cy="2177948"/>
+            <a:chOff x="0" y="-47625"/>
+            <a:chExt cx="2374012" cy="860425"/>
+          </a:xfrm>
+        </p:grpSpPr>
+        <p:sp>
+          <p:nvSpPr>
+            <p:cNvPr id="90" name="Google Shape;90;p13"/>
+            <p:cNvSpPr/>
+            <p:nvPr/>
+          </p:nvSpPr>
+          <p:spPr>
+            <a:xfrm>
+              <a:off x="0" y="0"/>
+              <a:ext cx="2374012" cy="145882"/>
+            </a:xfrm>
+            <a:custGeom>
+              <a:avLst/>
+              <a:gdLst/>
+              <a:ahLst/>
+              <a:cxnLst/>
+              <a:rect l="l" t="t" r="r" b="b"/>
+              <a:pathLst>
+                <a:path w="2374012" h="145882" extrusionOk="0">
+                  <a:moveTo>
+                    <a:pt x="0" y="0"/>
+                  </a:moveTo>
+                  <a:lnTo>
+                    <a:pt x="2374012" y="0"/>
+                  </a:lnTo>
+                  <a:lnTo>
+                    <a:pt x="2374012" y="145882"/>
+                  </a:lnTo>
+                  <a:lnTo>
+                    <a:pt x="0" y="145882"/>
+                  </a:lnTo>
+                  <a:close/>
+                </a:path>
+              </a:pathLst>
+            </a:custGeom>
+            <a:solidFill>
+              <a:srgbClr val="000000">
+                <a:alpha val="0"/>
+              </a:srgbClr>
+            </a:solidFill>
+            <a:ln w="19050" cap="flat" cmpd="sng">
+              <a:solidFill>
+                <a:srgbClr val="000000"/>
+              </a:solidFill>
+              <a:prstDash val="solid"/>
+              <a:round/>
+              <a:headEnd type="none" w="sm" len="sm"/>
+              <a:tailEnd type="none" w="sm" len="sm"/>
+            </a:ln>
+          </p:spPr>
+          <p:txBody>
+            <a:bodyPr/>
+            <a:lstStyle/>
+            <a:p>
+              <a:endParaRPr lang="en-CA" sz="1200"/>
+            </a:p>
+          </p:txBody>
+        </p:sp>
+        <p:sp>
+          <p:nvSpPr>
+            <p:cNvPr id="91" name="Google Shape;91;p13"/>
+            <p:cNvSpPr txBox="1"/>
+            <p:nvPr/>
+          </p:nvSpPr>
+          <p:spPr>
+            <a:xfrm>
+              <a:off x="0" y="-47625"/>
+              <a:ext cx="812800" cy="860425"/>
+            </a:xfrm>
+            <a:prstGeom prst="rect">
+              <a:avLst/>
+            </a:prstGeom>
+            <a:noFill/>
+            <a:ln>
+              <a:noFill/>
+            </a:ln>
+          </p:spPr>
+          <p:txBody>
+            <a:bodyPr spcFirstLastPara="1" wrap="square" lIns="33867" tIns="33867" rIns="33867" bIns="33867" anchor="ctr" anchorCtr="0">
+              <a:noAutofit/>
+            </a:bodyPr>
+            <a:lstStyle/>
+            <a:p>
+              <a:pPr algn="ctr">
+                <a:lnSpc>
+                  <a:spcPct val="186611"/>
+                </a:lnSpc>
+              </a:pPr>
+              <a:endParaRPr sz="1200">
+                <a:solidFill>
+                  <a:schemeClr val="dk1"/>
+                </a:solidFill>
+                <a:latin typeface="Calibri"/>
+                <a:ea typeface="Calibri"/>
+                <a:cs typeface="Calibri"/>
+                <a:sym typeface="Calibri"/>
+              </a:endParaRPr>
+            </a:p>
+          </p:txBody>
+        </p:sp>
+      </p:grpSp>
+      <p:cxnSp>
+        <p:nvCxnSpPr>
+          <p:cNvPr id="92" name="Google Shape;92;p13"/>
+          <p:cNvCxnSpPr/>
+          <p:nvPr/>
+        </p:nvCxnSpPr>
+        <p:spPr>
+          <a:xfrm rot="10800000">
+            <a:off x="7351611" y="-72764"/>
+            <a:ext cx="0" cy="6918064"/>
+          </a:xfrm>
+          <a:prstGeom prst="straightConnector1">
+            <a:avLst/>
+          </a:prstGeom>
+          <a:noFill/>
+          <a:ln w="19050" cap="flat" cmpd="sng">
+            <a:solidFill>
+              <a:srgbClr val="000000"/>
+            </a:solidFill>
+            <a:prstDash val="solid"/>
+            <a:round/>
+            <a:headEnd type="none" w="sm" len="sm"/>
+            <a:tailEnd type="none" w="sm" len="sm"/>
+          </a:ln>
+        </p:spPr>
+      </p:cxnSp>
+      <p:cxnSp>
+        <p:nvCxnSpPr>
+          <p:cNvPr id="93" name="Google Shape;93;p13"/>
+          <p:cNvCxnSpPr/>
+          <p:nvPr/>
+        </p:nvCxnSpPr>
+        <p:spPr>
+          <a:xfrm rot="10800000">
+            <a:off x="2694577" y="-56021"/>
+            <a:ext cx="0" cy="437985"/>
+          </a:xfrm>
+          <a:prstGeom prst="straightConnector1">
+            <a:avLst/>
+          </a:prstGeom>
+          <a:noFill/>
+          <a:ln w="19050" cap="flat" cmpd="sng">
+            <a:solidFill>
+              <a:srgbClr val="000000"/>
+            </a:solidFill>
+            <a:prstDash val="solid"/>
+            <a:round/>
+            <a:headEnd type="none" w="sm" len="sm"/>
+            <a:tailEnd type="none" w="sm" len="sm"/>
+          </a:ln>
+        </p:spPr>
+      </p:cxnSp>
+      <p:cxnSp>
+        <p:nvCxnSpPr>
+          <p:cNvPr id="94" name="Google Shape;94;p13"/>
+          <p:cNvCxnSpPr/>
+          <p:nvPr/>
+        </p:nvCxnSpPr>
+        <p:spPr>
+          <a:xfrm rot="10800000">
+            <a:off x="5019947" y="-56021"/>
+            <a:ext cx="0" cy="437985"/>
+          </a:xfrm>
+          <a:prstGeom prst="straightConnector1">
+            <a:avLst/>
+          </a:prstGeom>
+          <a:noFill/>
+          <a:ln w="19050" cap="flat" cmpd="sng">
+            <a:solidFill>
+              <a:srgbClr val="000000"/>
+            </a:solidFill>
+            <a:prstDash val="solid"/>
+            <a:round/>
+            <a:headEnd type="none" w="sm" len="sm"/>
+            <a:tailEnd type="none" w="sm" len="sm"/>
+          </a:ln>
+        </p:spPr>
+      </p:cxnSp>
+      <p:grpSp>
+        <p:nvGrpSpPr>
+          <p:cNvPr id="95" name="Google Shape;95;p13"/>
+          <p:cNvGrpSpPr/>
+          <p:nvPr/>
+        </p:nvGrpSpPr>
+        <p:grpSpPr>
+          <a:xfrm>
+            <a:off x="1304235" y="925994"/>
+            <a:ext cx="5226363" cy="4874910"/>
+            <a:chOff x="-457224" y="-6320771"/>
+            <a:chExt cx="10452727" cy="9749820"/>
+          </a:xfrm>
+        </p:grpSpPr>
+        <p:sp>
+          <p:nvSpPr>
+            <p:cNvPr id="96" name="Google Shape;96;p13"/>
+            <p:cNvSpPr txBox="1"/>
+            <p:nvPr/>
+          </p:nvSpPr>
+          <p:spPr>
+            <a:xfrm>
+              <a:off x="-457224" y="-6320771"/>
+              <a:ext cx="10452727" cy="5983176"/>
+            </a:xfrm>
+            <a:prstGeom prst="rect">
+              <a:avLst/>
+            </a:prstGeom>
+            <a:noFill/>
+            <a:ln>
+              <a:noFill/>
+            </a:ln>
+          </p:spPr>
+          <p:txBody>
+            <a:bodyPr spcFirstLastPara="1" wrap="square" lIns="0" tIns="0" rIns="0" bIns="0" anchor="t" anchorCtr="0">
+              <a:spAutoFit/>
+            </a:bodyPr>
+            <a:lstStyle/>
+            <a:p>
+              <a:pPr algn="ctr">
+                <a:lnSpc>
+                  <a:spcPct val="81000"/>
+                </a:lnSpc>
+              </a:pPr>
+              <a:r>
+                <a:rPr lang="en-US" sz="8000" b="1" dirty="0">
+                  <a:solidFill>
+                    <a:srgbClr val="000000"/>
+                  </a:solidFill>
+                  <a:latin typeface="DM Sans"/>
+                  <a:ea typeface="DM Sans"/>
+                  <a:cs typeface="DM Sans"/>
+                  <a:sym typeface="DM Sans"/>
+                </a:rPr>
+                <a:t>STROKE FACTOR</a:t>
+              </a:r>
+            </a:p>
+            <a:p>
+              <a:pPr algn="ctr">
+                <a:lnSpc>
+                  <a:spcPct val="81000"/>
+                </a:lnSpc>
+              </a:pPr>
+              <a:r>
+                <a:rPr lang="en-US" sz="8000" b="1" dirty="0">
+                  <a:solidFill>
+                    <a:srgbClr val="000000"/>
+                  </a:solidFill>
+                  <a:latin typeface="DM Sans"/>
+                  <a:sym typeface="DM Sans"/>
+                </a:rPr>
+                <a:t>ANALYSIS</a:t>
+              </a:r>
+              <a:endParaRPr sz="1200" dirty="0"/>
+            </a:p>
+          </p:txBody>
+        </p:sp>
+        <p:sp>
+          <p:nvSpPr>
+            <p:cNvPr id="97" name="Google Shape;97;p13"/>
+            <p:cNvSpPr txBox="1"/>
+            <p:nvPr/>
+          </p:nvSpPr>
+          <p:spPr>
+            <a:xfrm>
+              <a:off x="189816" y="-559735"/>
+              <a:ext cx="9158643" cy="3988784"/>
+            </a:xfrm>
+            <a:prstGeom prst="rect">
+              <a:avLst/>
+            </a:prstGeom>
+            <a:noFill/>
+            <a:ln>
+              <a:noFill/>
+            </a:ln>
+          </p:spPr>
+          <p:txBody>
+            <a:bodyPr spcFirstLastPara="1" wrap="square" lIns="0" tIns="0" rIns="0" bIns="0" anchor="t" anchorCtr="0">
+              <a:spAutoFit/>
+            </a:bodyPr>
+            <a:lstStyle/>
+            <a:p>
+              <a:pPr algn="ctr">
+                <a:lnSpc>
+                  <a:spcPct val="81000"/>
+                </a:lnSpc>
+              </a:pPr>
+              <a:r>
+                <a:rPr lang="en-US" sz="4000" b="1" dirty="0">
+                  <a:solidFill>
+                    <a:srgbClr val="000000"/>
+                  </a:solidFill>
+                  <a:latin typeface="DM Sans"/>
+                  <a:sym typeface="DM Sans"/>
+                </a:rPr>
+                <a:t>How to address the long-term prevention of stroke risk factors</a:t>
+              </a:r>
+              <a:endParaRPr sz="4000" dirty="0"/>
+            </a:p>
+          </p:txBody>
+        </p:sp>
+      </p:grpSp>
+      <p:sp>
+        <p:nvSpPr>
+          <p:cNvPr id="98" name="Google Shape;98;p13"/>
+          <p:cNvSpPr txBox="1"/>
+          <p:nvPr/>
+        </p:nvSpPr>
+        <p:spPr>
+          <a:xfrm>
+            <a:off x="999302" y="6153610"/>
+            <a:ext cx="2870660" cy="301621"/>
+          </a:xfrm>
+          <a:prstGeom prst="rect">
+            <a:avLst/>
+          </a:prstGeom>
+          <a:noFill/>
+          <a:ln>
+            <a:noFill/>
+          </a:ln>
+        </p:spPr>
+        <p:txBody>
+          <a:bodyPr spcFirstLastPara="1" wrap="square" lIns="0" tIns="0" rIns="0" bIns="0" anchor="t" anchorCtr="0">
+            <a:spAutoFit/>
+          </a:bodyPr>
+          <a:lstStyle/>
+          <a:p>
+            <a:pPr>
+              <a:lnSpc>
+                <a:spcPct val="140000"/>
+              </a:lnSpc>
+            </a:pPr>
+            <a:r>
+              <a:rPr lang="en-US" sz="1400" dirty="0">
+                <a:solidFill>
+                  <a:srgbClr val="000000"/>
+                </a:solidFill>
+                <a:latin typeface="DM Sans"/>
+                <a:ea typeface="DM Sans"/>
+                <a:cs typeface="DM Sans"/>
+                <a:sym typeface="DM Sans"/>
+              </a:rPr>
+              <a:t>Cohort 8 – DS3</a:t>
+            </a:r>
+            <a:endParaRPr sz="1200" dirty="0"/>
+          </a:p>
+        </p:txBody>
+      </p:sp>
+      <p:sp>
+        <p:nvSpPr>
+          <p:cNvPr id="99" name="Google Shape;99;p13"/>
+          <p:cNvSpPr txBox="1"/>
+          <p:nvPr/>
+        </p:nvSpPr>
+        <p:spPr>
+          <a:xfrm>
+            <a:off x="3869963" y="6153610"/>
+            <a:ext cx="2870660" cy="301621"/>
+          </a:xfrm>
+          <a:prstGeom prst="rect">
+            <a:avLst/>
+          </a:prstGeom>
+          <a:noFill/>
+          <a:ln>
+            <a:noFill/>
+          </a:ln>
+        </p:spPr>
+        <p:txBody>
+          <a:bodyPr spcFirstLastPara="1" wrap="square" lIns="0" tIns="0" rIns="0" bIns="0" anchor="t" anchorCtr="0">
+            <a:spAutoFit/>
+          </a:bodyPr>
+          <a:lstStyle/>
+          <a:p>
+            <a:pPr algn="r">
+              <a:lnSpc>
+                <a:spcPct val="140000"/>
+              </a:lnSpc>
+            </a:pPr>
+            <a:r>
+              <a:rPr lang="en-US" sz="1400">
+                <a:solidFill>
+                  <a:srgbClr val="000000"/>
+                </a:solidFill>
+                <a:latin typeface="DM Sans"/>
+                <a:ea typeface="DM Sans"/>
+                <a:cs typeface="DM Sans"/>
+                <a:sym typeface="DM Sans"/>
+              </a:rPr>
+              <a:t>03/07/2026</a:t>
+            </a:r>
+            <a:endParaRPr sz="1200" dirty="0"/>
+          </a:p>
+        </p:txBody>
+      </p:sp>
+      <p:pic>
+        <p:nvPicPr>
+          <p:cNvPr id="2" name="Picture 1"/>
+          <p:cNvPicPr>
+            <a:picLocks noChangeAspect="1"/>
+          </p:cNvPicPr>
+          <p:nvPr/>
+        </p:nvPicPr>
+        <p:blipFill>
+          <a:blip r:embed="rId3" cstate="print">
             <a:extLst>
-              <a:ext uri="{FF2B5EF4-FFF2-40B4-BE49-F238E27FC236}">
-                <a16:creationId xmlns:a16="http://schemas.microsoft.com/office/drawing/2014/main" id="{FC18549F-5209-B5B1-1B40-275AB9E15391}"/>
+              <a:ext uri="{28A0092B-C50C-407E-A947-70E740481C1C}">
+                <a14:useLocalDpi xmlns:a14="http://schemas.microsoft.com/office/drawing/2010/main" val="0"/>
               </a:ext>
             </a:extLst>
-          </p:cNvPr>
-          <p:cNvSpPr>
-            <a:spLocks noGrp="1"/>
-          </p:cNvSpPr>
-          <p:nvPr>
-            <p:ph type="title"/>
-          </p:nvPr>
-        </p:nvSpPr>
-        <p:spPr/>
-        <p:txBody>
-          <a:bodyPr/>
-          <a:lstStyle/>
-          <a:p>
-            <a:r>
-              <a:rPr lang="en-US" dirty="0"/>
-              <a:t>Cohort 8 – DS3</a:t>
-            </a:r>
-          </a:p>
-        </p:txBody>
-      </p:sp>
-      <p:sp>
-        <p:nvSpPr>
-          <p:cNvPr id="3" name="Title 1">
-            <a:extLst>
-              <a:ext uri="{FF2B5EF4-FFF2-40B4-BE49-F238E27FC236}">
-                <a16:creationId xmlns:a16="http://schemas.microsoft.com/office/drawing/2014/main" id="{69D4BBEE-D718-A844-DA71-F5642F915D3E}"/>
-              </a:ext>
-            </a:extLst>
-          </p:cNvPr>
-          <p:cNvSpPr txBox="1">
-            <a:spLocks/>
-          </p:cNvSpPr>
-          <p:nvPr/>
-        </p:nvSpPr>
-        <p:spPr>
-          <a:xfrm>
-            <a:off x="731874" y="2427841"/>
-            <a:ext cx="10515600" cy="1325563"/>
+          </a:blip>
+          <a:stretch>
+            <a:fillRect/>
+          </a:stretch>
+        </p:blipFill>
+        <p:spPr>
+          <a:xfrm>
+            <a:off x="7351610" y="1500979"/>
+            <a:ext cx="4457758" cy="3396480"/>
           </a:xfrm>
           <a:prstGeom prst="rect">
             <a:avLst/>
           </a:prstGeom>
         </p:spPr>
-        <p:txBody>
-          <a:bodyPr vert="horz" lIns="91440" tIns="45720" rIns="91440" bIns="45720" rtlCol="0" anchor="ctr">
-            <a:normAutofit/>
-          </a:bodyPr>
-          <a:lstStyle>
-            <a:lvl1pPr algn="l" defTabSz="914400" rtl="0" eaLnBrk="1" latinLnBrk="0" hangingPunct="1">
-              <a:lnSpc>
-                <a:spcPct val="90000"/>
-              </a:lnSpc>
-              <a:spcBef>
-                <a:spcPct val="0"/>
-              </a:spcBef>
-              <a:buNone/>
-              <a:defRPr sz="4400" kern="1200">
-                <a:solidFill>
-                  <a:schemeClr val="tx1"/>
-                </a:solidFill>
-                <a:latin typeface="+mj-lt"/>
-                <a:ea typeface="+mj-ea"/>
-                <a:cs typeface="+mj-cs"/>
-              </a:defRPr>
-            </a:lvl1pPr>
-          </a:lstStyle>
-          <a:p>
-            <a:r>
-              <a:rPr lang="en-US" dirty="0"/>
-              <a:t>Stroke Factors Analysis</a:t>
-            </a:r>
-          </a:p>
-        </p:txBody>
-      </p:sp>
+      </p:pic>
     </p:spTree>
-    <p:extLst>
-      <p:ext uri="{BB962C8B-B14F-4D97-AF65-F5344CB8AC3E}">
-        <p14:creationId xmlns:p14="http://schemas.microsoft.com/office/powerpoint/2010/main" val="2047952146"/>
-      </p:ext>
-    </p:extLst>
   </p:cSld>
   <p:clrMapOvr>
     <a:masterClrMapping/>
@@ -3441,187 +5695,6 @@
 </file>
 
 <file path=ppt/slides/slide10.xml><?xml version="1.0" encoding="utf-8"?>
-<p:sld xmlns:a="http://schemas.openxmlformats.org/drawingml/2006/main" xmlns:r="http://schemas.openxmlformats.org/officeDocument/2006/relationships" xmlns:p="http://schemas.openxmlformats.org/presentationml/2006/main">
-  <p:cSld>
-    <p:spTree>
-      <p:nvGrpSpPr>
-        <p:cNvPr id="1" name="">
-          <a:extLst>
-            <a:ext uri="{FF2B5EF4-FFF2-40B4-BE49-F238E27FC236}">
-              <a16:creationId xmlns:a16="http://schemas.microsoft.com/office/drawing/2014/main" id="{353FC363-1A5C-3D83-2FC1-8E685CED44C7}"/>
-            </a:ext>
-          </a:extLst>
-        </p:cNvPr>
-        <p:cNvGrpSpPr/>
-        <p:nvPr/>
-      </p:nvGrpSpPr>
-      <p:grpSpPr>
-        <a:xfrm>
-          <a:off x="0" y="0"/>
-          <a:ext cx="0" cy="0"/>
-          <a:chOff x="0" y="0"/>
-          <a:chExt cx="0" cy="0"/>
-        </a:xfrm>
-      </p:grpSpPr>
-      <p:sp>
-        <p:nvSpPr>
-          <p:cNvPr id="2" name="Title 1">
-            <a:extLst>
-              <a:ext uri="{FF2B5EF4-FFF2-40B4-BE49-F238E27FC236}">
-                <a16:creationId xmlns:a16="http://schemas.microsoft.com/office/drawing/2014/main" id="{5B278819-1EC0-167A-15D1-1F2F71952CE5}"/>
-              </a:ext>
-            </a:extLst>
-          </p:cNvPr>
-          <p:cNvSpPr>
-            <a:spLocks noGrp="1"/>
-          </p:cNvSpPr>
-          <p:nvPr>
-            <p:ph type="title"/>
-          </p:nvPr>
-        </p:nvSpPr>
-        <p:spPr/>
-        <p:txBody>
-          <a:bodyPr/>
-          <a:lstStyle/>
-          <a:p>
-            <a:r>
-              <a:rPr lang="en-US" dirty="0"/>
-              <a:t>Classification Modeling</a:t>
-            </a:r>
-          </a:p>
-        </p:txBody>
-      </p:sp>
-      <p:sp>
-        <p:nvSpPr>
-          <p:cNvPr id="3" name="Title 1">
-            <a:extLst>
-              <a:ext uri="{FF2B5EF4-FFF2-40B4-BE49-F238E27FC236}">
-                <a16:creationId xmlns:a16="http://schemas.microsoft.com/office/drawing/2014/main" id="{22C56F1C-6A54-CD7E-1C18-A142EDF340DE}"/>
-              </a:ext>
-            </a:extLst>
-          </p:cNvPr>
-          <p:cNvSpPr txBox="1">
-            <a:spLocks/>
-          </p:cNvSpPr>
-          <p:nvPr/>
-        </p:nvSpPr>
-        <p:spPr>
-          <a:xfrm>
-            <a:off x="908538" y="1690689"/>
-            <a:ext cx="10515600" cy="4267660"/>
-          </a:xfrm>
-          <a:prstGeom prst="rect">
-            <a:avLst/>
-          </a:prstGeom>
-        </p:spPr>
-        <p:txBody>
-          <a:bodyPr vert="horz" lIns="91440" tIns="45720" rIns="91440" bIns="45720" rtlCol="0" anchor="ctr">
-            <a:normAutofit fontScale="77500" lnSpcReduction="20000"/>
-          </a:bodyPr>
-          <a:lstStyle>
-            <a:lvl1pPr algn="l" defTabSz="914400" rtl="0" eaLnBrk="1" latinLnBrk="0" hangingPunct="1">
-              <a:lnSpc>
-                <a:spcPct val="90000"/>
-              </a:lnSpc>
-              <a:spcBef>
-                <a:spcPct val="0"/>
-              </a:spcBef>
-              <a:buNone/>
-              <a:defRPr sz="4400" kern="1200">
-                <a:solidFill>
-                  <a:schemeClr val="tx1"/>
-                </a:solidFill>
-                <a:latin typeface="+mj-lt"/>
-                <a:ea typeface="+mj-ea"/>
-                <a:cs typeface="+mj-cs"/>
-              </a:defRPr>
-            </a:lvl1pPr>
-          </a:lstStyle>
-          <a:p>
-            <a:pPr marL="571500" indent="-571500">
-              <a:buFont typeface="Arial" panose="020B0604020202020204" pitchFamily="34" charset="0"/>
-              <a:buChar char="•"/>
-            </a:pPr>
-            <a:r>
-              <a:rPr lang="en-US" dirty="0"/>
-              <a:t>The dataset is highly imbalanced (5% positive class)</a:t>
-            </a:r>
-          </a:p>
-          <a:p>
-            <a:pPr marL="571500" indent="-571500">
-              <a:buFont typeface="Arial" panose="020B0604020202020204" pitchFamily="34" charset="0"/>
-              <a:buChar char="•"/>
-            </a:pPr>
-            <a:endParaRPr lang="en-US" dirty="0"/>
-          </a:p>
-          <a:p>
-            <a:pPr marL="571500" indent="-571500">
-              <a:buFont typeface="Arial" panose="020B0604020202020204" pitchFamily="34" charset="0"/>
-              <a:buChar char="•"/>
-            </a:pPr>
-            <a:r>
-              <a:rPr lang="en-US" dirty="0"/>
-              <a:t>Tree-based models best for imbalanced data. </a:t>
-            </a:r>
-          </a:p>
-          <a:p>
-            <a:pPr marL="571500" indent="-571500">
-              <a:buFont typeface="Arial" panose="020B0604020202020204" pitchFamily="34" charset="0"/>
-              <a:buChar char="•"/>
-            </a:pPr>
-            <a:endParaRPr lang="en-US" dirty="0"/>
-          </a:p>
-          <a:p>
-            <a:pPr marL="571500" indent="-571500">
-              <a:buFont typeface="Arial" panose="020B0604020202020204" pitchFamily="34" charset="0"/>
-              <a:buChar char="•"/>
-            </a:pPr>
-            <a:r>
-              <a:rPr lang="en-US" dirty="0"/>
-              <a:t>Logistic Regression performed well when using balanced class weights. </a:t>
-            </a:r>
-          </a:p>
-          <a:p>
-            <a:pPr marL="571500" indent="-571500">
-              <a:buFont typeface="Arial" panose="020B0604020202020204" pitchFamily="34" charset="0"/>
-              <a:buChar char="•"/>
-            </a:pPr>
-            <a:endParaRPr lang="en-US" dirty="0"/>
-          </a:p>
-          <a:p>
-            <a:pPr marL="571500" indent="-571500">
-              <a:buFont typeface="Arial" panose="020B0604020202020204" pitchFamily="34" charset="0"/>
-              <a:buChar char="•"/>
-            </a:pPr>
-            <a:r>
-              <a:rPr lang="en-US" dirty="0"/>
-              <a:t>Therefore, three models were selected for the analysis: </a:t>
-            </a:r>
-            <a:r>
-              <a:rPr lang="en-US" dirty="0" err="1"/>
-              <a:t>XGBoost</a:t>
-            </a:r>
-            <a:r>
-              <a:rPr lang="en-US" dirty="0"/>
-              <a:t>, Random Forest, and Logistic Regression.</a:t>
-            </a:r>
-          </a:p>
-        </p:txBody>
-      </p:sp>
-    </p:spTree>
-    <p:extLst>
-      <p:ext uri="{BB962C8B-B14F-4D97-AF65-F5344CB8AC3E}">
-        <p14:creationId xmlns:p14="http://schemas.microsoft.com/office/powerpoint/2010/main" val="3100244814"/>
-      </p:ext>
-    </p:extLst>
-  </p:cSld>
-  <p:clrMapOvr>
-    <a:masterClrMapping/>
-  </p:clrMapOvr>
-</p:sld>
-</file>
-
-<file path=ppt/slides/slide11.xml><?xml version="1.0" encoding="utf-8"?>
 <p:sld xmlns:a="http://schemas.openxmlformats.org/drawingml/2006/main" xmlns:r="http://schemas.openxmlformats.org/officeDocument/2006/relationships" xmlns:p="http://schemas.openxmlformats.org/presentationml/2006/main">
   <p:cSld>
     <p:spTree>
@@ -3656,11 +5729,21 @@
         </p:nvSpPr>
         <p:spPr/>
         <p:txBody>
-          <a:bodyPr/>
+          <a:bodyPr>
+            <a:normAutofit/>
+          </a:bodyPr>
           <a:lstStyle/>
           <a:p>
-            <a:r>
-              <a:rPr lang="en-US" dirty="0"/>
+            <a:pPr algn="ctr"/>
+            <a:r>
+              <a:rPr lang="en-US" sz="4800" b="1" dirty="0">
+                <a:solidFill>
+                  <a:srgbClr val="000000"/>
+                </a:solidFill>
+                <a:latin typeface="DM Sans"/>
+                <a:ea typeface="+mn-ea"/>
+                <a:cs typeface="+mn-cs"/>
+              </a:rPr>
               <a:t>Classification Threshold- Recall</a:t>
             </a:r>
           </a:p>
@@ -3801,7 +5884,7 @@
 </p:sld>
 </file>
 
-<file path=ppt/slides/slide12.xml><?xml version="1.0" encoding="utf-8"?>
+<file path=ppt/slides/slide11.xml><?xml version="1.0" encoding="utf-8"?>
 <p:sld xmlns:a="http://schemas.openxmlformats.org/drawingml/2006/main" xmlns:r="http://schemas.openxmlformats.org/officeDocument/2006/relationships" xmlns:p="http://schemas.openxmlformats.org/presentationml/2006/main">
   <p:cSld>
     <p:spTree>
@@ -3836,11 +5919,21 @@
         </p:nvSpPr>
         <p:spPr/>
         <p:txBody>
-          <a:bodyPr/>
+          <a:bodyPr>
+            <a:normAutofit/>
+          </a:bodyPr>
           <a:lstStyle/>
           <a:p>
-            <a:r>
-              <a:rPr lang="en-US" dirty="0"/>
+            <a:pPr algn="ctr"/>
+            <a:r>
+              <a:rPr lang="en-US" sz="4800" b="1" dirty="0">
+                <a:solidFill>
+                  <a:srgbClr val="000000"/>
+                </a:solidFill>
+                <a:latin typeface="DM Sans"/>
+                <a:ea typeface="+mn-ea"/>
+                <a:cs typeface="+mn-cs"/>
+              </a:rPr>
               <a:t>Confusion Matrix</a:t>
             </a:r>
           </a:p>
@@ -3931,7 +6024,7 @@
 </p:sld>
 </file>
 
-<file path=ppt/slides/slide13.xml><?xml version="1.0" encoding="utf-8"?>
+<file path=ppt/slides/slide12.xml><?xml version="1.0" encoding="utf-8"?>
 <p:sld xmlns:a="http://schemas.openxmlformats.org/drawingml/2006/main" xmlns:r="http://schemas.openxmlformats.org/officeDocument/2006/relationships" xmlns:p="http://schemas.openxmlformats.org/presentationml/2006/main">
   <p:cSld>
     <p:spTree>
@@ -3966,11 +6059,21 @@
         </p:nvSpPr>
         <p:spPr/>
         <p:txBody>
-          <a:bodyPr/>
+          <a:bodyPr>
+            <a:noAutofit/>
+          </a:bodyPr>
           <a:lstStyle/>
           <a:p>
-            <a:r>
-              <a:rPr lang="en-US" dirty="0"/>
+            <a:pPr algn="ctr"/>
+            <a:r>
+              <a:rPr lang="en-US" sz="4800" b="1" dirty="0">
+                <a:solidFill>
+                  <a:srgbClr val="000000"/>
+                </a:solidFill>
+                <a:latin typeface="DM Sans"/>
+                <a:ea typeface="+mn-ea"/>
+                <a:cs typeface="+mn-cs"/>
+              </a:rPr>
               <a:t>Precision Recall-Area Under Curve</a:t>
             </a:r>
           </a:p>
@@ -4061,6 +6164,257 @@
 </p:sld>
 </file>
 
+<file path=ppt/slides/slide13.xml><?xml version="1.0" encoding="utf-8"?>
+<p:sld xmlns:a="http://schemas.openxmlformats.org/drawingml/2006/main" xmlns:r="http://schemas.openxmlformats.org/officeDocument/2006/relationships" xmlns:p="http://schemas.openxmlformats.org/presentationml/2006/main">
+  <p:cSld>
+    <p:spTree>
+      <p:nvGrpSpPr>
+        <p:cNvPr id="1" name="Shape 274">
+          <a:extLst>
+            <a:ext uri="{FF2B5EF4-FFF2-40B4-BE49-F238E27FC236}">
+              <a16:creationId xmlns:a16="http://schemas.microsoft.com/office/drawing/2014/main" id="{1C30281B-3760-2161-5794-B3B88C1381EC}"/>
+            </a:ext>
+          </a:extLst>
+        </p:cNvPr>
+        <p:cNvGrpSpPr/>
+        <p:nvPr/>
+      </p:nvGrpSpPr>
+      <p:grpSpPr>
+        <a:xfrm>
+          <a:off x="0" y="0"/>
+          <a:ext cx="0" cy="0"/>
+          <a:chOff x="0" y="0"/>
+          <a:chExt cx="0" cy="0"/>
+        </a:xfrm>
+      </p:grpSpPr>
+      <p:cxnSp>
+        <p:nvCxnSpPr>
+          <p:cNvPr id="277" name="Google Shape;277;p23">
+            <a:extLst>
+              <a:ext uri="{FF2B5EF4-FFF2-40B4-BE49-F238E27FC236}">
+                <a16:creationId xmlns:a16="http://schemas.microsoft.com/office/drawing/2014/main" id="{AB0BA0EA-3DF6-19F9-C9DA-6139AA37C04B}"/>
+              </a:ext>
+            </a:extLst>
+          </p:cNvPr>
+          <p:cNvCxnSpPr/>
+          <p:nvPr/>
+        </p:nvCxnSpPr>
+        <p:spPr>
+          <a:xfrm rot="10800000">
+            <a:off x="6096000" y="0"/>
+            <a:ext cx="12700" cy="6859420"/>
+          </a:xfrm>
+          <a:prstGeom prst="straightConnector1">
+            <a:avLst/>
+          </a:prstGeom>
+          <a:noFill/>
+          <a:ln w="19050" cap="flat" cmpd="sng">
+            <a:solidFill>
+              <a:srgbClr val="000000"/>
+            </a:solidFill>
+            <a:prstDash val="solid"/>
+            <a:round/>
+            <a:headEnd type="none" w="sm" len="sm"/>
+            <a:tailEnd type="none" w="sm" len="sm"/>
+          </a:ln>
+        </p:spPr>
+      </p:cxnSp>
+      <p:sp>
+        <p:nvSpPr>
+          <p:cNvPr id="278" name="Google Shape;278;p23">
+            <a:extLst>
+              <a:ext uri="{FF2B5EF4-FFF2-40B4-BE49-F238E27FC236}">
+                <a16:creationId xmlns:a16="http://schemas.microsoft.com/office/drawing/2014/main" id="{BDC5E0E6-5A49-9DBF-73D2-BF8F66CA890E}"/>
+              </a:ext>
+            </a:extLst>
+          </p:cNvPr>
+          <p:cNvSpPr txBox="1"/>
+          <p:nvPr/>
+        </p:nvSpPr>
+        <p:spPr>
+          <a:xfrm>
+            <a:off x="240527" y="1459230"/>
+            <a:ext cx="5627646" cy="2462213"/>
+          </a:xfrm>
+          <a:prstGeom prst="rect">
+            <a:avLst/>
+          </a:prstGeom>
+          <a:noFill/>
+          <a:ln>
+            <a:noFill/>
+          </a:ln>
+        </p:spPr>
+        <p:txBody>
+          <a:bodyPr spcFirstLastPara="1" wrap="square" lIns="0" tIns="0" rIns="0" bIns="0" anchor="t" anchorCtr="0">
+            <a:spAutoFit/>
+          </a:bodyPr>
+          <a:lstStyle/>
+          <a:p>
+            <a:pPr algn="ctr">
+              <a:spcBef>
+                <a:spcPct val="0"/>
+              </a:spcBef>
+            </a:pPr>
+            <a:r>
+              <a:rPr lang="en-US" sz="4800" b="1" spc="-100" dirty="0">
+                <a:solidFill>
+                  <a:srgbClr val="000000"/>
+                </a:solidFill>
+                <a:latin typeface="DM Sans"/>
+                <a:sym typeface="DM Sans"/>
+              </a:rPr>
+              <a:t>Key Data</a:t>
+            </a:r>
+          </a:p>
+          <a:p>
+            <a:pPr algn="ctr"/>
+            <a:r>
+              <a:rPr lang="en-US" sz="4800" b="1" spc="-100" dirty="0">
+                <a:solidFill>
+                  <a:srgbClr val="000000"/>
+                </a:solidFill>
+                <a:latin typeface="DM Sans"/>
+                <a:sym typeface="DM Sans"/>
+              </a:rPr>
+              <a:t>Findings</a:t>
+            </a:r>
+          </a:p>
+          <a:p>
+            <a:pPr algn="ctr"/>
+            <a:r>
+              <a:rPr lang="en-US" sz="4800" b="1" spc="-100" dirty="0">
+                <a:solidFill>
+                  <a:srgbClr val="000000"/>
+                </a:solidFill>
+                <a:latin typeface="DM Sans"/>
+                <a:sym typeface="DM Sans"/>
+              </a:rPr>
+              <a:t>For</a:t>
+            </a:r>
+            <a:r>
+              <a:rPr lang="en-US" sz="6400" b="1" dirty="0">
+                <a:solidFill>
+                  <a:srgbClr val="000000"/>
+                </a:solidFill>
+                <a:latin typeface="DM Sans"/>
+                <a:sym typeface="DM Sans"/>
+              </a:rPr>
+              <a:t> </a:t>
+            </a:r>
+            <a:r>
+              <a:rPr lang="en-US" sz="4800" b="1" spc="-100" dirty="0">
+                <a:solidFill>
+                  <a:srgbClr val="000000"/>
+                </a:solidFill>
+                <a:latin typeface="DM Sans"/>
+                <a:sym typeface="DM Sans"/>
+              </a:rPr>
+              <a:t>Stakeholders</a:t>
+            </a:r>
+            <a:endParaRPr sz="4800" b="1" spc="-100" dirty="0">
+              <a:solidFill>
+                <a:srgbClr val="000000"/>
+              </a:solidFill>
+              <a:latin typeface="DM Sans"/>
+            </a:endParaRPr>
+          </a:p>
+        </p:txBody>
+      </p:sp>
+      <p:sp>
+        <p:nvSpPr>
+          <p:cNvPr id="279" name="Google Shape;279;p23">
+            <a:extLst>
+              <a:ext uri="{FF2B5EF4-FFF2-40B4-BE49-F238E27FC236}">
+                <a16:creationId xmlns:a16="http://schemas.microsoft.com/office/drawing/2014/main" id="{55D299CF-9DA6-DBEF-7627-FDF69A2D3F0C}"/>
+              </a:ext>
+            </a:extLst>
+          </p:cNvPr>
+          <p:cNvSpPr txBox="1"/>
+          <p:nvPr/>
+        </p:nvSpPr>
+        <p:spPr>
+          <a:xfrm>
+            <a:off x="6794275" y="1502197"/>
+            <a:ext cx="4712149" cy="3323987"/>
+          </a:xfrm>
+          <a:prstGeom prst="rect">
+            <a:avLst/>
+          </a:prstGeom>
+          <a:noFill/>
+          <a:ln>
+            <a:noFill/>
+          </a:ln>
+        </p:spPr>
+        <p:txBody>
+          <a:bodyPr spcFirstLastPara="1" wrap="square" lIns="0" tIns="0" rIns="0" bIns="0" anchor="t" anchorCtr="0">
+            <a:spAutoFit/>
+          </a:bodyPr>
+          <a:lstStyle/>
+          <a:p>
+            <a:pPr marL="571500" indent="-571500">
+              <a:buFont typeface="Arial" panose="020B0604020202020204" pitchFamily="34" charset="0"/>
+              <a:buChar char="•"/>
+            </a:pPr>
+            <a:r>
+              <a:rPr lang="en-US" sz="2400" dirty="0"/>
+              <a:t>Blood Glucose, Old Age, High BMI</a:t>
+            </a:r>
+          </a:p>
+          <a:p>
+            <a:pPr marL="571500" indent="-571500">
+              <a:buFont typeface="Arial" panose="020B0604020202020204" pitchFamily="34" charset="0"/>
+              <a:buChar char="•"/>
+            </a:pPr>
+            <a:r>
+              <a:rPr lang="en-US" sz="2400" dirty="0"/>
+              <a:t>Different models weight age higher</a:t>
+            </a:r>
+          </a:p>
+          <a:p>
+            <a:pPr marL="571500" indent="-571500">
+              <a:buFont typeface="Arial" panose="020B0604020202020204" pitchFamily="34" charset="0"/>
+              <a:buChar char="•"/>
+            </a:pPr>
+            <a:r>
+              <a:rPr lang="en-US" sz="2400" dirty="0"/>
+              <a:t>Does age make BMI and Glucose harder to reduce?</a:t>
+            </a:r>
+          </a:p>
+          <a:p>
+            <a:pPr marL="571500" indent="-571500">
+              <a:buFont typeface="Arial" panose="020B0604020202020204" pitchFamily="34" charset="0"/>
+              <a:buChar char="•"/>
+            </a:pPr>
+            <a:r>
+              <a:rPr lang="en-US" sz="2400" dirty="0"/>
+              <a:t>What does this mean for our solution?</a:t>
+            </a:r>
+          </a:p>
+          <a:p>
+            <a:pPr marL="571500" indent="-571500">
+              <a:buFont typeface="Arial" panose="020B0604020202020204" pitchFamily="34" charset="0"/>
+              <a:buChar char="•"/>
+            </a:pPr>
+            <a:endParaRPr lang="en-US" sz="2400" dirty="0"/>
+          </a:p>
+        </p:txBody>
+      </p:sp>
+    </p:spTree>
+    <p:extLst>
+      <p:ext uri="{BB962C8B-B14F-4D97-AF65-F5344CB8AC3E}">
+        <p14:creationId xmlns:p14="http://schemas.microsoft.com/office/powerpoint/2010/main" val="2208245426"/>
+      </p:ext>
+    </p:extLst>
+  </p:cSld>
+  <p:clrMapOvr>
+    <a:masterClrMapping/>
+  </p:clrMapOvr>
+  <p:transition>
+    <p:push/>
+  </p:transition>
+</p:sld>
+</file>
+
 <file path=ppt/slides/slide14.xml><?xml version="1.0" encoding="utf-8"?>
 <p:sld xmlns:a="http://schemas.openxmlformats.org/drawingml/2006/main" xmlns:r="http://schemas.openxmlformats.org/officeDocument/2006/relationships" xmlns:p="http://schemas.openxmlformats.org/presentationml/2006/main">
   <p:cSld>
@@ -4096,11 +6450,21 @@
         </p:nvSpPr>
         <p:spPr/>
         <p:txBody>
-          <a:bodyPr/>
+          <a:bodyPr>
+            <a:normAutofit/>
+          </a:bodyPr>
           <a:lstStyle/>
           <a:p>
-            <a:r>
-              <a:rPr lang="en-US" dirty="0"/>
+            <a:pPr algn="ctr"/>
+            <a:r>
+              <a:rPr lang="en-US" sz="4800" b="1" dirty="0">
+                <a:solidFill>
+                  <a:srgbClr val="000000"/>
+                </a:solidFill>
+                <a:latin typeface="DM Sans"/>
+                <a:ea typeface="+mn-ea"/>
+                <a:cs typeface="+mn-cs"/>
+              </a:rPr>
               <a:t>Top 10 Important Features</a:t>
             </a:r>
           </a:p>
@@ -4134,7 +6498,7 @@
         </p:blipFill>
         <p:spPr>
           <a:xfrm>
-            <a:off x="1277102" y="1280155"/>
+            <a:off x="1277102" y="1451075"/>
             <a:ext cx="9637795" cy="4297689"/>
           </a:xfrm>
           <a:prstGeom prst="rect">
@@ -4190,11 +6554,21 @@
         </p:nvSpPr>
         <p:spPr/>
         <p:txBody>
-          <a:bodyPr/>
+          <a:bodyPr>
+            <a:normAutofit/>
+          </a:bodyPr>
           <a:lstStyle/>
           <a:p>
-            <a:r>
-              <a:rPr lang="en-US" dirty="0"/>
+            <a:pPr algn="ctr"/>
+            <a:r>
+              <a:rPr lang="en-US" sz="4800" b="1" dirty="0">
+                <a:solidFill>
+                  <a:srgbClr val="000000"/>
+                </a:solidFill>
+                <a:latin typeface="DM Sans"/>
+                <a:ea typeface="+mn-ea"/>
+                <a:cs typeface="+mn-cs"/>
+              </a:rPr>
               <a:t>Top 10 Important Features</a:t>
             </a:r>
           </a:p>
@@ -4228,7 +6602,7 @@
         </p:blipFill>
         <p:spPr>
           <a:xfrm>
-            <a:off x="1277102" y="1280155"/>
+            <a:off x="1277100" y="1502346"/>
             <a:ext cx="9637795" cy="4297689"/>
           </a:xfrm>
           <a:prstGeom prst="rect">
@@ -4280,8 +6654,8 @@
         </p:nvSpPr>
         <p:spPr>
           <a:xfrm>
-            <a:off x="1195752" y="5569545"/>
-            <a:ext cx="9435403" cy="923330"/>
+            <a:off x="8699618" y="1452784"/>
+            <a:ext cx="3093577" cy="2862322"/>
           </a:xfrm>
           <a:prstGeom prst="rect">
             <a:avLst/>
@@ -4343,7 +6717,7 @@
         </p:blipFill>
         <p:spPr>
           <a:xfrm>
-            <a:off x="1516442" y="868362"/>
+            <a:off x="345668" y="1295652"/>
             <a:ext cx="7818944" cy="4634901"/>
           </a:xfrm>
           <a:prstGeom prst="rect">
@@ -4369,24 +6743,57 @@
         </p:nvSpPr>
         <p:spPr>
           <a:xfrm>
-            <a:off x="838200" y="365125"/>
+            <a:off x="806302" y="652204"/>
             <a:ext cx="10515600" cy="1006475"/>
           </a:xfrm>
         </p:spPr>
         <p:txBody>
           <a:bodyPr>
-            <a:normAutofit fontScale="90000"/>
+            <a:noAutofit/>
           </a:bodyPr>
           <a:lstStyle/>
           <a:p>
-            <a:r>
-              <a:rPr lang="en-US" sz="4900" dirty="0"/>
-              <a:t>Bar Plots</a:t>
+            <a:pPr algn="ctr"/>
+            <a:r>
+              <a:rPr lang="en-US" sz="4800" b="1">
+                <a:solidFill>
+                  <a:srgbClr val="000000"/>
+                </a:solidFill>
+                <a:latin typeface="DM Sans"/>
+                <a:ea typeface="+mn-ea"/>
+                <a:cs typeface="+mn-cs"/>
+              </a:rPr>
+              <a:t>SHAP Bar </a:t>
+            </a:r>
+            <a:r>
+              <a:rPr lang="en-US" sz="4800" b="1" dirty="0">
+                <a:solidFill>
+                  <a:srgbClr val="000000"/>
+                </a:solidFill>
+                <a:latin typeface="DM Sans"/>
+                <a:ea typeface="+mn-ea"/>
+                <a:cs typeface="+mn-cs"/>
+              </a:rPr>
+              <a:t>Plots</a:t>
             </a:r>
             <a:br>
-              <a:rPr lang="en-US" dirty="0"/>
+              <a:rPr lang="en-US" sz="4800" b="1" dirty="0">
+                <a:solidFill>
+                  <a:srgbClr val="000000"/>
+                </a:solidFill>
+                <a:latin typeface="DM Sans"/>
+                <a:ea typeface="+mn-ea"/>
+                <a:cs typeface="+mn-cs"/>
+              </a:rPr>
             </a:br>
-            <a:endParaRPr lang="en-US" dirty="0"/>
+            <a:endParaRPr lang="en-US" sz="4800" b="1" dirty="0">
+              <a:solidFill>
+                <a:srgbClr val="000000"/>
+              </a:solidFill>
+              <a:latin typeface="DM Sans"/>
+              <a:ea typeface="+mn-ea"/>
+              <a:cs typeface="+mn-cs"/>
+            </a:endParaRPr>
           </a:p>
         </p:txBody>
       </p:sp>
@@ -4487,8 +6894,8 @@
         </p:nvSpPr>
         <p:spPr>
           <a:xfrm>
-            <a:off x="979462" y="5405757"/>
-            <a:ext cx="10515600" cy="1325563"/>
+            <a:off x="8952614" y="1190847"/>
+            <a:ext cx="3239386" cy="5540473"/>
           </a:xfrm>
           <a:prstGeom prst="rect">
             <a:avLst/>
@@ -4563,7 +6970,7 @@
         </p:blipFill>
         <p:spPr>
           <a:xfrm>
-            <a:off x="1860010" y="860490"/>
+            <a:off x="0" y="1604768"/>
             <a:ext cx="8754504" cy="4545267"/>
           </a:xfrm>
           <a:prstGeom prst="rect">
@@ -4587,20 +6994,49 @@
             <p:ph type="title"/>
           </p:nvPr>
         </p:nvSpPr>
-        <p:spPr/>
-        <p:txBody>
-          <a:bodyPr/>
+        <p:spPr>
+          <a:xfrm>
+            <a:off x="609600" y="288852"/>
+            <a:ext cx="10972800" cy="990600"/>
+          </a:xfrm>
+        </p:spPr>
+        <p:txBody>
+          <a:bodyPr>
+            <a:normAutofit/>
+          </a:bodyPr>
           <a:lstStyle/>
           <a:p>
-            <a:r>
-              <a:rPr lang="en-US" dirty="0"/>
+            <a:pPr algn="ctr"/>
+            <a:r>
+              <a:rPr lang="en-US" sz="4800" b="1" dirty="0">
+                <a:solidFill>
+                  <a:srgbClr val="000000"/>
+                </a:solidFill>
+                <a:latin typeface="DM Sans"/>
+                <a:ea typeface="+mn-ea"/>
+                <a:cs typeface="+mn-cs"/>
+              </a:rPr>
               <a:t>SHAP </a:t>
             </a:r>
             <a:r>
-              <a:rPr lang="en-US" dirty="0" err="1"/>
+              <a:rPr lang="en-US" sz="4800" b="1" dirty="0" err="1">
+                <a:solidFill>
+                  <a:srgbClr val="000000"/>
+                </a:solidFill>
+                <a:latin typeface="DM Sans"/>
+                <a:ea typeface="+mn-ea"/>
+                <a:cs typeface="+mn-cs"/>
+              </a:rPr>
               <a:t>Beeswarm</a:t>
             </a:r>
-            <a:endParaRPr lang="en-US" dirty="0"/>
+            <a:endParaRPr lang="en-US" sz="4800" b="1" dirty="0">
+              <a:solidFill>
+                <a:srgbClr val="000000"/>
+              </a:solidFill>
+              <a:latin typeface="DM Sans"/>
+              <a:ea typeface="+mn-ea"/>
+              <a:cs typeface="+mn-cs"/>
+            </a:endParaRPr>
           </a:p>
         </p:txBody>
       </p:sp>
@@ -4657,16 +7093,38 @@
           </a:bodyPr>
           <a:lstStyle/>
           <a:p>
-            <a:r>
-              <a:rPr lang="en-US" sz="4000" dirty="0"/>
+            <a:pPr algn="ctr"/>
+            <a:r>
+              <a:rPr lang="en-US" sz="4800" b="1" dirty="0">
+                <a:solidFill>
+                  <a:srgbClr val="000000"/>
+                </a:solidFill>
+                <a:latin typeface="DM Sans"/>
+                <a:ea typeface="+mn-ea"/>
+                <a:cs typeface="+mn-cs"/>
+              </a:rPr>
               <a:t>SHAP </a:t>
             </a:r>
             <a:r>
-              <a:rPr lang="en-US" sz="4000" dirty="0" err="1"/>
+              <a:rPr lang="en-US" sz="4800" b="1" dirty="0" err="1">
+                <a:solidFill>
+                  <a:srgbClr val="000000"/>
+                </a:solidFill>
+                <a:latin typeface="DM Sans"/>
+                <a:ea typeface="+mn-ea"/>
+                <a:cs typeface="+mn-cs"/>
+              </a:rPr>
               <a:t>Beeswarm</a:t>
             </a:r>
             <a:r>
-              <a:rPr lang="en-US" sz="4000" dirty="0"/>
+              <a:rPr lang="en-US" sz="4800" b="1" dirty="0">
+                <a:solidFill>
+                  <a:srgbClr val="000000"/>
+                </a:solidFill>
+                <a:latin typeface="DM Sans"/>
+                <a:ea typeface="+mn-ea"/>
+                <a:cs typeface="+mn-cs"/>
+              </a:rPr>
               <a:t> – True Positive</a:t>
             </a:r>
           </a:p>
@@ -4767,16 +7225,38 @@
           </a:bodyPr>
           <a:lstStyle/>
           <a:p>
-            <a:r>
-              <a:rPr lang="en-US" sz="4000" dirty="0"/>
+            <a:pPr algn="ctr"/>
+            <a:r>
+              <a:rPr lang="en-US" sz="4800" b="1" dirty="0">
+                <a:solidFill>
+                  <a:srgbClr val="000000"/>
+                </a:solidFill>
+                <a:latin typeface="DM Sans"/>
+                <a:ea typeface="+mn-ea"/>
+                <a:cs typeface="+mn-cs"/>
+              </a:rPr>
               <a:t>SHAP </a:t>
             </a:r>
             <a:r>
-              <a:rPr lang="en-US" sz="4000" dirty="0" err="1"/>
+              <a:rPr lang="en-US" sz="4800" b="1" dirty="0" err="1">
+                <a:solidFill>
+                  <a:srgbClr val="000000"/>
+                </a:solidFill>
+                <a:latin typeface="DM Sans"/>
+                <a:ea typeface="+mn-ea"/>
+                <a:cs typeface="+mn-cs"/>
+              </a:rPr>
               <a:t>Beeswarm</a:t>
             </a:r>
             <a:r>
-              <a:rPr lang="en-US" sz="4000" dirty="0"/>
+              <a:rPr lang="en-US" sz="4800" b="1" dirty="0">
+                <a:solidFill>
+                  <a:srgbClr val="000000"/>
+                </a:solidFill>
+                <a:latin typeface="DM Sans"/>
+                <a:ea typeface="+mn-ea"/>
+                <a:cs typeface="+mn-cs"/>
+              </a:rPr>
               <a:t> – False Negative</a:t>
             </a:r>
           </a:p>
@@ -4836,7 +7316,7 @@
   <p:cSld>
     <p:spTree>
       <p:nvGrpSpPr>
-        <p:cNvPr id="1" name=""/>
+        <p:cNvPr id="1" name="Shape 274"/>
         <p:cNvGrpSpPr/>
         <p:nvPr/>
       </p:nvGrpSpPr>
@@ -4848,87 +7328,105 @@
           <a:chExt cx="0" cy="0"/>
         </a:xfrm>
       </p:grpSpPr>
-      <p:sp>
-        <p:nvSpPr>
-          <p:cNvPr id="2" name="Title 1">
-            <a:extLst>
-              <a:ext uri="{FF2B5EF4-FFF2-40B4-BE49-F238E27FC236}">
-                <a16:creationId xmlns:a16="http://schemas.microsoft.com/office/drawing/2014/main" id="{D96CE8AB-CDD1-E1AE-429E-7D1B1EC2869C}"/>
-              </a:ext>
-            </a:extLst>
-          </p:cNvPr>
-          <p:cNvSpPr>
-            <a:spLocks noGrp="1"/>
-          </p:cNvSpPr>
-          <p:nvPr>
-            <p:ph type="title"/>
-          </p:nvPr>
-        </p:nvSpPr>
-        <p:spPr/>
-        <p:txBody>
-          <a:bodyPr/>
+      <p:cxnSp>
+        <p:nvCxnSpPr>
+          <p:cNvPr id="277" name="Google Shape;277;p23"/>
+          <p:cNvCxnSpPr/>
+          <p:nvPr/>
+        </p:nvCxnSpPr>
+        <p:spPr>
+          <a:xfrm rot="10800000">
+            <a:off x="6096000" y="0"/>
+            <a:ext cx="12700" cy="6859420"/>
+          </a:xfrm>
+          <a:prstGeom prst="straightConnector1">
+            <a:avLst/>
+          </a:prstGeom>
+          <a:noFill/>
+          <a:ln w="19050" cap="flat" cmpd="sng">
+            <a:solidFill>
+              <a:srgbClr val="000000"/>
+            </a:solidFill>
+            <a:prstDash val="solid"/>
+            <a:round/>
+            <a:headEnd type="none" w="sm" len="sm"/>
+            <a:tailEnd type="none" w="sm" len="sm"/>
+          </a:ln>
+        </p:spPr>
+      </p:cxnSp>
+      <p:sp>
+        <p:nvSpPr>
+          <p:cNvPr id="278" name="Google Shape;278;p23"/>
+          <p:cNvSpPr txBox="1"/>
+          <p:nvPr/>
+        </p:nvSpPr>
+        <p:spPr>
+          <a:xfrm>
+            <a:off x="616400" y="1994640"/>
+            <a:ext cx="4863200" cy="1969770"/>
+          </a:xfrm>
+          <a:prstGeom prst="rect">
+            <a:avLst/>
+          </a:prstGeom>
+          <a:noFill/>
+          <a:ln>
+            <a:noFill/>
+          </a:ln>
+        </p:spPr>
+        <p:txBody>
+          <a:bodyPr spcFirstLastPara="1" wrap="square" lIns="0" tIns="0" rIns="0" bIns="0" anchor="t" anchorCtr="0">
+            <a:spAutoFit/>
+          </a:bodyPr>
           <a:lstStyle/>
           <a:p>
-            <a:r>
-              <a:rPr lang="en-US" dirty="0"/>
-              <a:t>Team Members listed by Alphabetical Order</a:t>
-            </a:r>
-          </a:p>
-        </p:txBody>
-      </p:sp>
-      <p:sp>
-        <p:nvSpPr>
-          <p:cNvPr id="4" name="Title 1">
-            <a:extLst>
-              <a:ext uri="{FF2B5EF4-FFF2-40B4-BE49-F238E27FC236}">
-                <a16:creationId xmlns:a16="http://schemas.microsoft.com/office/drawing/2014/main" id="{97C135FB-E2F4-801A-66DE-F2A714516FA3}"/>
-              </a:ext>
-            </a:extLst>
-          </p:cNvPr>
-          <p:cNvSpPr txBox="1">
-            <a:spLocks/>
-          </p:cNvSpPr>
+            <a:pPr algn="ctr"/>
+            <a:r>
+              <a:rPr lang="en-US" sz="6400" b="1" dirty="0">
+                <a:solidFill>
+                  <a:srgbClr val="000000"/>
+                </a:solidFill>
+                <a:latin typeface="DM Sans"/>
+                <a:ea typeface="DM Sans"/>
+                <a:cs typeface="DM Sans"/>
+                <a:sym typeface="DM Sans"/>
+              </a:rPr>
+              <a:t>Team Members</a:t>
+            </a:r>
+            <a:endParaRPr sz="1200" dirty="0"/>
+          </a:p>
+        </p:txBody>
+      </p:sp>
+      <p:sp>
+        <p:nvSpPr>
+          <p:cNvPr id="279" name="Google Shape;279;p23"/>
+          <p:cNvSpPr txBox="1"/>
           <p:nvPr/>
         </p:nvSpPr>
         <p:spPr>
           <a:xfrm>
-            <a:off x="769374" y="1690689"/>
-            <a:ext cx="10515600" cy="3933364"/>
+            <a:off x="6794275" y="1502197"/>
+            <a:ext cx="4712149" cy="2954655"/>
           </a:xfrm>
           <a:prstGeom prst="rect">
             <a:avLst/>
           </a:prstGeom>
-        </p:spPr>
-        <p:txBody>
-          <a:bodyPr vert="horz" lIns="91440" tIns="45720" rIns="91440" bIns="45720" rtlCol="0" anchor="ctr">
-            <a:normAutofit/>
+          <a:noFill/>
+          <a:ln>
+            <a:noFill/>
+          </a:ln>
+        </p:spPr>
+        <p:txBody>
+          <a:bodyPr spcFirstLastPara="1" wrap="square" lIns="0" tIns="0" rIns="0" bIns="0" anchor="t" anchorCtr="0">
+            <a:spAutoFit/>
           </a:bodyPr>
-          <a:lstStyle>
-            <a:lvl1pPr algn="l" defTabSz="914400" rtl="0" eaLnBrk="1" latinLnBrk="0" hangingPunct="1">
-              <a:lnSpc>
-                <a:spcPct val="90000"/>
-              </a:lnSpc>
-              <a:spcBef>
-                <a:spcPct val="0"/>
-              </a:spcBef>
-              <a:buNone/>
-              <a:defRPr sz="4400" kern="1200">
-                <a:solidFill>
-                  <a:schemeClr val="tx1"/>
-                </a:solidFill>
-                <a:latin typeface="+mj-lt"/>
-                <a:ea typeface="+mj-ea"/>
-                <a:cs typeface="+mj-cs"/>
-              </a:defRPr>
-            </a:lvl1pPr>
-          </a:lstStyle>
+          <a:lstStyle/>
           <a:p>
             <a:pPr marL="571500" indent="-571500">
               <a:buFont typeface="Arial" panose="020B0604020202020204" pitchFamily="34" charset="0"/>
               <a:buChar char="•"/>
             </a:pPr>
             <a:r>
-              <a:rPr lang="en-US" sz="3600" dirty="0"/>
+              <a:rPr lang="en-US" sz="3200" dirty="0"/>
               <a:t>Adnan Takash</a:t>
             </a:r>
           </a:p>
@@ -4938,7 +7436,7 @@
               <a:buChar char="•"/>
             </a:pPr>
             <a:r>
-              <a:rPr lang="en-US" sz="3600" dirty="0"/>
+              <a:rPr lang="en-US" sz="3200" dirty="0"/>
               <a:t>Aravind Vijayaragavan</a:t>
             </a:r>
           </a:p>
@@ -4948,14 +7446,14 @@
               <a:buChar char="•"/>
             </a:pPr>
             <a:r>
-              <a:rPr lang="en-US" sz="3600" dirty="0"/>
+              <a:rPr lang="en-US" sz="3200" dirty="0"/>
               <a:t>Azadeh </a:t>
             </a:r>
             <a:r>
-              <a:rPr lang="en-US" sz="3600" dirty="0" err="1"/>
+              <a:rPr lang="en-US" sz="3200" dirty="0" err="1"/>
               <a:t>Selahvarzi</a:t>
             </a:r>
-            <a:endParaRPr lang="en-US" sz="3600" dirty="0"/>
+            <a:endParaRPr lang="en-US" sz="3200" dirty="0"/>
           </a:p>
           <a:p>
             <a:pPr marL="571500" indent="-571500">
@@ -4963,7 +7461,7 @@
               <a:buChar char="•"/>
             </a:pPr>
             <a:r>
-              <a:rPr lang="en-US" sz="3600" dirty="0"/>
+              <a:rPr lang="en-US" sz="3200" dirty="0"/>
               <a:t>Karen Huang</a:t>
             </a:r>
           </a:p>
@@ -4973,7 +7471,7 @@
               <a:buChar char="•"/>
             </a:pPr>
             <a:r>
-              <a:rPr lang="en-US" sz="3600" dirty="0"/>
+              <a:rPr lang="en-US" sz="3200" dirty="0"/>
               <a:t>Naveen Kumar Nair</a:t>
             </a:r>
           </a:p>
@@ -4983,25 +7481,20 @@
               <a:buChar char="•"/>
             </a:pPr>
             <a:r>
-              <a:rPr lang="en-US" sz="3600" dirty="0"/>
+              <a:rPr lang="en-US" sz="3200" dirty="0"/>
               <a:t>Yuli Zhang</a:t>
             </a:r>
           </a:p>
-          <a:p>
-            <a:endParaRPr lang="en-US" dirty="0"/>
-          </a:p>
         </p:txBody>
       </p:sp>
     </p:spTree>
-    <p:extLst>
-      <p:ext uri="{BB962C8B-B14F-4D97-AF65-F5344CB8AC3E}">
-        <p14:creationId xmlns:p14="http://schemas.microsoft.com/office/powerpoint/2010/main" val="2341215295"/>
-      </p:ext>
-    </p:extLst>
   </p:cSld>
   <p:clrMapOvr>
     <a:masterClrMapping/>
   </p:clrMapOvr>
+  <p:transition>
+    <p:push/>
+  </p:transition>
 </p:sld>
 </file>
 
@@ -5010,7 +7503,13 @@
   <p:cSld>
     <p:spTree>
       <p:nvGrpSpPr>
-        <p:cNvPr id="1" name=""/>
+        <p:cNvPr id="1" name="Shape 274">
+          <a:extLst>
+            <a:ext uri="{FF2B5EF4-FFF2-40B4-BE49-F238E27FC236}">
+              <a16:creationId xmlns:a16="http://schemas.microsoft.com/office/drawing/2014/main" id="{BE34003F-B0E4-9D99-7E7E-4FCB8AECCB15}"/>
+            </a:ext>
+          </a:extLst>
+        </p:cNvPr>
         <p:cNvGrpSpPr/>
         <p:nvPr/>
       </p:nvGrpSpPr>
@@ -5022,74 +7521,204 @@
           <a:chExt cx="0" cy="0"/>
         </a:xfrm>
       </p:grpSpPr>
-      <p:sp>
-        <p:nvSpPr>
-          <p:cNvPr id="2" name="Title 1">
+      <p:cxnSp>
+        <p:nvCxnSpPr>
+          <p:cNvPr id="277" name="Google Shape;277;p23">
             <a:extLst>
               <a:ext uri="{FF2B5EF4-FFF2-40B4-BE49-F238E27FC236}">
-                <a16:creationId xmlns:a16="http://schemas.microsoft.com/office/drawing/2014/main" id="{C3476C82-C89C-4F07-8B34-E57E83C03114}"/>
+                <a16:creationId xmlns:a16="http://schemas.microsoft.com/office/drawing/2014/main" id="{48FA03B2-BA79-B513-672B-F678ADE015B9}"/>
               </a:ext>
             </a:extLst>
           </p:cNvPr>
-          <p:cNvSpPr>
-            <a:spLocks noGrp="1"/>
-          </p:cNvSpPr>
-          <p:nvPr>
-            <p:ph type="title"/>
-          </p:nvPr>
-        </p:nvSpPr>
-        <p:spPr>
-          <a:xfrm>
-            <a:off x="570271" y="1731809"/>
-            <a:ext cx="10783529" cy="3233481"/>
-          </a:xfrm>
-        </p:spPr>
-        <p:txBody>
-          <a:bodyPr>
-            <a:normAutofit/>
+          <p:cNvCxnSpPr/>
+          <p:nvPr/>
+        </p:nvCxnSpPr>
+        <p:spPr>
+          <a:xfrm rot="10800000">
+            <a:off x="6096000" y="0"/>
+            <a:ext cx="12700" cy="6859420"/>
+          </a:xfrm>
+          <a:prstGeom prst="straightConnector1">
+            <a:avLst/>
+          </a:prstGeom>
+          <a:noFill/>
+          <a:ln w="19050" cap="flat" cmpd="sng">
+            <a:solidFill>
+              <a:srgbClr val="000000"/>
+            </a:solidFill>
+            <a:prstDash val="solid"/>
+            <a:round/>
+            <a:headEnd type="none" w="sm" len="sm"/>
+            <a:tailEnd type="none" w="sm" len="sm"/>
+          </a:ln>
+        </p:spPr>
+      </p:cxnSp>
+      <p:sp>
+        <p:nvSpPr>
+          <p:cNvPr id="278" name="Google Shape;278;p23">
+            <a:extLst>
+              <a:ext uri="{FF2B5EF4-FFF2-40B4-BE49-F238E27FC236}">
+                <a16:creationId xmlns:a16="http://schemas.microsoft.com/office/drawing/2014/main" id="{3E731076-B7A8-BFFC-339F-72BC223F4891}"/>
+              </a:ext>
+            </a:extLst>
+          </p:cNvPr>
+          <p:cNvSpPr txBox="1"/>
+          <p:nvPr/>
+        </p:nvSpPr>
+        <p:spPr>
+          <a:xfrm>
+            <a:off x="240527" y="1459230"/>
+            <a:ext cx="5627646" cy="1477328"/>
+          </a:xfrm>
+          <a:prstGeom prst="rect">
+            <a:avLst/>
+          </a:prstGeom>
+          <a:noFill/>
+          <a:ln>
+            <a:noFill/>
+          </a:ln>
+        </p:spPr>
+        <p:txBody>
+          <a:bodyPr spcFirstLastPara="1" wrap="square" lIns="0" tIns="0" rIns="0" bIns="0" anchor="t" anchorCtr="0">
+            <a:spAutoFit/>
           </a:bodyPr>
           <a:lstStyle/>
           <a:p>
-            <a:pPr algn="ctr"/>
-            <a:r>
-              <a:rPr lang="en-US" dirty="0"/>
-              <a:t>Thank You</a:t>
-            </a:r>
-            <a:br>
-              <a:rPr lang="en-US" dirty="0"/>
-            </a:br>
-            <a:br>
-              <a:rPr lang="en-US" dirty="0"/>
-            </a:br>
-            <a:br>
-              <a:rPr lang="en-US" dirty="0"/>
-            </a:br>
-            <a:r>
-              <a:rPr lang="en-US" dirty="0"/>
-              <a:t>Questions?</a:t>
-            </a:r>
+            <a:pPr algn="ctr">
+              <a:spcBef>
+                <a:spcPct val="0"/>
+              </a:spcBef>
+            </a:pPr>
+            <a:r>
+              <a:rPr lang="en-US" sz="4800" b="1" spc="-100" dirty="0">
+                <a:solidFill>
+                  <a:srgbClr val="000000"/>
+                </a:solidFill>
+                <a:latin typeface="DM Sans"/>
+                <a:sym typeface="DM Sans"/>
+              </a:rPr>
+              <a:t>Solution to Business Case</a:t>
+            </a:r>
+            <a:endParaRPr lang="en-CA" sz="4800" b="1" spc="-100" dirty="0">
+              <a:solidFill>
+                <a:srgbClr val="000000"/>
+              </a:solidFill>
+              <a:latin typeface="DM Sans"/>
+            </a:endParaRPr>
+          </a:p>
+        </p:txBody>
+      </p:sp>
+      <p:sp>
+        <p:nvSpPr>
+          <p:cNvPr id="279" name="Google Shape;279;p23">
+            <a:extLst>
+              <a:ext uri="{FF2B5EF4-FFF2-40B4-BE49-F238E27FC236}">
+                <a16:creationId xmlns:a16="http://schemas.microsoft.com/office/drawing/2014/main" id="{00DCE89C-87BE-BCD7-0E48-058C585160B9}"/>
+              </a:ext>
+            </a:extLst>
+          </p:cNvPr>
+          <p:cNvSpPr txBox="1"/>
+          <p:nvPr/>
+        </p:nvSpPr>
+        <p:spPr>
+          <a:xfrm>
+            <a:off x="6713539" y="701584"/>
+            <a:ext cx="4712149" cy="5170646"/>
+          </a:xfrm>
+          <a:prstGeom prst="rect">
+            <a:avLst/>
+          </a:prstGeom>
+          <a:noFill/>
+          <a:ln>
+            <a:noFill/>
+          </a:ln>
+        </p:spPr>
+        <p:txBody>
+          <a:bodyPr spcFirstLastPara="1" wrap="square" lIns="0" tIns="0" rIns="0" bIns="0" anchor="t" anchorCtr="0">
+            <a:spAutoFit/>
+          </a:bodyPr>
+          <a:lstStyle/>
+          <a:p>
+            <a:pPr marL="571500" indent="-571500">
+              <a:buFont typeface="Arial" panose="020B0604020202020204" pitchFamily="34" charset="0"/>
+              <a:buChar char="•"/>
+            </a:pPr>
+            <a:r>
+              <a:rPr lang="en-US" sz="2400" b="1" dirty="0"/>
+              <a:t>HABIT-FORMING PROGRAM:</a:t>
+            </a:r>
+          </a:p>
+          <a:p>
+            <a:pPr marL="1028700" lvl="1" indent="-571500">
+              <a:buFont typeface="Arial" panose="020B0604020202020204" pitchFamily="34" charset="0"/>
+              <a:buChar char="•"/>
+            </a:pPr>
+            <a:r>
+              <a:rPr lang="en-US" sz="2400" dirty="0"/>
+              <a:t>Focus on long-term good habit development</a:t>
+            </a:r>
+          </a:p>
+          <a:p>
+            <a:pPr marL="1028700" lvl="1" indent="-571500">
+              <a:buFont typeface="Arial" panose="020B0604020202020204" pitchFamily="34" charset="0"/>
+              <a:buChar char="•"/>
+            </a:pPr>
+            <a:r>
+              <a:rPr lang="en-US" sz="2400" dirty="0"/>
+              <a:t>Set up a program with Apple Watch or Fitbit to track changes</a:t>
+            </a:r>
+          </a:p>
+          <a:p>
+            <a:pPr marL="1028700" lvl="1" indent="-571500">
+              <a:buFont typeface="Arial" panose="020B0604020202020204" pitchFamily="34" charset="0"/>
+              <a:buChar char="•"/>
+            </a:pPr>
+            <a:r>
+              <a:rPr lang="en-US" sz="2400" dirty="0"/>
+              <a:t>Enter niche of fitness app programs, but specifically for stroke reduction</a:t>
+            </a:r>
+          </a:p>
+          <a:p>
+            <a:pPr marL="1028700" lvl="1" indent="-571500">
+              <a:buFont typeface="Arial" panose="020B0604020202020204" pitchFamily="34" charset="0"/>
+              <a:buChar char="•"/>
+            </a:pPr>
+            <a:r>
+              <a:rPr lang="en-US" sz="2400" dirty="0"/>
+              <a:t>Apps make it easy for people without a primary healthcare provider to participate</a:t>
+            </a:r>
+          </a:p>
+          <a:p>
+            <a:pPr marL="571500" indent="-571500">
+              <a:buFont typeface="Arial" panose="020B0604020202020204" pitchFamily="34" charset="0"/>
+              <a:buChar char="•"/>
+            </a:pPr>
+            <a:endParaRPr lang="en-US" sz="2400" dirty="0"/>
           </a:p>
         </p:txBody>
       </p:sp>
     </p:spTree>
     <p:extLst>
       <p:ext uri="{BB962C8B-B14F-4D97-AF65-F5344CB8AC3E}">
-        <p14:creationId xmlns:p14="http://schemas.microsoft.com/office/powerpoint/2010/main" val="3319105940"/>
+        <p14:creationId xmlns:p14="http://schemas.microsoft.com/office/powerpoint/2010/main" val="859957635"/>
       </p:ext>
     </p:extLst>
   </p:cSld>
   <p:clrMapOvr>
     <a:masterClrMapping/>
   </p:clrMapOvr>
+  <p:transition>
+    <p:push/>
+  </p:transition>
 </p:sld>
 </file>
 
-<file path=ppt/slides/slide3.xml><?xml version="1.0" encoding="utf-8"?>
+<file path=ppt/slides/slide21.xml><?xml version="1.0" encoding="utf-8"?>
 <p:sld xmlns:a="http://schemas.openxmlformats.org/drawingml/2006/main" xmlns:r="http://schemas.openxmlformats.org/officeDocument/2006/relationships" xmlns:p="http://schemas.openxmlformats.org/presentationml/2006/main">
   <p:cSld>
     <p:spTree>
       <p:nvGrpSpPr>
-        <p:cNvPr id="1" name=""/>
+        <p:cNvPr id="1" name="Shape 496"/>
         <p:cNvGrpSpPr/>
         <p:nvPr/>
       </p:nvGrpSpPr>
@@ -5103,48 +7732,297 @@
       </p:grpSpPr>
       <p:sp>
         <p:nvSpPr>
-          <p:cNvPr id="2" name="Title 1">
-            <a:extLst>
-              <a:ext uri="{FF2B5EF4-FFF2-40B4-BE49-F238E27FC236}">
-                <a16:creationId xmlns:a16="http://schemas.microsoft.com/office/drawing/2014/main" id="{79E43A91-B3C9-0454-AB88-45C9BEFB7898}"/>
-              </a:ext>
-            </a:extLst>
-          </p:cNvPr>
-          <p:cNvSpPr>
-            <a:spLocks noGrp="1"/>
-          </p:cNvSpPr>
-          <p:nvPr>
-            <p:ph type="title"/>
-          </p:nvPr>
-        </p:nvSpPr>
-        <p:spPr/>
+          <p:cNvPr id="497" name="Google Shape;497;p35"/>
+          <p:cNvSpPr/>
+          <p:nvPr/>
+        </p:nvSpPr>
+        <p:spPr>
+          <a:xfrm>
+            <a:off x="0" y="0"/>
+            <a:ext cx="12192000" cy="6858000"/>
+          </a:xfrm>
+          <a:custGeom>
+            <a:avLst/>
+            <a:gdLst/>
+            <a:ahLst/>
+            <a:cxnLst/>
+            <a:rect l="l" t="t" r="r" b="b"/>
+            <a:pathLst>
+              <a:path w="18288000" h="10287000" extrusionOk="0">
+                <a:moveTo>
+                  <a:pt x="0" y="0"/>
+                </a:moveTo>
+                <a:lnTo>
+                  <a:pt x="18288000" y="0"/>
+                </a:lnTo>
+                <a:lnTo>
+                  <a:pt x="18288000" y="10287000"/>
+                </a:lnTo>
+                <a:lnTo>
+                  <a:pt x="0" y="10287000"/>
+                </a:lnTo>
+                <a:lnTo>
+                  <a:pt x="0" y="0"/>
+                </a:lnTo>
+                <a:close/>
+              </a:path>
+            </a:pathLst>
+          </a:custGeom>
+          <a:blipFill rotWithShape="1">
+            <a:blip r:embed="rId3">
+              <a:alphaModFix/>
+            </a:blip>
+            <a:stretch>
+              <a:fillRect t="-20652" r="-1236" b="-11174"/>
+            </a:stretch>
+          </a:blipFill>
+          <a:ln>
+            <a:noFill/>
+          </a:ln>
+        </p:spPr>
         <p:txBody>
           <a:bodyPr/>
           <a:lstStyle/>
           <a:p>
-            <a:endParaRPr lang="en-US"/>
+            <a:endParaRPr lang="en-CA" sz="1200"/>
+          </a:p>
+        </p:txBody>
+      </p:sp>
+      <p:pic>
+        <p:nvPicPr>
+          <p:cNvPr id="498" name="Google Shape;498;p35"/>
+          <p:cNvPicPr preferRelativeResize="0"/>
+          <p:nvPr/>
+        </p:nvPicPr>
+        <p:blipFill>
+          <a:blip r:embed="rId4">
+            <a:alphaModFix/>
+          </a:blip>
+          <a:stretch>
+            <a:fillRect/>
+          </a:stretch>
+        </p:blipFill>
+        <p:spPr>
+          <a:xfrm>
+            <a:off x="6527632" y="682900"/>
+            <a:ext cx="5222082" cy="5484456"/>
+          </a:xfrm>
+          <a:prstGeom prst="rect">
+            <a:avLst/>
+          </a:prstGeom>
+          <a:noFill/>
+          <a:ln>
+            <a:noFill/>
+          </a:ln>
+        </p:spPr>
+      </p:pic>
+      <p:cxnSp>
+        <p:nvCxnSpPr>
+          <p:cNvPr id="499" name="Google Shape;499;p35"/>
+          <p:cNvCxnSpPr/>
+          <p:nvPr/>
+        </p:nvCxnSpPr>
+        <p:spPr>
+          <a:xfrm rot="10800000">
+            <a:off x="6102350" y="-65298"/>
+            <a:ext cx="0" cy="6955829"/>
+          </a:xfrm>
+          <a:prstGeom prst="straightConnector1">
+            <a:avLst/>
+          </a:prstGeom>
+          <a:noFill/>
+          <a:ln w="19050" cap="flat" cmpd="sng">
+            <a:solidFill>
+              <a:srgbClr val="FFFAF1"/>
+            </a:solidFill>
+            <a:prstDash val="solid"/>
+            <a:round/>
+            <a:headEnd type="none" w="sm" len="sm"/>
+            <a:tailEnd type="none" w="sm" len="sm"/>
+          </a:ln>
+        </p:spPr>
+      </p:cxnSp>
+      <p:sp>
+        <p:nvSpPr>
+          <p:cNvPr id="500" name="Google Shape;500;p35"/>
+          <p:cNvSpPr/>
+          <p:nvPr/>
+        </p:nvSpPr>
+        <p:spPr>
+          <a:xfrm>
+            <a:off x="6527800" y="685800"/>
+            <a:ext cx="5222048" cy="5486400"/>
+          </a:xfrm>
+          <a:custGeom>
+            <a:avLst/>
+            <a:gdLst/>
+            <a:ahLst/>
+            <a:cxnLst/>
+            <a:rect l="l" t="t" r="r" b="b"/>
+            <a:pathLst>
+              <a:path w="2063031" h="2167467" extrusionOk="0">
+                <a:moveTo>
+                  <a:pt x="0" y="0"/>
+                </a:moveTo>
+                <a:lnTo>
+                  <a:pt x="2063031" y="0"/>
+                </a:lnTo>
+                <a:lnTo>
+                  <a:pt x="2063031" y="2167467"/>
+                </a:lnTo>
+                <a:lnTo>
+                  <a:pt x="0" y="2167467"/>
+                </a:lnTo>
+                <a:close/>
+              </a:path>
+            </a:pathLst>
+          </a:custGeom>
+          <a:solidFill>
+            <a:srgbClr val="000000">
+              <a:alpha val="0"/>
+            </a:srgbClr>
+          </a:solidFill>
+          <a:ln w="19050" cap="flat" cmpd="sng">
+            <a:solidFill>
+              <a:srgbClr val="FFFAF1"/>
+            </a:solidFill>
+            <a:prstDash val="solid"/>
+            <a:round/>
+            <a:headEnd type="none" w="sm" len="sm"/>
+            <a:tailEnd type="none" w="sm" len="sm"/>
+          </a:ln>
+        </p:spPr>
+        <p:txBody>
+          <a:bodyPr/>
+          <a:lstStyle/>
+          <a:p>
+            <a:endParaRPr lang="en-CA" sz="1200"/>
+          </a:p>
+        </p:txBody>
+      </p:sp>
+      <p:sp>
+        <p:nvSpPr>
+          <p:cNvPr id="501" name="Google Shape;501;p35"/>
+          <p:cNvSpPr txBox="1"/>
+          <p:nvPr/>
+        </p:nvSpPr>
+        <p:spPr>
+          <a:xfrm>
+            <a:off x="418991" y="2954688"/>
+            <a:ext cx="5258068" cy="984885"/>
+          </a:xfrm>
+          <a:prstGeom prst="rect">
+            <a:avLst/>
+          </a:prstGeom>
+          <a:noFill/>
+          <a:ln>
+            <a:noFill/>
+          </a:ln>
+        </p:spPr>
+        <p:txBody>
+          <a:bodyPr spcFirstLastPara="1" wrap="square" lIns="0" tIns="0" rIns="0" bIns="0" anchor="t" anchorCtr="0">
+            <a:spAutoFit/>
+          </a:bodyPr>
+          <a:lstStyle/>
+          <a:p>
+            <a:pPr algn="ctr"/>
+            <a:r>
+              <a:rPr lang="en-US" sz="6400" b="1">
+                <a:solidFill>
+                  <a:srgbClr val="FFFAF1"/>
+                </a:solidFill>
+                <a:latin typeface="DM Sans"/>
+                <a:ea typeface="DM Sans"/>
+                <a:cs typeface="DM Sans"/>
+                <a:sym typeface="DM Sans"/>
+              </a:rPr>
+              <a:t>THANK YOU!</a:t>
+            </a:r>
+            <a:endParaRPr sz="1200"/>
+          </a:p>
+        </p:txBody>
+      </p:sp>
+      <p:sp>
+        <p:nvSpPr>
+          <p:cNvPr id="502" name="Google Shape;502;p35"/>
+          <p:cNvSpPr txBox="1"/>
+          <p:nvPr/>
+        </p:nvSpPr>
+        <p:spPr>
+          <a:xfrm>
+            <a:off x="442152" y="3764784"/>
+            <a:ext cx="5258068" cy="301621"/>
+          </a:xfrm>
+          <a:prstGeom prst="rect">
+            <a:avLst/>
+          </a:prstGeom>
+          <a:noFill/>
+          <a:ln>
+            <a:noFill/>
+          </a:ln>
+        </p:spPr>
+        <p:txBody>
+          <a:bodyPr spcFirstLastPara="1" wrap="square" lIns="0" tIns="0" rIns="0" bIns="0" anchor="t" anchorCtr="0">
+            <a:spAutoFit/>
+          </a:bodyPr>
+          <a:lstStyle/>
+          <a:p>
+            <a:pPr algn="ctr">
+              <a:lnSpc>
+                <a:spcPct val="140000"/>
+              </a:lnSpc>
+            </a:pPr>
+            <a:r>
+              <a:rPr lang="en-US" sz="1400" dirty="0">
+                <a:solidFill>
+                  <a:srgbClr val="FFFAF1"/>
+                </a:solidFill>
+                <a:latin typeface="DM Sans"/>
+                <a:ea typeface="DM Sans"/>
+                <a:cs typeface="DM Sans"/>
+                <a:sym typeface="DM Sans"/>
+              </a:rPr>
+              <a:t>We will be taking questions at </a:t>
+            </a:r>
+            <a:r>
+              <a:rPr lang="en-US" sz="1400">
+                <a:solidFill>
+                  <a:srgbClr val="FFFAF1"/>
+                </a:solidFill>
+                <a:latin typeface="DM Sans"/>
+                <a:ea typeface="DM Sans"/>
+                <a:cs typeface="DM Sans"/>
+                <a:sym typeface="DM Sans"/>
+              </a:rPr>
+              <a:t>this time.</a:t>
+            </a:r>
+            <a:endParaRPr sz="1200" dirty="0"/>
           </a:p>
         </p:txBody>
       </p:sp>
     </p:spTree>
-    <p:extLst>
-      <p:ext uri="{BB962C8B-B14F-4D97-AF65-F5344CB8AC3E}">
-        <p14:creationId xmlns:p14="http://schemas.microsoft.com/office/powerpoint/2010/main" val="133211007"/>
-      </p:ext>
-    </p:extLst>
   </p:cSld>
   <p:clrMapOvr>
     <a:masterClrMapping/>
   </p:clrMapOvr>
+  <p:transition>
+    <p:push/>
+  </p:transition>
 </p:sld>
 </file>
 
-<file path=ppt/slides/slide4.xml><?xml version="1.0" encoding="utf-8"?>
+<file path=ppt/slides/slide3.xml><?xml version="1.0" encoding="utf-8"?>
 <p:sld xmlns:a="http://schemas.openxmlformats.org/drawingml/2006/main" xmlns:r="http://schemas.openxmlformats.org/officeDocument/2006/relationships" xmlns:p="http://schemas.openxmlformats.org/presentationml/2006/main">
   <p:cSld>
     <p:spTree>
       <p:nvGrpSpPr>
-        <p:cNvPr id="1" name=""/>
+        <p:cNvPr id="1" name="Shape 274">
+          <a:extLst>
+            <a:ext uri="{FF2B5EF4-FFF2-40B4-BE49-F238E27FC236}">
+              <a16:creationId xmlns:a16="http://schemas.microsoft.com/office/drawing/2014/main" id="{8B31EF99-0A3C-FDBB-32CF-EA2C40AA6787}"/>
+            </a:ext>
+          </a:extLst>
+        </p:cNvPr>
         <p:cNvGrpSpPr/>
         <p:nvPr/>
       </p:nvGrpSpPr>
@@ -5158,48 +8036,149 @@
       </p:grpSpPr>
       <p:sp>
         <p:nvSpPr>
-          <p:cNvPr id="2" name="Title 1">
+          <p:cNvPr id="278" name="Google Shape;278;p23">
             <a:extLst>
               <a:ext uri="{FF2B5EF4-FFF2-40B4-BE49-F238E27FC236}">
-                <a16:creationId xmlns:a16="http://schemas.microsoft.com/office/drawing/2014/main" id="{82A03920-A48B-F3FE-9B09-5B136B90EF1D}"/>
+                <a16:creationId xmlns:a16="http://schemas.microsoft.com/office/drawing/2014/main" id="{D1BB4620-696B-D377-D1DF-6F1382F0C288}"/>
               </a:ext>
             </a:extLst>
           </p:cNvPr>
-          <p:cNvSpPr>
-            <a:spLocks noGrp="1"/>
-          </p:cNvSpPr>
-          <p:nvPr>
-            <p:ph type="title"/>
-          </p:nvPr>
-        </p:nvSpPr>
-        <p:spPr/>
-        <p:txBody>
-          <a:bodyPr/>
+          <p:cNvSpPr txBox="1"/>
+          <p:nvPr/>
+        </p:nvSpPr>
+        <p:spPr>
+          <a:xfrm>
+            <a:off x="1638965" y="484948"/>
+            <a:ext cx="8470709" cy="738664"/>
+          </a:xfrm>
+          <a:prstGeom prst="rect">
+            <a:avLst/>
+          </a:prstGeom>
+          <a:noFill/>
+          <a:ln>
+            <a:noFill/>
+          </a:ln>
+        </p:spPr>
+        <p:txBody>
+          <a:bodyPr spcFirstLastPara="1" wrap="square" lIns="0" tIns="0" rIns="0" bIns="0" anchor="t" anchorCtr="0">
+            <a:spAutoFit/>
+          </a:bodyPr>
           <a:lstStyle/>
           <a:p>
-            <a:endParaRPr lang="en-US"/>
+            <a:pPr algn="ctr">
+              <a:spcBef>
+                <a:spcPct val="0"/>
+              </a:spcBef>
+            </a:pPr>
+            <a:r>
+              <a:rPr lang="en-US" sz="4800" b="1" spc="-100" dirty="0">
+                <a:solidFill>
+                  <a:srgbClr val="000000"/>
+                </a:solidFill>
+                <a:latin typeface="DM Sans"/>
+                <a:sym typeface="DM Sans"/>
+              </a:rPr>
+              <a:t>Business Case</a:t>
+            </a:r>
+            <a:endParaRPr sz="4800" b="1" spc="-100" dirty="0">
+              <a:solidFill>
+                <a:srgbClr val="000000"/>
+              </a:solidFill>
+              <a:latin typeface="DM Sans"/>
+            </a:endParaRPr>
+          </a:p>
+        </p:txBody>
+      </p:sp>
+      <p:sp>
+        <p:nvSpPr>
+          <p:cNvPr id="279" name="Google Shape;279;p23">
+            <a:extLst>
+              <a:ext uri="{FF2B5EF4-FFF2-40B4-BE49-F238E27FC236}">
+                <a16:creationId xmlns:a16="http://schemas.microsoft.com/office/drawing/2014/main" id="{0AF21EBD-1FDC-2D2F-FBB8-D370362333AC}"/>
+              </a:ext>
+            </a:extLst>
+          </p:cNvPr>
+          <p:cNvSpPr txBox="1"/>
+          <p:nvPr/>
+        </p:nvSpPr>
+        <p:spPr>
+          <a:xfrm>
+            <a:off x="691924" y="1701665"/>
+            <a:ext cx="11297825" cy="3693319"/>
+          </a:xfrm>
+          <a:prstGeom prst="rect">
+            <a:avLst/>
+          </a:prstGeom>
+          <a:noFill/>
+          <a:ln>
+            <a:noFill/>
+          </a:ln>
+        </p:spPr>
+        <p:txBody>
+          <a:bodyPr spcFirstLastPara="1" wrap="square" lIns="0" tIns="0" rIns="0" bIns="0" anchor="t" anchorCtr="0">
+            <a:spAutoFit/>
+          </a:bodyPr>
+          <a:lstStyle/>
+          <a:p>
+            <a:pPr marL="457200" indent="-457200">
+              <a:buFont typeface="Arial" panose="020B0604020202020204" pitchFamily="34" charset="0"/>
+              <a:buChar char="•"/>
+            </a:pPr>
+            <a:r>
+              <a:rPr lang="en-US" sz="3000" dirty="0"/>
+              <a:t>Identify the top 3 predictors of stroke risk from the dataset and determine whether they are primarily lifestyle-based or health-based factors.</a:t>
+            </a:r>
+          </a:p>
+          <a:p>
+            <a:pPr marL="457200" indent="-457200">
+              <a:buFont typeface="Arial" panose="020B0604020202020204" pitchFamily="34" charset="0"/>
+              <a:buChar char="•"/>
+            </a:pPr>
+            <a:r>
+              <a:rPr lang="en-US" sz="3000" dirty="0"/>
+              <a:t>Transform complex health data into an actionable priority list to guide prevention strategies.</a:t>
+            </a:r>
+          </a:p>
+          <a:p>
+            <a:pPr marL="457200" indent="-457200">
+              <a:buFont typeface="Arial" panose="020B0604020202020204" pitchFamily="34" charset="0"/>
+              <a:buChar char="•"/>
+            </a:pPr>
+            <a:r>
+              <a:rPr lang="en-US" sz="3000" dirty="0"/>
+              <a:t>Enable proactive healthcare interventions that reduce preventable hospitalizations and improve long-term health outcomes.</a:t>
+            </a:r>
           </a:p>
         </p:txBody>
       </p:sp>
     </p:spTree>
     <p:extLst>
       <p:ext uri="{BB962C8B-B14F-4D97-AF65-F5344CB8AC3E}">
-        <p14:creationId xmlns:p14="http://schemas.microsoft.com/office/powerpoint/2010/main" val="4041828798"/>
+        <p14:creationId xmlns:p14="http://schemas.microsoft.com/office/powerpoint/2010/main" val="3083323049"/>
       </p:ext>
     </p:extLst>
   </p:cSld>
   <p:clrMapOvr>
     <a:masterClrMapping/>
   </p:clrMapOvr>
+  <p:transition>
+    <p:push/>
+  </p:transition>
 </p:sld>
 </file>
 
-<file path=ppt/slides/slide5.xml><?xml version="1.0" encoding="utf-8"?>
+<file path=ppt/slides/slide4.xml><?xml version="1.0" encoding="utf-8"?>
 <p:sld xmlns:a="http://schemas.openxmlformats.org/drawingml/2006/main" xmlns:r="http://schemas.openxmlformats.org/officeDocument/2006/relationships" xmlns:p="http://schemas.openxmlformats.org/presentationml/2006/main">
   <p:cSld>
     <p:spTree>
       <p:nvGrpSpPr>
-        <p:cNvPr id="1" name=""/>
+        <p:cNvPr id="1" name="Shape 274">
+          <a:extLst>
+            <a:ext uri="{FF2B5EF4-FFF2-40B4-BE49-F238E27FC236}">
+              <a16:creationId xmlns:a16="http://schemas.microsoft.com/office/drawing/2014/main" id="{8B31EF99-0A3C-FDBB-32CF-EA2C40AA6787}"/>
+            </a:ext>
+          </a:extLst>
+        </p:cNvPr>
         <p:cNvGrpSpPr/>
         <p:nvPr/>
       </p:nvGrpSpPr>
@@ -5213,74 +8192,10 @@
       </p:grpSpPr>
       <p:sp>
         <p:nvSpPr>
-          <p:cNvPr id="2" name="Title 1">
+          <p:cNvPr id="278" name="Google Shape;278;p23">
             <a:extLst>
               <a:ext uri="{FF2B5EF4-FFF2-40B4-BE49-F238E27FC236}">
-                <a16:creationId xmlns:a16="http://schemas.microsoft.com/office/drawing/2014/main" id="{8E0EC056-085F-0F32-063D-FB5BEB1009C7}"/>
-              </a:ext>
-            </a:extLst>
-          </p:cNvPr>
-          <p:cNvSpPr>
-            <a:spLocks noGrp="1"/>
-          </p:cNvSpPr>
-          <p:nvPr>
-            <p:ph type="title"/>
-          </p:nvPr>
-        </p:nvSpPr>
-        <p:spPr/>
-        <p:txBody>
-          <a:bodyPr/>
-          <a:lstStyle/>
-          <a:p>
-            <a:r>
-              <a:rPr lang="en-US" dirty="0"/>
-              <a:t>Stroke Class Distribution</a:t>
-            </a:r>
-          </a:p>
-        </p:txBody>
-      </p:sp>
-      <p:pic>
-        <p:nvPicPr>
-          <p:cNvPr id="4" name="Picture 3">
-            <a:extLst>
-              <a:ext uri="{FF2B5EF4-FFF2-40B4-BE49-F238E27FC236}">
-                <a16:creationId xmlns:a16="http://schemas.microsoft.com/office/drawing/2014/main" id="{A4B3F245-8DDD-53AB-8423-AACECF3B9218}"/>
-              </a:ext>
-            </a:extLst>
-          </p:cNvPr>
-          <p:cNvPicPr>
-            <a:picLocks noChangeAspect="1"/>
-          </p:cNvPicPr>
-          <p:nvPr/>
-        </p:nvPicPr>
-        <p:blipFill>
-          <a:blip r:embed="rId2">
-            <a:extLst>
-              <a:ext uri="{28A0092B-C50C-407E-A947-70E740481C1C}">
-                <a14:useLocalDpi xmlns:a14="http://schemas.microsoft.com/office/drawing/2010/main" val="0"/>
-              </a:ext>
-            </a:extLst>
-          </a:blip>
-          <a:stretch>
-            <a:fillRect/>
-          </a:stretch>
-        </p:blipFill>
-        <p:spPr>
-          <a:xfrm>
-            <a:off x="838200" y="2095802"/>
-            <a:ext cx="5303531" cy="4160528"/>
-          </a:xfrm>
-          <a:prstGeom prst="rect">
-            <a:avLst/>
-          </a:prstGeom>
-        </p:spPr>
-      </p:pic>
-      <p:sp>
-        <p:nvSpPr>
-          <p:cNvPr id="5" name="TextBox 4">
-            <a:extLst>
-              <a:ext uri="{FF2B5EF4-FFF2-40B4-BE49-F238E27FC236}">
-                <a16:creationId xmlns:a16="http://schemas.microsoft.com/office/drawing/2014/main" id="{2322F41E-E829-BDF5-12FB-66D0F18D9A14}"/>
+                <a16:creationId xmlns:a16="http://schemas.microsoft.com/office/drawing/2014/main" id="{D1BB4620-696B-D377-D1DF-6F1382F0C288}"/>
               </a:ext>
             </a:extLst>
           </p:cNvPr>
@@ -5289,58 +8204,136 @@
         </p:nvSpPr>
         <p:spPr>
           <a:xfrm>
-            <a:off x="6801648" y="3665044"/>
-            <a:ext cx="2725810" cy="1200329"/>
+            <a:off x="1638965" y="484948"/>
+            <a:ext cx="9932041" cy="738664"/>
           </a:xfrm>
           <a:prstGeom prst="rect">
             <a:avLst/>
           </a:prstGeom>
           <a:noFill/>
-        </p:spPr>
-        <p:txBody>
-          <a:bodyPr wrap="square" rtlCol="0">
+          <a:ln>
+            <a:noFill/>
+          </a:ln>
+        </p:spPr>
+        <p:txBody>
+          <a:bodyPr spcFirstLastPara="1" wrap="square" lIns="0" tIns="0" rIns="0" bIns="0" anchor="t" anchorCtr="0">
             <a:spAutoFit/>
           </a:bodyPr>
           <a:lstStyle/>
           <a:p>
-            <a:r>
-              <a:rPr lang="en-US" dirty="0"/>
-              <a:t>Percentage distribution: Class	      % </a:t>
-            </a:r>
-          </a:p>
-          <a:p>
-            <a:r>
-              <a:rPr lang="en-US" dirty="0"/>
-              <a:t>0	 95.13</a:t>
-            </a:r>
-          </a:p>
-          <a:p>
-            <a:r>
-              <a:rPr lang="en-US" dirty="0"/>
-              <a:t>1	 4.87</a:t>
-            </a:r>
+            <a:pPr algn="ctr">
+              <a:spcBef>
+                <a:spcPct val="0"/>
+              </a:spcBef>
+            </a:pPr>
+            <a:r>
+              <a:rPr lang="en-US" sz="4800" b="1" spc="-100" dirty="0">
+                <a:solidFill>
+                  <a:srgbClr val="000000"/>
+                </a:solidFill>
+                <a:latin typeface="DM Sans"/>
+                <a:sym typeface="DM Sans"/>
+              </a:rPr>
+              <a:t>The Problem to Tackle</a:t>
+            </a:r>
+            <a:endParaRPr sz="4800" b="1" spc="-100" dirty="0">
+              <a:solidFill>
+                <a:srgbClr val="000000"/>
+              </a:solidFill>
+              <a:latin typeface="DM Sans"/>
+            </a:endParaRPr>
+          </a:p>
+        </p:txBody>
+      </p:sp>
+      <p:sp>
+        <p:nvSpPr>
+          <p:cNvPr id="279" name="Google Shape;279;p23">
+            <a:extLst>
+              <a:ext uri="{FF2B5EF4-FFF2-40B4-BE49-F238E27FC236}">
+                <a16:creationId xmlns:a16="http://schemas.microsoft.com/office/drawing/2014/main" id="{0AF21EBD-1FDC-2D2F-FBB8-D370362333AC}"/>
+              </a:ext>
+            </a:extLst>
+          </p:cNvPr>
+          <p:cNvSpPr txBox="1"/>
+          <p:nvPr/>
+        </p:nvSpPr>
+        <p:spPr>
+          <a:xfrm>
+            <a:off x="691924" y="1701665"/>
+            <a:ext cx="11297825" cy="3447098"/>
+          </a:xfrm>
+          <a:prstGeom prst="rect">
+            <a:avLst/>
+          </a:prstGeom>
+          <a:noFill/>
+          <a:ln>
+            <a:noFill/>
+          </a:ln>
+        </p:spPr>
+        <p:txBody>
+          <a:bodyPr spcFirstLastPara="1" wrap="square" lIns="0" tIns="0" rIns="0" bIns="0" anchor="t" anchorCtr="0">
+            <a:spAutoFit/>
+          </a:bodyPr>
+          <a:lstStyle/>
+          <a:p>
+            <a:pPr marL="457200" indent="-457200">
+              <a:buFont typeface="Arial" panose="020B0604020202020204" pitchFamily="34" charset="0"/>
+              <a:buChar char="•"/>
+            </a:pPr>
+            <a:r>
+              <a:rPr lang="en-US" sz="3200" dirty="0"/>
+              <a:t>Stroke is a major global health burden, ranking as the 3rd leading cause of disability and mortality.</a:t>
+            </a:r>
+          </a:p>
+          <a:p>
+            <a:pPr marL="457200" indent="-457200">
+              <a:buFont typeface="Arial" panose="020B0604020202020204" pitchFamily="34" charset="0"/>
+              <a:buChar char="•"/>
+            </a:pPr>
+            <a:r>
+              <a:rPr lang="en-US" sz="3200" dirty="0"/>
+              <a:t>High economic impact: In Canada, average 1-year stroke costs exceed $33,000 per patient</a:t>
+            </a:r>
+          </a:p>
+          <a:p>
+            <a:pPr marL="457200" indent="-457200">
+              <a:buFont typeface="Arial" panose="020B0604020202020204" pitchFamily="34" charset="0"/>
+              <a:buChar char="•"/>
+            </a:pPr>
+            <a:r>
+              <a:rPr lang="en-US" sz="3200" dirty="0"/>
+              <a:t>Prevention gap: Preventive care is more effective and less costly than reactive treatment. Large amounts of data, make it difficult to identify the most critical risk factors to target</a:t>
+            </a:r>
+            <a:r>
+              <a:rPr lang="en-US" sz="3200" b="1" dirty="0"/>
+              <a:t>.</a:t>
+            </a:r>
+            <a:endParaRPr lang="en-US" sz="3200" dirty="0"/>
           </a:p>
         </p:txBody>
       </p:sp>
     </p:spTree>
     <p:extLst>
       <p:ext uri="{BB962C8B-B14F-4D97-AF65-F5344CB8AC3E}">
-        <p14:creationId xmlns:p14="http://schemas.microsoft.com/office/powerpoint/2010/main" val="3280902174"/>
+        <p14:creationId xmlns:p14="http://schemas.microsoft.com/office/powerpoint/2010/main" val="396651663"/>
       </p:ext>
     </p:extLst>
   </p:cSld>
   <p:clrMapOvr>
     <a:masterClrMapping/>
   </p:clrMapOvr>
+  <p:transition>
+    <p:push/>
+  </p:transition>
 </p:sld>
 </file>
 
-<file path=ppt/slides/slide6.xml><?xml version="1.0" encoding="utf-8"?>
+<file path=ppt/slides/slide5.xml><?xml version="1.0" encoding="utf-8"?>
 <p:sld xmlns:a="http://schemas.openxmlformats.org/drawingml/2006/main" xmlns:r="http://schemas.openxmlformats.org/officeDocument/2006/relationships" xmlns:p="http://schemas.openxmlformats.org/presentationml/2006/main">
   <p:cSld>
     <p:spTree>
       <p:nvGrpSpPr>
-        <p:cNvPr id="1" name=""/>
+        <p:cNvPr id="1" name="Shape 263"/>
         <p:cNvGrpSpPr/>
         <p:nvPr/>
       </p:nvGrpSpPr>
@@ -5354,168 +8347,58 @@
       </p:grpSpPr>
       <p:sp>
         <p:nvSpPr>
-          <p:cNvPr id="2" name="Title 1">
+          <p:cNvPr id="268" name="Google Shape;268;p22"/>
+          <p:cNvSpPr txBox="1"/>
+          <p:nvPr/>
+        </p:nvSpPr>
+        <p:spPr>
+          <a:xfrm>
+            <a:off x="610277" y="585856"/>
+            <a:ext cx="9584856" cy="738664"/>
+          </a:xfrm>
+          <a:prstGeom prst="rect">
+            <a:avLst/>
+          </a:prstGeom>
+          <a:noFill/>
+          <a:ln>
+            <a:noFill/>
+          </a:ln>
+        </p:spPr>
+        <p:txBody>
+          <a:bodyPr spcFirstLastPara="1" wrap="square" lIns="0" tIns="0" rIns="0" bIns="0" anchor="t" anchorCtr="0">
+            <a:spAutoFit/>
+          </a:bodyPr>
+          <a:lstStyle/>
+          <a:p>
+            <a:pPr algn="ctr">
+              <a:spcBef>
+                <a:spcPct val="0"/>
+              </a:spcBef>
+            </a:pPr>
+            <a:r>
+              <a:rPr lang="en-US" sz="4800" b="1" spc="-100" dirty="0">
+                <a:solidFill>
+                  <a:srgbClr val="000000"/>
+                </a:solidFill>
+                <a:latin typeface="DM Sans"/>
+              </a:rPr>
+              <a:t>Stroke Class Distribution</a:t>
+            </a:r>
+            <a:endParaRPr sz="4800" b="1" spc="-100" dirty="0">
+              <a:solidFill>
+                <a:srgbClr val="000000"/>
+              </a:solidFill>
+              <a:latin typeface="DM Sans"/>
+            </a:endParaRPr>
+          </a:p>
+        </p:txBody>
+      </p:sp>
+      <p:pic>
+        <p:nvPicPr>
+          <p:cNvPr id="2" name="Picture 1">
             <a:extLst>
               <a:ext uri="{FF2B5EF4-FFF2-40B4-BE49-F238E27FC236}">
-                <a16:creationId xmlns:a16="http://schemas.microsoft.com/office/drawing/2014/main" id="{ECEBE8FA-3692-BB7A-90A2-26E0BD516E51}"/>
-              </a:ext>
-            </a:extLst>
-          </p:cNvPr>
-          <p:cNvSpPr>
-            <a:spLocks noGrp="1"/>
-          </p:cNvSpPr>
-          <p:nvPr>
-            <p:ph type="title"/>
-          </p:nvPr>
-        </p:nvSpPr>
-        <p:spPr/>
-        <p:txBody>
-          <a:bodyPr/>
-          <a:lstStyle/>
-          <a:p>
-            <a:r>
-              <a:rPr lang="en-US" dirty="0"/>
-              <a:t>Normalized Box Plot</a:t>
-            </a:r>
-          </a:p>
-        </p:txBody>
-      </p:sp>
-      <p:pic>
-        <p:nvPicPr>
-          <p:cNvPr id="4" name="Picture 3">
-            <a:extLst>
-              <a:ext uri="{FF2B5EF4-FFF2-40B4-BE49-F238E27FC236}">
-                <a16:creationId xmlns:a16="http://schemas.microsoft.com/office/drawing/2014/main" id="{576EB070-C1B4-0D9E-118D-8F3F0CD3CDF4}"/>
-              </a:ext>
-            </a:extLst>
-          </p:cNvPr>
-          <p:cNvPicPr>
-            <a:picLocks noChangeAspect="1"/>
-          </p:cNvPicPr>
-          <p:nvPr/>
-        </p:nvPicPr>
-        <p:blipFill>
-          <a:blip r:embed="rId2">
-            <a:extLst>
-              <a:ext uri="{28A0092B-C50C-407E-A947-70E740481C1C}">
-                <a14:useLocalDpi xmlns:a14="http://schemas.microsoft.com/office/drawing/2010/main" val="0"/>
-              </a:ext>
-            </a:extLst>
-          </a:blip>
-          <a:stretch>
-            <a:fillRect/>
-          </a:stretch>
-        </p:blipFill>
-        <p:spPr>
-          <a:xfrm>
-            <a:off x="1777792" y="1839434"/>
-            <a:ext cx="8597669" cy="4653442"/>
-          </a:xfrm>
-          <a:prstGeom prst="rect">
-            <a:avLst/>
-          </a:prstGeom>
-        </p:spPr>
-      </p:pic>
-    </p:spTree>
-    <p:extLst>
-      <p:ext uri="{BB962C8B-B14F-4D97-AF65-F5344CB8AC3E}">
-        <p14:creationId xmlns:p14="http://schemas.microsoft.com/office/powerpoint/2010/main" val="1187541308"/>
-      </p:ext>
-    </p:extLst>
-  </p:cSld>
-  <p:clrMapOvr>
-    <a:masterClrMapping/>
-  </p:clrMapOvr>
-</p:sld>
-</file>
-
-<file path=ppt/slides/slide7.xml><?xml version="1.0" encoding="utf-8"?>
-<p:sld xmlns:a="http://schemas.openxmlformats.org/drawingml/2006/main" xmlns:r="http://schemas.openxmlformats.org/officeDocument/2006/relationships" xmlns:p="http://schemas.openxmlformats.org/presentationml/2006/main">
-  <p:cSld>
-    <p:spTree>
-      <p:nvGrpSpPr>
-        <p:cNvPr id="1" name=""/>
-        <p:cNvGrpSpPr/>
-        <p:nvPr/>
-      </p:nvGrpSpPr>
-      <p:grpSpPr>
-        <a:xfrm>
-          <a:off x="0" y="0"/>
-          <a:ext cx="0" cy="0"/>
-          <a:chOff x="0" y="0"/>
-          <a:chExt cx="0" cy="0"/>
-        </a:xfrm>
-      </p:grpSpPr>
-      <p:sp>
-        <p:nvSpPr>
-          <p:cNvPr id="2" name="Title 1">
-            <a:extLst>
-              <a:ext uri="{FF2B5EF4-FFF2-40B4-BE49-F238E27FC236}">
-                <a16:creationId xmlns:a16="http://schemas.microsoft.com/office/drawing/2014/main" id="{8D57C393-384C-21C7-9583-BD885425F068}"/>
-              </a:ext>
-            </a:extLst>
-          </p:cNvPr>
-          <p:cNvSpPr>
-            <a:spLocks noGrp="1"/>
-          </p:cNvSpPr>
-          <p:nvPr>
-            <p:ph type="title"/>
-          </p:nvPr>
-        </p:nvSpPr>
-        <p:spPr/>
-        <p:txBody>
-          <a:bodyPr/>
-          <a:lstStyle/>
-          <a:p>
-            <a:r>
-              <a:rPr lang="en-US" dirty="0"/>
-              <a:t>Box Plot by Class</a:t>
-            </a:r>
-          </a:p>
-        </p:txBody>
-      </p:sp>
-      <p:pic>
-        <p:nvPicPr>
-          <p:cNvPr id="4" name="Picture 3">
-            <a:extLst>
-              <a:ext uri="{FF2B5EF4-FFF2-40B4-BE49-F238E27FC236}">
-                <a16:creationId xmlns:a16="http://schemas.microsoft.com/office/drawing/2014/main" id="{858E656D-BAC2-BCA8-74AB-AE92C2A52B7C}"/>
-              </a:ext>
-            </a:extLst>
-          </p:cNvPr>
-          <p:cNvPicPr>
-            <a:picLocks noChangeAspect="1"/>
-          </p:cNvPicPr>
-          <p:nvPr/>
-        </p:nvPicPr>
-        <p:blipFill>
-          <a:blip r:embed="rId2">
-            <a:extLst>
-              <a:ext uri="{28A0092B-C50C-407E-A947-70E740481C1C}">
-                <a14:useLocalDpi xmlns:a14="http://schemas.microsoft.com/office/drawing/2010/main" val="0"/>
-              </a:ext>
-            </a:extLst>
-          </a:blip>
-          <a:stretch>
-            <a:fillRect/>
-          </a:stretch>
-        </p:blipFill>
-        <p:spPr>
-          <a:xfrm>
-            <a:off x="325140" y="1853534"/>
-            <a:ext cx="3437272" cy="2543969"/>
-          </a:xfrm>
-          <a:prstGeom prst="rect">
-            <a:avLst/>
-          </a:prstGeom>
-        </p:spPr>
-      </p:pic>
-      <p:pic>
-        <p:nvPicPr>
-          <p:cNvPr id="6" name="Picture 5">
-            <a:extLst>
-              <a:ext uri="{FF2B5EF4-FFF2-40B4-BE49-F238E27FC236}">
-                <a16:creationId xmlns:a16="http://schemas.microsoft.com/office/drawing/2014/main" id="{F6D7F127-7CFF-D693-1011-280CD6380DBB}"/>
+                <a16:creationId xmlns:a16="http://schemas.microsoft.com/office/drawing/2014/main" id="{71A07D56-E8C5-9FF7-C661-6D8888A99021}"/>
               </a:ext>
             </a:extLst>
           </p:cNvPr>
@@ -5538,20 +8421,521 @@
         </p:blipFill>
         <p:spPr>
           <a:xfrm>
-            <a:off x="3762412" y="1811114"/>
-            <a:ext cx="3854805" cy="2805441"/>
+            <a:off x="811474" y="1676356"/>
+            <a:ext cx="5546596" cy="4351209"/>
           </a:xfrm>
           <a:prstGeom prst="rect">
             <a:avLst/>
           </a:prstGeom>
+          <a:ln w="19050">
+            <a:solidFill>
+              <a:schemeClr val="tx1"/>
+            </a:solidFill>
+          </a:ln>
+        </p:spPr>
+      </p:pic>
+      <p:sp>
+        <p:nvSpPr>
+          <p:cNvPr id="3" name="TextBox 2">
+            <a:extLst>
+              <a:ext uri="{FF2B5EF4-FFF2-40B4-BE49-F238E27FC236}">
+                <a16:creationId xmlns:a16="http://schemas.microsoft.com/office/drawing/2014/main" id="{AD85F488-7E4C-8F44-ED85-A8704FF7952D}"/>
+              </a:ext>
+            </a:extLst>
+          </p:cNvPr>
+          <p:cNvSpPr txBox="1"/>
+          <p:nvPr/>
+        </p:nvSpPr>
+        <p:spPr>
+          <a:xfrm>
+            <a:off x="7469322" y="1942240"/>
+            <a:ext cx="3332561" cy="1200329"/>
+          </a:xfrm>
+          <a:prstGeom prst="rect">
+            <a:avLst/>
+          </a:prstGeom>
+          <a:noFill/>
+        </p:spPr>
+        <p:txBody>
+          <a:bodyPr wrap="square" rtlCol="0">
+            <a:spAutoFit/>
+          </a:bodyPr>
+          <a:lstStyle/>
+          <a:p>
+            <a:r>
+              <a:rPr lang="en-US" dirty="0"/>
+              <a:t>Percentage distribution: Class	      	      % </a:t>
+            </a:r>
+          </a:p>
+          <a:p>
+            <a:r>
+              <a:rPr lang="en-US" dirty="0"/>
+              <a:t>0 (No stroke)	 95.13</a:t>
+            </a:r>
+          </a:p>
+          <a:p>
+            <a:r>
+              <a:rPr lang="en-US" dirty="0"/>
+              <a:t>1 (Stroke)	 4.87</a:t>
+            </a:r>
+          </a:p>
+        </p:txBody>
+      </p:sp>
+      <p:sp>
+        <p:nvSpPr>
+          <p:cNvPr id="4" name="TextBox 3">
+            <a:extLst>
+              <a:ext uri="{FF2B5EF4-FFF2-40B4-BE49-F238E27FC236}">
+                <a16:creationId xmlns:a16="http://schemas.microsoft.com/office/drawing/2014/main" id="{C590DB31-32DA-7922-B217-9A1505A0685E}"/>
+              </a:ext>
+            </a:extLst>
+          </p:cNvPr>
+          <p:cNvSpPr txBox="1"/>
+          <p:nvPr/>
+        </p:nvSpPr>
+        <p:spPr>
+          <a:xfrm>
+            <a:off x="7045128" y="4399095"/>
+            <a:ext cx="4695257" cy="923330"/>
+          </a:xfrm>
+          <a:prstGeom prst="rect">
+            <a:avLst/>
+          </a:prstGeom>
+          <a:noFill/>
+        </p:spPr>
+        <p:txBody>
+          <a:bodyPr wrap="square" rtlCol="0">
+            <a:spAutoFit/>
+          </a:bodyPr>
+          <a:lstStyle/>
+          <a:p>
+            <a:r>
+              <a:rPr lang="en-US" dirty="0"/>
+              <a:t>Takeaways: </a:t>
+            </a:r>
+          </a:p>
+          <a:p>
+            <a:pPr marL="571500" indent="-571500">
+              <a:buFont typeface="Arial" panose="020B0604020202020204" pitchFamily="34" charset="0"/>
+              <a:buChar char="•"/>
+            </a:pPr>
+            <a:r>
+              <a:rPr lang="en-US" dirty="0"/>
+              <a:t>The dataset is highly imbalanced (5% positive class)</a:t>
+            </a:r>
+          </a:p>
+        </p:txBody>
+      </p:sp>
+    </p:spTree>
+  </p:cSld>
+  <p:clrMapOvr>
+    <a:masterClrMapping/>
+  </p:clrMapOvr>
+  <p:transition>
+    <p:push/>
+  </p:transition>
+</p:sld>
+</file>
+
+<file path=ppt/slides/slide6.xml><?xml version="1.0" encoding="utf-8"?>
+<p:sld xmlns:a="http://schemas.openxmlformats.org/drawingml/2006/main" xmlns:r="http://schemas.openxmlformats.org/officeDocument/2006/relationships" xmlns:p="http://schemas.openxmlformats.org/presentationml/2006/main">
+  <p:cSld>
+    <p:spTree>
+      <p:nvGrpSpPr>
+        <p:cNvPr id="1" name="Shape 274"/>
+        <p:cNvGrpSpPr/>
+        <p:nvPr/>
+      </p:nvGrpSpPr>
+      <p:grpSpPr>
+        <a:xfrm>
+          <a:off x="0" y="0"/>
+          <a:ext cx="0" cy="0"/>
+          <a:chOff x="0" y="0"/>
+          <a:chExt cx="0" cy="0"/>
+        </a:xfrm>
+      </p:grpSpPr>
+      <p:cxnSp>
+        <p:nvCxnSpPr>
+          <p:cNvPr id="277" name="Google Shape;277;p23"/>
+          <p:cNvCxnSpPr/>
+          <p:nvPr/>
+        </p:nvCxnSpPr>
+        <p:spPr>
+          <a:xfrm rot="10800000">
+            <a:off x="8034163" y="-10202"/>
+            <a:ext cx="12700" cy="6859420"/>
+          </a:xfrm>
+          <a:prstGeom prst="straightConnector1">
+            <a:avLst/>
+          </a:prstGeom>
+          <a:noFill/>
+          <a:ln w="19050" cap="flat" cmpd="sng">
+            <a:solidFill>
+              <a:srgbClr val="000000"/>
+            </a:solidFill>
+            <a:prstDash val="solid"/>
+            <a:round/>
+            <a:headEnd type="none" w="sm" len="sm"/>
+            <a:tailEnd type="none" w="sm" len="sm"/>
+          </a:ln>
+        </p:spPr>
+      </p:cxnSp>
+      <p:sp>
+        <p:nvSpPr>
+          <p:cNvPr id="278" name="Google Shape;278;p23"/>
+          <p:cNvSpPr txBox="1"/>
+          <p:nvPr/>
+        </p:nvSpPr>
+        <p:spPr>
+          <a:xfrm>
+            <a:off x="7514014" y="977462"/>
+            <a:ext cx="5161461" cy="1477328"/>
+          </a:xfrm>
+          <a:prstGeom prst="rect">
+            <a:avLst/>
+          </a:prstGeom>
+          <a:noFill/>
+          <a:ln>
+            <a:noFill/>
+          </a:ln>
+        </p:spPr>
+        <p:txBody>
+          <a:bodyPr spcFirstLastPara="1" wrap="square" lIns="0" tIns="0" rIns="0" bIns="0" anchor="t" anchorCtr="0">
+            <a:spAutoFit/>
+          </a:bodyPr>
+          <a:lstStyle/>
+          <a:p>
+            <a:pPr algn="ctr">
+              <a:spcBef>
+                <a:spcPct val="0"/>
+              </a:spcBef>
+            </a:pPr>
+            <a:r>
+              <a:rPr lang="en-US" sz="4800" b="1" spc="-100" dirty="0">
+                <a:solidFill>
+                  <a:srgbClr val="000000"/>
+                </a:solidFill>
+                <a:latin typeface="DM Sans"/>
+                <a:sym typeface="DM Sans"/>
+              </a:rPr>
+              <a:t>Normalized</a:t>
+            </a:r>
+          </a:p>
+          <a:p>
+            <a:pPr algn="ctr">
+              <a:spcBef>
+                <a:spcPct val="0"/>
+              </a:spcBef>
+            </a:pPr>
+            <a:r>
+              <a:rPr lang="en-US" sz="4800" b="1" spc="-100" dirty="0">
+                <a:solidFill>
+                  <a:srgbClr val="000000"/>
+                </a:solidFill>
+                <a:latin typeface="DM Sans"/>
+                <a:sym typeface="DM Sans"/>
+              </a:rPr>
+              <a:t>Box Plot</a:t>
+            </a:r>
+            <a:endParaRPr sz="4800" b="1" spc="-100" dirty="0">
+              <a:solidFill>
+                <a:srgbClr val="000000"/>
+              </a:solidFill>
+              <a:latin typeface="DM Sans"/>
+            </a:endParaRPr>
+          </a:p>
+        </p:txBody>
+      </p:sp>
+      <p:pic>
+        <p:nvPicPr>
+          <p:cNvPr id="2" name="Picture 1">
+            <a:extLst>
+              <a:ext uri="{FF2B5EF4-FFF2-40B4-BE49-F238E27FC236}">
+                <a16:creationId xmlns:a16="http://schemas.microsoft.com/office/drawing/2014/main" id="{3013F98F-F016-44BD-F010-15306E3E37AC}"/>
+              </a:ext>
+            </a:extLst>
+          </p:cNvPr>
+          <p:cNvPicPr>
+            <a:picLocks noChangeAspect="1"/>
+          </p:cNvPicPr>
+          <p:nvPr/>
+        </p:nvPicPr>
+        <p:blipFill>
+          <a:blip r:embed="rId3">
+            <a:extLst>
+              <a:ext uri="{28A0092B-C50C-407E-A947-70E740481C1C}">
+                <a14:useLocalDpi xmlns:a14="http://schemas.microsoft.com/office/drawing/2010/main" val="0"/>
+              </a:ext>
+            </a:extLst>
+          </a:blip>
+          <a:stretch>
+            <a:fillRect/>
+          </a:stretch>
+        </p:blipFill>
+        <p:spPr>
+          <a:xfrm>
+            <a:off x="298261" y="1430141"/>
+            <a:ext cx="7351082" cy="3978734"/>
+          </a:xfrm>
+          <a:prstGeom prst="rect">
+            <a:avLst/>
+          </a:prstGeom>
+          <a:noFill/>
+          <a:ln w="19050">
+            <a:solidFill>
+              <a:schemeClr val="tx1"/>
+            </a:solidFill>
+          </a:ln>
+        </p:spPr>
+      </p:pic>
+      <p:sp>
+        <p:nvSpPr>
+          <p:cNvPr id="3" name="TextBox 2">
+            <a:extLst>
+              <a:ext uri="{FF2B5EF4-FFF2-40B4-BE49-F238E27FC236}">
+                <a16:creationId xmlns:a16="http://schemas.microsoft.com/office/drawing/2014/main" id="{4D96EB63-2418-7F70-8C36-AF98EA97CC75}"/>
+              </a:ext>
+            </a:extLst>
+          </p:cNvPr>
+          <p:cNvSpPr txBox="1"/>
+          <p:nvPr/>
+        </p:nvSpPr>
+        <p:spPr>
+          <a:xfrm>
+            <a:off x="8555421" y="3037490"/>
+            <a:ext cx="2938515" cy="1754326"/>
+          </a:xfrm>
+          <a:prstGeom prst="rect">
+            <a:avLst/>
+          </a:prstGeom>
+          <a:noFill/>
+        </p:spPr>
+        <p:txBody>
+          <a:bodyPr wrap="square" rtlCol="0">
+            <a:spAutoFit/>
+          </a:bodyPr>
+          <a:lstStyle/>
+          <a:p>
+            <a:pPr marL="285750" indent="-285750">
+              <a:buFontTx/>
+              <a:buChar char="-"/>
+            </a:pPr>
+            <a:r>
+              <a:rPr lang="en-CA" dirty="0"/>
+              <a:t>Note how age is largely devoid of outliers, but glucose and BMI are not</a:t>
+            </a:r>
+          </a:p>
+          <a:p>
+            <a:pPr marL="285750" indent="-285750">
+              <a:buFontTx/>
+              <a:buChar char="-"/>
+            </a:pPr>
+            <a:r>
+              <a:rPr lang="en-CA" dirty="0"/>
+              <a:t>How does age affect these factors, and how resilient they are?</a:t>
+            </a:r>
+          </a:p>
+        </p:txBody>
+      </p:sp>
+    </p:spTree>
+  </p:cSld>
+  <p:clrMapOvr>
+    <a:masterClrMapping/>
+  </p:clrMapOvr>
+  <p:transition>
+    <p:push/>
+  </p:transition>
+</p:sld>
+</file>
+
+<file path=ppt/slides/slide7.xml><?xml version="1.0" encoding="utf-8"?>
+<p:sld xmlns:a="http://schemas.openxmlformats.org/drawingml/2006/main" xmlns:r="http://schemas.openxmlformats.org/officeDocument/2006/relationships" xmlns:p="http://schemas.openxmlformats.org/presentationml/2006/main">
+  <p:cSld>
+    <p:spTree>
+      <p:nvGrpSpPr>
+        <p:cNvPr id="1" name="Shape 263">
+          <a:extLst>
+            <a:ext uri="{FF2B5EF4-FFF2-40B4-BE49-F238E27FC236}">
+              <a16:creationId xmlns:a16="http://schemas.microsoft.com/office/drawing/2014/main" id="{947DD4A1-7A93-C10E-5A07-4EC5C681639F}"/>
+            </a:ext>
+          </a:extLst>
+        </p:cNvPr>
+        <p:cNvGrpSpPr/>
+        <p:nvPr/>
+      </p:nvGrpSpPr>
+      <p:grpSpPr>
+        <a:xfrm>
+          <a:off x="0" y="0"/>
+          <a:ext cx="0" cy="0"/>
+          <a:chOff x="0" y="0"/>
+          <a:chExt cx="0" cy="0"/>
+        </a:xfrm>
+      </p:grpSpPr>
+      <p:cxnSp>
+        <p:nvCxnSpPr>
+          <p:cNvPr id="266" name="Google Shape;266;p22">
+            <a:extLst>
+              <a:ext uri="{FF2B5EF4-FFF2-40B4-BE49-F238E27FC236}">
+                <a16:creationId xmlns:a16="http://schemas.microsoft.com/office/drawing/2014/main" id="{4720075E-3549-58CE-84BB-F4BF021C35F2}"/>
+              </a:ext>
+            </a:extLst>
+          </p:cNvPr>
+          <p:cNvCxnSpPr/>
+          <p:nvPr/>
+        </p:nvCxnSpPr>
+        <p:spPr>
+          <a:xfrm rot="10800000">
+            <a:off x="-63217" y="3422650"/>
+            <a:ext cx="12293931" cy="0"/>
+          </a:xfrm>
+          <a:prstGeom prst="straightConnector1">
+            <a:avLst/>
+          </a:prstGeom>
+          <a:noFill/>
+          <a:ln w="19050" cap="flat" cmpd="sng">
+            <a:solidFill>
+              <a:srgbClr val="000000"/>
+            </a:solidFill>
+            <a:prstDash val="solid"/>
+            <a:round/>
+            <a:headEnd type="none" w="sm" len="sm"/>
+            <a:tailEnd type="none" w="sm" len="sm"/>
+          </a:ln>
+        </p:spPr>
+      </p:cxnSp>
+      <p:cxnSp>
+        <p:nvCxnSpPr>
+          <p:cNvPr id="267" name="Google Shape;267;p22">
+            <a:extLst>
+              <a:ext uri="{FF2B5EF4-FFF2-40B4-BE49-F238E27FC236}">
+                <a16:creationId xmlns:a16="http://schemas.microsoft.com/office/drawing/2014/main" id="{60A48628-491D-52BC-6A6C-51D0ABB32F30}"/>
+              </a:ext>
+            </a:extLst>
+          </p:cNvPr>
+          <p:cNvCxnSpPr/>
+          <p:nvPr/>
+        </p:nvCxnSpPr>
+        <p:spPr>
+          <a:xfrm rot="10800000">
+            <a:off x="6096000" y="0"/>
+            <a:ext cx="12700" cy="6859420"/>
+          </a:xfrm>
+          <a:prstGeom prst="straightConnector1">
+            <a:avLst/>
+          </a:prstGeom>
+          <a:noFill/>
+          <a:ln w="19050" cap="flat" cmpd="sng">
+            <a:solidFill>
+              <a:srgbClr val="000000"/>
+            </a:solidFill>
+            <a:prstDash val="solid"/>
+            <a:round/>
+            <a:headEnd type="none" w="sm" len="sm"/>
+            <a:tailEnd type="none" w="sm" len="sm"/>
+          </a:ln>
+        </p:spPr>
+      </p:cxnSp>
+      <p:sp>
+        <p:nvSpPr>
+          <p:cNvPr id="268" name="Google Shape;268;p22">
+            <a:extLst>
+              <a:ext uri="{FF2B5EF4-FFF2-40B4-BE49-F238E27FC236}">
+                <a16:creationId xmlns:a16="http://schemas.microsoft.com/office/drawing/2014/main" id="{2C79D34E-94D8-D801-ABDE-B73F1E41CFCB}"/>
+              </a:ext>
+            </a:extLst>
+          </p:cNvPr>
+          <p:cNvSpPr txBox="1"/>
+          <p:nvPr/>
+        </p:nvSpPr>
+        <p:spPr>
+          <a:xfrm>
+            <a:off x="610276" y="1015885"/>
+            <a:ext cx="4863193" cy="738664"/>
+          </a:xfrm>
+          <a:prstGeom prst="rect">
+            <a:avLst/>
+          </a:prstGeom>
+          <a:noFill/>
+          <a:ln>
+            <a:noFill/>
+          </a:ln>
+        </p:spPr>
+        <p:txBody>
+          <a:bodyPr spcFirstLastPara="1" wrap="square" lIns="0" tIns="0" rIns="0" bIns="0" anchor="t" anchorCtr="0">
+            <a:spAutoFit/>
+          </a:bodyPr>
+          <a:lstStyle/>
+          <a:p>
+            <a:pPr algn="ctr">
+              <a:spcBef>
+                <a:spcPct val="0"/>
+              </a:spcBef>
+            </a:pPr>
+            <a:r>
+              <a:rPr lang="en-US" sz="4800" b="1" spc="-100" dirty="0">
+                <a:solidFill>
+                  <a:srgbClr val="000000"/>
+                </a:solidFill>
+                <a:latin typeface="DM Sans"/>
+              </a:rPr>
+              <a:t>Bar Plot by Class</a:t>
+            </a:r>
+            <a:endParaRPr sz="4800" b="1" spc="-100" dirty="0">
+              <a:solidFill>
+                <a:srgbClr val="000000"/>
+              </a:solidFill>
+              <a:latin typeface="DM Sans"/>
+            </a:endParaRPr>
+          </a:p>
+        </p:txBody>
+      </p:sp>
+      <p:pic>
+        <p:nvPicPr>
+          <p:cNvPr id="5" name="Picture 4">
+            <a:extLst>
+              <a:ext uri="{FF2B5EF4-FFF2-40B4-BE49-F238E27FC236}">
+                <a16:creationId xmlns:a16="http://schemas.microsoft.com/office/drawing/2014/main" id="{B6F19372-0553-7137-2291-67799FF3C010}"/>
+              </a:ext>
+            </a:extLst>
+          </p:cNvPr>
+          <p:cNvPicPr>
+            <a:picLocks noChangeAspect="1"/>
+          </p:cNvPicPr>
+          <p:nvPr/>
+        </p:nvPicPr>
+        <p:blipFill>
+          <a:blip r:embed="rId3">
+            <a:extLst>
+              <a:ext uri="{28A0092B-C50C-407E-A947-70E740481C1C}">
+                <a14:useLocalDpi xmlns:a14="http://schemas.microsoft.com/office/drawing/2010/main" val="0"/>
+              </a:ext>
+            </a:extLst>
+          </a:blip>
+          <a:stretch>
+            <a:fillRect/>
+          </a:stretch>
+        </p:blipFill>
+        <p:spPr>
+          <a:xfrm>
+            <a:off x="1150323" y="3809474"/>
+            <a:ext cx="3437272" cy="2543969"/>
+          </a:xfrm>
+          <a:prstGeom prst="rect">
+            <a:avLst/>
+          </a:prstGeom>
+          <a:ln w="19050">
+            <a:solidFill>
+              <a:srgbClr val="000000"/>
+            </a:solidFill>
+          </a:ln>
         </p:spPr>
       </p:pic>
       <p:pic>
         <p:nvPicPr>
-          <p:cNvPr id="8" name="Picture 7">
+          <p:cNvPr id="6" name="Picture 5">
             <a:extLst>
               <a:ext uri="{FF2B5EF4-FFF2-40B4-BE49-F238E27FC236}">
-                <a16:creationId xmlns:a16="http://schemas.microsoft.com/office/drawing/2014/main" id="{63689DEB-E838-7006-4D44-F5CD99529BE1}"/>
+                <a16:creationId xmlns:a16="http://schemas.microsoft.com/office/drawing/2014/main" id="{BF2D48C9-B9D9-3D2B-9218-FC264F29C9D4}"/>
               </a:ext>
             </a:extLst>
           </p:cNvPr>
@@ -5574,24 +8958,73 @@
         </p:blipFill>
         <p:spPr>
           <a:xfrm>
-            <a:off x="7617216" y="1825430"/>
+            <a:off x="7466260" y="3809474"/>
+            <a:ext cx="3626836" cy="2639530"/>
+          </a:xfrm>
+          <a:prstGeom prst="rect">
+            <a:avLst/>
+          </a:prstGeom>
+          <a:ln w="19050">
+            <a:solidFill>
+              <a:srgbClr val="000000"/>
+            </a:solidFill>
+          </a:ln>
+        </p:spPr>
+      </p:pic>
+      <p:pic>
+        <p:nvPicPr>
+          <p:cNvPr id="7" name="Picture 6">
+            <a:extLst>
+              <a:ext uri="{FF2B5EF4-FFF2-40B4-BE49-F238E27FC236}">
+                <a16:creationId xmlns:a16="http://schemas.microsoft.com/office/drawing/2014/main" id="{0B9634D9-7FC0-117B-8A62-3B88358535A7}"/>
+              </a:ext>
+            </a:extLst>
+          </p:cNvPr>
+          <p:cNvPicPr>
+            <a:picLocks noChangeAspect="1"/>
+          </p:cNvPicPr>
+          <p:nvPr/>
+        </p:nvPicPr>
+        <p:blipFill>
+          <a:blip r:embed="rId5">
+            <a:extLst>
+              <a:ext uri="{28A0092B-C50C-407E-A947-70E740481C1C}">
+                <a14:useLocalDpi xmlns:a14="http://schemas.microsoft.com/office/drawing/2010/main" val="0"/>
+              </a:ext>
+            </a:extLst>
+          </a:blip>
+          <a:stretch>
+            <a:fillRect/>
+          </a:stretch>
+        </p:blipFill>
+        <p:spPr>
+          <a:xfrm>
+            <a:off x="7453030" y="517489"/>
             <a:ext cx="3653295" cy="2658787"/>
           </a:xfrm>
           <a:prstGeom prst="rect">
             <a:avLst/>
           </a:prstGeom>
+          <a:ln w="19050">
+            <a:solidFill>
+              <a:srgbClr val="000000"/>
+            </a:solidFill>
+          </a:ln>
         </p:spPr>
       </p:pic>
     </p:spTree>
     <p:extLst>
       <p:ext uri="{BB962C8B-B14F-4D97-AF65-F5344CB8AC3E}">
-        <p14:creationId xmlns:p14="http://schemas.microsoft.com/office/powerpoint/2010/main" val="3816312345"/>
+        <p14:creationId xmlns:p14="http://schemas.microsoft.com/office/powerpoint/2010/main" val="2137934500"/>
       </p:ext>
     </p:extLst>
   </p:cSld>
   <p:clrMapOvr>
     <a:masterClrMapping/>
   </p:clrMapOvr>
+  <p:transition>
+    <p:push/>
+  </p:transition>
 </p:sld>
 </file>
 
@@ -5600,7 +9033,13 @@
   <p:cSld>
     <p:spTree>
       <p:nvGrpSpPr>
-        <p:cNvPr id="1" name=""/>
+        <p:cNvPr id="1" name="Shape 263">
+          <a:extLst>
+            <a:ext uri="{FF2B5EF4-FFF2-40B4-BE49-F238E27FC236}">
+              <a16:creationId xmlns:a16="http://schemas.microsoft.com/office/drawing/2014/main" id="{1683D3BF-B4ED-42E6-86A6-2A1EAF00F992}"/>
+            </a:ext>
+          </a:extLst>
+        </p:cNvPr>
         <p:cNvGrpSpPr/>
         <p:nvPr/>
       </p:nvGrpSpPr>
@@ -5612,81 +9051,124 @@
           <a:chExt cx="0" cy="0"/>
         </a:xfrm>
       </p:grpSpPr>
-      <p:sp>
-        <p:nvSpPr>
-          <p:cNvPr id="2" name="Title 1">
+      <p:cxnSp>
+        <p:nvCxnSpPr>
+          <p:cNvPr id="266" name="Google Shape;266;p22">
             <a:extLst>
               <a:ext uri="{FF2B5EF4-FFF2-40B4-BE49-F238E27FC236}">
-                <a16:creationId xmlns:a16="http://schemas.microsoft.com/office/drawing/2014/main" id="{7265E4E6-FAAA-7E9D-7F63-701795397158}"/>
+                <a16:creationId xmlns:a16="http://schemas.microsoft.com/office/drawing/2014/main" id="{6C4CB194-3F99-F963-06DC-A6BAC75D6959}"/>
               </a:ext>
             </a:extLst>
           </p:cNvPr>
-          <p:cNvSpPr>
-            <a:spLocks noGrp="1"/>
-          </p:cNvSpPr>
-          <p:nvPr>
-            <p:ph type="title"/>
-          </p:nvPr>
-        </p:nvSpPr>
-        <p:spPr>
-          <a:xfrm>
-            <a:off x="838200" y="365125"/>
-            <a:ext cx="10515600" cy="910893"/>
-          </a:xfrm>
-        </p:spPr>
-        <p:txBody>
-          <a:bodyPr/>
-          <a:lstStyle/>
-          <a:p>
-            <a:r>
-              <a:rPr lang="en-US" dirty="0"/>
-              <a:t>Correlation</a:t>
-            </a:r>
-          </a:p>
-        </p:txBody>
-      </p:sp>
-      <p:pic>
-        <p:nvPicPr>
-          <p:cNvPr id="4" name="Picture 3">
+          <p:cNvCxnSpPr/>
+          <p:nvPr/>
+        </p:nvCxnSpPr>
+        <p:spPr>
+          <a:xfrm rot="10800000">
+            <a:off x="-274340" y="1619976"/>
+            <a:ext cx="12293931" cy="0"/>
+          </a:xfrm>
+          <a:prstGeom prst="straightConnector1">
+            <a:avLst/>
+          </a:prstGeom>
+          <a:noFill/>
+          <a:ln w="19050" cap="flat" cmpd="sng">
+            <a:solidFill>
+              <a:srgbClr val="000000"/>
+            </a:solidFill>
+            <a:prstDash val="solid"/>
+            <a:round/>
+            <a:headEnd type="none" w="sm" len="sm"/>
+            <a:tailEnd type="none" w="sm" len="sm"/>
+          </a:ln>
+        </p:spPr>
+      </p:cxnSp>
+      <p:cxnSp>
+        <p:nvCxnSpPr>
+          <p:cNvPr id="267" name="Google Shape;267;p22">
             <a:extLst>
               <a:ext uri="{FF2B5EF4-FFF2-40B4-BE49-F238E27FC236}">
-                <a16:creationId xmlns:a16="http://schemas.microsoft.com/office/drawing/2014/main" id="{10460AC3-D760-3A84-D680-B75A6A3E99F4}"/>
+                <a16:creationId xmlns:a16="http://schemas.microsoft.com/office/drawing/2014/main" id="{BAA337C0-DD81-20FF-0DC1-703222A2DE86}"/>
               </a:ext>
             </a:extLst>
           </p:cNvPr>
-          <p:cNvPicPr>
-            <a:picLocks noChangeAspect="1"/>
-          </p:cNvPicPr>
+          <p:cNvCxnSpPr/>
           <p:nvPr/>
-        </p:nvPicPr>
-        <p:blipFill>
-          <a:blip r:embed="rId2">
+        </p:nvCxnSpPr>
+        <p:spPr>
+          <a:xfrm rot="10800000">
+            <a:off x="6096000" y="0"/>
+            <a:ext cx="12700" cy="6859420"/>
+          </a:xfrm>
+          <a:prstGeom prst="straightConnector1">
+            <a:avLst/>
+          </a:prstGeom>
+          <a:noFill/>
+          <a:ln w="19050" cap="flat" cmpd="sng">
+            <a:solidFill>
+              <a:srgbClr val="000000"/>
+            </a:solidFill>
+            <a:prstDash val="solid"/>
+            <a:round/>
+            <a:headEnd type="none" w="sm" len="sm"/>
+            <a:tailEnd type="none" w="sm" len="sm"/>
+          </a:ln>
+        </p:spPr>
+      </p:cxnSp>
+      <p:sp>
+        <p:nvSpPr>
+          <p:cNvPr id="268" name="Google Shape;268;p22">
             <a:extLst>
-              <a:ext uri="{28A0092B-C50C-407E-A947-70E740481C1C}">
-                <a14:useLocalDpi xmlns:a14="http://schemas.microsoft.com/office/drawing/2010/main" val="0"/>
+              <a:ext uri="{FF2B5EF4-FFF2-40B4-BE49-F238E27FC236}">
+                <a16:creationId xmlns:a16="http://schemas.microsoft.com/office/drawing/2014/main" id="{36797858-C2D6-AD12-CC43-19AC586EB4A4}"/>
               </a:ext>
             </a:extLst>
-          </a:blip>
-          <a:stretch>
-            <a:fillRect/>
-          </a:stretch>
-        </p:blipFill>
-        <p:spPr>
-          <a:xfrm>
-            <a:off x="5943601" y="1584250"/>
-            <a:ext cx="5748730" cy="4992113"/>
+          </p:cNvPr>
+          <p:cNvSpPr txBox="1"/>
+          <p:nvPr/>
+        </p:nvSpPr>
+        <p:spPr>
+          <a:xfrm>
+            <a:off x="0" y="616981"/>
+            <a:ext cx="6095999" cy="738664"/>
           </a:xfrm>
           <a:prstGeom prst="rect">
             <a:avLst/>
           </a:prstGeom>
-        </p:spPr>
-      </p:pic>
+          <a:noFill/>
+          <a:ln>
+            <a:noFill/>
+          </a:ln>
+        </p:spPr>
+        <p:txBody>
+          <a:bodyPr spcFirstLastPara="1" wrap="square" lIns="0" tIns="0" rIns="0" bIns="0" anchor="t" anchorCtr="0">
+            <a:spAutoFit/>
+          </a:bodyPr>
+          <a:lstStyle/>
+          <a:p>
+            <a:pPr algn="ctr">
+              <a:spcBef>
+                <a:spcPct val="0"/>
+              </a:spcBef>
+            </a:pPr>
+            <a:r>
+              <a:rPr lang="en-US" sz="4800" b="1" spc="-100" dirty="0">
+                <a:solidFill>
+                  <a:srgbClr val="000000"/>
+                </a:solidFill>
+                <a:latin typeface="DM Sans"/>
+              </a:rPr>
+              <a:t>Correlation Plots</a:t>
+            </a:r>
+          </a:p>
+        </p:txBody>
+      </p:sp>
       <p:pic>
         <p:nvPicPr>
-          <p:cNvPr id="6" name="Picture 5">
+          <p:cNvPr id="2" name="Picture 1">
             <a:extLst>
               <a:ext uri="{FF2B5EF4-FFF2-40B4-BE49-F238E27FC236}">
-                <a16:creationId xmlns:a16="http://schemas.microsoft.com/office/drawing/2014/main" id="{0233239C-F206-BA47-1204-1CE55B34386C}"/>
+                <a16:creationId xmlns:a16="http://schemas.microsoft.com/office/drawing/2014/main" id="{98E9E19C-C61E-9265-7C44-B705FBED9971}"/>
               </a:ext>
             </a:extLst>
           </p:cNvPr>
@@ -5709,24 +9191,122 @@
         </p:blipFill>
         <p:spPr>
           <a:xfrm>
-            <a:off x="172409" y="1714041"/>
-            <a:ext cx="5923591" cy="5143959"/>
+            <a:off x="465688" y="1888443"/>
+            <a:ext cx="5013908" cy="4354004"/>
           </a:xfrm>
           <a:prstGeom prst="rect">
             <a:avLst/>
           </a:prstGeom>
+          <a:ln w="19050">
+            <a:solidFill>
+              <a:srgbClr val="000000"/>
+            </a:solidFill>
+          </a:ln>
         </p:spPr>
       </p:pic>
+      <p:pic>
+        <p:nvPicPr>
+          <p:cNvPr id="3" name="Picture 2">
+            <a:extLst>
+              <a:ext uri="{FF2B5EF4-FFF2-40B4-BE49-F238E27FC236}">
+                <a16:creationId xmlns:a16="http://schemas.microsoft.com/office/drawing/2014/main" id="{F87FEBCD-AFA2-ADAD-BFA3-A9AACDD09556}"/>
+              </a:ext>
+            </a:extLst>
+          </p:cNvPr>
+          <p:cNvPicPr>
+            <a:picLocks noChangeAspect="1"/>
+          </p:cNvPicPr>
+          <p:nvPr/>
+        </p:nvPicPr>
+        <p:blipFill>
+          <a:blip r:embed="rId4">
+            <a:extLst>
+              <a:ext uri="{28A0092B-C50C-407E-A947-70E740481C1C}">
+                <a14:useLocalDpi xmlns:a14="http://schemas.microsoft.com/office/drawing/2010/main" val="0"/>
+              </a:ext>
+            </a:extLst>
+          </a:blip>
+          <a:stretch>
+            <a:fillRect/>
+          </a:stretch>
+        </p:blipFill>
+        <p:spPr>
+          <a:xfrm>
+            <a:off x="6725103" y="1888443"/>
+            <a:ext cx="5013908" cy="4354004"/>
+          </a:xfrm>
+          <a:prstGeom prst="rect">
+            <a:avLst/>
+          </a:prstGeom>
+          <a:ln w="19050">
+            <a:solidFill>
+              <a:srgbClr val="000000"/>
+            </a:solidFill>
+          </a:ln>
+        </p:spPr>
+      </p:pic>
+      <p:sp>
+        <p:nvSpPr>
+          <p:cNvPr id="4" name="TextBox 3">
+            <a:extLst>
+              <a:ext uri="{FF2B5EF4-FFF2-40B4-BE49-F238E27FC236}">
+                <a16:creationId xmlns:a16="http://schemas.microsoft.com/office/drawing/2014/main" id="{BE31FBEF-70B0-2A0D-07F3-5A0102AC4CDC}"/>
+              </a:ext>
+            </a:extLst>
+          </p:cNvPr>
+          <p:cNvSpPr txBox="1"/>
+          <p:nvPr/>
+        </p:nvSpPr>
+        <p:spPr>
+          <a:xfrm>
+            <a:off x="6725103" y="540068"/>
+            <a:ext cx="4850492" cy="646331"/>
+          </a:xfrm>
+          <a:prstGeom prst="rect">
+            <a:avLst/>
+          </a:prstGeom>
+          <a:noFill/>
+        </p:spPr>
+        <p:txBody>
+          <a:bodyPr wrap="square" rtlCol="0">
+            <a:spAutoFit/>
+          </a:bodyPr>
+          <a:lstStyle/>
+          <a:p>
+            <a:pPr marL="285750" indent="-285750">
+              <a:buFontTx/>
+              <a:buChar char="-"/>
+            </a:pPr>
+            <a:r>
+              <a:rPr lang="en-CA" dirty="0"/>
+              <a:t>Spearman (nonlinear) vs Pearson (linear)</a:t>
+            </a:r>
+          </a:p>
+          <a:p>
+            <a:pPr marL="285750" indent="-285750">
+              <a:buFontTx/>
+              <a:buChar char="-"/>
+            </a:pPr>
+            <a:r>
+              <a:rPr lang="en-CA" dirty="0"/>
+              <a:t>Correlation is weak for both &lt; 0.5</a:t>
+            </a:r>
+          </a:p>
+        </p:txBody>
+      </p:sp>
     </p:spTree>
     <p:extLst>
       <p:ext uri="{BB962C8B-B14F-4D97-AF65-F5344CB8AC3E}">
-        <p14:creationId xmlns:p14="http://schemas.microsoft.com/office/powerpoint/2010/main" val="3324611659"/>
+        <p14:creationId xmlns:p14="http://schemas.microsoft.com/office/powerpoint/2010/main" val="587567508"/>
       </p:ext>
     </p:extLst>
   </p:cSld>
   <p:clrMapOvr>
     <a:masterClrMapping/>
   </p:clrMapOvr>
+  <p:transition>
+    <p:push/>
+  </p:transition>
 </p:sld>
 </file>
 
@@ -5735,7 +9315,13 @@
   <p:cSld>
     <p:spTree>
       <p:nvGrpSpPr>
-        <p:cNvPr id="1" name=""/>
+        <p:cNvPr id="1" name="Shape 274">
+          <a:extLst>
+            <a:ext uri="{FF2B5EF4-FFF2-40B4-BE49-F238E27FC236}">
+              <a16:creationId xmlns:a16="http://schemas.microsoft.com/office/drawing/2014/main" id="{D4560813-2923-7F73-656A-6594E575DBC9}"/>
+            </a:ext>
+          </a:extLst>
+        </p:cNvPr>
         <p:cNvGrpSpPr/>
         <p:nvPr/>
       </p:nvGrpSpPr>
@@ -5749,43 +9335,456 @@
       </p:grpSpPr>
       <p:sp>
         <p:nvSpPr>
-          <p:cNvPr id="2" name="Title 1">
+          <p:cNvPr id="278" name="Google Shape;278;p23">
             <a:extLst>
               <a:ext uri="{FF2B5EF4-FFF2-40B4-BE49-F238E27FC236}">
-                <a16:creationId xmlns:a16="http://schemas.microsoft.com/office/drawing/2014/main" id="{DF05875B-A98D-9A28-D847-8F7CF17E2796}"/>
+                <a16:creationId xmlns:a16="http://schemas.microsoft.com/office/drawing/2014/main" id="{CEC4A98B-F1A1-0DEB-A3FE-E6F2991CED65}"/>
               </a:ext>
             </a:extLst>
           </p:cNvPr>
-          <p:cNvSpPr>
-            <a:spLocks noGrp="1"/>
-          </p:cNvSpPr>
-          <p:nvPr>
-            <p:ph type="title"/>
-          </p:nvPr>
-        </p:nvSpPr>
-        <p:spPr/>
-        <p:txBody>
-          <a:bodyPr/>
+          <p:cNvSpPr txBox="1"/>
+          <p:nvPr/>
+        </p:nvSpPr>
+        <p:spPr>
+          <a:xfrm>
+            <a:off x="240527" y="578867"/>
+            <a:ext cx="11706494" cy="738664"/>
+          </a:xfrm>
+          <a:prstGeom prst="rect">
+            <a:avLst/>
+          </a:prstGeom>
+          <a:noFill/>
+          <a:ln>
+            <a:noFill/>
+          </a:ln>
+        </p:spPr>
+        <p:txBody>
+          <a:bodyPr spcFirstLastPara="1" wrap="square" lIns="0" tIns="0" rIns="0" bIns="0" anchor="t" anchorCtr="0">
+            <a:spAutoFit/>
+          </a:bodyPr>
           <a:lstStyle/>
           <a:p>
-            <a:endParaRPr lang="en-US"/>
+            <a:pPr algn="ctr">
+              <a:spcBef>
+                <a:spcPct val="0"/>
+              </a:spcBef>
+            </a:pPr>
+            <a:r>
+              <a:rPr lang="en-US" sz="4800" b="1" spc="-100" dirty="0">
+                <a:solidFill>
+                  <a:srgbClr val="000000"/>
+                </a:solidFill>
+                <a:latin typeface="DM Sans"/>
+                <a:sym typeface="DM Sans"/>
+              </a:rPr>
+              <a:t>Classification Modelling Findings</a:t>
+            </a:r>
+            <a:endParaRPr sz="4800" b="1" spc="-100" dirty="0">
+              <a:solidFill>
+                <a:srgbClr val="000000"/>
+              </a:solidFill>
+              <a:latin typeface="DM Sans"/>
+            </a:endParaRPr>
+          </a:p>
+        </p:txBody>
+      </p:sp>
+      <p:sp>
+        <p:nvSpPr>
+          <p:cNvPr id="279" name="Google Shape;279;p23">
+            <a:extLst>
+              <a:ext uri="{FF2B5EF4-FFF2-40B4-BE49-F238E27FC236}">
+                <a16:creationId xmlns:a16="http://schemas.microsoft.com/office/drawing/2014/main" id="{80C2D2E7-712E-6CB3-00B2-3EA19C4F4F3F}"/>
+              </a:ext>
+            </a:extLst>
+          </p:cNvPr>
+          <p:cNvSpPr txBox="1"/>
+          <p:nvPr/>
+        </p:nvSpPr>
+        <p:spPr>
+          <a:xfrm>
+            <a:off x="461841" y="1767117"/>
+            <a:ext cx="11211714" cy="2769989"/>
+          </a:xfrm>
+          <a:prstGeom prst="rect">
+            <a:avLst/>
+          </a:prstGeom>
+          <a:noFill/>
+          <a:ln>
+            <a:noFill/>
+          </a:ln>
+        </p:spPr>
+        <p:txBody>
+          <a:bodyPr spcFirstLastPara="1" wrap="square" lIns="0" tIns="0" rIns="0" bIns="0" anchor="t" anchorCtr="0">
+            <a:spAutoFit/>
+          </a:bodyPr>
+          <a:lstStyle/>
+          <a:p>
+            <a:pPr marL="571500" indent="-571500">
+              <a:lnSpc>
+                <a:spcPct val="150000"/>
+              </a:lnSpc>
+              <a:buFont typeface="Arial" panose="020B0604020202020204" pitchFamily="34" charset="0"/>
+              <a:buChar char="•"/>
+            </a:pPr>
+            <a:r>
+              <a:rPr lang="en-US" sz="2400" dirty="0"/>
+              <a:t>The dataset is highly imbalanced (5% positive class)</a:t>
+            </a:r>
+          </a:p>
+          <a:p>
+            <a:pPr marL="571500" indent="-571500">
+              <a:lnSpc>
+                <a:spcPct val="150000"/>
+              </a:lnSpc>
+              <a:buFont typeface="Arial" panose="020B0604020202020204" pitchFamily="34" charset="0"/>
+              <a:buChar char="•"/>
+            </a:pPr>
+            <a:r>
+              <a:rPr lang="en-US" sz="2400" dirty="0"/>
+              <a:t>Tree-based models best for imbalanced data. </a:t>
+            </a:r>
+          </a:p>
+          <a:p>
+            <a:pPr marL="571500" indent="-571500">
+              <a:lnSpc>
+                <a:spcPct val="150000"/>
+              </a:lnSpc>
+              <a:buFont typeface="Arial" panose="020B0604020202020204" pitchFamily="34" charset="0"/>
+              <a:buChar char="•"/>
+            </a:pPr>
+            <a:r>
+              <a:rPr lang="en-US" sz="2400" dirty="0"/>
+              <a:t>Logistic Regression performed well when using balanced class weights. </a:t>
+            </a:r>
+          </a:p>
+          <a:p>
+            <a:pPr marL="571500" indent="-571500">
+              <a:lnSpc>
+                <a:spcPct val="150000"/>
+              </a:lnSpc>
+              <a:buFont typeface="Arial" panose="020B0604020202020204" pitchFamily="34" charset="0"/>
+              <a:buChar char="•"/>
+            </a:pPr>
+            <a:r>
+              <a:rPr lang="en-US" sz="2400" dirty="0"/>
+              <a:t>Therefore, three models were selected for the analysis: </a:t>
+            </a:r>
+            <a:r>
+              <a:rPr lang="en-US" sz="2400" dirty="0" err="1"/>
+              <a:t>XGBoost</a:t>
+            </a:r>
+            <a:r>
+              <a:rPr lang="en-US" sz="2400" dirty="0"/>
+              <a:t>, Random Forest, and Logistic Regression.</a:t>
+            </a:r>
           </a:p>
         </p:txBody>
       </p:sp>
     </p:spTree>
     <p:extLst>
       <p:ext uri="{BB962C8B-B14F-4D97-AF65-F5344CB8AC3E}">
-        <p14:creationId xmlns:p14="http://schemas.microsoft.com/office/powerpoint/2010/main" val="4063274077"/>
+        <p14:creationId xmlns:p14="http://schemas.microsoft.com/office/powerpoint/2010/main" val="4218661914"/>
       </p:ext>
     </p:extLst>
   </p:cSld>
   <p:clrMapOvr>
     <a:masterClrMapping/>
   </p:clrMapOvr>
+  <p:transition>
+    <p:push/>
+  </p:transition>
 </p:sld>
 </file>
 
 <file path=ppt/theme/theme1.xml><?xml version="1.0" encoding="utf-8"?>
+<a:theme xmlns:a="http://schemas.openxmlformats.org/drawingml/2006/main" name="Clarity">
+  <a:themeElements>
+    <a:clrScheme name="Clarity">
+      <a:dk1>
+        <a:srgbClr val="292934"/>
+      </a:dk1>
+      <a:lt1>
+        <a:srgbClr val="FFFFFF"/>
+      </a:lt1>
+      <a:dk2>
+        <a:srgbClr val="D2533C"/>
+      </a:dk2>
+      <a:lt2>
+        <a:srgbClr val="F3F2DC"/>
+      </a:lt2>
+      <a:accent1>
+        <a:srgbClr val="93A299"/>
+      </a:accent1>
+      <a:accent2>
+        <a:srgbClr val="AD8F67"/>
+      </a:accent2>
+      <a:accent3>
+        <a:srgbClr val="726056"/>
+      </a:accent3>
+      <a:accent4>
+        <a:srgbClr val="4C5A6A"/>
+      </a:accent4>
+      <a:accent5>
+        <a:srgbClr val="808DA0"/>
+      </a:accent5>
+      <a:accent6>
+        <a:srgbClr val="79463D"/>
+      </a:accent6>
+      <a:hlink>
+        <a:srgbClr val="0000FF"/>
+      </a:hlink>
+      <a:folHlink>
+        <a:srgbClr val="800080"/>
+      </a:folHlink>
+    </a:clrScheme>
+    <a:fontScheme name="Office Classic 2">
+      <a:majorFont>
+        <a:latin typeface="Arial"/>
+        <a:ea typeface=""/>
+        <a:cs typeface=""/>
+        <a:font script="Jpan" typeface="ＭＳ Ｐゴシック"/>
+        <a:font script="Hang" typeface="돋움"/>
+        <a:font script="Hans" typeface="方正舒体"/>
+        <a:font script="Hant" typeface="微軟正黑體"/>
+        <a:font script="Arab" typeface="Arial"/>
+        <a:font script="Hebr" typeface="Arial"/>
+        <a:font script="Thai" typeface="Cordia New"/>
+        <a:font script="Ethi" typeface="Nyala"/>
+        <a:font script="Beng" typeface="Vrinda"/>
+        <a:font script="Gujr" typeface="Shruti"/>
+        <a:font script="Khmr" typeface="DaunPenh"/>
+        <a:font script="Knda" typeface="Tunga"/>
+        <a:font script="Guru" typeface="Raavi"/>
+        <a:font script="Cans" typeface="Euphemia"/>
+        <a:font script="Cher" typeface="Plantagenet Cherokee"/>
+        <a:font script="Yiii" typeface="Microsoft Yi Baiti"/>
+        <a:font script="Tibt" typeface="Microsoft Himalaya"/>
+        <a:font script="Thaa" typeface="MV Boli"/>
+        <a:font script="Deva" typeface="Mangal"/>
+        <a:font script="Telu" typeface="Gautami"/>
+        <a:font script="Taml" typeface="Latha"/>
+        <a:font script="Syrc" typeface="Estrangelo Edessa"/>
+        <a:font script="Orya" typeface="Kalinga"/>
+        <a:font script="Mlym" typeface="Kartika"/>
+        <a:font script="Laoo" typeface="DokChampa"/>
+        <a:font script="Sinh" typeface="Iskoola Pota"/>
+        <a:font script="Mong" typeface="Mongolian Baiti"/>
+        <a:font script="Viet" typeface="Arial"/>
+        <a:font script="Uigh" typeface="Microsoft Uighur"/>
+        <a:font script="Geor" typeface="Sylfaen"/>
+      </a:majorFont>
+      <a:minorFont>
+        <a:latin typeface="Arial"/>
+        <a:ea typeface=""/>
+        <a:cs typeface=""/>
+        <a:font script="Jpan" typeface="ＭＳ Ｐゴシック"/>
+        <a:font script="Hang" typeface="돋움"/>
+        <a:font script="Hans" typeface="方正舒体"/>
+        <a:font script="Hant" typeface="微軟正黑體"/>
+        <a:font script="Arab" typeface="Arial"/>
+        <a:font script="Hebr" typeface="Arial"/>
+        <a:font script="Thai" typeface="Cordia New"/>
+        <a:font script="Ethi" typeface="Nyala"/>
+        <a:font script="Beng" typeface="Vrinda"/>
+        <a:font script="Gujr" typeface="Shruti"/>
+        <a:font script="Khmr" typeface="DaunPenh"/>
+        <a:font script="Knda" typeface="Tunga"/>
+        <a:font script="Guru" typeface="Raavi"/>
+        <a:font script="Cans" typeface="Euphemia"/>
+        <a:font script="Cher" typeface="Plantagenet Cherokee"/>
+        <a:font script="Yiii" typeface="Microsoft Yi Baiti"/>
+        <a:font script="Tibt" typeface="Microsoft Himalaya"/>
+        <a:font script="Thaa" typeface="MV Boli"/>
+        <a:font script="Deva" typeface="Mangal"/>
+        <a:font script="Telu" typeface="Gautami"/>
+        <a:font script="Taml" typeface="Latha"/>
+        <a:font script="Syrc" typeface="Estrangelo Edessa"/>
+        <a:font script="Orya" typeface="Kalinga"/>
+        <a:font script="Mlym" typeface="Kartika"/>
+        <a:font script="Laoo" typeface="DokChampa"/>
+        <a:font script="Sinh" typeface="Iskoola Pota"/>
+        <a:font script="Mong" typeface="Mongolian Baiti"/>
+        <a:font script="Viet" typeface="Arial"/>
+        <a:font script="Uigh" typeface="Microsoft Uighur"/>
+        <a:font script="Geor" typeface="Sylfaen"/>
+      </a:minorFont>
+    </a:fontScheme>
+    <a:fmtScheme name="Clarity">
+      <a:fillStyleLst>
+        <a:solidFill>
+          <a:schemeClr val="phClr"/>
+        </a:solidFill>
+        <a:gradFill rotWithShape="1">
+          <a:gsLst>
+            <a:gs pos="0">
+              <a:schemeClr val="phClr">
+                <a:tint val="50000"/>
+                <a:shade val="86000"/>
+                <a:satMod val="140000"/>
+              </a:schemeClr>
+            </a:gs>
+            <a:gs pos="45000">
+              <a:schemeClr val="phClr">
+                <a:tint val="48000"/>
+                <a:satMod val="150000"/>
+              </a:schemeClr>
+            </a:gs>
+            <a:gs pos="100000">
+              <a:schemeClr val="phClr">
+                <a:tint val="28000"/>
+                <a:satMod val="160000"/>
+              </a:schemeClr>
+            </a:gs>
+          </a:gsLst>
+          <a:path path="circle">
+            <a:fillToRect l="100000" t="100000" r="100000" b="100000"/>
+          </a:path>
+        </a:gradFill>
+        <a:gradFill rotWithShape="1">
+          <a:gsLst>
+            <a:gs pos="0">
+              <a:schemeClr val="phClr">
+                <a:shade val="70000"/>
+                <a:satMod val="150000"/>
+              </a:schemeClr>
+            </a:gs>
+            <a:gs pos="34000">
+              <a:schemeClr val="phClr">
+                <a:shade val="70000"/>
+                <a:satMod val="140000"/>
+              </a:schemeClr>
+            </a:gs>
+            <a:gs pos="70000">
+              <a:schemeClr val="phClr">
+                <a:tint val="100000"/>
+                <a:shade val="90000"/>
+                <a:satMod val="140000"/>
+              </a:schemeClr>
+            </a:gs>
+            <a:gs pos="100000">
+              <a:schemeClr val="phClr">
+                <a:tint val="100000"/>
+                <a:shade val="100000"/>
+                <a:satMod val="100000"/>
+              </a:schemeClr>
+            </a:gs>
+          </a:gsLst>
+          <a:path path="circle">
+            <a:fillToRect l="100000" t="100000" r="100000" b="100000"/>
+          </a:path>
+        </a:gradFill>
+      </a:fillStyleLst>
+      <a:lnStyleLst>
+        <a:ln w="9525" cap="flat" cmpd="sng" algn="ctr">
+          <a:solidFill>
+            <a:schemeClr val="phClr"/>
+          </a:solidFill>
+          <a:prstDash val="solid"/>
+        </a:ln>
+        <a:ln w="26425" cap="flat" cmpd="sng" algn="ctr">
+          <a:solidFill>
+            <a:schemeClr val="phClr"/>
+          </a:solidFill>
+          <a:prstDash val="solid"/>
+        </a:ln>
+        <a:ln w="44450" cap="flat" cmpd="sng" algn="ctr">
+          <a:solidFill>
+            <a:schemeClr val="phClr"/>
+          </a:solidFill>
+          <a:prstDash val="solid"/>
+        </a:ln>
+      </a:lnStyleLst>
+      <a:effectStyleLst>
+        <a:effectStyle>
+          <a:effectLst/>
+        </a:effectStyle>
+        <a:effectStyle>
+          <a:effectLst>
+            <a:outerShdw blurRad="38100" dist="25400" dir="2700000" algn="br" rotWithShape="0">
+              <a:srgbClr val="000000">
+                <a:alpha val="60000"/>
+              </a:srgbClr>
+            </a:outerShdw>
+          </a:effectLst>
+        </a:effectStyle>
+        <a:effectStyle>
+          <a:effectLst>
+            <a:outerShdw blurRad="38100" dist="25400" dir="2700000" algn="br" rotWithShape="0">
+              <a:srgbClr val="000000">
+                <a:alpha val="60000"/>
+              </a:srgbClr>
+            </a:outerShdw>
+          </a:effectLst>
+          <a:scene3d>
+            <a:camera prst="orthographicFront">
+              <a:rot lat="0" lon="0" rev="0"/>
+            </a:camera>
+            <a:lightRig rig="balanced" dir="t">
+              <a:rot lat="0" lon="0" rev="5100000"/>
+            </a:lightRig>
+          </a:scene3d>
+          <a:sp3d contourW="6350">
+            <a:bevelT w="29210" h="12700"/>
+            <a:contourClr>
+              <a:schemeClr val="phClr">
+                <a:shade val="30000"/>
+                <a:satMod val="130000"/>
+              </a:schemeClr>
+            </a:contourClr>
+          </a:sp3d>
+        </a:effectStyle>
+      </a:effectStyleLst>
+      <a:bgFillStyleLst>
+        <a:solidFill>
+          <a:schemeClr val="phClr"/>
+        </a:solidFill>
+        <a:gradFill rotWithShape="1">
+          <a:gsLst>
+            <a:gs pos="0">
+              <a:schemeClr val="phClr">
+                <a:tint val="85000"/>
+                <a:satMod val="180000"/>
+              </a:schemeClr>
+            </a:gs>
+            <a:gs pos="40000">
+              <a:schemeClr val="phClr">
+                <a:tint val="95000"/>
+                <a:shade val="85000"/>
+                <a:satMod val="150000"/>
+              </a:schemeClr>
+            </a:gs>
+            <a:gs pos="100000">
+              <a:schemeClr val="phClr">
+                <a:shade val="45000"/>
+                <a:satMod val="200000"/>
+              </a:schemeClr>
+            </a:gs>
+          </a:gsLst>
+          <a:lin ang="5400000" scaled="0"/>
+        </a:gradFill>
+        <a:blipFill rotWithShape="1">
+          <a:blip xmlns:r="http://schemas.openxmlformats.org/officeDocument/2006/relationships" r:embed="rId1">
+            <a:duotone>
+              <a:schemeClr val="phClr">
+                <a:shade val="55000"/>
+              </a:schemeClr>
+              <a:schemeClr val="phClr">
+                <a:tint val="97000"/>
+                <a:satMod val="95000"/>
+              </a:schemeClr>
+            </a:duotone>
+          </a:blip>
+          <a:tile tx="0" ty="0" sx="70000" sy="70000" flip="none" algn="tl"/>
+        </a:blipFill>
+      </a:bgFillStyleLst>
+    </a:fmtScheme>
+  </a:themeElements>
+  <a:objectDefaults/>
+  <a:extraClrSchemeLst/>
+</a:theme>
+</file>
+
+<file path=ppt/theme/theme2.xml><?xml version="1.0" encoding="utf-8"?>
 <a:theme xmlns:a="http://schemas.openxmlformats.org/drawingml/2006/main" name="Office Theme">
   <a:themeElements>
     <a:clrScheme name="Office">

--- a/report_and_presentation/Cohort8_DS3_Presentation.pptx
+++ b/report_and_presentation/Cohort8_DS3_Presentation.pptx
@@ -129,7 +129,18 @@
   </p:defaultTextStyle>
   <p:extLst>
     <p:ext uri="{EFAFB233-063F-42B5-8137-9DF3F51BA10A}">
-      <p15:sldGuideLst xmlns:p15="http://schemas.microsoft.com/office/powerpoint/2012/main" xmlns=""/>
+      <p15:sldGuideLst xmlns:p15="http://schemas.microsoft.com/office/powerpoint/2012/main">
+        <p15:guide id="1" orient="horz" pos="2160">
+          <p15:clr>
+            <a:srgbClr val="A4A3A4"/>
+          </p15:clr>
+        </p15:guide>
+        <p15:guide id="2" pos="3840">
+          <p15:clr>
+            <a:srgbClr val="A4A3A4"/>
+          </p15:clr>
+        </p15:guide>
+      </p15:sldGuideLst>
     </p:ext>
   </p:extLst>
 </p:presentation>
@@ -217,7 +228,7 @@
           <a:p>
             <a:fld id="{318D9752-18F5-491D-A8FE-927E5AB031AE}" type="datetimeFigureOut">
               <a:rPr lang="en-CA" smtClean="0"/>
-              <a:t>2026-03-05</a:t>
+              <a:t>2026-03-06</a:t>
             </a:fld>
             <a:endParaRPr lang="en-CA"/>
           </a:p>
@@ -597,7 +608,7 @@
         <p:cNvPr id="1" name="Shape 271">
           <a:extLst>
             <a:ext uri="{FF2B5EF4-FFF2-40B4-BE49-F238E27FC236}">
-              <a16:creationId xmlns:a16="http://schemas.microsoft.com/office/drawing/2014/main" xmlns="" id="{30E5B0FF-7F6A-5BBA-FD84-E67D98E0CA07}"/>
+              <a16:creationId xmlns:a16="http://schemas.microsoft.com/office/drawing/2014/main" id="{30E5B0FF-7F6A-5BBA-FD84-E67D98E0CA07}"/>
             </a:ext>
           </a:extLst>
         </p:cNvPr>
@@ -617,7 +628,7 @@
           <p:cNvPr id="272" name="Google Shape;272;p11:notes">
             <a:extLst>
               <a:ext uri="{FF2B5EF4-FFF2-40B4-BE49-F238E27FC236}">
-                <a16:creationId xmlns:a16="http://schemas.microsoft.com/office/drawing/2014/main" xmlns="" id="{58156EA9-AE74-DAA2-37EE-FD21A1D01AE0}"/>
+                <a16:creationId xmlns:a16="http://schemas.microsoft.com/office/drawing/2014/main" id="{58156EA9-AE74-DAA2-37EE-FD21A1D01AE0}"/>
               </a:ext>
             </a:extLst>
           </p:cNvPr>
@@ -661,7 +672,7 @@
           <p:cNvPr id="273" name="Google Shape;273;p11:notes">
             <a:extLst>
               <a:ext uri="{FF2B5EF4-FFF2-40B4-BE49-F238E27FC236}">
-                <a16:creationId xmlns:a16="http://schemas.microsoft.com/office/drawing/2014/main" xmlns="" id="{4D6DA1AF-9CBF-94BE-DAF7-11CC472703EE}"/>
+                <a16:creationId xmlns:a16="http://schemas.microsoft.com/office/drawing/2014/main" id="{4D6DA1AF-9CBF-94BE-DAF7-11CC472703EE}"/>
               </a:ext>
             </a:extLst>
           </p:cNvPr>
@@ -724,7 +735,7 @@
         <p:cNvPr id="1" name="Shape 271">
           <a:extLst>
             <a:ext uri="{FF2B5EF4-FFF2-40B4-BE49-F238E27FC236}">
-              <a16:creationId xmlns:a16="http://schemas.microsoft.com/office/drawing/2014/main" xmlns="" id="{0B5CE19B-28C4-4D25-EB9B-439810A6455F}"/>
+              <a16:creationId xmlns:a16="http://schemas.microsoft.com/office/drawing/2014/main" id="{0B5CE19B-28C4-4D25-EB9B-439810A6455F}"/>
             </a:ext>
           </a:extLst>
         </p:cNvPr>
@@ -744,7 +755,7 @@
           <p:cNvPr id="272" name="Google Shape;272;p11:notes">
             <a:extLst>
               <a:ext uri="{FF2B5EF4-FFF2-40B4-BE49-F238E27FC236}">
-                <a16:creationId xmlns:a16="http://schemas.microsoft.com/office/drawing/2014/main" xmlns="" id="{73B21E0F-8B08-FC1B-D07F-7E6E02321723}"/>
+                <a16:creationId xmlns:a16="http://schemas.microsoft.com/office/drawing/2014/main" id="{73B21E0F-8B08-FC1B-D07F-7E6E02321723}"/>
               </a:ext>
             </a:extLst>
           </p:cNvPr>
@@ -788,7 +799,7 @@
           <p:cNvPr id="273" name="Google Shape;273;p11:notes">
             <a:extLst>
               <a:ext uri="{FF2B5EF4-FFF2-40B4-BE49-F238E27FC236}">
-                <a16:creationId xmlns:a16="http://schemas.microsoft.com/office/drawing/2014/main" xmlns="" id="{243BF204-1B95-C87B-6715-B2949BED2E18}"/>
+                <a16:creationId xmlns:a16="http://schemas.microsoft.com/office/drawing/2014/main" id="{243BF204-1B95-C87B-6715-B2949BED2E18}"/>
               </a:ext>
             </a:extLst>
           </p:cNvPr>
@@ -1059,7 +1070,7 @@
         <p:cNvPr id="1" name="Shape 271">
           <a:extLst>
             <a:ext uri="{FF2B5EF4-FFF2-40B4-BE49-F238E27FC236}">
-              <a16:creationId xmlns:a16="http://schemas.microsoft.com/office/drawing/2014/main" xmlns="" id="{92943E5C-15F6-54E9-B745-B30B17AAB483}"/>
+              <a16:creationId xmlns:a16="http://schemas.microsoft.com/office/drawing/2014/main" id="{92943E5C-15F6-54E9-B745-B30B17AAB483}"/>
             </a:ext>
           </a:extLst>
         </p:cNvPr>
@@ -1079,7 +1090,7 @@
           <p:cNvPr id="272" name="Google Shape;272;p11:notes">
             <a:extLst>
               <a:ext uri="{FF2B5EF4-FFF2-40B4-BE49-F238E27FC236}">
-                <a16:creationId xmlns:a16="http://schemas.microsoft.com/office/drawing/2014/main" xmlns="" id="{43D16254-6F56-28A8-E72D-69E13CA5F982}"/>
+                <a16:creationId xmlns:a16="http://schemas.microsoft.com/office/drawing/2014/main" id="{43D16254-6F56-28A8-E72D-69E13CA5F982}"/>
               </a:ext>
             </a:extLst>
           </p:cNvPr>
@@ -1123,7 +1134,7 @@
           <p:cNvPr id="273" name="Google Shape;273;p11:notes">
             <a:extLst>
               <a:ext uri="{FF2B5EF4-FFF2-40B4-BE49-F238E27FC236}">
-                <a16:creationId xmlns:a16="http://schemas.microsoft.com/office/drawing/2014/main" xmlns="" id="{6A221F69-FA65-4CC9-B4D5-4663971FD65F}"/>
+                <a16:creationId xmlns:a16="http://schemas.microsoft.com/office/drawing/2014/main" id="{6A221F69-FA65-4CC9-B4D5-4663971FD65F}"/>
               </a:ext>
             </a:extLst>
           </p:cNvPr>
@@ -1186,7 +1197,7 @@
         <p:cNvPr id="1" name="Shape 271">
           <a:extLst>
             <a:ext uri="{FF2B5EF4-FFF2-40B4-BE49-F238E27FC236}">
-              <a16:creationId xmlns:a16="http://schemas.microsoft.com/office/drawing/2014/main" xmlns="" id="{92943E5C-15F6-54E9-B745-B30B17AAB483}"/>
+              <a16:creationId xmlns:a16="http://schemas.microsoft.com/office/drawing/2014/main" id="{92943E5C-15F6-54E9-B745-B30B17AAB483}"/>
             </a:ext>
           </a:extLst>
         </p:cNvPr>
@@ -1206,7 +1217,7 @@
           <p:cNvPr id="272" name="Google Shape;272;p11:notes">
             <a:extLst>
               <a:ext uri="{FF2B5EF4-FFF2-40B4-BE49-F238E27FC236}">
-                <a16:creationId xmlns:a16="http://schemas.microsoft.com/office/drawing/2014/main" xmlns="" id="{43D16254-6F56-28A8-E72D-69E13CA5F982}"/>
+                <a16:creationId xmlns:a16="http://schemas.microsoft.com/office/drawing/2014/main" id="{43D16254-6F56-28A8-E72D-69E13CA5F982}"/>
               </a:ext>
             </a:extLst>
           </p:cNvPr>
@@ -1250,7 +1261,7 @@
           <p:cNvPr id="273" name="Google Shape;273;p11:notes">
             <a:extLst>
               <a:ext uri="{FF2B5EF4-FFF2-40B4-BE49-F238E27FC236}">
-                <a16:creationId xmlns:a16="http://schemas.microsoft.com/office/drawing/2014/main" xmlns="" id="{6A221F69-FA65-4CC9-B4D5-4663971FD65F}"/>
+                <a16:creationId xmlns:a16="http://schemas.microsoft.com/office/drawing/2014/main" id="{6A221F69-FA65-4CC9-B4D5-4663971FD65F}"/>
               </a:ext>
             </a:extLst>
           </p:cNvPr>
@@ -1521,7 +1532,7 @@
         <p:cNvPr id="1" name="Shape 260">
           <a:extLst>
             <a:ext uri="{FF2B5EF4-FFF2-40B4-BE49-F238E27FC236}">
-              <a16:creationId xmlns:a16="http://schemas.microsoft.com/office/drawing/2014/main" xmlns="" id="{031ADCA6-ED41-89E8-8C5D-A7C0A46EC911}"/>
+              <a16:creationId xmlns:a16="http://schemas.microsoft.com/office/drawing/2014/main" id="{031ADCA6-ED41-89E8-8C5D-A7C0A46EC911}"/>
             </a:ext>
           </a:extLst>
         </p:cNvPr>
@@ -1541,7 +1552,7 @@
           <p:cNvPr id="261" name="Google Shape;261;p10:notes">
             <a:extLst>
               <a:ext uri="{FF2B5EF4-FFF2-40B4-BE49-F238E27FC236}">
-                <a16:creationId xmlns:a16="http://schemas.microsoft.com/office/drawing/2014/main" xmlns="" id="{76B5FB3A-981F-7241-F06A-19C82D27A25B}"/>
+                <a16:creationId xmlns:a16="http://schemas.microsoft.com/office/drawing/2014/main" id="{76B5FB3A-981F-7241-F06A-19C82D27A25B}"/>
               </a:ext>
             </a:extLst>
           </p:cNvPr>
@@ -1585,7 +1596,7 @@
           <p:cNvPr id="262" name="Google Shape;262;p10:notes">
             <a:extLst>
               <a:ext uri="{FF2B5EF4-FFF2-40B4-BE49-F238E27FC236}">
-                <a16:creationId xmlns:a16="http://schemas.microsoft.com/office/drawing/2014/main" xmlns="" id="{15698202-36E2-7700-F89A-43A791D1B102}"/>
+                <a16:creationId xmlns:a16="http://schemas.microsoft.com/office/drawing/2014/main" id="{15698202-36E2-7700-F89A-43A791D1B102}"/>
               </a:ext>
             </a:extLst>
           </p:cNvPr>
@@ -1648,7 +1659,7 @@
         <p:cNvPr id="1" name="Shape 260">
           <a:extLst>
             <a:ext uri="{FF2B5EF4-FFF2-40B4-BE49-F238E27FC236}">
-              <a16:creationId xmlns:a16="http://schemas.microsoft.com/office/drawing/2014/main" xmlns="" id="{0E976981-14AE-3DC3-9973-EF0F0CADCAEB}"/>
+              <a16:creationId xmlns:a16="http://schemas.microsoft.com/office/drawing/2014/main" id="{0E976981-14AE-3DC3-9973-EF0F0CADCAEB}"/>
             </a:ext>
           </a:extLst>
         </p:cNvPr>
@@ -1668,7 +1679,7 @@
           <p:cNvPr id="261" name="Google Shape;261;p10:notes">
             <a:extLst>
               <a:ext uri="{FF2B5EF4-FFF2-40B4-BE49-F238E27FC236}">
-                <a16:creationId xmlns:a16="http://schemas.microsoft.com/office/drawing/2014/main" xmlns="" id="{FA607C5C-DCD1-5349-A7DF-6FC75E5ED5A2}"/>
+                <a16:creationId xmlns:a16="http://schemas.microsoft.com/office/drawing/2014/main" id="{FA607C5C-DCD1-5349-A7DF-6FC75E5ED5A2}"/>
               </a:ext>
             </a:extLst>
           </p:cNvPr>
@@ -1712,7 +1723,7 @@
           <p:cNvPr id="262" name="Google Shape;262;p10:notes">
             <a:extLst>
               <a:ext uri="{FF2B5EF4-FFF2-40B4-BE49-F238E27FC236}">
-                <a16:creationId xmlns:a16="http://schemas.microsoft.com/office/drawing/2014/main" xmlns="" id="{1C481F5B-62F5-FF71-90D8-F8B7AC3FE442}"/>
+                <a16:creationId xmlns:a16="http://schemas.microsoft.com/office/drawing/2014/main" id="{1C481F5B-62F5-FF71-90D8-F8B7AC3FE442}"/>
               </a:ext>
             </a:extLst>
           </p:cNvPr>
@@ -1775,7 +1786,7 @@
         <p:cNvPr id="1" name="Shape 271">
           <a:extLst>
             <a:ext uri="{FF2B5EF4-FFF2-40B4-BE49-F238E27FC236}">
-              <a16:creationId xmlns:a16="http://schemas.microsoft.com/office/drawing/2014/main" xmlns="" id="{491CAB47-D3CB-8D12-095A-517DD5602BF3}"/>
+              <a16:creationId xmlns:a16="http://schemas.microsoft.com/office/drawing/2014/main" id="{491CAB47-D3CB-8D12-095A-517DD5602BF3}"/>
             </a:ext>
           </a:extLst>
         </p:cNvPr>
@@ -1795,7 +1806,7 @@
           <p:cNvPr id="272" name="Google Shape;272;p11:notes">
             <a:extLst>
               <a:ext uri="{FF2B5EF4-FFF2-40B4-BE49-F238E27FC236}">
-                <a16:creationId xmlns:a16="http://schemas.microsoft.com/office/drawing/2014/main" xmlns="" id="{12DFE4D8-9CD7-C8F2-B8DA-9C7304EF86EB}"/>
+                <a16:creationId xmlns:a16="http://schemas.microsoft.com/office/drawing/2014/main" id="{12DFE4D8-9CD7-C8F2-B8DA-9C7304EF86EB}"/>
               </a:ext>
             </a:extLst>
           </p:cNvPr>
@@ -1839,7 +1850,7 @@
           <p:cNvPr id="273" name="Google Shape;273;p11:notes">
             <a:extLst>
               <a:ext uri="{FF2B5EF4-FFF2-40B4-BE49-F238E27FC236}">
-                <a16:creationId xmlns:a16="http://schemas.microsoft.com/office/drawing/2014/main" xmlns="" id="{2E3771D8-16F3-1D78-85D9-6F890316ECA3}"/>
+                <a16:creationId xmlns:a16="http://schemas.microsoft.com/office/drawing/2014/main" id="{2E3771D8-16F3-1D78-85D9-6F890316ECA3}"/>
               </a:ext>
             </a:extLst>
           </p:cNvPr>
@@ -1938,7 +1949,7 @@
           </a:lstStyle>
           <a:p>
             <a:r>
-              <a:rPr lang="en-US" smtClean="0"/>
+              <a:rPr lang="en-US"/>
               <a:t>Click to edit Master title style</a:t>
             </a:r>
             <a:endParaRPr lang="en-US" dirty="0"/>
@@ -2058,7 +2069,7 @@
           </a:lstStyle>
           <a:p>
             <a:r>
-              <a:rPr lang="en-US" smtClean="0"/>
+              <a:rPr lang="en-US"/>
               <a:t>Click to edit Master subtitle style</a:t>
             </a:r>
             <a:endParaRPr lang="en-US" dirty="0"/>
@@ -2082,7 +2093,7 @@
           <a:p>
             <a:fld id="{F4D18BF0-D309-41FF-AA8C-FC2AA1806513}" type="datetimeFigureOut">
               <a:rPr lang="en-US" smtClean="0"/>
-              <a:t>3/5/2026</a:t>
+              <a:t>3/6/2026</a:t>
             </a:fld>
             <a:endParaRPr lang="en-US"/>
           </a:p>
@@ -2206,10 +2217,9 @@
           <a:lstStyle/>
           <a:p>
             <a:r>
-              <a:rPr lang="en-US" smtClean="0"/>
+              <a:rPr lang="en-US"/>
               <a:t>Click to edit Master title style</a:t>
             </a:r>
-            <a:endParaRPr lang="en-US"/>
           </a:p>
         </p:txBody>
       </p:sp>
@@ -2230,38 +2240,37 @@
           <a:p>
             <a:pPr lvl="0"/>
             <a:r>
-              <a:rPr lang="en-US" smtClean="0"/>
+              <a:rPr lang="en-US"/>
               <a:t>Click to edit Master text styles</a:t>
             </a:r>
           </a:p>
           <a:p>
             <a:pPr lvl="1"/>
             <a:r>
-              <a:rPr lang="en-US" smtClean="0"/>
+              <a:rPr lang="en-US"/>
               <a:t>Second level</a:t>
             </a:r>
           </a:p>
           <a:p>
             <a:pPr lvl="2"/>
             <a:r>
-              <a:rPr lang="en-US" smtClean="0"/>
+              <a:rPr lang="en-US"/>
               <a:t>Third level</a:t>
             </a:r>
           </a:p>
           <a:p>
             <a:pPr lvl="3"/>
             <a:r>
-              <a:rPr lang="en-US" smtClean="0"/>
+              <a:rPr lang="en-US"/>
               <a:t>Fourth level</a:t>
             </a:r>
           </a:p>
           <a:p>
             <a:pPr lvl="4"/>
             <a:r>
-              <a:rPr lang="en-US" smtClean="0"/>
+              <a:rPr lang="en-US"/>
               <a:t>Fifth level</a:t>
             </a:r>
-            <a:endParaRPr lang="en-US"/>
           </a:p>
         </p:txBody>
       </p:sp>
@@ -2282,7 +2291,7 @@
           <a:p>
             <a:fld id="{F4D18BF0-D309-41FF-AA8C-FC2AA1806513}" type="datetimeFigureOut">
               <a:rPr lang="en-US" smtClean="0"/>
-              <a:t>3/5/2026</a:t>
+              <a:t>3/6/2026</a:t>
             </a:fld>
             <a:endParaRPr lang="en-US"/>
           </a:p>
@@ -2376,7 +2385,7 @@
           <a:lstStyle/>
           <a:p>
             <a:r>
-              <a:rPr lang="en-US" smtClean="0"/>
+              <a:rPr lang="en-US"/>
               <a:t>Click to edit Master title style</a:t>
             </a:r>
             <a:endParaRPr lang="en-US" dirty="0"/>
@@ -2405,35 +2414,35 @@
           <a:p>
             <a:pPr lvl="0"/>
             <a:r>
-              <a:rPr lang="en-US" smtClean="0"/>
+              <a:rPr lang="en-US"/>
               <a:t>Click to edit Master text styles</a:t>
             </a:r>
           </a:p>
           <a:p>
             <a:pPr lvl="1"/>
             <a:r>
-              <a:rPr lang="en-US" smtClean="0"/>
+              <a:rPr lang="en-US"/>
               <a:t>Second level</a:t>
             </a:r>
           </a:p>
           <a:p>
             <a:pPr lvl="2"/>
             <a:r>
-              <a:rPr lang="en-US" smtClean="0"/>
+              <a:rPr lang="en-US"/>
               <a:t>Third level</a:t>
             </a:r>
           </a:p>
           <a:p>
             <a:pPr lvl="3"/>
             <a:r>
-              <a:rPr lang="en-US" smtClean="0"/>
+              <a:rPr lang="en-US"/>
               <a:t>Fourth level</a:t>
             </a:r>
           </a:p>
           <a:p>
             <a:pPr lvl="4"/>
             <a:r>
-              <a:rPr lang="en-US" smtClean="0"/>
+              <a:rPr lang="en-US"/>
               <a:t>Fifth level</a:t>
             </a:r>
             <a:endParaRPr lang="en-US" dirty="0"/>
@@ -2457,7 +2466,7 @@
           <a:p>
             <a:fld id="{F4D18BF0-D309-41FF-AA8C-FC2AA1806513}" type="datetimeFigureOut">
               <a:rPr lang="en-US" smtClean="0"/>
-              <a:t>3/5/2026</a:t>
+              <a:t>3/6/2026</a:t>
             </a:fld>
             <a:endParaRPr lang="en-US"/>
           </a:p>
@@ -2546,10 +2555,9 @@
           <a:lstStyle/>
           <a:p>
             <a:r>
-              <a:rPr lang="en-US" smtClean="0"/>
+              <a:rPr lang="en-US"/>
               <a:t>Click to edit Master title style</a:t>
             </a:r>
-            <a:endParaRPr lang="en-US"/>
           </a:p>
         </p:txBody>
       </p:sp>
@@ -2570,38 +2578,37 @@
           <a:p>
             <a:pPr lvl="0"/>
             <a:r>
-              <a:rPr lang="en-US" smtClean="0"/>
+              <a:rPr lang="en-US"/>
               <a:t>Click to edit Master text styles</a:t>
             </a:r>
           </a:p>
           <a:p>
             <a:pPr lvl="1"/>
             <a:r>
-              <a:rPr lang="en-US" smtClean="0"/>
+              <a:rPr lang="en-US"/>
               <a:t>Second level</a:t>
             </a:r>
           </a:p>
           <a:p>
             <a:pPr lvl="2"/>
             <a:r>
-              <a:rPr lang="en-US" smtClean="0"/>
+              <a:rPr lang="en-US"/>
               <a:t>Third level</a:t>
             </a:r>
           </a:p>
           <a:p>
             <a:pPr lvl="3"/>
             <a:r>
-              <a:rPr lang="en-US" smtClean="0"/>
+              <a:rPr lang="en-US"/>
               <a:t>Fourth level</a:t>
             </a:r>
           </a:p>
           <a:p>
             <a:pPr lvl="4"/>
             <a:r>
-              <a:rPr lang="en-US" smtClean="0"/>
+              <a:rPr lang="en-US"/>
               <a:t>Fifth level</a:t>
             </a:r>
-            <a:endParaRPr lang="en-US"/>
           </a:p>
         </p:txBody>
       </p:sp>
@@ -2622,7 +2629,7 @@
           <a:p>
             <a:fld id="{F4D18BF0-D309-41FF-AA8C-FC2AA1806513}" type="datetimeFigureOut">
               <a:rPr lang="en-US" smtClean="0"/>
-              <a:t>3/5/2026</a:t>
+              <a:t>3/6/2026</a:t>
             </a:fld>
             <a:endParaRPr lang="en-US"/>
           </a:p>
@@ -2727,7 +2734,7 @@
           </a:lstStyle>
           <a:p>
             <a:r>
-              <a:rPr lang="en-US" smtClean="0"/>
+              <a:rPr lang="en-US"/>
               <a:t>Click to edit Master title style</a:t>
             </a:r>
             <a:endParaRPr lang="en-US" dirty="0"/>
@@ -2847,7 +2854,7 @@
           <a:p>
             <a:pPr lvl="0"/>
             <a:r>
-              <a:rPr lang="en-US" smtClean="0"/>
+              <a:rPr lang="en-US"/>
               <a:t>Click to edit Master text styles</a:t>
             </a:r>
           </a:p>
@@ -2870,7 +2877,7 @@
           <a:p>
             <a:fld id="{F4D18BF0-D309-41FF-AA8C-FC2AA1806513}" type="datetimeFigureOut">
               <a:rPr lang="en-US" smtClean="0"/>
-              <a:t>3/5/2026</a:t>
+              <a:t>3/6/2026</a:t>
             </a:fld>
             <a:endParaRPr lang="en-US"/>
           </a:p>
@@ -2994,10 +3001,9 @@
           <a:lstStyle/>
           <a:p>
             <a:r>
-              <a:rPr lang="en-US" smtClean="0"/>
+              <a:rPr lang="en-US"/>
               <a:t>Click to edit Master title style</a:t>
             </a:r>
-            <a:endParaRPr lang="en-US"/>
           </a:p>
         </p:txBody>
       </p:sp>
@@ -3051,35 +3057,35 @@
           <a:p>
             <a:pPr lvl="0"/>
             <a:r>
-              <a:rPr lang="en-US" smtClean="0"/>
+              <a:rPr lang="en-US"/>
               <a:t>Click to edit Master text styles</a:t>
             </a:r>
           </a:p>
           <a:p>
             <a:pPr lvl="1"/>
             <a:r>
-              <a:rPr lang="en-US" smtClean="0"/>
+              <a:rPr lang="en-US"/>
               <a:t>Second level</a:t>
             </a:r>
           </a:p>
           <a:p>
             <a:pPr lvl="2"/>
             <a:r>
-              <a:rPr lang="en-US" smtClean="0"/>
+              <a:rPr lang="en-US"/>
               <a:t>Third level</a:t>
             </a:r>
           </a:p>
           <a:p>
             <a:pPr lvl="3"/>
             <a:r>
-              <a:rPr lang="en-US" smtClean="0"/>
+              <a:rPr lang="en-US"/>
               <a:t>Fourth level</a:t>
             </a:r>
           </a:p>
           <a:p>
             <a:pPr lvl="4"/>
             <a:r>
-              <a:rPr lang="en-US" smtClean="0"/>
+              <a:rPr lang="en-US"/>
               <a:t>Fifth level</a:t>
             </a:r>
             <a:endParaRPr lang="en-US" dirty="0"/>
@@ -3136,35 +3142,35 @@
           <a:p>
             <a:pPr lvl="0"/>
             <a:r>
-              <a:rPr lang="en-US" smtClean="0"/>
+              <a:rPr lang="en-US"/>
               <a:t>Click to edit Master text styles</a:t>
             </a:r>
           </a:p>
           <a:p>
             <a:pPr lvl="1"/>
             <a:r>
-              <a:rPr lang="en-US" smtClean="0"/>
+              <a:rPr lang="en-US"/>
               <a:t>Second level</a:t>
             </a:r>
           </a:p>
           <a:p>
             <a:pPr lvl="2"/>
             <a:r>
-              <a:rPr lang="en-US" smtClean="0"/>
+              <a:rPr lang="en-US"/>
               <a:t>Third level</a:t>
             </a:r>
           </a:p>
           <a:p>
             <a:pPr lvl="3"/>
             <a:r>
-              <a:rPr lang="en-US" smtClean="0"/>
+              <a:rPr lang="en-US"/>
               <a:t>Fourth level</a:t>
             </a:r>
           </a:p>
           <a:p>
             <a:pPr lvl="4"/>
             <a:r>
-              <a:rPr lang="en-US" smtClean="0"/>
+              <a:rPr lang="en-US"/>
               <a:t>Fifth level</a:t>
             </a:r>
             <a:endParaRPr lang="en-US" dirty="0"/>
@@ -3188,7 +3194,7 @@
           <a:p>
             <a:fld id="{F4D18BF0-D309-41FF-AA8C-FC2AA1806513}" type="datetimeFigureOut">
               <a:rPr lang="en-US" smtClean="0"/>
-              <a:t>3/5/2026</a:t>
+              <a:t>3/6/2026</a:t>
             </a:fld>
             <a:endParaRPr lang="en-US"/>
           </a:p>
@@ -3281,7 +3287,7 @@
           </a:lstStyle>
           <a:p>
             <a:r>
-              <a:rPr lang="en-US" smtClean="0"/>
+              <a:rPr lang="en-US"/>
               <a:t>Click to edit Master title style</a:t>
             </a:r>
             <a:endParaRPr lang="en-US" dirty="0"/>
@@ -3370,7 +3376,7 @@
           <a:p>
             <a:pPr lvl="0"/>
             <a:r>
-              <a:rPr lang="en-US" smtClean="0"/>
+              <a:rPr lang="en-US"/>
               <a:t>Click to edit Master text styles</a:t>
             </a:r>
           </a:p>
@@ -3426,35 +3432,35 @@
           <a:p>
             <a:pPr lvl="0"/>
             <a:r>
-              <a:rPr lang="en-US" smtClean="0"/>
+              <a:rPr lang="en-US"/>
               <a:t>Click to edit Master text styles</a:t>
             </a:r>
           </a:p>
           <a:p>
             <a:pPr lvl="1"/>
             <a:r>
-              <a:rPr lang="en-US" smtClean="0"/>
+              <a:rPr lang="en-US"/>
               <a:t>Second level</a:t>
             </a:r>
           </a:p>
           <a:p>
             <a:pPr lvl="2"/>
             <a:r>
-              <a:rPr lang="en-US" smtClean="0"/>
+              <a:rPr lang="en-US"/>
               <a:t>Third level</a:t>
             </a:r>
           </a:p>
           <a:p>
             <a:pPr lvl="3"/>
             <a:r>
-              <a:rPr lang="en-US" smtClean="0"/>
+              <a:rPr lang="en-US"/>
               <a:t>Fourth level</a:t>
             </a:r>
           </a:p>
           <a:p>
             <a:pPr lvl="4"/>
             <a:r>
-              <a:rPr lang="en-US" smtClean="0"/>
+              <a:rPr lang="en-US"/>
               <a:t>Fifth level</a:t>
             </a:r>
             <a:endParaRPr lang="en-US" dirty="0"/>
@@ -3546,7 +3552,7 @@
           <a:p>
             <a:pPr lvl="0"/>
             <a:r>
-              <a:rPr lang="en-US" smtClean="0"/>
+              <a:rPr lang="en-US"/>
               <a:t>Click to edit Master text styles</a:t>
             </a:r>
           </a:p>
@@ -3602,35 +3608,35 @@
           <a:p>
             <a:pPr lvl="0"/>
             <a:r>
-              <a:rPr lang="en-US" smtClean="0"/>
+              <a:rPr lang="en-US"/>
               <a:t>Click to edit Master text styles</a:t>
             </a:r>
           </a:p>
           <a:p>
             <a:pPr lvl="1"/>
             <a:r>
-              <a:rPr lang="en-US" smtClean="0"/>
+              <a:rPr lang="en-US"/>
               <a:t>Second level</a:t>
             </a:r>
           </a:p>
           <a:p>
             <a:pPr lvl="2"/>
             <a:r>
-              <a:rPr lang="en-US" smtClean="0"/>
+              <a:rPr lang="en-US"/>
               <a:t>Third level</a:t>
             </a:r>
           </a:p>
           <a:p>
             <a:pPr lvl="3"/>
             <a:r>
-              <a:rPr lang="en-US" smtClean="0"/>
+              <a:rPr lang="en-US"/>
               <a:t>Fourth level</a:t>
             </a:r>
           </a:p>
           <a:p>
             <a:pPr lvl="4"/>
             <a:r>
-              <a:rPr lang="en-US" smtClean="0"/>
+              <a:rPr lang="en-US"/>
               <a:t>Fifth level</a:t>
             </a:r>
             <a:endParaRPr lang="en-US" dirty="0"/>
@@ -3654,7 +3660,7 @@
           <a:p>
             <a:fld id="{F4D18BF0-D309-41FF-AA8C-FC2AA1806513}" type="datetimeFigureOut">
               <a:rPr lang="en-US" smtClean="0"/>
-              <a:t>3/5/2026</a:t>
+              <a:t>3/6/2026</a:t>
             </a:fld>
             <a:endParaRPr lang="en-US"/>
           </a:p>
@@ -3778,10 +3784,9 @@
           <a:lstStyle/>
           <a:p>
             <a:r>
-              <a:rPr lang="en-US" smtClean="0"/>
+              <a:rPr lang="en-US"/>
               <a:t>Click to edit Master title style</a:t>
             </a:r>
-            <a:endParaRPr lang="en-US"/>
           </a:p>
         </p:txBody>
       </p:sp>
@@ -3802,7 +3807,7 @@
           <a:p>
             <a:fld id="{F4D18BF0-D309-41FF-AA8C-FC2AA1806513}" type="datetimeFigureOut">
               <a:rPr lang="en-US" smtClean="0"/>
-              <a:t>3/5/2026</a:t>
+              <a:t>3/6/2026</a:t>
             </a:fld>
             <a:endParaRPr lang="en-US"/>
           </a:p>
@@ -3892,7 +3897,7 @@
           <a:p>
             <a:fld id="{F4D18BF0-D309-41FF-AA8C-FC2AA1806513}" type="datetimeFigureOut">
               <a:rPr lang="en-US" smtClean="0"/>
-              <a:t>3/5/2026</a:t>
+              <a:t>3/6/2026</a:t>
             </a:fld>
             <a:endParaRPr lang="en-US"/>
           </a:p>
@@ -3992,7 +3997,7 @@
           </a:lstStyle>
           <a:p>
             <a:r>
-              <a:rPr lang="en-US" smtClean="0"/>
+              <a:rPr lang="en-US"/>
               <a:t>Click to edit Master title style</a:t>
             </a:r>
             <a:endParaRPr lang="en-US" dirty="0"/>
@@ -4049,35 +4054,35 @@
           <a:p>
             <a:pPr lvl="0"/>
             <a:r>
-              <a:rPr lang="en-US" smtClean="0"/>
+              <a:rPr lang="en-US"/>
               <a:t>Click to edit Master text styles</a:t>
             </a:r>
           </a:p>
           <a:p>
             <a:pPr lvl="1"/>
             <a:r>
-              <a:rPr lang="en-US" smtClean="0"/>
+              <a:rPr lang="en-US"/>
               <a:t>Second level</a:t>
             </a:r>
           </a:p>
           <a:p>
             <a:pPr lvl="2"/>
             <a:r>
-              <a:rPr lang="en-US" smtClean="0"/>
+              <a:rPr lang="en-US"/>
               <a:t>Third level</a:t>
             </a:r>
           </a:p>
           <a:p>
             <a:pPr lvl="3"/>
             <a:r>
-              <a:rPr lang="en-US" smtClean="0"/>
+              <a:rPr lang="en-US"/>
               <a:t>Fourth level</a:t>
             </a:r>
           </a:p>
           <a:p>
             <a:pPr lvl="4"/>
             <a:r>
-              <a:rPr lang="en-US" smtClean="0"/>
+              <a:rPr lang="en-US"/>
               <a:t>Fifth level</a:t>
             </a:r>
             <a:endParaRPr lang="en-US" dirty="0"/>
@@ -4143,7 +4148,7 @@
           <a:p>
             <a:pPr lvl="0"/>
             <a:r>
-              <a:rPr lang="en-US" smtClean="0"/>
+              <a:rPr lang="en-US"/>
               <a:t>Click to edit Master text styles</a:t>
             </a:r>
           </a:p>
@@ -4166,7 +4171,7 @@
           <a:p>
             <a:fld id="{F4D18BF0-D309-41FF-AA8C-FC2AA1806513}" type="datetimeFigureOut">
               <a:rPr lang="en-US" smtClean="0"/>
-              <a:t>3/5/2026</a:t>
+              <a:t>3/6/2026</a:t>
             </a:fld>
             <a:endParaRPr lang="en-US"/>
           </a:p>
@@ -4301,7 +4306,7 @@
           </a:lstStyle>
           <a:p>
             <a:r>
-              <a:rPr lang="en-US" smtClean="0"/>
+              <a:rPr lang="en-US"/>
               <a:t>Click to edit Master title style</a:t>
             </a:r>
             <a:endParaRPr lang="en-US" dirty="0"/>
@@ -4382,7 +4387,7 @@
           </a:lstStyle>
           <a:p>
             <a:r>
-              <a:rPr lang="en-US" smtClean="0"/>
+              <a:rPr lang="en-US"/>
               <a:t>Click icon to add picture</a:t>
             </a:r>
             <a:endParaRPr lang="en-US" dirty="0"/>
@@ -4448,7 +4453,7 @@
           <a:p>
             <a:pPr lvl="0"/>
             <a:r>
-              <a:rPr lang="en-US" smtClean="0"/>
+              <a:rPr lang="en-US"/>
               <a:t>Click to edit Master text styles</a:t>
             </a:r>
           </a:p>
@@ -4471,7 +4476,7 @@
           <a:p>
             <a:fld id="{F4D18BF0-D309-41FF-AA8C-FC2AA1806513}" type="datetimeFigureOut">
               <a:rPr lang="en-US" smtClean="0"/>
-              <a:t>3/5/2026</a:t>
+              <a:t>3/6/2026</a:t>
             </a:fld>
             <a:endParaRPr lang="en-US"/>
           </a:p>
@@ -4621,7 +4626,7 @@
           <a:lstStyle/>
           <a:p>
             <a:r>
-              <a:rPr lang="en-US" smtClean="0"/>
+              <a:rPr lang="en-US"/>
               <a:t>Click to edit Master title style</a:t>
             </a:r>
             <a:endParaRPr lang="en-US" dirty="0"/>
@@ -4655,35 +4660,35 @@
           <a:p>
             <a:pPr lvl="0"/>
             <a:r>
-              <a:rPr lang="en-US" smtClean="0"/>
+              <a:rPr lang="en-US"/>
               <a:t>Click to edit Master text styles</a:t>
             </a:r>
           </a:p>
           <a:p>
             <a:pPr lvl="1"/>
             <a:r>
-              <a:rPr lang="en-US" smtClean="0"/>
+              <a:rPr lang="en-US"/>
               <a:t>Second level</a:t>
             </a:r>
           </a:p>
           <a:p>
             <a:pPr lvl="2"/>
             <a:r>
-              <a:rPr lang="en-US" smtClean="0"/>
+              <a:rPr lang="en-US"/>
               <a:t>Third level</a:t>
             </a:r>
           </a:p>
           <a:p>
             <a:pPr lvl="3"/>
             <a:r>
-              <a:rPr lang="en-US" smtClean="0"/>
+              <a:rPr lang="en-US"/>
               <a:t>Fourth level</a:t>
             </a:r>
           </a:p>
           <a:p>
             <a:pPr lvl="4"/>
             <a:r>
-              <a:rPr lang="en-US" smtClean="0"/>
+              <a:rPr lang="en-US"/>
               <a:t>Fifth level</a:t>
             </a:r>
             <a:endParaRPr lang="en-US" dirty="0"/>
@@ -4769,7 +4774,7 @@
           <a:p>
             <a:fld id="{F4D18BF0-D309-41FF-AA8C-FC2AA1806513}" type="datetimeFigureOut">
               <a:rPr lang="en-US" smtClean="0"/>
-              <a:t>3/5/2026</a:t>
+              <a:t>3/6/2026</a:t>
             </a:fld>
             <a:endParaRPr lang="en-US"/>
           </a:p>
@@ -5501,7 +5506,7 @@
                 </a:lnSpc>
               </a:pPr>
               <a:r>
-                <a:rPr lang="en-US" sz="8000" b="1" dirty="0" smtClean="0">
+                <a:rPr lang="en-US" sz="8000" b="1" dirty="0">
                   <a:solidFill>
                     <a:srgbClr val="000000"/>
                   </a:solidFill>
@@ -5552,27 +5557,7 @@
                   <a:latin typeface="DM Sans"/>
                   <a:sym typeface="DM Sans"/>
                 </a:rPr>
-                <a:t>How to </a:t>
-              </a:r>
-              <a:r>
-                <a:rPr lang="en-US" sz="4000" b="1" dirty="0" smtClean="0">
-                  <a:solidFill>
-                    <a:srgbClr val="000000"/>
-                  </a:solidFill>
-                  <a:latin typeface="DM Sans"/>
-                  <a:sym typeface="DM Sans"/>
-                </a:rPr>
-                <a:t>address </a:t>
-              </a:r>
-              <a:r>
-                <a:rPr lang="en-US" sz="4000" b="1" dirty="0">
-                  <a:solidFill>
-                    <a:srgbClr val="000000"/>
-                  </a:solidFill>
-                  <a:latin typeface="DM Sans"/>
-                  <a:sym typeface="DM Sans"/>
-                </a:rPr>
-                <a:t>the long-term prevention of stroke risk factors</a:t>
+                <a:t>How to address the long-term prevention of stroke risk factors</a:t>
               </a:r>
               <a:endParaRPr sz="4000" dirty="0"/>
             </a:p>
@@ -5665,7 +5650,7 @@
                 <a:cs typeface="DM Sans"/>
                 <a:sym typeface="DM Sans"/>
               </a:rPr>
-              <a:t>07/17/2023</a:t>
+              <a:t>03/07/2026</a:t>
             </a:r>
             <a:endParaRPr sz="1200" dirty="0"/>
           </a:p>
@@ -5706,13 +5691,6 @@
   <p:clrMapOvr>
     <a:masterClrMapping/>
   </p:clrMapOvr>
-  <p:timing>
-    <p:tnLst>
-      <p:par>
-        <p:cTn id="1" dur="indefinite" restart="never" nodeType="tmRoot"/>
-      </p:par>
-    </p:tnLst>
-  </p:timing>
 </p:sld>
 </file>
 
@@ -5738,7 +5716,7 @@
           <p:cNvPr id="2" name="Title 1">
             <a:extLst>
               <a:ext uri="{FF2B5EF4-FFF2-40B4-BE49-F238E27FC236}">
-                <a16:creationId xmlns:a16="http://schemas.microsoft.com/office/drawing/2014/main" xmlns="" id="{01C10B9E-90C0-9670-DAA4-76A271EAE1C2}"/>
+                <a16:creationId xmlns:a16="http://schemas.microsoft.com/office/drawing/2014/main" id="{01C10B9E-90C0-9670-DAA4-76A271EAE1C2}"/>
               </a:ext>
             </a:extLst>
           </p:cNvPr>
@@ -5776,7 +5754,7 @@
           <p:cNvPr id="7" name="TextBox 6">
             <a:extLst>
               <a:ext uri="{FF2B5EF4-FFF2-40B4-BE49-F238E27FC236}">
-                <a16:creationId xmlns:a16="http://schemas.microsoft.com/office/drawing/2014/main" xmlns="" id="{6B483A5E-4DDA-A3E0-EDFB-D0FF1AA4EAB5}"/>
+                <a16:creationId xmlns:a16="http://schemas.microsoft.com/office/drawing/2014/main" id="{6B483A5E-4DDA-A3E0-EDFB-D0FF1AA4EAB5}"/>
               </a:ext>
             </a:extLst>
           </p:cNvPr>
@@ -5826,7 +5804,7 @@
           <p:cNvPr id="5" name="Picture 4">
             <a:extLst>
               <a:ext uri="{FF2B5EF4-FFF2-40B4-BE49-F238E27FC236}">
-                <a16:creationId xmlns:a16="http://schemas.microsoft.com/office/drawing/2014/main" xmlns="" id="{C75444B8-5D86-E68B-3EBA-EF948AAAA4EC}"/>
+                <a16:creationId xmlns:a16="http://schemas.microsoft.com/office/drawing/2014/main" id="{C75444B8-5D86-E68B-3EBA-EF948AAAA4EC}"/>
               </a:ext>
             </a:extLst>
           </p:cNvPr>
@@ -5862,7 +5840,7 @@
           <p:cNvPr id="9" name="Picture 8">
             <a:extLst>
               <a:ext uri="{FF2B5EF4-FFF2-40B4-BE49-F238E27FC236}">
-                <a16:creationId xmlns:a16="http://schemas.microsoft.com/office/drawing/2014/main" xmlns="" id="{2675BDA9-A3D6-7D87-07BD-09F6863468E0}"/>
+                <a16:creationId xmlns:a16="http://schemas.microsoft.com/office/drawing/2014/main" id="{2675BDA9-A3D6-7D87-07BD-09F6863468E0}"/>
               </a:ext>
             </a:extLst>
           </p:cNvPr>
@@ -5903,13 +5881,6 @@
   <p:clrMapOvr>
     <a:masterClrMapping/>
   </p:clrMapOvr>
-  <p:timing>
-    <p:tnLst>
-      <p:par>
-        <p:cTn id="1" dur="indefinite" restart="never" nodeType="tmRoot"/>
-      </p:par>
-    </p:tnLst>
-  </p:timing>
 </p:sld>
 </file>
 
@@ -5935,7 +5906,7 @@
           <p:cNvPr id="2" name="Title 1">
             <a:extLst>
               <a:ext uri="{FF2B5EF4-FFF2-40B4-BE49-F238E27FC236}">
-                <a16:creationId xmlns:a16="http://schemas.microsoft.com/office/drawing/2014/main" xmlns="" id="{133460DC-725D-68D9-A0E1-CA81CA68E035}"/>
+                <a16:creationId xmlns:a16="http://schemas.microsoft.com/office/drawing/2014/main" id="{133460DC-725D-68D9-A0E1-CA81CA68E035}"/>
               </a:ext>
             </a:extLst>
           </p:cNvPr>
@@ -5973,7 +5944,7 @@
           <p:cNvPr id="4" name="Picture 3">
             <a:extLst>
               <a:ext uri="{FF2B5EF4-FFF2-40B4-BE49-F238E27FC236}">
-                <a16:creationId xmlns:a16="http://schemas.microsoft.com/office/drawing/2014/main" xmlns="" id="{4C074982-224C-F718-2655-1ADD433920F9}"/>
+                <a16:creationId xmlns:a16="http://schemas.microsoft.com/office/drawing/2014/main" id="{4C074982-224C-F718-2655-1ADD433920F9}"/>
               </a:ext>
             </a:extLst>
           </p:cNvPr>
@@ -6009,7 +5980,7 @@
           <p:cNvPr id="6" name="Picture 5">
             <a:extLst>
               <a:ext uri="{FF2B5EF4-FFF2-40B4-BE49-F238E27FC236}">
-                <a16:creationId xmlns:a16="http://schemas.microsoft.com/office/drawing/2014/main" xmlns="" id="{61EDA505-3CDA-18D8-27DB-EA9CCD764CE6}"/>
+                <a16:creationId xmlns:a16="http://schemas.microsoft.com/office/drawing/2014/main" id="{61EDA505-3CDA-18D8-27DB-EA9CCD764CE6}"/>
               </a:ext>
             </a:extLst>
           </p:cNvPr>
@@ -6050,13 +6021,6 @@
   <p:clrMapOvr>
     <a:masterClrMapping/>
   </p:clrMapOvr>
-  <p:timing>
-    <p:tnLst>
-      <p:par>
-        <p:cTn id="1" dur="indefinite" restart="never" nodeType="tmRoot"/>
-      </p:par>
-    </p:tnLst>
-  </p:timing>
 </p:sld>
 </file>
 
@@ -6082,7 +6046,7 @@
           <p:cNvPr id="2" name="Title 1">
             <a:extLst>
               <a:ext uri="{FF2B5EF4-FFF2-40B4-BE49-F238E27FC236}">
-                <a16:creationId xmlns:a16="http://schemas.microsoft.com/office/drawing/2014/main" xmlns="" id="{29C9DFEB-0CA1-CB6C-4AFD-3BC259ED3B9E}"/>
+                <a16:creationId xmlns:a16="http://schemas.microsoft.com/office/drawing/2014/main" id="{29C9DFEB-0CA1-CB6C-4AFD-3BC259ED3B9E}"/>
               </a:ext>
             </a:extLst>
           </p:cNvPr>
@@ -6120,7 +6084,7 @@
           <p:cNvPr id="4" name="Picture 3">
             <a:extLst>
               <a:ext uri="{FF2B5EF4-FFF2-40B4-BE49-F238E27FC236}">
-                <a16:creationId xmlns:a16="http://schemas.microsoft.com/office/drawing/2014/main" xmlns="" id="{534FECA0-84D6-8895-9DCD-7AAC0FE96103}"/>
+                <a16:creationId xmlns:a16="http://schemas.microsoft.com/office/drawing/2014/main" id="{534FECA0-84D6-8895-9DCD-7AAC0FE96103}"/>
               </a:ext>
             </a:extLst>
           </p:cNvPr>
@@ -6156,7 +6120,7 @@
           <p:cNvPr id="6" name="Picture 5">
             <a:extLst>
               <a:ext uri="{FF2B5EF4-FFF2-40B4-BE49-F238E27FC236}">
-                <a16:creationId xmlns:a16="http://schemas.microsoft.com/office/drawing/2014/main" xmlns="" id="{EFE99F0D-6888-2FD5-992A-E287A9783734}"/>
+                <a16:creationId xmlns:a16="http://schemas.microsoft.com/office/drawing/2014/main" id="{EFE99F0D-6888-2FD5-992A-E287A9783734}"/>
               </a:ext>
             </a:extLst>
           </p:cNvPr>
@@ -6197,13 +6161,6 @@
   <p:clrMapOvr>
     <a:masterClrMapping/>
   </p:clrMapOvr>
-  <p:timing>
-    <p:tnLst>
-      <p:par>
-        <p:cTn id="1" dur="indefinite" restart="never" nodeType="tmRoot"/>
-      </p:par>
-    </p:tnLst>
-  </p:timing>
 </p:sld>
 </file>
 
@@ -6215,7 +6172,7 @@
         <p:cNvPr id="1" name="Shape 274">
           <a:extLst>
             <a:ext uri="{FF2B5EF4-FFF2-40B4-BE49-F238E27FC236}">
-              <a16:creationId xmlns:a16="http://schemas.microsoft.com/office/drawing/2014/main" xmlns="" id="{1C30281B-3760-2161-5794-B3B88C1381EC}"/>
+              <a16:creationId xmlns:a16="http://schemas.microsoft.com/office/drawing/2014/main" id="{1C30281B-3760-2161-5794-B3B88C1381EC}"/>
             </a:ext>
           </a:extLst>
         </p:cNvPr>
@@ -6235,7 +6192,7 @@
           <p:cNvPr id="277" name="Google Shape;277;p23">
             <a:extLst>
               <a:ext uri="{FF2B5EF4-FFF2-40B4-BE49-F238E27FC236}">
-                <a16:creationId xmlns:a16="http://schemas.microsoft.com/office/drawing/2014/main" xmlns="" id="{AB0BA0EA-3DF6-19F9-C9DA-6139AA37C04B}"/>
+                <a16:creationId xmlns:a16="http://schemas.microsoft.com/office/drawing/2014/main" id="{AB0BA0EA-3DF6-19F9-C9DA-6139AA37C04B}"/>
               </a:ext>
             </a:extLst>
           </p:cNvPr>
@@ -6267,7 +6224,7 @@
           <p:cNvPr id="278" name="Google Shape;278;p23">
             <a:extLst>
               <a:ext uri="{FF2B5EF4-FFF2-40B4-BE49-F238E27FC236}">
-                <a16:creationId xmlns:a16="http://schemas.microsoft.com/office/drawing/2014/main" xmlns="" id="{BDC5E0E6-5A49-9DBF-73D2-BF8F66CA890E}"/>
+                <a16:creationId xmlns:a16="http://schemas.microsoft.com/office/drawing/2014/main" id="{BDC5E0E6-5A49-9DBF-73D2-BF8F66CA890E}"/>
               </a:ext>
             </a:extLst>
           </p:cNvPr>
@@ -6368,7 +6325,7 @@
           <p:cNvPr id="279" name="Google Shape;279;p23">
             <a:extLst>
               <a:ext uri="{FF2B5EF4-FFF2-40B4-BE49-F238E27FC236}">
-                <a16:creationId xmlns:a16="http://schemas.microsoft.com/office/drawing/2014/main" xmlns="" id="{55D299CF-9DA6-DBEF-7627-FDF69A2D3F0C}"/>
+                <a16:creationId xmlns:a16="http://schemas.microsoft.com/office/drawing/2014/main" id="{55D299CF-9DA6-DBEF-7627-FDF69A2D3F0C}"/>
               </a:ext>
             </a:extLst>
           </p:cNvPr>
@@ -6455,13 +6412,6 @@
   <p:transition>
     <p:push/>
   </p:transition>
-  <p:timing>
-    <p:tnLst>
-      <p:par>
-        <p:cTn id="1" dur="indefinite" restart="never" nodeType="tmRoot"/>
-      </p:par>
-    </p:tnLst>
-  </p:timing>
 </p:sld>
 </file>
 
@@ -6487,7 +6437,7 @@
           <p:cNvPr id="2" name="Title 1">
             <a:extLst>
               <a:ext uri="{FF2B5EF4-FFF2-40B4-BE49-F238E27FC236}">
-                <a16:creationId xmlns:a16="http://schemas.microsoft.com/office/drawing/2014/main" xmlns="" id="{504E5768-5196-E7B0-5832-1C34EADE2A9E}"/>
+                <a16:creationId xmlns:a16="http://schemas.microsoft.com/office/drawing/2014/main" id="{504E5768-5196-E7B0-5832-1C34EADE2A9E}"/>
               </a:ext>
             </a:extLst>
           </p:cNvPr>
@@ -6525,7 +6475,7 @@
           <p:cNvPr id="4" name="Picture 3">
             <a:extLst>
               <a:ext uri="{FF2B5EF4-FFF2-40B4-BE49-F238E27FC236}">
-                <a16:creationId xmlns:a16="http://schemas.microsoft.com/office/drawing/2014/main" xmlns="" id="{6E8ED54E-6A0F-3791-032C-7B6A9F60D7D7}"/>
+                <a16:creationId xmlns:a16="http://schemas.microsoft.com/office/drawing/2014/main" id="{6E8ED54E-6A0F-3791-032C-7B6A9F60D7D7}"/>
               </a:ext>
             </a:extLst>
           </p:cNvPr>
@@ -6566,13 +6516,6 @@
   <p:clrMapOvr>
     <a:masterClrMapping/>
   </p:clrMapOvr>
-  <p:timing>
-    <p:tnLst>
-      <p:par>
-        <p:cTn id="1" dur="indefinite" restart="never" nodeType="tmRoot"/>
-      </p:par>
-    </p:tnLst>
-  </p:timing>
 </p:sld>
 </file>
 
@@ -6598,7 +6541,7 @@
           <p:cNvPr id="2" name="Title 1">
             <a:extLst>
               <a:ext uri="{FF2B5EF4-FFF2-40B4-BE49-F238E27FC236}">
-                <a16:creationId xmlns:a16="http://schemas.microsoft.com/office/drawing/2014/main" xmlns="" id="{1FE84273-F5F3-6139-2570-575B7D985726}"/>
+                <a16:creationId xmlns:a16="http://schemas.microsoft.com/office/drawing/2014/main" id="{1FE84273-F5F3-6139-2570-575B7D985726}"/>
               </a:ext>
             </a:extLst>
           </p:cNvPr>
@@ -6636,7 +6579,7 @@
           <p:cNvPr id="5" name="Picture 4">
             <a:extLst>
               <a:ext uri="{FF2B5EF4-FFF2-40B4-BE49-F238E27FC236}">
-                <a16:creationId xmlns:a16="http://schemas.microsoft.com/office/drawing/2014/main" xmlns="" id="{72207C6A-CBC3-B195-4FA4-064B4BCEDF82}"/>
+                <a16:creationId xmlns:a16="http://schemas.microsoft.com/office/drawing/2014/main" id="{72207C6A-CBC3-B195-4FA4-064B4BCEDF82}"/>
               </a:ext>
             </a:extLst>
           </p:cNvPr>
@@ -6677,13 +6620,6 @@
   <p:clrMapOvr>
     <a:masterClrMapping/>
   </p:clrMapOvr>
-  <p:timing>
-    <p:tnLst>
-      <p:par>
-        <p:cTn id="1" dur="indefinite" restart="never" nodeType="tmRoot"/>
-      </p:par>
-    </p:tnLst>
-  </p:timing>
 </p:sld>
 </file>
 
@@ -6709,7 +6645,7 @@
           <p:cNvPr id="7" name="TextBox 6">
             <a:extLst>
               <a:ext uri="{FF2B5EF4-FFF2-40B4-BE49-F238E27FC236}">
-                <a16:creationId xmlns:a16="http://schemas.microsoft.com/office/drawing/2014/main" xmlns="" id="{613E3048-8AB0-6339-1911-14C3BD8B35D9}"/>
+                <a16:creationId xmlns:a16="http://schemas.microsoft.com/office/drawing/2014/main" id="{613E3048-8AB0-6339-1911-14C3BD8B35D9}"/>
               </a:ext>
             </a:extLst>
           </p:cNvPr>
@@ -6758,7 +6694,7 @@
           <p:cNvPr id="11" name="Picture 10">
             <a:extLst>
               <a:ext uri="{FF2B5EF4-FFF2-40B4-BE49-F238E27FC236}">
-                <a16:creationId xmlns:a16="http://schemas.microsoft.com/office/drawing/2014/main" xmlns="" id="{DC5116E7-9696-4B20-3D8A-0031F5B899A7}"/>
+                <a16:creationId xmlns:a16="http://schemas.microsoft.com/office/drawing/2014/main" id="{DC5116E7-9696-4B20-3D8A-0031F5B899A7}"/>
               </a:ext>
             </a:extLst>
           </p:cNvPr>
@@ -6794,7 +6730,7 @@
           <p:cNvPr id="6" name="Title 5">
             <a:extLst>
               <a:ext uri="{FF2B5EF4-FFF2-40B4-BE49-F238E27FC236}">
-                <a16:creationId xmlns:a16="http://schemas.microsoft.com/office/drawing/2014/main" xmlns="" id="{425BEFA8-7ED3-BA25-9651-0FE3544DB1D9}"/>
+                <a16:creationId xmlns:a16="http://schemas.microsoft.com/office/drawing/2014/main" id="{425BEFA8-7ED3-BA25-9651-0FE3544DB1D9}"/>
               </a:ext>
             </a:extLst>
           </p:cNvPr>
@@ -6885,7 +6821,7 @@
           <p:cNvPr id="3" name="Title 1">
             <a:extLst>
               <a:ext uri="{FF2B5EF4-FFF2-40B4-BE49-F238E27FC236}">
-                <a16:creationId xmlns:a16="http://schemas.microsoft.com/office/drawing/2014/main" xmlns="" id="{D2A1B674-38BE-4390-2336-69EDE0FC8E51}"/>
+                <a16:creationId xmlns:a16="http://schemas.microsoft.com/office/drawing/2014/main" id="{D2A1B674-38BE-4390-2336-69EDE0FC8E51}"/>
               </a:ext>
             </a:extLst>
           </p:cNvPr>
@@ -6936,7 +6872,7 @@
           <p:cNvPr id="4" name="Title 1">
             <a:extLst>
               <a:ext uri="{FF2B5EF4-FFF2-40B4-BE49-F238E27FC236}">
-                <a16:creationId xmlns:a16="http://schemas.microsoft.com/office/drawing/2014/main" xmlns="" id="{DEE56EF2-EB15-BDB8-F898-3303C9BB23AB}"/>
+                <a16:creationId xmlns:a16="http://schemas.microsoft.com/office/drawing/2014/main" id="{DEE56EF2-EB15-BDB8-F898-3303C9BB23AB}"/>
               </a:ext>
             </a:extLst>
           </p:cNvPr>
@@ -7000,7 +6936,7 @@
           <p:cNvPr id="6" name="Picture 5">
             <a:extLst>
               <a:ext uri="{FF2B5EF4-FFF2-40B4-BE49-F238E27FC236}">
-                <a16:creationId xmlns:a16="http://schemas.microsoft.com/office/drawing/2014/main" xmlns="" id="{31ED442E-E669-5E39-BCAF-17EC948309F2}"/>
+                <a16:creationId xmlns:a16="http://schemas.microsoft.com/office/drawing/2014/main" id="{31ED442E-E669-5E39-BCAF-17EC948309F2}"/>
               </a:ext>
             </a:extLst>
           </p:cNvPr>
@@ -7036,7 +6972,7 @@
           <p:cNvPr id="2" name="Title 1">
             <a:extLst>
               <a:ext uri="{FF2B5EF4-FFF2-40B4-BE49-F238E27FC236}">
-                <a16:creationId xmlns:a16="http://schemas.microsoft.com/office/drawing/2014/main" xmlns="" id="{80E1CF65-26FA-FE28-1A72-ABF074E7E04B}"/>
+                <a16:creationId xmlns:a16="http://schemas.microsoft.com/office/drawing/2014/main" id="{80E1CF65-26FA-FE28-1A72-ABF074E7E04B}"/>
               </a:ext>
             </a:extLst>
           </p:cNvPr>
@@ -7128,7 +7064,7 @@
           <p:cNvPr id="2" name="Title 1">
             <a:extLst>
               <a:ext uri="{FF2B5EF4-FFF2-40B4-BE49-F238E27FC236}">
-                <a16:creationId xmlns:a16="http://schemas.microsoft.com/office/drawing/2014/main" xmlns="" id="{B0691AED-5067-823A-C7CB-1DA20B2CFADC}"/>
+                <a16:creationId xmlns:a16="http://schemas.microsoft.com/office/drawing/2014/main" id="{B0691AED-5067-823A-C7CB-1DA20B2CFADC}"/>
               </a:ext>
             </a:extLst>
           </p:cNvPr>
@@ -7188,7 +7124,7 @@
           <p:cNvPr id="4" name="Picture 3">
             <a:extLst>
               <a:ext uri="{FF2B5EF4-FFF2-40B4-BE49-F238E27FC236}">
-                <a16:creationId xmlns:a16="http://schemas.microsoft.com/office/drawing/2014/main" xmlns="" id="{7A8D01C5-4D40-835B-212D-C7A937F37951}"/>
+                <a16:creationId xmlns:a16="http://schemas.microsoft.com/office/drawing/2014/main" id="{7A8D01C5-4D40-835B-212D-C7A937F37951}"/>
               </a:ext>
             </a:extLst>
           </p:cNvPr>
@@ -7240,7 +7176,7 @@
         <p:cNvPr id="1" name="">
           <a:extLst>
             <a:ext uri="{FF2B5EF4-FFF2-40B4-BE49-F238E27FC236}">
-              <a16:creationId xmlns:a16="http://schemas.microsoft.com/office/drawing/2014/main" xmlns="" id="{CF63FAAA-A097-0BF1-BF9D-904760525EAE}"/>
+              <a16:creationId xmlns:a16="http://schemas.microsoft.com/office/drawing/2014/main" id="{CF63FAAA-A097-0BF1-BF9D-904760525EAE}"/>
             </a:ext>
           </a:extLst>
         </p:cNvPr>
@@ -7260,7 +7196,7 @@
           <p:cNvPr id="2" name="Title 1">
             <a:extLst>
               <a:ext uri="{FF2B5EF4-FFF2-40B4-BE49-F238E27FC236}">
-                <a16:creationId xmlns:a16="http://schemas.microsoft.com/office/drawing/2014/main" xmlns="" id="{768FF90E-7972-2B4C-8068-BE58D8C6546B}"/>
+                <a16:creationId xmlns:a16="http://schemas.microsoft.com/office/drawing/2014/main" id="{768FF90E-7972-2B4C-8068-BE58D8C6546B}"/>
               </a:ext>
             </a:extLst>
           </p:cNvPr>
@@ -7320,7 +7256,7 @@
           <p:cNvPr id="5" name="Picture 4">
             <a:extLst>
               <a:ext uri="{FF2B5EF4-FFF2-40B4-BE49-F238E27FC236}">
-                <a16:creationId xmlns:a16="http://schemas.microsoft.com/office/drawing/2014/main" xmlns="" id="{271D4B84-3D01-1E10-2DB1-50CD84540A59}"/>
+                <a16:creationId xmlns:a16="http://schemas.microsoft.com/office/drawing/2014/main" id="{271D4B84-3D01-1E10-2DB1-50CD84540A59}"/>
               </a:ext>
             </a:extLst>
           </p:cNvPr>
@@ -7548,13 +7484,6 @@
   <p:transition>
     <p:push/>
   </p:transition>
-  <p:timing>
-    <p:tnLst>
-      <p:par>
-        <p:cTn id="1" dur="indefinite" restart="never" nodeType="tmRoot"/>
-      </p:par>
-    </p:tnLst>
-  </p:timing>
 </p:sld>
 </file>
 
@@ -7566,7 +7495,7 @@
         <p:cNvPr id="1" name="Shape 274">
           <a:extLst>
             <a:ext uri="{FF2B5EF4-FFF2-40B4-BE49-F238E27FC236}">
-              <a16:creationId xmlns:a16="http://schemas.microsoft.com/office/drawing/2014/main" xmlns="" id="{BE34003F-B0E4-9D99-7E7E-4FCB8AECCB15}"/>
+              <a16:creationId xmlns:a16="http://schemas.microsoft.com/office/drawing/2014/main" id="{BE34003F-B0E4-9D99-7E7E-4FCB8AECCB15}"/>
             </a:ext>
           </a:extLst>
         </p:cNvPr>
@@ -7586,7 +7515,7 @@
           <p:cNvPr id="277" name="Google Shape;277;p23">
             <a:extLst>
               <a:ext uri="{FF2B5EF4-FFF2-40B4-BE49-F238E27FC236}">
-                <a16:creationId xmlns:a16="http://schemas.microsoft.com/office/drawing/2014/main" xmlns="" id="{48FA03B2-BA79-B513-672B-F678ADE015B9}"/>
+                <a16:creationId xmlns:a16="http://schemas.microsoft.com/office/drawing/2014/main" id="{48FA03B2-BA79-B513-672B-F678ADE015B9}"/>
               </a:ext>
             </a:extLst>
           </p:cNvPr>
@@ -7618,7 +7547,7 @@
           <p:cNvPr id="278" name="Google Shape;278;p23">
             <a:extLst>
               <a:ext uri="{FF2B5EF4-FFF2-40B4-BE49-F238E27FC236}">
-                <a16:creationId xmlns:a16="http://schemas.microsoft.com/office/drawing/2014/main" xmlns="" id="{3E731076-B7A8-BFFC-339F-72BC223F4891}"/>
+                <a16:creationId xmlns:a16="http://schemas.microsoft.com/office/drawing/2014/main" id="{3E731076-B7A8-BFFC-339F-72BC223F4891}"/>
               </a:ext>
             </a:extLst>
           </p:cNvPr>
@@ -7673,7 +7602,7 @@
           <p:cNvPr id="279" name="Google Shape;279;p23">
             <a:extLst>
               <a:ext uri="{FF2B5EF4-FFF2-40B4-BE49-F238E27FC236}">
-                <a16:creationId xmlns:a16="http://schemas.microsoft.com/office/drawing/2014/main" xmlns="" id="{00DCE89C-87BE-BCD7-0E48-058C585160B9}"/>
+                <a16:creationId xmlns:a16="http://schemas.microsoft.com/office/drawing/2014/main" id="{00DCE89C-87BE-BCD7-0E48-058C585160B9}"/>
               </a:ext>
             </a:extLst>
           </p:cNvPr>
@@ -8079,7 +8008,7 @@
         <p:cNvPr id="1" name="Shape 274">
           <a:extLst>
             <a:ext uri="{FF2B5EF4-FFF2-40B4-BE49-F238E27FC236}">
-              <a16:creationId xmlns:a16="http://schemas.microsoft.com/office/drawing/2014/main" xmlns="" id="{8B31EF99-0A3C-FDBB-32CF-EA2C40AA6787}"/>
+              <a16:creationId xmlns:a16="http://schemas.microsoft.com/office/drawing/2014/main" id="{8B31EF99-0A3C-FDBB-32CF-EA2C40AA6787}"/>
             </a:ext>
           </a:extLst>
         </p:cNvPr>
@@ -8099,7 +8028,7 @@
           <p:cNvPr id="278" name="Google Shape;278;p23">
             <a:extLst>
               <a:ext uri="{FF2B5EF4-FFF2-40B4-BE49-F238E27FC236}">
-                <a16:creationId xmlns:a16="http://schemas.microsoft.com/office/drawing/2014/main" xmlns="" id="{D1BB4620-696B-D377-D1DF-6F1382F0C288}"/>
+                <a16:creationId xmlns:a16="http://schemas.microsoft.com/office/drawing/2014/main" id="{D1BB4620-696B-D377-D1DF-6F1382F0C288}"/>
               </a:ext>
             </a:extLst>
           </p:cNvPr>
@@ -8154,7 +8083,7 @@
           <p:cNvPr id="279" name="Google Shape;279;p23">
             <a:extLst>
               <a:ext uri="{FF2B5EF4-FFF2-40B4-BE49-F238E27FC236}">
-                <a16:creationId xmlns:a16="http://schemas.microsoft.com/office/drawing/2014/main" xmlns="" id="{0AF21EBD-1FDC-2D2F-FBB8-D370362333AC}"/>
+                <a16:creationId xmlns:a16="http://schemas.microsoft.com/office/drawing/2014/main" id="{0AF21EBD-1FDC-2D2F-FBB8-D370362333AC}"/>
               </a:ext>
             </a:extLst>
           </p:cNvPr>
@@ -8186,23 +8115,7 @@
             </a:pPr>
             <a:r>
               <a:rPr lang="en-US" sz="3000" dirty="0"/>
-              <a:t>Identify the top </a:t>
-            </a:r>
-            <a:r>
-              <a:rPr lang="en-US" sz="3000" dirty="0" smtClean="0"/>
-              <a:t>3 predictors </a:t>
-            </a:r>
-            <a:r>
-              <a:rPr lang="en-US" sz="3000" dirty="0"/>
-              <a:t>of stroke risk </a:t>
-            </a:r>
-            <a:r>
-              <a:rPr lang="en-US" sz="3000" dirty="0" smtClean="0"/>
-              <a:t>from the dataset and </a:t>
-            </a:r>
-            <a:r>
-              <a:rPr lang="en-US" sz="3000" dirty="0"/>
-              <a:t>determine whether they are primarily lifestyle-based or health-based factors.</a:t>
+              <a:t>Identify the top 3 predictors of stroke risk from the dataset and determine whether they are primarily lifestyle-based or health-based factors.</a:t>
             </a:r>
           </a:p>
           <a:p>
@@ -8240,13 +8153,6 @@
   <p:transition>
     <p:push/>
   </p:transition>
-  <p:timing>
-    <p:tnLst>
-      <p:par>
-        <p:cTn id="1" dur="indefinite" restart="never" nodeType="tmRoot"/>
-      </p:par>
-    </p:tnLst>
-  </p:timing>
 </p:sld>
 </file>
 
@@ -8258,7 +8164,7 @@
         <p:cNvPr id="1" name="Shape 274">
           <a:extLst>
             <a:ext uri="{FF2B5EF4-FFF2-40B4-BE49-F238E27FC236}">
-              <a16:creationId xmlns:a16="http://schemas.microsoft.com/office/drawing/2014/main" xmlns="" id="{8B31EF99-0A3C-FDBB-32CF-EA2C40AA6787}"/>
+              <a16:creationId xmlns:a16="http://schemas.microsoft.com/office/drawing/2014/main" id="{8B31EF99-0A3C-FDBB-32CF-EA2C40AA6787}"/>
             </a:ext>
           </a:extLst>
         </p:cNvPr>
@@ -8278,7 +8184,7 @@
           <p:cNvPr id="278" name="Google Shape;278;p23">
             <a:extLst>
               <a:ext uri="{FF2B5EF4-FFF2-40B4-BE49-F238E27FC236}">
-                <a16:creationId xmlns:a16="http://schemas.microsoft.com/office/drawing/2014/main" xmlns="" id="{D1BB4620-696B-D377-D1DF-6F1382F0C288}"/>
+                <a16:creationId xmlns:a16="http://schemas.microsoft.com/office/drawing/2014/main" id="{D1BB4620-696B-D377-D1DF-6F1382F0C288}"/>
               </a:ext>
             </a:extLst>
           </p:cNvPr>
@@ -8317,27 +8223,7 @@
                 <a:latin typeface="DM Sans"/>
                 <a:sym typeface="DM Sans"/>
               </a:rPr>
-              <a:t>The </a:t>
-            </a:r>
-            <a:r>
-              <a:rPr lang="en-US" sz="4800" b="1" spc="-100" dirty="0">
-                <a:solidFill>
-                  <a:srgbClr val="000000"/>
-                </a:solidFill>
-                <a:latin typeface="DM Sans"/>
-                <a:sym typeface="DM Sans"/>
-              </a:rPr>
-              <a:t>Problem</a:t>
-            </a:r>
-            <a:r>
-              <a:rPr lang="en-US" sz="4800" b="1" spc="-100" dirty="0">
-                <a:solidFill>
-                  <a:srgbClr val="000000"/>
-                </a:solidFill>
-                <a:latin typeface="DM Sans"/>
-                <a:sym typeface="DM Sans"/>
-              </a:rPr>
-              <a:t> to Tackle</a:t>
+              <a:t>The Problem to Tackle</a:t>
             </a:r>
             <a:endParaRPr sz="4800" b="1" spc="-100" dirty="0">
               <a:solidFill>
@@ -8353,7 +8239,7 @@
           <p:cNvPr id="279" name="Google Shape;279;p23">
             <a:extLst>
               <a:ext uri="{FF2B5EF4-FFF2-40B4-BE49-F238E27FC236}">
-                <a16:creationId xmlns:a16="http://schemas.microsoft.com/office/drawing/2014/main" xmlns="" id="{0AF21EBD-1FDC-2D2F-FBB8-D370362333AC}"/>
+                <a16:creationId xmlns:a16="http://schemas.microsoft.com/office/drawing/2014/main" id="{0AF21EBD-1FDC-2D2F-FBB8-D370362333AC}"/>
               </a:ext>
             </a:extLst>
           </p:cNvPr>
@@ -8385,13 +8271,8 @@
             </a:pPr>
             <a:r>
               <a:rPr lang="en-US" sz="3200" dirty="0"/>
-              <a:t>Stroke is a major global health burden, ranking as the 3rd leading cause of disability and </a:t>
-            </a:r>
-            <a:r>
-              <a:rPr lang="en-US" sz="3200" dirty="0" smtClean="0"/>
-              <a:t>mortality.</a:t>
-            </a:r>
-            <a:endParaRPr lang="en-US" sz="3200" dirty="0"/>
+              <a:t>Stroke is a major global health burden, ranking as the 3rd leading cause of disability and mortality.</a:t>
+            </a:r>
           </a:p>
           <a:p>
             <a:pPr marL="457200" indent="-457200">
@@ -8400,11 +8281,7 @@
             </a:pPr>
             <a:r>
               <a:rPr lang="en-US" sz="3200" dirty="0"/>
-              <a:t>High economic impact: In Canada, average 1-year stroke costs exceed $33,000 per </a:t>
-            </a:r>
-            <a:r>
-              <a:rPr lang="en-US" sz="3200" dirty="0" smtClean="0"/>
-              <a:t>patient</a:t>
+              <a:t>High economic impact: In Canada, average 1-year stroke costs exceed $33,000 per patient</a:t>
             </a:r>
           </a:p>
           <a:p>
@@ -8413,44 +8290,8 @@
               <a:buChar char="•"/>
             </a:pPr>
             <a:r>
-              <a:rPr lang="en-US" sz="3200" dirty="0" smtClean="0"/>
-              <a:t>Prevention </a:t>
-            </a:r>
-            <a:r>
               <a:rPr lang="en-US" sz="3200" dirty="0"/>
-              <a:t>gap: </a:t>
-            </a:r>
-            <a:r>
-              <a:rPr lang="en-US" sz="3200" dirty="0" smtClean="0"/>
-              <a:t>Preventive </a:t>
-            </a:r>
-            <a:r>
-              <a:rPr lang="en-US" sz="3200" dirty="0"/>
-              <a:t>care is more effective and less costly than reactive </a:t>
-            </a:r>
-            <a:r>
-              <a:rPr lang="en-US" sz="3200" dirty="0" smtClean="0"/>
-              <a:t>treatment. </a:t>
-            </a:r>
-            <a:r>
-              <a:rPr lang="en-US" sz="3200" dirty="0"/>
-              <a:t>L</a:t>
-            </a:r>
-            <a:r>
-              <a:rPr lang="en-US" sz="3200" dirty="0" smtClean="0"/>
-              <a:t>arge </a:t>
-            </a:r>
-            <a:r>
-              <a:rPr lang="en-US" sz="3200" dirty="0"/>
-              <a:t>amounts of data, </a:t>
-            </a:r>
-            <a:r>
-              <a:rPr lang="en-US" sz="3200" dirty="0" smtClean="0"/>
-              <a:t>make it </a:t>
-            </a:r>
-            <a:r>
-              <a:rPr lang="en-US" sz="3200" dirty="0"/>
-              <a:t>difficult to identify the most critical risk factors to target</a:t>
+              <a:t>Prevention gap: Preventive care is more effective and less costly than reactive treatment. Large amounts of data, make it difficult to identify the most critical risk factors to target</a:t>
             </a:r>
             <a:r>
               <a:rPr lang="en-US" sz="3200" b="1" dirty="0"/>
@@ -8473,13 +8314,6 @@
   <p:transition>
     <p:push/>
   </p:transition>
-  <p:timing>
-    <p:tnLst>
-      <p:par>
-        <p:cTn id="1" dur="indefinite" restart="never" nodeType="tmRoot"/>
-      </p:par>
-    </p:tnLst>
-  </p:timing>
 </p:sld>
 </file>
 
@@ -8553,7 +8387,7 @@
           <p:cNvPr id="2" name="Picture 1">
             <a:extLst>
               <a:ext uri="{FF2B5EF4-FFF2-40B4-BE49-F238E27FC236}">
-                <a16:creationId xmlns:a16="http://schemas.microsoft.com/office/drawing/2014/main" xmlns="" id="{71A07D56-E8C5-9FF7-C661-6D8888A99021}"/>
+                <a16:creationId xmlns:a16="http://schemas.microsoft.com/office/drawing/2014/main" id="{71A07D56-E8C5-9FF7-C661-6D8888A99021}"/>
               </a:ext>
             </a:extLst>
           </p:cNvPr>
@@ -8594,7 +8428,7 @@
           <p:cNvPr id="3" name="TextBox 2">
             <a:extLst>
               <a:ext uri="{FF2B5EF4-FFF2-40B4-BE49-F238E27FC236}">
-                <a16:creationId xmlns:a16="http://schemas.microsoft.com/office/drawing/2014/main" xmlns="" id="{AD85F488-7E4C-8F44-ED85-A8704FF7952D}"/>
+                <a16:creationId xmlns:a16="http://schemas.microsoft.com/office/drawing/2014/main" id="{AD85F488-7E4C-8F44-ED85-A8704FF7952D}"/>
               </a:ext>
             </a:extLst>
           </p:cNvPr>
@@ -8641,7 +8475,7 @@
           <p:cNvPr id="4" name="TextBox 3">
             <a:extLst>
               <a:ext uri="{FF2B5EF4-FFF2-40B4-BE49-F238E27FC236}">
-                <a16:creationId xmlns:a16="http://schemas.microsoft.com/office/drawing/2014/main" xmlns="" id="{C590DB31-32DA-7922-B217-9A1505A0685E}"/>
+                <a16:creationId xmlns:a16="http://schemas.microsoft.com/office/drawing/2014/main" id="{C590DB31-32DA-7922-B217-9A1505A0685E}"/>
               </a:ext>
             </a:extLst>
           </p:cNvPr>
@@ -8665,7 +8499,7 @@
           <a:lstStyle/>
           <a:p>
             <a:r>
-              <a:rPr lang="en-US" dirty="0" smtClean="0"/>
+              <a:rPr lang="en-US" dirty="0"/>
               <a:t>Takeaways: </a:t>
             </a:r>
           </a:p>
@@ -8675,12 +8509,8 @@
               <a:buChar char="•"/>
             </a:pPr>
             <a:r>
-              <a:rPr lang="en-US" dirty="0" smtClean="0"/>
-              <a:t>The </a:t>
-            </a:r>
-            <a:r>
               <a:rPr lang="en-US" dirty="0"/>
-              <a:t>dataset is highly imbalanced (5% positive class)</a:t>
+              <a:t>The dataset is highly imbalanced (5% positive class)</a:t>
             </a:r>
           </a:p>
         </p:txBody>
@@ -8693,13 +8523,6 @@
   <p:transition>
     <p:push/>
   </p:transition>
-  <p:timing>
-    <p:tnLst>
-      <p:par>
-        <p:cTn id="1" dur="indefinite" restart="never" nodeType="tmRoot"/>
-      </p:par>
-    </p:tnLst>
-  </p:timing>
 </p:sld>
 </file>
 
@@ -8817,7 +8640,7 @@
           <p:cNvPr id="2" name="Picture 1">
             <a:extLst>
               <a:ext uri="{FF2B5EF4-FFF2-40B4-BE49-F238E27FC236}">
-                <a16:creationId xmlns:a16="http://schemas.microsoft.com/office/drawing/2014/main" xmlns="" id="{3013F98F-F016-44BD-F010-15306E3E37AC}"/>
+                <a16:creationId xmlns:a16="http://schemas.microsoft.com/office/drawing/2014/main" id="{3013F98F-F016-44BD-F010-15306E3E37AC}"/>
               </a:ext>
             </a:extLst>
           </p:cNvPr>
@@ -8859,7 +8682,7 @@
           <p:cNvPr id="3" name="TextBox 2">
             <a:extLst>
               <a:ext uri="{FF2B5EF4-FFF2-40B4-BE49-F238E27FC236}">
-                <a16:creationId xmlns:a16="http://schemas.microsoft.com/office/drawing/2014/main" xmlns="" id="{4D96EB63-2418-7F70-8C36-AF98EA97CC75}"/>
+                <a16:creationId xmlns:a16="http://schemas.microsoft.com/office/drawing/2014/main" id="{4D96EB63-2418-7F70-8C36-AF98EA97CC75}"/>
               </a:ext>
             </a:extLst>
           </p:cNvPr>
@@ -8911,13 +8734,6 @@
   <p:transition>
     <p:push/>
   </p:transition>
-  <p:timing>
-    <p:tnLst>
-      <p:par>
-        <p:cTn id="1" dur="indefinite" restart="never" nodeType="tmRoot"/>
-      </p:par>
-    </p:tnLst>
-  </p:timing>
 </p:sld>
 </file>
 
@@ -8929,7 +8745,7 @@
         <p:cNvPr id="1" name="Shape 263">
           <a:extLst>
             <a:ext uri="{FF2B5EF4-FFF2-40B4-BE49-F238E27FC236}">
-              <a16:creationId xmlns:a16="http://schemas.microsoft.com/office/drawing/2014/main" xmlns="" id="{947DD4A1-7A93-C10E-5A07-4EC5C681639F}"/>
+              <a16:creationId xmlns:a16="http://schemas.microsoft.com/office/drawing/2014/main" id="{947DD4A1-7A93-C10E-5A07-4EC5C681639F}"/>
             </a:ext>
           </a:extLst>
         </p:cNvPr>
@@ -8949,7 +8765,7 @@
           <p:cNvPr id="266" name="Google Shape;266;p22">
             <a:extLst>
               <a:ext uri="{FF2B5EF4-FFF2-40B4-BE49-F238E27FC236}">
-                <a16:creationId xmlns:a16="http://schemas.microsoft.com/office/drawing/2014/main" xmlns="" id="{4720075E-3549-58CE-84BB-F4BF021C35F2}"/>
+                <a16:creationId xmlns:a16="http://schemas.microsoft.com/office/drawing/2014/main" id="{4720075E-3549-58CE-84BB-F4BF021C35F2}"/>
               </a:ext>
             </a:extLst>
           </p:cNvPr>
@@ -8981,7 +8797,7 @@
           <p:cNvPr id="267" name="Google Shape;267;p22">
             <a:extLst>
               <a:ext uri="{FF2B5EF4-FFF2-40B4-BE49-F238E27FC236}">
-                <a16:creationId xmlns:a16="http://schemas.microsoft.com/office/drawing/2014/main" xmlns="" id="{60A48628-491D-52BC-6A6C-51D0ABB32F30}"/>
+                <a16:creationId xmlns:a16="http://schemas.microsoft.com/office/drawing/2014/main" id="{60A48628-491D-52BC-6A6C-51D0ABB32F30}"/>
               </a:ext>
             </a:extLst>
           </p:cNvPr>
@@ -9013,7 +8829,7 @@
           <p:cNvPr id="268" name="Google Shape;268;p22">
             <a:extLst>
               <a:ext uri="{FF2B5EF4-FFF2-40B4-BE49-F238E27FC236}">
-                <a16:creationId xmlns:a16="http://schemas.microsoft.com/office/drawing/2014/main" xmlns="" id="{2C79D34E-94D8-D801-ABDE-B73F1E41CFCB}"/>
+                <a16:creationId xmlns:a16="http://schemas.microsoft.com/office/drawing/2014/main" id="{2C79D34E-94D8-D801-ABDE-B73F1E41CFCB}"/>
               </a:ext>
             </a:extLst>
           </p:cNvPr>
@@ -9067,7 +8883,7 @@
           <p:cNvPr id="5" name="Picture 4">
             <a:extLst>
               <a:ext uri="{FF2B5EF4-FFF2-40B4-BE49-F238E27FC236}">
-                <a16:creationId xmlns:a16="http://schemas.microsoft.com/office/drawing/2014/main" xmlns="" id="{B6F19372-0553-7137-2291-67799FF3C010}"/>
+                <a16:creationId xmlns:a16="http://schemas.microsoft.com/office/drawing/2014/main" id="{B6F19372-0553-7137-2291-67799FF3C010}"/>
               </a:ext>
             </a:extLst>
           </p:cNvPr>
@@ -9108,7 +8924,7 @@
           <p:cNvPr id="6" name="Picture 5">
             <a:extLst>
               <a:ext uri="{FF2B5EF4-FFF2-40B4-BE49-F238E27FC236}">
-                <a16:creationId xmlns:a16="http://schemas.microsoft.com/office/drawing/2014/main" xmlns="" id="{BF2D48C9-B9D9-3D2B-9218-FC264F29C9D4}"/>
+                <a16:creationId xmlns:a16="http://schemas.microsoft.com/office/drawing/2014/main" id="{BF2D48C9-B9D9-3D2B-9218-FC264F29C9D4}"/>
               </a:ext>
             </a:extLst>
           </p:cNvPr>
@@ -9149,7 +8965,7 @@
           <p:cNvPr id="7" name="Picture 6">
             <a:extLst>
               <a:ext uri="{FF2B5EF4-FFF2-40B4-BE49-F238E27FC236}">
-                <a16:creationId xmlns:a16="http://schemas.microsoft.com/office/drawing/2014/main" xmlns="" id="{0B9634D9-7FC0-117B-8A62-3B88358535A7}"/>
+                <a16:creationId xmlns:a16="http://schemas.microsoft.com/office/drawing/2014/main" id="{0B9634D9-7FC0-117B-8A62-3B88358535A7}"/>
               </a:ext>
             </a:extLst>
           </p:cNvPr>
@@ -9198,13 +9014,6 @@
   <p:transition>
     <p:push/>
   </p:transition>
-  <p:timing>
-    <p:tnLst>
-      <p:par>
-        <p:cTn id="1" dur="indefinite" restart="never" nodeType="tmRoot"/>
-      </p:par>
-    </p:tnLst>
-  </p:timing>
 </p:sld>
 </file>
 
@@ -9216,7 +9025,7 @@
         <p:cNvPr id="1" name="Shape 263">
           <a:extLst>
             <a:ext uri="{FF2B5EF4-FFF2-40B4-BE49-F238E27FC236}">
-              <a16:creationId xmlns:a16="http://schemas.microsoft.com/office/drawing/2014/main" xmlns="" id="{1683D3BF-B4ED-42E6-86A6-2A1EAF00F992}"/>
+              <a16:creationId xmlns:a16="http://schemas.microsoft.com/office/drawing/2014/main" id="{1683D3BF-B4ED-42E6-86A6-2A1EAF00F992}"/>
             </a:ext>
           </a:extLst>
         </p:cNvPr>
@@ -9236,7 +9045,7 @@
           <p:cNvPr id="266" name="Google Shape;266;p22">
             <a:extLst>
               <a:ext uri="{FF2B5EF4-FFF2-40B4-BE49-F238E27FC236}">
-                <a16:creationId xmlns:a16="http://schemas.microsoft.com/office/drawing/2014/main" xmlns="" id="{6C4CB194-3F99-F963-06DC-A6BAC75D6959}"/>
+                <a16:creationId xmlns:a16="http://schemas.microsoft.com/office/drawing/2014/main" id="{6C4CB194-3F99-F963-06DC-A6BAC75D6959}"/>
               </a:ext>
             </a:extLst>
           </p:cNvPr>
@@ -9268,7 +9077,7 @@
           <p:cNvPr id="267" name="Google Shape;267;p22">
             <a:extLst>
               <a:ext uri="{FF2B5EF4-FFF2-40B4-BE49-F238E27FC236}">
-                <a16:creationId xmlns:a16="http://schemas.microsoft.com/office/drawing/2014/main" xmlns="" id="{BAA337C0-DD81-20FF-0DC1-703222A2DE86}"/>
+                <a16:creationId xmlns:a16="http://schemas.microsoft.com/office/drawing/2014/main" id="{BAA337C0-DD81-20FF-0DC1-703222A2DE86}"/>
               </a:ext>
             </a:extLst>
           </p:cNvPr>
@@ -9300,7 +9109,7 @@
           <p:cNvPr id="268" name="Google Shape;268;p22">
             <a:extLst>
               <a:ext uri="{FF2B5EF4-FFF2-40B4-BE49-F238E27FC236}">
-                <a16:creationId xmlns:a16="http://schemas.microsoft.com/office/drawing/2014/main" xmlns="" id="{36797858-C2D6-AD12-CC43-19AC586EB4A4}"/>
+                <a16:creationId xmlns:a16="http://schemas.microsoft.com/office/drawing/2014/main" id="{36797858-C2D6-AD12-CC43-19AC586EB4A4}"/>
               </a:ext>
             </a:extLst>
           </p:cNvPr>
@@ -9348,7 +9157,7 @@
           <p:cNvPr id="2" name="Picture 1">
             <a:extLst>
               <a:ext uri="{FF2B5EF4-FFF2-40B4-BE49-F238E27FC236}">
-                <a16:creationId xmlns:a16="http://schemas.microsoft.com/office/drawing/2014/main" xmlns="" id="{98E9E19C-C61E-9265-7C44-B705FBED9971}"/>
+                <a16:creationId xmlns:a16="http://schemas.microsoft.com/office/drawing/2014/main" id="{98E9E19C-C61E-9265-7C44-B705FBED9971}"/>
               </a:ext>
             </a:extLst>
           </p:cNvPr>
@@ -9389,7 +9198,7 @@
           <p:cNvPr id="3" name="Picture 2">
             <a:extLst>
               <a:ext uri="{FF2B5EF4-FFF2-40B4-BE49-F238E27FC236}">
-                <a16:creationId xmlns:a16="http://schemas.microsoft.com/office/drawing/2014/main" xmlns="" id="{F87FEBCD-AFA2-ADAD-BFA3-A9AACDD09556}"/>
+                <a16:creationId xmlns:a16="http://schemas.microsoft.com/office/drawing/2014/main" id="{F87FEBCD-AFA2-ADAD-BFA3-A9AACDD09556}"/>
               </a:ext>
             </a:extLst>
           </p:cNvPr>
@@ -9430,7 +9239,7 @@
           <p:cNvPr id="4" name="TextBox 3">
             <a:extLst>
               <a:ext uri="{FF2B5EF4-FFF2-40B4-BE49-F238E27FC236}">
-                <a16:creationId xmlns:a16="http://schemas.microsoft.com/office/drawing/2014/main" xmlns="" id="{BE31FBEF-70B0-2A0D-07F3-5A0102AC4CDC}"/>
+                <a16:creationId xmlns:a16="http://schemas.microsoft.com/office/drawing/2014/main" id="{BE31FBEF-70B0-2A0D-07F3-5A0102AC4CDC}"/>
               </a:ext>
             </a:extLst>
           </p:cNvPr>
@@ -9469,8 +9278,13 @@
             </a:pPr>
             <a:r>
               <a:rPr lang="en-CA" dirty="0"/>
-              <a:t>Does this suggest non-linear relations between comorbid health factors?</a:t>
-            </a:r>
+              <a:t>Linear / non-linear relations </a:t>
+            </a:r>
+            <a:r>
+              <a:rPr lang="en-CA"/>
+              <a:t>no correlation &lt; 0.5</a:t>
+            </a:r>
+            <a:endParaRPr lang="en-CA" dirty="0"/>
           </a:p>
         </p:txBody>
       </p:sp>
@@ -9487,13 +9301,6 @@
   <p:transition>
     <p:push/>
   </p:transition>
-  <p:timing>
-    <p:tnLst>
-      <p:par>
-        <p:cTn id="1" dur="indefinite" restart="never" nodeType="tmRoot"/>
-      </p:par>
-    </p:tnLst>
-  </p:timing>
 </p:sld>
 </file>
 
@@ -9505,7 +9312,7 @@
         <p:cNvPr id="1" name="Shape 274">
           <a:extLst>
             <a:ext uri="{FF2B5EF4-FFF2-40B4-BE49-F238E27FC236}">
-              <a16:creationId xmlns:a16="http://schemas.microsoft.com/office/drawing/2014/main" xmlns="" id="{D4560813-2923-7F73-656A-6594E575DBC9}"/>
+              <a16:creationId xmlns:a16="http://schemas.microsoft.com/office/drawing/2014/main" id="{D4560813-2923-7F73-656A-6594E575DBC9}"/>
             </a:ext>
           </a:extLst>
         </p:cNvPr>
@@ -9525,7 +9332,7 @@
           <p:cNvPr id="278" name="Google Shape;278;p23">
             <a:extLst>
               <a:ext uri="{FF2B5EF4-FFF2-40B4-BE49-F238E27FC236}">
-                <a16:creationId xmlns:a16="http://schemas.microsoft.com/office/drawing/2014/main" xmlns="" id="{CEC4A98B-F1A1-0DEB-A3FE-E6F2991CED65}"/>
+                <a16:creationId xmlns:a16="http://schemas.microsoft.com/office/drawing/2014/main" id="{CEC4A98B-F1A1-0DEB-A3FE-E6F2991CED65}"/>
               </a:ext>
             </a:extLst>
           </p:cNvPr>
@@ -9580,7 +9387,7 @@
           <p:cNvPr id="279" name="Google Shape;279;p23">
             <a:extLst>
               <a:ext uri="{FF2B5EF4-FFF2-40B4-BE49-F238E27FC236}">
-                <a16:creationId xmlns:a16="http://schemas.microsoft.com/office/drawing/2014/main" xmlns="" id="{80C2D2E7-712E-6CB3-00B2-3EA19C4F4F3F}"/>
+                <a16:creationId xmlns:a16="http://schemas.microsoft.com/office/drawing/2014/main" id="{80C2D2E7-712E-6CB3-00B2-3EA19C4F4F3F}"/>
               </a:ext>
             </a:extLst>
           </p:cNvPr>
@@ -9680,13 +9487,6 @@
   <p:transition>
     <p:push/>
   </p:transition>
-  <p:timing>
-    <p:tnLst>
-      <p:par>
-        <p:cTn id="1" dur="indefinite" restart="never" nodeType="tmRoot"/>
-      </p:par>
-    </p:tnLst>
-  </p:timing>
 </p:sld>
 </file>
 
@@ -10287,7 +10087,7 @@
   <a:extraClrSchemeLst/>
   <a:extLst>
     <a:ext uri="{05A4C25C-085E-4340-85A3-A5531E510DB2}">
-      <thm15:themeFamily xmlns:thm15="http://schemas.microsoft.com/office/thememl/2012/main" xmlns="" name="Office Theme" id="{2E142A2C-CD16-42D6-873A-C26D2A0506FA}" vid="{1BDDFF52-6CD6-40A5-AB3C-68EB2F1E4D0A}"/>
+      <thm15:themeFamily xmlns:thm15="http://schemas.microsoft.com/office/thememl/2012/main" name="Office Theme" id="{2E142A2C-CD16-42D6-873A-C26D2A0506FA}" vid="{1BDDFF52-6CD6-40A5-AB3C-68EB2F1E4D0A}"/>
     </a:ext>
   </a:extLst>
 </a:theme>
